--- a/seminar/slides/세션1_CUDA_스레드모델과_첫커널.pptx
+++ b/seminar/slides/세션1_CUDA_스레드모델과_첫커널.pptx
@@ -18,9 +18,10 @@
     <p:sldId id="266" r:id="rId12"/>
     <p:sldId id="267" r:id="rId13"/>
     <p:sldId id="268" r:id="rId14"/>
+    <p:sldId id="269" r:id="rId15"/>
   </p:sldIdLst>
   <p:notesMasterIdLst>
-    <p:notesMasterId r:id="rId15"/>
+    <p:notesMasterId r:id="rId16"/>
   </p:notesMasterIdLst>
   <p:sldSz cx="12192000" cy="6858000"/>
   <p:notesSz cx="6858000" cy="12192000"/>
@@ -602,7 +603,7 @@
           <a:p>
             <a:r>
               <a:rPr lang="en-US" dirty="0"/>
-              <a:t>커널 launch는 CPU 코드 안의 한 줄이라는 점, dim3로 그리드 차원을 지정한다는 점을 설명하세요.</a:t>
+              <a:t>이 대비가 세미나 전체의 뼈대입니다. 같은 문제를 느린 방식과 빠른 방식으로 푸는 코드가 한 저장소에 있다는 점.</a:t>
             </a:r>
             <a:endParaRPr lang="en-US" dirty="0"/>
           </a:p>
@@ -690,7 +691,7 @@
           <a:p>
             <a:r>
               <a:rPr lang="en-US" dirty="0"/>
-              <a:t>실습 랩 문서(세션1_실습랩.md)를 나눠주고 진행합니다. Ex 4는 반드시 원복하도록 강조하세요.</a:t>
+              <a:t>커널 launch는 CPU 코드 안의 한 줄이라는 점, dim3로 그리드 차원을 지정한다는 점을 설명하세요.</a:t>
             </a:r>
             <a:endParaRPr lang="en-US" dirty="0"/>
           </a:p>
@@ -778,7 +779,7 @@
           <a:p>
             <a:r>
               <a:rPr lang="en-US" dirty="0"/>
-              <a:t>네 가지 목표(슬라이드 2)로 돌아가 자가 점검을 유도하세요.</a:t>
+              <a:t>실습 랩 문서(세션1_실습랩.md)를 나눠주고 진행합니다. Ex 4는 반드시 원복하도록 강조하세요.</a:t>
             </a:r>
             <a:endParaRPr lang="en-US" dirty="0"/>
           </a:p>
@@ -866,7 +867,7 @@
           <a:p>
             <a:r>
               <a:rPr lang="en-US" dirty="0"/>
-              <a:t>오늘의 write 커널이 다음 세션 read 커널로 이어진다는 연속성을 강조하며 마무리하세요.</a:t>
+              <a:t>네 가지 목표(슬라이드 2)로 돌아가 자가 점검을 유도하세요.</a:t>
             </a:r>
             <a:endParaRPr lang="en-US" dirty="0"/>
           </a:p>
@@ -890,6 +891,94 @@
             <a:fld id="{F7021451-1387-4CA6-816F-3879F97B5CBC}" type="slidenum">
               <a:rPr lang="en-US"/>
               <a:t>13</a:t>
+            </a:fld>
+            <a:endParaRPr lang="en-US"/>
+          </a:p>
+        </p:txBody>
+      </p:sp>
+    </p:spTree>
+    <p:extLst>
+      <p:ext uri="{BB962C8B-B14F-4D97-AF65-F5344CB8AC3E}">
+        <p14:creationId xmlns:p14="http://schemas.microsoft.com/office/powerpoint/2010/main" val="1024086991"/>
+      </p:ext>
+    </p:extLst>
+  </p:cSld>
+  <p:clrMapOvr>
+    <a:masterClrMapping/>
+  </p:clrMapOvr>
+</p:notes>
+</file>
+
+<file path=ppt/notesSlides/notesSlide14.xml><?xml version="1.0" encoding="utf-8"?>
+<p:notes xmlns:a="http://schemas.openxmlformats.org/drawingml/2006/main" xmlns:r="http://schemas.openxmlformats.org/officeDocument/2006/relationships" xmlns:p="http://schemas.openxmlformats.org/presentationml/2006/main">
+  <p:cSld>
+    <p:spTree>
+      <p:nvGrpSpPr>
+        <p:cNvPr id="1" name=""/>
+        <p:cNvGrpSpPr/>
+        <p:nvPr/>
+      </p:nvGrpSpPr>
+      <p:grpSpPr>
+        <a:xfrm>
+          <a:off x="0" y="0"/>
+          <a:ext cx="0" cy="0"/>
+          <a:chOff x="0" y="0"/>
+          <a:chExt cx="0" cy="0"/>
+        </a:xfrm>
+      </p:grpSpPr>
+      <p:sp>
+        <p:nvSpPr>
+          <p:cNvPr id="2" name="Slide Image Placeholder 1"/>
+          <p:cNvSpPr>
+            <a:spLocks noGrp="1" noRot="1" noChangeAspect="1"/>
+          </p:cNvSpPr>
+          <p:nvPr>
+            <p:ph type="sldImg"/>
+          </p:nvPr>
+        </p:nvSpPr>
+        <p:spPr/>
+      </p:sp>
+      <p:sp>
+        <p:nvSpPr>
+          <p:cNvPr id="3" name="Notes Placeholder 2"/>
+          <p:cNvSpPr>
+            <a:spLocks noGrp="1"/>
+          </p:cNvSpPr>
+          <p:nvPr>
+            <p:ph type="body" idx="1"/>
+          </p:nvPr>
+        </p:nvSpPr>
+        <p:spPr/>
+        <p:txBody>
+          <a:bodyPr/>
+          <a:lstStyle/>
+          <a:p>
+            <a:r>
+              <a:rPr lang="en-US" dirty="0"/>
+              <a:t>오늘의 write 커널이 다음 세션 read 커널로 이어진다는 연속성을 강조하며 마무리하세요.</a:t>
+            </a:r>
+            <a:endParaRPr lang="en-US" dirty="0"/>
+          </a:p>
+        </p:txBody>
+      </p:sp>
+      <p:sp>
+        <p:nvSpPr>
+          <p:cNvPr id="4" name="Slide Number Placeholder 3"/>
+          <p:cNvSpPr>
+            <a:spLocks noGrp="1"/>
+          </p:cNvSpPr>
+          <p:nvPr>
+            <p:ph type="sldNum" sz="quarter" idx="10"/>
+          </p:nvPr>
+        </p:nvSpPr>
+        <p:spPr/>
+        <p:txBody>
+          <a:bodyPr/>
+          <a:lstStyle/>
+          <a:p>
+            <a:fld id="{F7021451-1387-4CA6-816F-3879F97B5CBC}" type="slidenum">
+              <a:rPr lang="en-US"/>
+              <a:t>14</a:t>
             </a:fld>
             <a:endParaRPr lang="en-US"/>
           </a:p>
@@ -1306,7 +1395,7 @@
           <a:p>
             <a:r>
               <a:rPr lang="en-US" dirty="0"/>
-              <a:t>blockIdx/threadIdx는 '읽기 전용, 스레드마다 다름', blockDim/gridDim은 '모든 스레드가 같은 값'이라는 대비를 짚어주세요.</a:t>
+              <a:t>실행 계층: Grid⊃Block⊃Thread. 각 스레드는 (blockIdx, threadIdx)로 자기 위치를 안다. cuda_memtest의 두 구성도 함께 표시.</a:t>
             </a:r>
             <a:endParaRPr lang="en-US" dirty="0"/>
           </a:p>
@@ -1394,7 +1483,7 @@
           <a:p>
             <a:r>
               <a:rPr lang="en-US" dirty="0"/>
-              <a:t>핵심 통찰: 스레드/블록이 겹치지 않는 자기 구역을 갖는 것이 병렬 프로그래밍의 기본. cuda_memtest.h:91.</a:t>
+              <a:t>blockIdx/threadIdx는 '읽기 전용, 스레드마다 다름', blockDim/gridDim은 '모든 스레드가 같은 값'이라는 대비를 짚어주세요.</a:t>
             </a:r>
             <a:endParaRPr lang="en-US" dirty="0"/>
           </a:p>
@@ -1482,7 +1571,7 @@
           <a:p>
             <a:r>
               <a:rPr lang="en-US" dirty="0"/>
-              <a:t>한 줄씩: 포인터 계산 → 경계 검사 → 루프로 채우기. sizeof로 나눠 4바이트 단위 인덱싱하는 부분을 짚어주세요.</a:t>
+              <a:t>핵심 통찰: 스레드/블록이 겹치지 않는 자기 구역을 갖는 것이 병렬 프로그래밍의 기본. cuda_memtest.h:91.</a:t>
             </a:r>
             <a:endParaRPr lang="en-US" dirty="0"/>
           </a:p>
@@ -1570,7 +1659,7 @@
           <a:p>
             <a:r>
               <a:rPr lang="en-US" dirty="0"/>
-              <a:t>이 대비가 세미나 전체의 뼈대입니다. 같은 문제를 느린 방식과 빠른 방식으로 푸는 코드가 한 저장소에 있다는 점.</a:t>
+              <a:t>한 줄씩: 포인터 계산 → 경계 검사 → 루프로 채우기. sizeof로 나눠 4바이트 단위 인덱싱하는 부분을 짚어주세요.</a:t>
             </a:r>
             <a:endParaRPr lang="en-US" dirty="0"/>
           </a:p>
@@ -2280,7 +2369,7 @@
                 <a:ea typeface="Courier New" pitchFamily="34" charset="-122"/>
                 <a:cs typeface="Courier New" pitchFamily="34" charset="-120"/>
               </a:rPr>
-              <a:t>9</a:t>
+              <a:t>8</a:t>
             </a:r>
             <a:endParaRPr lang="en-US" sz="2200" dirty="0"/>
           </a:p>
@@ -2319,7 +2408,7 @@
                 <a:ea typeface="Malgun Gothic" pitchFamily="34" charset="-122"/>
                 <a:cs typeface="Malgun Gothic" pitchFamily="34" charset="-120"/>
               </a:rPr>
-              <a:t>호스트가 커널을 부르는 법</a:t>
+              <a:t>왜 블록당 스레드 1개일까?</a:t>
             </a:r>
             <a:endParaRPr lang="en-US" sz="3000" dirty="0"/>
           </a:p>
@@ -2333,23 +2422,18 @@
         </p:nvSpPr>
         <p:spPr>
           <a:xfrm>
-            <a:off x="548640" y="1554480"/>
-            <a:ext cx="11064240" cy="2743200"/>
+            <a:off x="548640" y="1600200"/>
+            <a:ext cx="5349240" cy="4114800"/>
           </a:xfrm>
           <a:prstGeom prst="roundRect">
             <a:avLst>
-              <a:gd name="adj" fmla="val 2000"/>
+              <a:gd name="adj" fmla="val 1778"/>
             </a:avLst>
           </a:prstGeom>
           <a:solidFill>
-            <a:srgbClr val="0E1116"/>
+            <a:srgbClr val="1E232C"/>
           </a:solidFill>
-          <a:ln w="12700">
-            <a:solidFill>
-              <a:srgbClr val="2C3440"/>
-            </a:solidFill>
-            <a:prstDash val="solid"/>
-          </a:ln>
+          <a:ln/>
         </p:spPr>
       </p:sp>
       <p:sp>
@@ -2360,8 +2444,47 @@
         </p:nvSpPr>
         <p:spPr>
           <a:xfrm>
-            <a:off x="749808" y="1700784"/>
-            <a:ext cx="10661904" cy="2450592"/>
+            <a:off x="822960" y="1828800"/>
+            <a:ext cx="4800600" cy="457200"/>
+          </a:xfrm>
+          <a:prstGeom prst="rect">
+            <a:avLst/>
+          </a:prstGeom>
+          <a:noFill/>
+          <a:ln/>
+        </p:spPr>
+        <p:txBody>
+          <a:bodyPr wrap="square" lIns="0" tIns="0" rIns="0" bIns="0" rtlCol="0" anchor="ctr"/>
+          <a:lstStyle/>
+          <a:p>
+            <a:pPr indent="0" marL="0">
+              <a:buNone/>
+            </a:pPr>
+            <a:r>
+              <a:rPr lang="en-US" sz="2000" b="1" dirty="0">
+                <a:solidFill>
+                  <a:srgbClr val="8CC63F"/>
+                </a:solidFill>
+                <a:latin typeface="Malgun Gothic" pitchFamily="34" charset="0"/>
+                <a:ea typeface="Malgun Gothic" pitchFamily="34" charset="-122"/>
+                <a:cs typeface="Malgun Gothic" pitchFamily="34" charset="-120"/>
+              </a:rPr>
+              <a:t>의도된 단순함</a:t>
+            </a:r>
+            <a:endParaRPr lang="en-US" sz="2000" dirty="0"/>
+          </a:p>
+        </p:txBody>
+      </p:sp>
+      <p:sp>
+        <p:nvSpPr>
+          <p:cNvPr id="6" name="Text 4"/>
+          <p:cNvSpPr/>
+          <p:nvPr/>
+        </p:nvSpPr>
+        <p:spPr>
+          <a:xfrm>
+            <a:off x="822960" y="2377440"/>
+            <a:ext cx="4800600" cy="3108960"/>
           </a:xfrm>
           <a:prstGeom prst="rect">
             <a:avLst/>
@@ -2373,181 +2496,258 @@
           <a:bodyPr wrap="square" lIns="0" tIns="0" rIns="0" bIns="0" rtlCol="0" anchor="t"/>
           <a:lstStyle/>
           <a:p>
-            <a:pPr algn="l" indent="0" marL="0">
-              <a:lnSpc>
-                <a:spcPct val="108000"/>
-              </a:lnSpc>
-              <a:buNone/>
-            </a:pPr>
-            <a:r>
-              <a:rPr lang="en-US" sz="1350" dirty="0">
-                <a:solidFill>
-                  <a:srgbClr val="9AA6B2"/>
-                </a:solidFill>
-                <a:latin typeface="Courier New" pitchFamily="34" charset="0"/>
-                <a:ea typeface="Courier New" pitchFamily="34" charset="-122"/>
-                <a:cs typeface="Courier New" pitchFamily="34" charset="-120"/>
-              </a:rPr>
-              <a:t>// move_inv_test  (tests.cpp:312)  — 호스트(CPU) 함수</a:t>
-            </a:r>
-            <a:endParaRPr lang="en-US" sz="1350" dirty="0"/>
-          </a:p>
-          <a:p>
-            <a:pPr algn="l" indent="0" marL="0">
-              <a:lnSpc>
-                <a:spcPct val="108000"/>
-              </a:lnSpc>
-              <a:buNone/>
-            </a:pPr>
-            <a:r>
-              <a:rPr lang="en-US" sz="1350" dirty="0">
+            <a:pPr marL="342900" indent="-342900">
+              <a:spcAft>
+                <a:spcPts val="1000"/>
+              </a:spcAft>
+              <a:buSzPct val="100000"/>
+              <a:buChar char="•"/>
+            </a:pPr>
+            <a:r>
+              <a:rPr lang="en-US" sz="1550" dirty="0">
                 <a:solidFill>
                   <a:srgbClr val="E8EDF2"/>
                 </a:solidFill>
-                <a:latin typeface="Courier New" pitchFamily="34" charset="0"/>
-                <a:ea typeface="Courier New" pitchFamily="34" charset="-122"/>
-                <a:cs typeface="Courier New" pitchFamily="34" charset="-120"/>
-              </a:rPr>
-              <a:t>for (i = 0; i &lt; tot_num_blocks; i += GRIDSIZE) {</a:t>
-            </a:r>
-            <a:endParaRPr lang="en-US" sz="1350" dirty="0"/>
-          </a:p>
-          <a:p>
-            <a:pPr algn="l" indent="0" marL="0">
-              <a:lnSpc>
-                <a:spcPct val="108000"/>
-              </a:lnSpc>
-              <a:buNone/>
-            </a:pPr>
-            <a:r>
-              <a:rPr lang="en-US" sz="1350" dirty="0">
+                <a:latin typeface="Malgun Gothic" pitchFamily="34" charset="0"/>
+                <a:ea typeface="Malgun Gothic" pitchFamily="34" charset="-122"/>
+                <a:cs typeface="Malgun Gothic" pitchFamily="34" charset="-120"/>
+              </a:rPr>
+              <a:t>Test 0~9의 목적은 속도가 아니라 정확한 진단</a:t>
+            </a:r>
+            <a:endParaRPr lang="en-US" sz="1550" dirty="0"/>
+          </a:p>
+          <a:p>
+            <a:pPr marL="342900" indent="-342900">
+              <a:spcAft>
+                <a:spcPts val="1000"/>
+              </a:spcAft>
+              <a:buSzPct val="100000"/>
+              <a:buChar char="•"/>
+            </a:pPr>
+            <a:r>
+              <a:rPr lang="en-US" sz="1550" dirty="0">
                 <a:solidFill>
                   <a:srgbClr val="E8EDF2"/>
                 </a:solidFill>
-                <a:latin typeface="Courier New" pitchFamily="34" charset="0"/>
-                <a:ea typeface="Courier New" pitchFamily="34" charset="-122"/>
-                <a:cs typeface="Courier New" pitchFamily="34" charset="-120"/>
-              </a:rPr>
-              <a:t>    dim3 grid;  grid.x = GRIDSIZE;                 // GRIDSIZE = 128</a:t>
-            </a:r>
-            <a:endParaRPr lang="en-US" sz="1350" dirty="0"/>
-          </a:p>
-          <a:p>
-            <a:pPr algn="l" indent="0" marL="0">
-              <a:lnSpc>
-                <a:spcPct val="108000"/>
-              </a:lnSpc>
-              <a:buNone/>
-            </a:pPr>
-            <a:r>
-              <a:rPr lang="en-US" sz="1350" dirty="0">
+                <a:latin typeface="Malgun Gothic" pitchFamily="34" charset="0"/>
+                <a:ea typeface="Malgun Gothic" pitchFamily="34" charset="-122"/>
+                <a:cs typeface="Malgun Gothic" pitchFamily="34" charset="-120"/>
+              </a:rPr>
+              <a:t>주소 배선(address wire) 오류를 찾으려면 예측 가능한 접근 패턴이 유리</a:t>
+            </a:r>
+            <a:endParaRPr lang="en-US" sz="1550" dirty="0"/>
+          </a:p>
+          <a:p>
+            <a:pPr marL="342900" indent="-342900">
+              <a:spcAft>
+                <a:spcPts val="1000"/>
+              </a:spcAft>
+              <a:buSzPct val="100000"/>
+              <a:buChar char="•"/>
+            </a:pPr>
+            <a:r>
+              <a:rPr lang="en-US" sz="1550" dirty="0">
+                <a:solidFill>
+                  <a:srgbClr val="E8EDF2"/>
+                </a:solidFill>
+                <a:latin typeface="Malgun Gothic" pitchFamily="34" charset="0"/>
+                <a:ea typeface="Malgun Gothic" pitchFamily="34" charset="-122"/>
+                <a:cs typeface="Malgun Gothic" pitchFamily="34" charset="-120"/>
+              </a:rPr>
+              <a:t>코드가 단순 = 버그가 적고 신뢰 가능</a:t>
+            </a:r>
+            <a:endParaRPr lang="en-US" sz="1550" dirty="0"/>
+          </a:p>
+          <a:p>
+            <a:pPr marL="342900" indent="-342900">
+              <a:buSzPct val="100000"/>
+              <a:buChar char="•"/>
+            </a:pPr>
+            <a:r>
+              <a:rPr lang="en-US" sz="1550" dirty="0">
                 <a:solidFill>
                   <a:srgbClr val="8CC63F"/>
                 </a:solidFill>
-                <a:latin typeface="Courier New" pitchFamily="34" charset="0"/>
-                <a:ea typeface="Courier New" pitchFamily="34" charset="-122"/>
-                <a:cs typeface="Courier New" pitchFamily="34" charset="-120"/>
-              </a:rPr>
-              <a:t>    kernel_move_inv_write</a:t>
-            </a:r>
-            <a:pPr algn="l" indent="0" marL="0">
-              <a:lnSpc>
-                <a:spcPct val="108000"/>
-              </a:lnSpc>
-              <a:buNone/>
-            </a:pPr>
-            <a:r>
-              <a:rPr lang="en-US" sz="1350" b="1" dirty="0">
+                <a:latin typeface="Malgun Gothic" pitchFamily="34" charset="0"/>
+                <a:ea typeface="Malgun Gothic" pitchFamily="34" charset="-122"/>
+                <a:cs typeface="Malgun Gothic" pitchFamily="34" charset="-120"/>
+              </a:rPr>
+              <a:t>입문자가 읽기에 완벽</a:t>
+            </a:r>
+            <a:endParaRPr lang="en-US" sz="1550" dirty="0"/>
+          </a:p>
+        </p:txBody>
+      </p:sp>
+      <p:sp>
+        <p:nvSpPr>
+          <p:cNvPr id="7" name="Shape 5"/>
+          <p:cNvSpPr/>
+          <p:nvPr/>
+        </p:nvSpPr>
+        <p:spPr>
+          <a:xfrm>
+            <a:off x="6263640" y="1600200"/>
+            <a:ext cx="5349240" cy="4114800"/>
+          </a:xfrm>
+          <a:prstGeom prst="roundRect">
+            <a:avLst>
+              <a:gd name="adj" fmla="val 1778"/>
+            </a:avLst>
+          </a:prstGeom>
+          <a:solidFill>
+            <a:srgbClr val="1E232C"/>
+          </a:solidFill>
+          <a:ln/>
+        </p:spPr>
+      </p:sp>
+      <p:sp>
+        <p:nvSpPr>
+          <p:cNvPr id="8" name="Text 6"/>
+          <p:cNvSpPr/>
+          <p:nvPr/>
+        </p:nvSpPr>
+        <p:spPr>
+          <a:xfrm>
+            <a:off x="6537960" y="1828800"/>
+            <a:ext cx="4800600" cy="457200"/>
+          </a:xfrm>
+          <a:prstGeom prst="rect">
+            <a:avLst/>
+          </a:prstGeom>
+          <a:noFill/>
+          <a:ln/>
+        </p:spPr>
+        <p:txBody>
+          <a:bodyPr wrap="square" lIns="0" tIns="0" rIns="0" bIns="0" rtlCol="0" anchor="ctr"/>
+          <a:lstStyle/>
+          <a:p>
+            <a:pPr indent="0" marL="0">
+              <a:buNone/>
+            </a:pPr>
+            <a:r>
+              <a:rPr lang="en-US" sz="2000" b="1" dirty="0">
+                <a:solidFill>
+                  <a:srgbClr val="E0A458"/>
+                </a:solidFill>
+                <a:latin typeface="Malgun Gothic" pitchFamily="34" charset="0"/>
+                <a:ea typeface="Malgun Gothic" pitchFamily="34" charset="-122"/>
+                <a:cs typeface="Malgun Gothic" pitchFamily="34" charset="-120"/>
+              </a:rPr>
+              <a:t>하지만 느리다</a:t>
+            </a:r>
+            <a:endParaRPr lang="en-US" sz="2000" dirty="0"/>
+          </a:p>
+        </p:txBody>
+      </p:sp>
+      <p:sp>
+        <p:nvSpPr>
+          <p:cNvPr id="9" name="Text 7"/>
+          <p:cNvSpPr/>
+          <p:nvPr/>
+        </p:nvSpPr>
+        <p:spPr>
+          <a:xfrm>
+            <a:off x="6537960" y="2377440"/>
+            <a:ext cx="4800600" cy="3108960"/>
+          </a:xfrm>
+          <a:prstGeom prst="rect">
+            <a:avLst/>
+          </a:prstGeom>
+          <a:noFill/>
+          <a:ln/>
+        </p:spPr>
+        <p:txBody>
+          <a:bodyPr wrap="square" lIns="0" tIns="0" rIns="0" bIns="0" rtlCol="0" anchor="t"/>
+          <a:lstStyle/>
+          <a:p>
+            <a:pPr marL="342900" indent="-342900">
+              <a:spcAft>
+                <a:spcPts val="1000"/>
+              </a:spcAft>
+              <a:buSzPct val="100000"/>
+              <a:buChar char="•"/>
+            </a:pPr>
+            <a:r>
+              <a:rPr lang="en-US" sz="1550" dirty="0">
+                <a:solidFill>
+                  <a:srgbClr val="E8EDF2"/>
+                </a:solidFill>
+                <a:latin typeface="Malgun Gothic" pitchFamily="34" charset="0"/>
+                <a:ea typeface="Malgun Gothic" pitchFamily="34" charset="-122"/>
+                <a:cs typeface="Malgun Gothic" pitchFamily="34" charset="-120"/>
+              </a:rPr>
+              <a:t>GPU의 수천 코어를 거의 놀림</a:t>
+            </a:r>
+            <a:endParaRPr lang="en-US" sz="1550" dirty="0"/>
+          </a:p>
+          <a:p>
+            <a:pPr marL="342900" indent="-342900">
+              <a:spcAft>
+                <a:spcPts val="1000"/>
+              </a:spcAft>
+              <a:buSzPct val="100000"/>
+              <a:buChar char="•"/>
+            </a:pPr>
+            <a:r>
+              <a:rPr lang="en-US" sz="1550" dirty="0">
+                <a:solidFill>
+                  <a:srgbClr val="E8EDF2"/>
+                </a:solidFill>
+                <a:latin typeface="Malgun Gothic" pitchFamily="34" charset="0"/>
+                <a:ea typeface="Malgun Gothic" pitchFamily="34" charset="-122"/>
+                <a:cs typeface="Malgun Gothic" pitchFamily="34" charset="-120"/>
+              </a:rPr>
+              <a:t>블록당 스레드 1개 → 병렬성 최소</a:t>
+            </a:r>
+            <a:endParaRPr lang="en-US" sz="1550" dirty="0"/>
+          </a:p>
+          <a:p>
+            <a:pPr marL="342900" indent="-342900">
+              <a:spcAft>
+                <a:spcPts val="600"/>
+              </a:spcAft>
+              <a:buSzPct val="100000"/>
+              <a:buChar char="•"/>
+            </a:pPr>
+            <a:r>
+              <a:rPr lang="en-US" sz="1550" dirty="0">
+                <a:solidFill>
+                  <a:srgbClr val="E8EDF2"/>
+                </a:solidFill>
+                <a:latin typeface="Malgun Gothic" pitchFamily="34" charset="0"/>
+                <a:ea typeface="Malgun Gothic" pitchFamily="34" charset="-122"/>
+                <a:cs typeface="Malgun Gothic" pitchFamily="34" charset="-120"/>
+              </a:rPr>
+              <a:t>Test 10은 정반대로 설계됨:</a:t>
+            </a:r>
+            <a:endParaRPr lang="en-US" sz="1550" dirty="0"/>
+          </a:p>
+          <a:p>
+            <a:pPr indent="0" marL="0">
+              <a:spcAft>
+                <a:spcPts val="1000"/>
+              </a:spcAft>
+              <a:buNone/>
+            </a:pPr>
+            <a:r>
+              <a:rPr lang="en-US" sz="1550" dirty="0">
                 <a:solidFill>
                   <a:srgbClr val="4FB0C6"/>
                 </a:solidFill>
-                <a:latin typeface="Courier New" pitchFamily="34" charset="0"/>
-                <a:ea typeface="Courier New" pitchFamily="34" charset="-122"/>
-                <a:cs typeface="Courier New" pitchFamily="34" charset="-120"/>
-              </a:rPr>
-              <a:t>&lt;&lt;&lt;grid, 1&gt;&gt;&gt;</a:t>
-            </a:r>
-            <a:pPr algn="l" indent="0" marL="0">
-              <a:lnSpc>
-                <a:spcPct val="108000"/>
-              </a:lnSpc>
-              <a:buNone/>
-            </a:pPr>
-            <a:r>
-              <a:rPr lang="en-US" sz="1350" dirty="0">
-                <a:solidFill>
-                  <a:srgbClr val="E8EDF2"/>
-                </a:solidFill>
-                <a:latin typeface="Courier New" pitchFamily="34" charset="0"/>
-                <a:ea typeface="Courier New" pitchFamily="34" charset="-122"/>
-                <a:cs typeface="Courier New" pitchFamily="34" charset="-120"/>
-              </a:rPr>
-              <a:t>(ptr + i*BLOCKSIZE, end_ptr, p1);</a:t>
-            </a:r>
-            <a:endParaRPr lang="en-US" sz="1350" dirty="0"/>
-          </a:p>
-          <a:p>
-            <a:pPr algn="l" indent="0" marL="0">
-              <a:lnSpc>
-                <a:spcPct val="108000"/>
-              </a:lnSpc>
-              <a:buNone/>
-            </a:pPr>
-            <a:r>
-              <a:rPr lang="en-US" sz="1350" dirty="0">
-                <a:solidFill>
-                  <a:srgbClr val="E8EDF2"/>
-                </a:solidFill>
-                <a:latin typeface="Courier New" pitchFamily="34" charset="0"/>
-                <a:ea typeface="Courier New" pitchFamily="34" charset="-122"/>
-                <a:cs typeface="Courier New" pitchFamily="34" charset="-120"/>
-              </a:rPr>
-              <a:t>}</a:t>
-            </a:r>
-            <a:endParaRPr lang="en-US" sz="1350" dirty="0"/>
-          </a:p>
-        </p:txBody>
-      </p:sp>
-      <p:sp>
-        <p:nvSpPr>
-          <p:cNvPr id="6" name="Text 4"/>
-          <p:cNvSpPr/>
-          <p:nvPr/>
-        </p:nvSpPr>
-        <p:spPr>
-          <a:xfrm>
-            <a:off x="548640" y="4572000"/>
-            <a:ext cx="11064240" cy="1280160"/>
-          </a:xfrm>
-          <a:prstGeom prst="rect">
-            <a:avLst/>
-          </a:prstGeom>
-          <a:noFill/>
-          <a:ln/>
-        </p:spPr>
-        <p:txBody>
-          <a:bodyPr wrap="square" lIns="0" tIns="0" rIns="0" bIns="0" rtlCol="0" anchor="t"/>
-          <a:lstStyle/>
+                <a:latin typeface="Malgun Gothic" pitchFamily="34" charset="0"/>
+                <a:ea typeface="Malgun Gothic" pitchFamily="34" charset="-122"/>
+                <a:cs typeface="Malgun Gothic" pitchFamily="34" charset="-120"/>
+              </a:rPr>
+              <a:t>&lt;&lt;&lt;32768, 64&gt;&gt;&gt;  — 대역폭 최적화</a:t>
+            </a:r>
+            <a:endParaRPr lang="en-US" sz="1550" dirty="0"/>
+          </a:p>
           <a:p>
             <a:pPr indent="0" marL="0">
               <a:buNone/>
             </a:pPr>
             <a:r>
-              <a:rPr lang="en-US" sz="1700" dirty="0">
-                <a:solidFill>
-                  <a:srgbClr val="E8EDF2"/>
-                </a:solidFill>
-                <a:latin typeface="Malgun Gothic" pitchFamily="34" charset="0"/>
-                <a:ea typeface="Malgun Gothic" pitchFamily="34" charset="-122"/>
-                <a:cs typeface="Malgun Gothic" pitchFamily="34" charset="-120"/>
-              </a:rPr>
-              <a:t>한 번에 128 MB(블록 128개)를 처리하고, </a:t>
-            </a:r>
-            <a:pPr indent="0" marL="0">
-              <a:buNone/>
-            </a:pPr>
-            <a:r>
-              <a:rPr lang="en-US" sz="1700" b="1" dirty="0">
+              <a:rPr lang="en-US" sz="1550" i="1" dirty="0">
                 <a:solidFill>
                   <a:srgbClr val="8CC63F"/>
                 </a:solidFill>
@@ -2555,23 +2755,9 @@
                 <a:ea typeface="Malgun Gothic" pitchFamily="34" charset="-122"/>
                 <a:cs typeface="Malgun Gothic" pitchFamily="34" charset="-120"/>
               </a:rPr>
-              <a:t>바깥 for 루프</a:t>
-            </a:r>
-            <a:pPr indent="0" marL="0">
-              <a:buNone/>
-            </a:pPr>
-            <a:r>
-              <a:rPr lang="en-US" sz="1700" dirty="0">
-                <a:solidFill>
-                  <a:srgbClr val="E8EDF2"/>
-                </a:solidFill>
-                <a:latin typeface="Malgun Gothic" pitchFamily="34" charset="0"/>
-                <a:ea typeface="Malgun Gothic" pitchFamily="34" charset="-122"/>
-                <a:cs typeface="Malgun Gothic" pitchFamily="34" charset="-120"/>
-              </a:rPr>
-              <a:t>가 전체 메모리를 128 MB씩 훑습니다. 4 GB이면 약 32번 반복됩니다.</a:t>
-            </a:r>
-            <a:endParaRPr lang="en-US" sz="1700" dirty="0"/>
+              <a:t>→ 세션 3에서 두 방식을 직접 비교합니다</a:t>
+            </a:r>
+            <a:endParaRPr lang="en-US" sz="1550" dirty="0"/>
           </a:p>
         </p:txBody>
       </p:sp>
@@ -2644,7 +2830,7 @@
                 <a:ea typeface="Courier New" pitchFamily="34" charset="-122"/>
                 <a:cs typeface="Courier New" pitchFamily="34" charset="-120"/>
               </a:rPr>
-              <a:t>10</a:t>
+              <a:t>9</a:t>
             </a:r>
             <a:endParaRPr lang="en-US" sz="2200" dirty="0"/>
           </a:p>
@@ -2683,7 +2869,7 @@
                 <a:ea typeface="Malgun Gothic" pitchFamily="34" charset="-122"/>
                 <a:cs typeface="Malgun Gothic" pitchFamily="34" charset="-120"/>
               </a:rPr>
-              <a:t>실습 미리보기 · Lab 1</a:t>
+              <a:t>호스트가 커널을 부르는 법</a:t>
             </a:r>
             <a:endParaRPr lang="en-US" sz="3000" dirty="0"/>
           </a:p>
@@ -2698,17 +2884,22 @@
         <p:spPr>
           <a:xfrm>
             <a:off x="548640" y="1554480"/>
-            <a:ext cx="5303520" cy="1965960"/>
+            <a:ext cx="11064240" cy="2743200"/>
           </a:xfrm>
           <a:prstGeom prst="roundRect">
             <a:avLst>
-              <a:gd name="adj" fmla="val 3721"/>
+              <a:gd name="adj" fmla="val 2000"/>
             </a:avLst>
           </a:prstGeom>
           <a:solidFill>
-            <a:srgbClr val="1E232C"/>
+            <a:srgbClr val="0E1116"/>
           </a:solidFill>
-          <a:ln/>
+          <a:ln w="12700">
+            <a:solidFill>
+              <a:srgbClr val="2C3440"/>
+            </a:solidFill>
+            <a:prstDash val="solid"/>
+          </a:ln>
         </p:spPr>
       </p:sp>
       <p:sp>
@@ -2719,557 +2910,218 @@
         </p:nvSpPr>
         <p:spPr>
           <a:xfrm>
-            <a:off x="804672" y="1755648"/>
-            <a:ext cx="1188720" cy="502920"/>
-          </a:xfrm>
-          <a:prstGeom prst="roundRect">
-            <a:avLst>
-              <a:gd name="adj" fmla="val 14545"/>
-            </a:avLst>
-          </a:prstGeom>
-          <a:solidFill>
-            <a:srgbClr val="8CC63F"/>
-          </a:solidFill>
-          <a:ln/>
-        </p:spPr>
-        <p:txBody>
-          <a:bodyPr wrap="square" rtlCol="0" anchor="ctr"/>
-          <a:lstStyle/>
-          <a:p>
-            <a:pPr algn="ctr" indent="0" marL="0">
-              <a:buNone/>
-            </a:pPr>
-            <a:r>
-              <a:rPr lang="en-US" sz="1700" b="1" dirty="0">
-                <a:solidFill>
-                  <a:srgbClr val="13161C"/>
+            <a:off x="749808" y="1700784"/>
+            <a:ext cx="10661904" cy="2450592"/>
+          </a:xfrm>
+          <a:prstGeom prst="rect">
+            <a:avLst/>
+          </a:prstGeom>
+          <a:noFill/>
+          <a:ln/>
+        </p:spPr>
+        <p:txBody>
+          <a:bodyPr wrap="square" lIns="0" tIns="0" rIns="0" bIns="0" rtlCol="0" anchor="t"/>
+          <a:lstStyle/>
+          <a:p>
+            <a:pPr algn="l" indent="0" marL="0">
+              <a:lnSpc>
+                <a:spcPct val="108000"/>
+              </a:lnSpc>
+              <a:buNone/>
+            </a:pPr>
+            <a:r>
+              <a:rPr lang="en-US" sz="1350" dirty="0">
+                <a:solidFill>
+                  <a:srgbClr val="9AA6B2"/>
                 </a:solidFill>
                 <a:latin typeface="Courier New" pitchFamily="34" charset="0"/>
                 <a:ea typeface="Courier New" pitchFamily="34" charset="-122"/>
                 <a:cs typeface="Courier New" pitchFamily="34" charset="-120"/>
               </a:rPr>
-              <a:t>Ex 1</a:t>
-            </a:r>
-            <a:endParaRPr lang="en-US" sz="1700" dirty="0"/>
-          </a:p>
-        </p:txBody>
-      </p:sp>
-      <p:sp>
-        <p:nvSpPr>
-          <p:cNvPr id="6" name="Text 4"/>
-          <p:cNvSpPr/>
-          <p:nvPr/>
-        </p:nvSpPr>
-        <p:spPr>
-          <a:xfrm>
-            <a:off x="2148840" y="1773936"/>
-            <a:ext cx="3474720" cy="822960"/>
-          </a:xfrm>
-          <a:prstGeom prst="rect">
-            <a:avLst/>
-          </a:prstGeom>
-          <a:noFill/>
-          <a:ln/>
-        </p:spPr>
-        <p:txBody>
-          <a:bodyPr wrap="square" lIns="0" tIns="0" rIns="0" bIns="0" rtlCol="0" anchor="t"/>
-          <a:lstStyle/>
-          <a:p>
-            <a:pPr indent="0" marL="0">
-              <a:buNone/>
-            </a:pPr>
-            <a:r>
-              <a:rPr lang="en-US" sz="1700" b="1" dirty="0">
+              <a:t>// move_inv_test  (tests.cpp:312)  — 호스트(CPU) 함수</a:t>
+            </a:r>
+            <a:endParaRPr lang="en-US" sz="1350" dirty="0"/>
+          </a:p>
+          <a:p>
+            <a:pPr algn="l" indent="0" marL="0">
+              <a:lnSpc>
+                <a:spcPct val="108000"/>
+              </a:lnSpc>
+              <a:buNone/>
+            </a:pPr>
+            <a:r>
+              <a:rPr lang="en-US" sz="1350" dirty="0">
                 <a:solidFill>
                   <a:srgbClr val="E8EDF2"/>
-                </a:solidFill>
-                <a:latin typeface="Malgun Gothic" pitchFamily="34" charset="0"/>
-                <a:ea typeface="Malgun Gothic" pitchFamily="34" charset="-122"/>
-                <a:cs typeface="Malgun Gothic" pitchFamily="34" charset="-120"/>
-              </a:rPr>
-              <a:t>스레드는 자기가 누구인지 안다</a:t>
-            </a:r>
-            <a:endParaRPr lang="en-US" sz="1700" dirty="0"/>
-          </a:p>
-        </p:txBody>
-      </p:sp>
-      <p:sp>
-        <p:nvSpPr>
-          <p:cNvPr id="7" name="Text 5"/>
-          <p:cNvSpPr/>
-          <p:nvPr/>
-        </p:nvSpPr>
-        <p:spPr>
-          <a:xfrm>
-            <a:off x="804672" y="2651760"/>
-            <a:ext cx="4791456" cy="731520"/>
-          </a:xfrm>
-          <a:prstGeom prst="rect">
-            <a:avLst/>
-          </a:prstGeom>
-          <a:noFill/>
-          <a:ln/>
-        </p:spPr>
-        <p:txBody>
-          <a:bodyPr wrap="square" lIns="0" tIns="0" rIns="0" bIns="0" rtlCol="0" anchor="t"/>
-          <a:lstStyle/>
-          <a:p>
-            <a:pPr indent="0" marL="0">
-              <a:lnSpc>
-                <a:spcPct val="110000"/>
-              </a:lnSpc>
-              <a:buNone/>
-            </a:pPr>
-            <a:r>
-              <a:rPr lang="en-US" sz="1400" dirty="0">
-                <a:solidFill>
-                  <a:srgbClr val="9AA6B2"/>
-                </a:solidFill>
-                <a:latin typeface="Malgun Gothic" pitchFamily="34" charset="0"/>
-                <a:ea typeface="Malgun Gothic" pitchFamily="34" charset="-122"/>
-                <a:cs typeface="Malgun Gothic" pitchFamily="34" charset="-120"/>
-              </a:rPr>
-              <a:t>커널 안에서 blockIdx.x를 printf로 출력해 확인</a:t>
-            </a:r>
-            <a:endParaRPr lang="en-US" sz="1400" dirty="0"/>
-          </a:p>
-        </p:txBody>
-      </p:sp>
-      <p:sp>
-        <p:nvSpPr>
-          <p:cNvPr id="8" name="Shape 6"/>
-          <p:cNvSpPr/>
-          <p:nvPr/>
-        </p:nvSpPr>
-        <p:spPr>
-          <a:xfrm>
-            <a:off x="6309360" y="1554480"/>
-            <a:ext cx="5303520" cy="1965960"/>
-          </a:xfrm>
-          <a:prstGeom prst="roundRect">
-            <a:avLst>
-              <a:gd name="adj" fmla="val 3721"/>
-            </a:avLst>
-          </a:prstGeom>
-          <a:solidFill>
-            <a:srgbClr val="1E232C"/>
-          </a:solidFill>
-          <a:ln/>
-        </p:spPr>
-      </p:sp>
-      <p:sp>
-        <p:nvSpPr>
-          <p:cNvPr id="9" name="Text 7"/>
-          <p:cNvSpPr/>
-          <p:nvPr/>
-        </p:nvSpPr>
-        <p:spPr>
-          <a:xfrm>
-            <a:off x="6565392" y="1755648"/>
-            <a:ext cx="1188720" cy="502920"/>
-          </a:xfrm>
-          <a:prstGeom prst="roundRect">
-            <a:avLst>
-              <a:gd name="adj" fmla="val 14545"/>
-            </a:avLst>
-          </a:prstGeom>
-          <a:solidFill>
-            <a:srgbClr val="4FB0C6"/>
-          </a:solidFill>
-          <a:ln/>
-        </p:spPr>
-        <p:txBody>
-          <a:bodyPr wrap="square" rtlCol="0" anchor="ctr"/>
-          <a:lstStyle/>
-          <a:p>
-            <a:pPr algn="ctr" indent="0" marL="0">
-              <a:buNone/>
-            </a:pPr>
-            <a:r>
-              <a:rPr lang="en-US" sz="1700" b="1" dirty="0">
-                <a:solidFill>
-                  <a:srgbClr val="13161C"/>
                 </a:solidFill>
                 <a:latin typeface="Courier New" pitchFamily="34" charset="0"/>
                 <a:ea typeface="Courier New" pitchFamily="34" charset="-122"/>
                 <a:cs typeface="Courier New" pitchFamily="34" charset="-120"/>
               </a:rPr>
-              <a:t>Ex 2</a:t>
-            </a:r>
-            <a:endParaRPr lang="en-US" sz="1700" dirty="0"/>
-          </a:p>
-        </p:txBody>
-      </p:sp>
-      <p:sp>
-        <p:nvSpPr>
-          <p:cNvPr id="10" name="Text 8"/>
-          <p:cNvSpPr/>
-          <p:nvPr/>
-        </p:nvSpPr>
-        <p:spPr>
-          <a:xfrm>
-            <a:off x="7909560" y="1773936"/>
-            <a:ext cx="3474720" cy="822960"/>
-          </a:xfrm>
-          <a:prstGeom prst="rect">
-            <a:avLst/>
-          </a:prstGeom>
-          <a:noFill/>
-          <a:ln/>
-        </p:spPr>
-        <p:txBody>
-          <a:bodyPr wrap="square" lIns="0" tIns="0" rIns="0" bIns="0" rtlCol="0" anchor="t"/>
-          <a:lstStyle/>
-          <a:p>
-            <a:pPr indent="0" marL="0">
-              <a:buNone/>
-            </a:pPr>
-            <a:r>
-              <a:rPr lang="en-US" sz="1700" b="1" dirty="0">
+              <a:t>for (i = 0; i &lt; tot_num_blocks; i += GRIDSIZE) {</a:t>
+            </a:r>
+            <a:endParaRPr lang="en-US" sz="1350" dirty="0"/>
+          </a:p>
+          <a:p>
+            <a:pPr algn="l" indent="0" marL="0">
+              <a:lnSpc>
+                <a:spcPct val="108000"/>
+              </a:lnSpc>
+              <a:buNone/>
+            </a:pPr>
+            <a:r>
+              <a:rPr lang="en-US" sz="1350" dirty="0">
                 <a:solidFill>
                   <a:srgbClr val="E8EDF2"/>
-                </a:solidFill>
-                <a:latin typeface="Malgun Gothic" pitchFamily="34" charset="0"/>
-                <a:ea typeface="Malgun Gothic" pitchFamily="34" charset="-122"/>
-                <a:cs typeface="Malgun Gothic" pitchFamily="34" charset="-120"/>
-              </a:rPr>
-              <a:t>그리드 크기를 바꿔보기</a:t>
-            </a:r>
-            <a:endParaRPr lang="en-US" sz="1700" dirty="0"/>
-          </a:p>
-        </p:txBody>
-      </p:sp>
-      <p:sp>
-        <p:nvSpPr>
-          <p:cNvPr id="11" name="Text 9"/>
-          <p:cNvSpPr/>
-          <p:nvPr/>
-        </p:nvSpPr>
-        <p:spPr>
-          <a:xfrm>
-            <a:off x="6565392" y="2651760"/>
-            <a:ext cx="4791456" cy="731520"/>
-          </a:xfrm>
-          <a:prstGeom prst="rect">
-            <a:avLst/>
-          </a:prstGeom>
-          <a:noFill/>
-          <a:ln/>
-        </p:spPr>
-        <p:txBody>
-          <a:bodyPr wrap="square" lIns="0" tIns="0" rIns="0" bIns="0" rtlCol="0" anchor="t"/>
-          <a:lstStyle/>
-          <a:p>
-            <a:pPr indent="0" marL="0">
-              <a:lnSpc>
-                <a:spcPct val="110000"/>
-              </a:lnSpc>
-              <a:buNone/>
-            </a:pPr>
-            <a:r>
-              <a:rPr lang="en-US" sz="1400" dirty="0">
-                <a:solidFill>
-                  <a:srgbClr val="9AA6B2"/>
-                </a:solidFill>
-                <a:latin typeface="Malgun Gothic" pitchFamily="34" charset="0"/>
-                <a:ea typeface="Malgun Gothic" pitchFamily="34" charset="-122"/>
-                <a:cs typeface="Malgun Gothic" pitchFamily="34" charset="-120"/>
-              </a:rPr>
-              <a:t>GRIDSIZE를 32/128/512로 바꿔 실행 시간 측정</a:t>
-            </a:r>
-            <a:endParaRPr lang="en-US" sz="1400" dirty="0"/>
-          </a:p>
-        </p:txBody>
-      </p:sp>
-      <p:sp>
-        <p:nvSpPr>
-          <p:cNvPr id="12" name="Shape 10"/>
-          <p:cNvSpPr/>
-          <p:nvPr/>
-        </p:nvSpPr>
-        <p:spPr>
-          <a:xfrm>
-            <a:off x="548640" y="3840480"/>
-            <a:ext cx="5303520" cy="1965960"/>
-          </a:xfrm>
-          <a:prstGeom prst="roundRect">
-            <a:avLst>
-              <a:gd name="adj" fmla="val 3721"/>
-            </a:avLst>
-          </a:prstGeom>
-          <a:solidFill>
-            <a:srgbClr val="1E232C"/>
-          </a:solidFill>
-          <a:ln/>
-        </p:spPr>
-      </p:sp>
-      <p:sp>
-        <p:nvSpPr>
-          <p:cNvPr id="13" name="Text 11"/>
-          <p:cNvSpPr/>
-          <p:nvPr/>
-        </p:nvSpPr>
-        <p:spPr>
-          <a:xfrm>
-            <a:off x="804672" y="4041648"/>
-            <a:ext cx="1188720" cy="502920"/>
-          </a:xfrm>
-          <a:prstGeom prst="roundRect">
-            <a:avLst>
-              <a:gd name="adj" fmla="val 14545"/>
-            </a:avLst>
-          </a:prstGeom>
-          <a:solidFill>
-            <a:srgbClr val="8CC63F"/>
-          </a:solidFill>
-          <a:ln/>
-        </p:spPr>
-        <p:txBody>
-          <a:bodyPr wrap="square" rtlCol="0" anchor="ctr"/>
-          <a:lstStyle/>
-          <a:p>
-            <a:pPr algn="ctr" indent="0" marL="0">
-              <a:buNone/>
-            </a:pPr>
-            <a:r>
-              <a:rPr lang="en-US" sz="1700" b="1" dirty="0">
-                <a:solidFill>
-                  <a:srgbClr val="13161C"/>
                 </a:solidFill>
                 <a:latin typeface="Courier New" pitchFamily="34" charset="0"/>
                 <a:ea typeface="Courier New" pitchFamily="34" charset="-122"/>
                 <a:cs typeface="Courier New" pitchFamily="34" charset="-120"/>
               </a:rPr>
-              <a:t>Ex 3</a:t>
-            </a:r>
-            <a:endParaRPr lang="en-US" sz="1700" dirty="0"/>
-          </a:p>
-        </p:txBody>
-      </p:sp>
-      <p:sp>
-        <p:nvSpPr>
-          <p:cNvPr id="14" name="Text 12"/>
-          <p:cNvSpPr/>
-          <p:nvPr/>
-        </p:nvSpPr>
-        <p:spPr>
-          <a:xfrm>
-            <a:off x="2148840" y="4059936"/>
-            <a:ext cx="3474720" cy="822960"/>
-          </a:xfrm>
-          <a:prstGeom prst="rect">
-            <a:avLst/>
-          </a:prstGeom>
-          <a:noFill/>
-          <a:ln/>
-        </p:spPr>
-        <p:txBody>
-          <a:bodyPr wrap="square" lIns="0" tIns="0" rIns="0" bIns="0" rtlCol="0" anchor="t"/>
-          <a:lstStyle/>
-          <a:p>
-            <a:pPr indent="0" marL="0">
-              <a:buNone/>
-            </a:pPr>
-            <a:r>
-              <a:rPr lang="en-US" sz="1700" b="1" dirty="0">
-                <a:solidFill>
-                  <a:srgbClr val="E8EDF2"/>
-                </a:solidFill>
-                <a:latin typeface="Malgun Gothic" pitchFamily="34" charset="0"/>
-                <a:ea typeface="Malgun Gothic" pitchFamily="34" charset="-122"/>
-                <a:cs typeface="Malgun Gothic" pitchFamily="34" charset="-120"/>
-              </a:rPr>
-              <a:t>패턴을 내 마음대로</a:t>
-            </a:r>
-            <a:endParaRPr lang="en-US" sz="1700" dirty="0"/>
-          </a:p>
-        </p:txBody>
-      </p:sp>
-      <p:sp>
-        <p:nvSpPr>
-          <p:cNvPr id="15" name="Text 13"/>
-          <p:cNvSpPr/>
-          <p:nvPr/>
-        </p:nvSpPr>
-        <p:spPr>
-          <a:xfrm>
-            <a:off x="804672" y="4937760"/>
-            <a:ext cx="4791456" cy="731520"/>
-          </a:xfrm>
-          <a:prstGeom prst="rect">
-            <a:avLst/>
-          </a:prstGeom>
-          <a:noFill/>
-          <a:ln/>
-        </p:spPr>
-        <p:txBody>
-          <a:bodyPr wrap="square" lIns="0" tIns="0" rIns="0" bIns="0" rtlCol="0" anchor="t"/>
-          <a:lstStyle/>
-          <a:p>
-            <a:pPr indent="0" marL="0">
+              <a:t>    dim3 grid;  grid.x = GRIDSIZE;                 // GRIDSIZE = 128</a:t>
+            </a:r>
+            <a:endParaRPr lang="en-US" sz="1350" dirty="0"/>
+          </a:p>
+          <a:p>
+            <a:pPr algn="l" indent="0" marL="0">
               <a:lnSpc>
-                <a:spcPct val="110000"/>
+                <a:spcPct val="108000"/>
               </a:lnSpc>
               <a:buNone/>
             </a:pPr>
             <a:r>
-              <a:rPr lang="en-US" sz="1400" dirty="0">
-                <a:solidFill>
-                  <a:srgbClr val="9AA6B2"/>
-                </a:solidFill>
-                <a:latin typeface="Malgun Gothic" pitchFamily="34" charset="0"/>
-                <a:ea typeface="Malgun Gothic" pitchFamily="34" charset="-122"/>
-                <a:cs typeface="Malgun Gothic" pitchFamily="34" charset="-120"/>
-              </a:rPr>
-              <a:t>--pattern 0xDEADBEEF 로 커널 인자 전달 관찰</a:t>
-            </a:r>
-            <a:endParaRPr lang="en-US" sz="1400" dirty="0"/>
-          </a:p>
-        </p:txBody>
-      </p:sp>
-      <p:sp>
-        <p:nvSpPr>
-          <p:cNvPr id="16" name="Shape 14"/>
-          <p:cNvSpPr/>
-          <p:nvPr/>
-        </p:nvSpPr>
-        <p:spPr>
-          <a:xfrm>
-            <a:off x="6309360" y="3840480"/>
-            <a:ext cx="5303520" cy="1965960"/>
-          </a:xfrm>
-          <a:prstGeom prst="roundRect">
-            <a:avLst>
-              <a:gd name="adj" fmla="val 3721"/>
-            </a:avLst>
-          </a:prstGeom>
-          <a:solidFill>
-            <a:srgbClr val="1E232C"/>
-          </a:solidFill>
-          <a:ln/>
-        </p:spPr>
-      </p:sp>
-      <p:sp>
-        <p:nvSpPr>
-          <p:cNvPr id="17" name="Text 15"/>
-          <p:cNvSpPr/>
-          <p:nvPr/>
-        </p:nvSpPr>
-        <p:spPr>
-          <a:xfrm>
-            <a:off x="6565392" y="4041648"/>
-            <a:ext cx="1188720" cy="502920"/>
-          </a:xfrm>
-          <a:prstGeom prst="roundRect">
-            <a:avLst>
-              <a:gd name="adj" fmla="val 14545"/>
-            </a:avLst>
-          </a:prstGeom>
-          <a:solidFill>
-            <a:srgbClr val="E0A458"/>
-          </a:solidFill>
-          <a:ln/>
-        </p:spPr>
-        <p:txBody>
-          <a:bodyPr wrap="square" rtlCol="0" anchor="ctr"/>
-          <a:lstStyle/>
-          <a:p>
-            <a:pPr algn="ctr" indent="0" marL="0">
-              <a:buNone/>
-            </a:pPr>
-            <a:r>
-              <a:rPr lang="en-US" sz="1700" b="1" dirty="0">
-                <a:solidFill>
-                  <a:srgbClr val="13161C"/>
+              <a:rPr lang="en-US" sz="1350" dirty="0">
+                <a:solidFill>
+                  <a:srgbClr val="8CC63F"/>
                 </a:solidFill>
                 <a:latin typeface="Courier New" pitchFamily="34" charset="0"/>
                 <a:ea typeface="Courier New" pitchFamily="34" charset="-122"/>
                 <a:cs typeface="Courier New" pitchFamily="34" charset="-120"/>
               </a:rPr>
-              <a:t>Ex 4</a:t>
+              <a:t>    kernel_move_inv_write</a:t>
+            </a:r>
+            <a:pPr algn="l" indent="0" marL="0">
+              <a:lnSpc>
+                <a:spcPct val="108000"/>
+              </a:lnSpc>
+              <a:buNone/>
+            </a:pPr>
+            <a:r>
+              <a:rPr lang="en-US" sz="1350" b="1" dirty="0">
+                <a:solidFill>
+                  <a:srgbClr val="4FB0C6"/>
+                </a:solidFill>
+                <a:latin typeface="Courier New" pitchFamily="34" charset="0"/>
+                <a:ea typeface="Courier New" pitchFamily="34" charset="-122"/>
+                <a:cs typeface="Courier New" pitchFamily="34" charset="-120"/>
+              </a:rPr>
+              <a:t>&lt;&lt;&lt;grid, 1&gt;&gt;&gt;</a:t>
+            </a:r>
+            <a:pPr algn="l" indent="0" marL="0">
+              <a:lnSpc>
+                <a:spcPct val="108000"/>
+              </a:lnSpc>
+              <a:buNone/>
+            </a:pPr>
+            <a:r>
+              <a:rPr lang="en-US" sz="1350" dirty="0">
+                <a:solidFill>
+                  <a:srgbClr val="E8EDF2"/>
+                </a:solidFill>
+                <a:latin typeface="Courier New" pitchFamily="34" charset="0"/>
+                <a:ea typeface="Courier New" pitchFamily="34" charset="-122"/>
+                <a:cs typeface="Courier New" pitchFamily="34" charset="-120"/>
+              </a:rPr>
+              <a:t>(ptr + i*BLOCKSIZE, end_ptr, p1);</a:t>
+            </a:r>
+            <a:endParaRPr lang="en-US" sz="1350" dirty="0"/>
+          </a:p>
+          <a:p>
+            <a:pPr algn="l" indent="0" marL="0">
+              <a:lnSpc>
+                <a:spcPct val="108000"/>
+              </a:lnSpc>
+              <a:buNone/>
+            </a:pPr>
+            <a:r>
+              <a:rPr lang="en-US" sz="1350" dirty="0">
+                <a:solidFill>
+                  <a:srgbClr val="E8EDF2"/>
+                </a:solidFill>
+                <a:latin typeface="Courier New" pitchFamily="34" charset="0"/>
+                <a:ea typeface="Courier New" pitchFamily="34" charset="-122"/>
+                <a:cs typeface="Courier New" pitchFamily="34" charset="-120"/>
+              </a:rPr>
+              <a:t>}</a:t>
+            </a:r>
+            <a:endParaRPr lang="en-US" sz="1350" dirty="0"/>
+          </a:p>
+        </p:txBody>
+      </p:sp>
+      <p:sp>
+        <p:nvSpPr>
+          <p:cNvPr id="6" name="Text 4"/>
+          <p:cNvSpPr/>
+          <p:nvPr/>
+        </p:nvSpPr>
+        <p:spPr>
+          <a:xfrm>
+            <a:off x="548640" y="4572000"/>
+            <a:ext cx="11064240" cy="1280160"/>
+          </a:xfrm>
+          <a:prstGeom prst="rect">
+            <a:avLst/>
+          </a:prstGeom>
+          <a:noFill/>
+          <a:ln/>
+        </p:spPr>
+        <p:txBody>
+          <a:bodyPr wrap="square" lIns="0" tIns="0" rIns="0" bIns="0" rtlCol="0" anchor="t"/>
+          <a:lstStyle/>
+          <a:p>
+            <a:pPr indent="0" marL="0">
+              <a:buNone/>
+            </a:pPr>
+            <a:r>
+              <a:rPr lang="en-US" sz="1700" dirty="0">
+                <a:solidFill>
+                  <a:srgbClr val="E8EDF2"/>
+                </a:solidFill>
+                <a:latin typeface="Malgun Gothic" pitchFamily="34" charset="0"/>
+                <a:ea typeface="Malgun Gothic" pitchFamily="34" charset="-122"/>
+                <a:cs typeface="Malgun Gothic" pitchFamily="34" charset="-120"/>
+              </a:rPr>
+              <a:t>한 번에 128 MB(블록 128개)를 처리하고, </a:t>
+            </a:r>
+            <a:pPr indent="0" marL="0">
+              <a:buNone/>
+            </a:pPr>
+            <a:r>
+              <a:rPr lang="en-US" sz="1700" b="1" dirty="0">
+                <a:solidFill>
+                  <a:srgbClr val="8CC63F"/>
+                </a:solidFill>
+                <a:latin typeface="Malgun Gothic" pitchFamily="34" charset="0"/>
+                <a:ea typeface="Malgun Gothic" pitchFamily="34" charset="-122"/>
+                <a:cs typeface="Malgun Gothic" pitchFamily="34" charset="-120"/>
+              </a:rPr>
+              <a:t>바깥 for 루프</a:t>
+            </a:r>
+            <a:pPr indent="0" marL="0">
+              <a:buNone/>
+            </a:pPr>
+            <a:r>
+              <a:rPr lang="en-US" sz="1700" dirty="0">
+                <a:solidFill>
+                  <a:srgbClr val="E8EDF2"/>
+                </a:solidFill>
+                <a:latin typeface="Malgun Gothic" pitchFamily="34" charset="0"/>
+                <a:ea typeface="Malgun Gothic" pitchFamily="34" charset="-122"/>
+                <a:cs typeface="Malgun Gothic" pitchFamily="34" charset="-120"/>
+              </a:rPr>
+              <a:t>가 전체 메모리를 128 MB씩 훑습니다. 4 GB이면 약 32번 반복됩니다.</a:t>
             </a:r>
             <a:endParaRPr lang="en-US" sz="1700" dirty="0"/>
-          </a:p>
-        </p:txBody>
-      </p:sp>
-      <p:sp>
-        <p:nvSpPr>
-          <p:cNvPr id="18" name="Text 16"/>
-          <p:cNvSpPr/>
-          <p:nvPr/>
-        </p:nvSpPr>
-        <p:spPr>
-          <a:xfrm>
-            <a:off x="7909560" y="4059936"/>
-            <a:ext cx="3474720" cy="822960"/>
-          </a:xfrm>
-          <a:prstGeom prst="rect">
-            <a:avLst/>
-          </a:prstGeom>
-          <a:noFill/>
-          <a:ln/>
-        </p:spPr>
-        <p:txBody>
-          <a:bodyPr wrap="square" lIns="0" tIns="0" rIns="0" bIns="0" rtlCol="0" anchor="t"/>
-          <a:lstStyle/>
-          <a:p>
-            <a:pPr indent="0" marL="0">
-              <a:buNone/>
-            </a:pPr>
-            <a:r>
-              <a:rPr lang="en-US" sz="1700" b="1" dirty="0">
-                <a:solidFill>
-                  <a:srgbClr val="E8EDF2"/>
-                </a:solidFill>
-                <a:latin typeface="Malgun Gothic" pitchFamily="34" charset="0"/>
-                <a:ea typeface="Malgun Gothic" pitchFamily="34" charset="-122"/>
-                <a:cs typeface="Malgun Gothic" pitchFamily="34" charset="-120"/>
-              </a:rPr>
-              <a:t>경계 검사를 지우면?</a:t>
-            </a:r>
-            <a:endParaRPr lang="en-US" sz="1700" dirty="0"/>
-          </a:p>
-        </p:txBody>
-      </p:sp>
-      <p:sp>
-        <p:nvSpPr>
-          <p:cNvPr id="19" name="Text 17"/>
-          <p:cNvSpPr/>
-          <p:nvPr/>
-        </p:nvSpPr>
-        <p:spPr>
-          <a:xfrm>
-            <a:off x="6565392" y="4937760"/>
-            <a:ext cx="4791456" cy="731520"/>
-          </a:xfrm>
-          <a:prstGeom prst="rect">
-            <a:avLst/>
-          </a:prstGeom>
-          <a:noFill/>
-          <a:ln/>
-        </p:spPr>
-        <p:txBody>
-          <a:bodyPr wrap="square" lIns="0" tIns="0" rIns="0" bIns="0" rtlCol="0" anchor="t"/>
-          <a:lstStyle/>
-          <a:p>
-            <a:pPr indent="0" marL="0">
-              <a:lnSpc>
-                <a:spcPct val="110000"/>
-              </a:lnSpc>
-              <a:buNone/>
-            </a:pPr>
-            <a:r>
-              <a:rPr lang="en-US" sz="1400" dirty="0">
-                <a:solidFill>
-                  <a:srgbClr val="9AA6B2"/>
-                </a:solidFill>
-                <a:latin typeface="Malgun Gothic" pitchFamily="34" charset="0"/>
-                <a:ea typeface="Malgun Gothic" pitchFamily="34" charset="-122"/>
-                <a:cs typeface="Malgun Gothic" pitchFamily="34" charset="-120"/>
-              </a:rPr>
-              <a:t>guard를 없애 illegal memory access 재현</a:t>
-            </a:r>
-            <a:endParaRPr lang="en-US" sz="1400" dirty="0"/>
           </a:p>
         </p:txBody>
       </p:sp>
@@ -3342,7 +3194,7 @@
                 <a:ea typeface="Courier New" pitchFamily="34" charset="-122"/>
                 <a:cs typeface="Courier New" pitchFamily="34" charset="-120"/>
               </a:rPr>
-              <a:t>11</a:t>
+              <a:t>10</a:t>
             </a:r>
             <a:endParaRPr lang="en-US" sz="2200" dirty="0"/>
           </a:p>
@@ -3381,7 +3233,7 @@
                 <a:ea typeface="Malgun Gothic" pitchFamily="34" charset="-122"/>
                 <a:cs typeface="Malgun Gothic" pitchFamily="34" charset="-120"/>
               </a:rPr>
-              <a:t>핵심 정리 &amp; 자주 하는 실수</a:t>
+              <a:t>실습 미리보기 · Lab 1</a:t>
             </a:r>
             <a:endParaRPr lang="en-US" sz="3000" dirty="0"/>
           </a:p>
@@ -3395,12 +3247,12 @@
         </p:nvSpPr>
         <p:spPr>
           <a:xfrm>
-            <a:off x="548640" y="1600200"/>
-            <a:ext cx="5349240" cy="4114800"/>
+            <a:off x="548640" y="1554480"/>
+            <a:ext cx="5303520" cy="1965960"/>
           </a:xfrm>
           <a:prstGeom prst="roundRect">
             <a:avLst>
-              <a:gd name="adj" fmla="val 1778"/>
+              <a:gd name="adj" fmla="val 3721"/>
             </a:avLst>
           </a:prstGeom>
           <a:solidFill>
@@ -3417,154 +3269,136 @@
         </p:nvSpPr>
         <p:spPr>
           <a:xfrm>
-            <a:off x="822960" y="1828800"/>
-            <a:ext cx="4800600" cy="457200"/>
-          </a:xfrm>
-          <a:prstGeom prst="rect">
-            <a:avLst/>
-          </a:prstGeom>
-          <a:noFill/>
-          <a:ln/>
-        </p:spPr>
-        <p:txBody>
-          <a:bodyPr wrap="square" lIns="0" tIns="0" rIns="0" bIns="0" rtlCol="0" anchor="ctr"/>
-          <a:lstStyle/>
-          <a:p>
-            <a:pPr indent="0" marL="0">
-              <a:buNone/>
-            </a:pPr>
-            <a:r>
-              <a:rPr lang="en-US" sz="2000" b="1" dirty="0">
-                <a:solidFill>
-                  <a:srgbClr val="8CC63F"/>
-                </a:solidFill>
-                <a:latin typeface="Malgun Gothic" pitchFamily="34" charset="0"/>
-                <a:ea typeface="Malgun Gothic" pitchFamily="34" charset="-122"/>
-                <a:cs typeface="Malgun Gothic" pitchFamily="34" charset="-120"/>
-              </a:rPr>
-              <a:t>기억할 것</a:t>
-            </a:r>
-            <a:endParaRPr lang="en-US" sz="2000" dirty="0"/>
-          </a:p>
-        </p:txBody>
-      </p:sp>
-      <p:sp>
-        <p:nvSpPr>
-          <p:cNvPr id="6" name="Text 4"/>
-          <p:cNvSpPr/>
-          <p:nvPr/>
-        </p:nvSpPr>
-        <p:spPr>
-          <a:xfrm>
-            <a:off x="822960" y="2423160"/>
-            <a:ext cx="4800600" cy="3108960"/>
-          </a:xfrm>
-          <a:prstGeom prst="rect">
-            <a:avLst/>
-          </a:prstGeom>
-          <a:noFill/>
-          <a:ln/>
-        </p:spPr>
-        <p:txBody>
-          <a:bodyPr wrap="square" lIns="0" tIns="0" rIns="0" bIns="0" rtlCol="0" anchor="t"/>
-          <a:lstStyle/>
-          <a:p>
-            <a:pPr marL="342900" indent="-342900">
-              <a:spcAft>
-                <a:spcPts val="1200"/>
-              </a:spcAft>
-              <a:buSzPct val="100000"/>
-              <a:buChar char="✓"/>
-            </a:pPr>
-            <a:r>
-              <a:rPr lang="en-US" sz="1600" dirty="0">
-                <a:solidFill>
-                  <a:srgbClr val="E8EDF2"/>
-                </a:solidFill>
-                <a:latin typeface="Malgun Gothic" pitchFamily="34" charset="0"/>
-                <a:ea typeface="Malgun Gothic" pitchFamily="34" charset="-122"/>
-                <a:cs typeface="Malgun Gothic" pitchFamily="34" charset="-120"/>
-              </a:rPr>
-              <a:t>커널 = __global__, 반환형 void</a:t>
-            </a:r>
-            <a:endParaRPr lang="en-US" sz="1600" dirty="0"/>
-          </a:p>
-          <a:p>
-            <a:pPr marL="342900" indent="-342900">
-              <a:spcAft>
-                <a:spcPts val="1200"/>
-              </a:spcAft>
-              <a:buSzPct val="100000"/>
-              <a:buChar char="✓"/>
-            </a:pPr>
-            <a:r>
-              <a:rPr lang="en-US" sz="1600" dirty="0">
-                <a:solidFill>
-                  <a:srgbClr val="E8EDF2"/>
-                </a:solidFill>
-                <a:latin typeface="Malgun Gothic" pitchFamily="34" charset="0"/>
-                <a:ea typeface="Malgun Gothic" pitchFamily="34" charset="-122"/>
-                <a:cs typeface="Malgun Gothic" pitchFamily="34" charset="-120"/>
-              </a:rPr>
-              <a:t>&lt;&lt;&lt;블록수, 블록당스레드수&gt;&gt;&gt;</a:t>
-            </a:r>
-            <a:endParaRPr lang="en-US" sz="1600" dirty="0"/>
-          </a:p>
-          <a:p>
-            <a:pPr marL="342900" indent="-342900">
-              <a:spcAft>
-                <a:spcPts val="1200"/>
-              </a:spcAft>
-              <a:buSzPct val="100000"/>
-              <a:buChar char="✓"/>
-            </a:pPr>
-            <a:r>
-              <a:rPr lang="en-US" sz="1600" dirty="0">
-                <a:solidFill>
-                  <a:srgbClr val="E8EDF2"/>
-                </a:solidFill>
-                <a:latin typeface="Malgun Gothic" pitchFamily="34" charset="0"/>
-                <a:ea typeface="Malgun Gothic" pitchFamily="34" charset="-122"/>
-                <a:cs typeface="Malgun Gothic" pitchFamily="34" charset="-120"/>
-              </a:rPr>
-              <a:t>blockIdx로 자기 구역 계산</a:t>
-            </a:r>
-            <a:endParaRPr lang="en-US" sz="1600" dirty="0"/>
-          </a:p>
-          <a:p>
-            <a:pPr marL="342900" indent="-342900">
-              <a:buSzPct val="100000"/>
-              <a:buChar char="✓"/>
-            </a:pPr>
-            <a:r>
-              <a:rPr lang="en-US" sz="1600" dirty="0">
-                <a:solidFill>
-                  <a:srgbClr val="E8EDF2"/>
-                </a:solidFill>
-                <a:latin typeface="Malgun Gothic" pitchFamily="34" charset="0"/>
-                <a:ea typeface="Malgun Gothic" pitchFamily="34" charset="-122"/>
-                <a:cs typeface="Malgun Gothic" pitchFamily="34" charset="-120"/>
-              </a:rPr>
-              <a:t>경계 검사(guard)는 필수</a:t>
-            </a:r>
-            <a:endParaRPr lang="en-US" sz="1600" dirty="0"/>
-          </a:p>
-        </p:txBody>
-      </p:sp>
-      <p:sp>
-        <p:nvSpPr>
-          <p:cNvPr id="7" name="Shape 5"/>
-          <p:cNvSpPr/>
-          <p:nvPr/>
-        </p:nvSpPr>
-        <p:spPr>
-          <a:xfrm>
-            <a:off x="6263640" y="1600200"/>
-            <a:ext cx="5349240" cy="4114800"/>
+            <a:off x="804672" y="1755648"/>
+            <a:ext cx="1188720" cy="502920"/>
           </a:xfrm>
           <a:prstGeom prst="roundRect">
             <a:avLst>
-              <a:gd name="adj" fmla="val 1778"/>
+              <a:gd name="adj" fmla="val 14545"/>
+            </a:avLst>
+          </a:prstGeom>
+          <a:solidFill>
+            <a:srgbClr val="8CC63F"/>
+          </a:solidFill>
+          <a:ln/>
+        </p:spPr>
+        <p:txBody>
+          <a:bodyPr wrap="square" rtlCol="0" anchor="ctr"/>
+          <a:lstStyle/>
+          <a:p>
+            <a:pPr algn="ctr" indent="0" marL="0">
+              <a:buNone/>
+            </a:pPr>
+            <a:r>
+              <a:rPr lang="en-US" sz="1700" b="1" dirty="0">
+                <a:solidFill>
+                  <a:srgbClr val="13161C"/>
+                </a:solidFill>
+                <a:latin typeface="Courier New" pitchFamily="34" charset="0"/>
+                <a:ea typeface="Courier New" pitchFamily="34" charset="-122"/>
+                <a:cs typeface="Courier New" pitchFamily="34" charset="-120"/>
+              </a:rPr>
+              <a:t>Ex 1</a:t>
+            </a:r>
+            <a:endParaRPr lang="en-US" sz="1700" dirty="0"/>
+          </a:p>
+        </p:txBody>
+      </p:sp>
+      <p:sp>
+        <p:nvSpPr>
+          <p:cNvPr id="6" name="Text 4"/>
+          <p:cNvSpPr/>
+          <p:nvPr/>
+        </p:nvSpPr>
+        <p:spPr>
+          <a:xfrm>
+            <a:off x="2148840" y="1773936"/>
+            <a:ext cx="3474720" cy="822960"/>
+          </a:xfrm>
+          <a:prstGeom prst="rect">
+            <a:avLst/>
+          </a:prstGeom>
+          <a:noFill/>
+          <a:ln/>
+        </p:spPr>
+        <p:txBody>
+          <a:bodyPr wrap="square" lIns="0" tIns="0" rIns="0" bIns="0" rtlCol="0" anchor="t"/>
+          <a:lstStyle/>
+          <a:p>
+            <a:pPr indent="0" marL="0">
+              <a:buNone/>
+            </a:pPr>
+            <a:r>
+              <a:rPr lang="en-US" sz="1700" b="1" dirty="0">
+                <a:solidFill>
+                  <a:srgbClr val="E8EDF2"/>
+                </a:solidFill>
+                <a:latin typeface="Malgun Gothic" pitchFamily="34" charset="0"/>
+                <a:ea typeface="Malgun Gothic" pitchFamily="34" charset="-122"/>
+                <a:cs typeface="Malgun Gothic" pitchFamily="34" charset="-120"/>
+              </a:rPr>
+              <a:t>스레드는 자기가 누구인지 안다</a:t>
+            </a:r>
+            <a:endParaRPr lang="en-US" sz="1700" dirty="0"/>
+          </a:p>
+        </p:txBody>
+      </p:sp>
+      <p:sp>
+        <p:nvSpPr>
+          <p:cNvPr id="7" name="Text 5"/>
+          <p:cNvSpPr/>
+          <p:nvPr/>
+        </p:nvSpPr>
+        <p:spPr>
+          <a:xfrm>
+            <a:off x="804672" y="2651760"/>
+            <a:ext cx="4791456" cy="731520"/>
+          </a:xfrm>
+          <a:prstGeom prst="rect">
+            <a:avLst/>
+          </a:prstGeom>
+          <a:noFill/>
+          <a:ln/>
+        </p:spPr>
+        <p:txBody>
+          <a:bodyPr wrap="square" lIns="0" tIns="0" rIns="0" bIns="0" rtlCol="0" anchor="t"/>
+          <a:lstStyle/>
+          <a:p>
+            <a:pPr indent="0" marL="0">
+              <a:lnSpc>
+                <a:spcPct val="110000"/>
+              </a:lnSpc>
+              <a:buNone/>
+            </a:pPr>
+            <a:r>
+              <a:rPr lang="en-US" sz="1400" dirty="0">
+                <a:solidFill>
+                  <a:srgbClr val="9AA6B2"/>
+                </a:solidFill>
+                <a:latin typeface="Malgun Gothic" pitchFamily="34" charset="0"/>
+                <a:ea typeface="Malgun Gothic" pitchFamily="34" charset="-122"/>
+                <a:cs typeface="Malgun Gothic" pitchFamily="34" charset="-120"/>
+              </a:rPr>
+              <a:t>커널 안에서 blockIdx.x를 printf로 출력해 확인</a:t>
+            </a:r>
+            <a:endParaRPr lang="en-US" sz="1400" dirty="0"/>
+          </a:p>
+        </p:txBody>
+      </p:sp>
+      <p:sp>
+        <p:nvSpPr>
+          <p:cNvPr id="8" name="Shape 6"/>
+          <p:cNvSpPr/>
+          <p:nvPr/>
+        </p:nvSpPr>
+        <p:spPr>
+          <a:xfrm>
+            <a:off x="6309360" y="1554480"/>
+            <a:ext cx="5303520" cy="1965960"/>
+          </a:xfrm>
+          <a:prstGeom prst="roundRect">
+            <a:avLst>
+              <a:gd name="adj" fmla="val 3721"/>
             </a:avLst>
           </a:prstGeom>
           <a:solidFill>
@@ -3575,53 +3409,96 @@
       </p:sp>
       <p:sp>
         <p:nvSpPr>
-          <p:cNvPr id="8" name="Text 6"/>
-          <p:cNvSpPr/>
-          <p:nvPr/>
-        </p:nvSpPr>
-        <p:spPr>
-          <a:xfrm>
-            <a:off x="6537960" y="1828800"/>
-            <a:ext cx="4800600" cy="457200"/>
-          </a:xfrm>
-          <a:prstGeom prst="rect">
-            <a:avLst/>
-          </a:prstGeom>
-          <a:noFill/>
-          <a:ln/>
-        </p:spPr>
-        <p:txBody>
-          <a:bodyPr wrap="square" lIns="0" tIns="0" rIns="0" bIns="0" rtlCol="0" anchor="ctr"/>
+          <p:cNvPr id="9" name="Text 7"/>
+          <p:cNvSpPr/>
+          <p:nvPr/>
+        </p:nvSpPr>
+        <p:spPr>
+          <a:xfrm>
+            <a:off x="6565392" y="1755648"/>
+            <a:ext cx="1188720" cy="502920"/>
+          </a:xfrm>
+          <a:prstGeom prst="roundRect">
+            <a:avLst>
+              <a:gd name="adj" fmla="val 14545"/>
+            </a:avLst>
+          </a:prstGeom>
+          <a:solidFill>
+            <a:srgbClr val="4FB0C6"/>
+          </a:solidFill>
+          <a:ln/>
+        </p:spPr>
+        <p:txBody>
+          <a:bodyPr wrap="square" rtlCol="0" anchor="ctr"/>
+          <a:lstStyle/>
+          <a:p>
+            <a:pPr algn="ctr" indent="0" marL="0">
+              <a:buNone/>
+            </a:pPr>
+            <a:r>
+              <a:rPr lang="en-US" sz="1700" b="1" dirty="0">
+                <a:solidFill>
+                  <a:srgbClr val="13161C"/>
+                </a:solidFill>
+                <a:latin typeface="Courier New" pitchFamily="34" charset="0"/>
+                <a:ea typeface="Courier New" pitchFamily="34" charset="-122"/>
+                <a:cs typeface="Courier New" pitchFamily="34" charset="-120"/>
+              </a:rPr>
+              <a:t>Ex 2</a:t>
+            </a:r>
+            <a:endParaRPr lang="en-US" sz="1700" dirty="0"/>
+          </a:p>
+        </p:txBody>
+      </p:sp>
+      <p:sp>
+        <p:nvSpPr>
+          <p:cNvPr id="10" name="Text 8"/>
+          <p:cNvSpPr/>
+          <p:nvPr/>
+        </p:nvSpPr>
+        <p:spPr>
+          <a:xfrm>
+            <a:off x="7909560" y="1773936"/>
+            <a:ext cx="3474720" cy="822960"/>
+          </a:xfrm>
+          <a:prstGeom prst="rect">
+            <a:avLst/>
+          </a:prstGeom>
+          <a:noFill/>
+          <a:ln/>
+        </p:spPr>
+        <p:txBody>
+          <a:bodyPr wrap="square" lIns="0" tIns="0" rIns="0" bIns="0" rtlCol="0" anchor="t"/>
           <a:lstStyle/>
           <a:p>
             <a:pPr indent="0" marL="0">
               <a:buNone/>
             </a:pPr>
             <a:r>
-              <a:rPr lang="en-US" sz="2000" b="1" dirty="0">
-                <a:solidFill>
-                  <a:srgbClr val="E0A458"/>
-                </a:solidFill>
-                <a:latin typeface="Malgun Gothic" pitchFamily="34" charset="0"/>
-                <a:ea typeface="Malgun Gothic" pitchFamily="34" charset="-122"/>
-                <a:cs typeface="Malgun Gothic" pitchFamily="34" charset="-120"/>
-              </a:rPr>
-              <a:t>입문자 함정</a:t>
-            </a:r>
-            <a:endParaRPr lang="en-US" sz="2000" dirty="0"/>
-          </a:p>
-        </p:txBody>
-      </p:sp>
-      <p:sp>
-        <p:nvSpPr>
-          <p:cNvPr id="9" name="Text 7"/>
-          <p:cNvSpPr/>
-          <p:nvPr/>
-        </p:nvSpPr>
-        <p:spPr>
-          <a:xfrm>
-            <a:off x="6537960" y="2423160"/>
-            <a:ext cx="4800600" cy="3108960"/>
+              <a:rPr lang="en-US" sz="1700" b="1" dirty="0">
+                <a:solidFill>
+                  <a:srgbClr val="E8EDF2"/>
+                </a:solidFill>
+                <a:latin typeface="Malgun Gothic" pitchFamily="34" charset="0"/>
+                <a:ea typeface="Malgun Gothic" pitchFamily="34" charset="-122"/>
+                <a:cs typeface="Malgun Gothic" pitchFamily="34" charset="-120"/>
+              </a:rPr>
+              <a:t>그리드 크기를 바꿔보기</a:t>
+            </a:r>
+            <a:endParaRPr lang="en-US" sz="1700" dirty="0"/>
+          </a:p>
+        </p:txBody>
+      </p:sp>
+      <p:sp>
+        <p:nvSpPr>
+          <p:cNvPr id="11" name="Text 9"/>
+          <p:cNvSpPr/>
+          <p:nvPr/>
+        </p:nvSpPr>
+        <p:spPr>
+          <a:xfrm>
+            <a:off x="6565392" y="2651760"/>
+            <a:ext cx="4791456" cy="731520"/>
           </a:xfrm>
           <a:prstGeom prst="rect">
             <a:avLst/>
@@ -3633,15 +3510,118 @@
           <a:bodyPr wrap="square" lIns="0" tIns="0" rIns="0" bIns="0" rtlCol="0" anchor="t"/>
           <a:lstStyle/>
           <a:p>
-            <a:pPr marL="342900" indent="-342900">
-              <a:spcAft>
-                <a:spcPts val="1200"/>
-              </a:spcAft>
-              <a:buSzPct val="100000"/>
-              <a:buChar char="✗"/>
-            </a:pPr>
-            <a:r>
-              <a:rPr lang="en-US" sz="1600" dirty="0">
+            <a:pPr indent="0" marL="0">
+              <a:lnSpc>
+                <a:spcPct val="110000"/>
+              </a:lnSpc>
+              <a:buNone/>
+            </a:pPr>
+            <a:r>
+              <a:rPr lang="en-US" sz="1400" dirty="0">
+                <a:solidFill>
+                  <a:srgbClr val="9AA6B2"/>
+                </a:solidFill>
+                <a:latin typeface="Malgun Gothic" pitchFamily="34" charset="0"/>
+                <a:ea typeface="Malgun Gothic" pitchFamily="34" charset="-122"/>
+                <a:cs typeface="Malgun Gothic" pitchFamily="34" charset="-120"/>
+              </a:rPr>
+              <a:t>GRIDSIZE를 32/128/512로 바꿔 실행 시간 측정</a:t>
+            </a:r>
+            <a:endParaRPr lang="en-US" sz="1400" dirty="0"/>
+          </a:p>
+        </p:txBody>
+      </p:sp>
+      <p:sp>
+        <p:nvSpPr>
+          <p:cNvPr id="12" name="Shape 10"/>
+          <p:cNvSpPr/>
+          <p:nvPr/>
+        </p:nvSpPr>
+        <p:spPr>
+          <a:xfrm>
+            <a:off x="548640" y="3840480"/>
+            <a:ext cx="5303520" cy="1965960"/>
+          </a:xfrm>
+          <a:prstGeom prst="roundRect">
+            <a:avLst>
+              <a:gd name="adj" fmla="val 3721"/>
+            </a:avLst>
+          </a:prstGeom>
+          <a:solidFill>
+            <a:srgbClr val="1E232C"/>
+          </a:solidFill>
+          <a:ln/>
+        </p:spPr>
+      </p:sp>
+      <p:sp>
+        <p:nvSpPr>
+          <p:cNvPr id="13" name="Text 11"/>
+          <p:cNvSpPr/>
+          <p:nvPr/>
+        </p:nvSpPr>
+        <p:spPr>
+          <a:xfrm>
+            <a:off x="804672" y="4041648"/>
+            <a:ext cx="1188720" cy="502920"/>
+          </a:xfrm>
+          <a:prstGeom prst="roundRect">
+            <a:avLst>
+              <a:gd name="adj" fmla="val 14545"/>
+            </a:avLst>
+          </a:prstGeom>
+          <a:solidFill>
+            <a:srgbClr val="8CC63F"/>
+          </a:solidFill>
+          <a:ln/>
+        </p:spPr>
+        <p:txBody>
+          <a:bodyPr wrap="square" rtlCol="0" anchor="ctr"/>
+          <a:lstStyle/>
+          <a:p>
+            <a:pPr algn="ctr" indent="0" marL="0">
+              <a:buNone/>
+            </a:pPr>
+            <a:r>
+              <a:rPr lang="en-US" sz="1700" b="1" dirty="0">
+                <a:solidFill>
+                  <a:srgbClr val="13161C"/>
+                </a:solidFill>
+                <a:latin typeface="Courier New" pitchFamily="34" charset="0"/>
+                <a:ea typeface="Courier New" pitchFamily="34" charset="-122"/>
+                <a:cs typeface="Courier New" pitchFamily="34" charset="-120"/>
+              </a:rPr>
+              <a:t>Ex 3</a:t>
+            </a:r>
+            <a:endParaRPr lang="en-US" sz="1700" dirty="0"/>
+          </a:p>
+        </p:txBody>
+      </p:sp>
+      <p:sp>
+        <p:nvSpPr>
+          <p:cNvPr id="14" name="Text 12"/>
+          <p:cNvSpPr/>
+          <p:nvPr/>
+        </p:nvSpPr>
+        <p:spPr>
+          <a:xfrm>
+            <a:off x="2148840" y="4059936"/>
+            <a:ext cx="3474720" cy="822960"/>
+          </a:xfrm>
+          <a:prstGeom prst="rect">
+            <a:avLst/>
+          </a:prstGeom>
+          <a:noFill/>
+          <a:ln/>
+        </p:spPr>
+        <p:txBody>
+          <a:bodyPr wrap="square" lIns="0" tIns="0" rIns="0" bIns="0" rtlCol="0" anchor="t"/>
+          <a:lstStyle/>
+          <a:p>
+            <a:pPr indent="0" marL="0">
+              <a:buNone/>
+            </a:pPr>
+            <a:r>
+              <a:rPr lang="en-US" sz="1700" b="1" dirty="0">
                 <a:solidFill>
                   <a:srgbClr val="E8EDF2"/>
                 </a:solidFill>
@@ -3649,20 +3629,145 @@
                 <a:ea typeface="Malgun Gothic" pitchFamily="34" charset="-122"/>
                 <a:cs typeface="Malgun Gothic" pitchFamily="34" charset="-120"/>
               </a:rPr>
-              <a:t>커널을 일반 함수처럼 () 로 호출 → &lt;&lt;&lt;&gt;&gt;&gt; 필수</a:t>
-            </a:r>
-            <a:endParaRPr lang="en-US" sz="1600" dirty="0"/>
-          </a:p>
-          <a:p>
-            <a:pPr marL="342900" indent="-342900">
-              <a:spcAft>
-                <a:spcPts val="1200"/>
-              </a:spcAft>
-              <a:buSzPct val="100000"/>
-              <a:buChar char="✗"/>
-            </a:pPr>
-            <a:r>
-              <a:rPr lang="en-US" sz="1600" dirty="0">
+              <a:t>패턴을 내 마음대로</a:t>
+            </a:r>
+            <a:endParaRPr lang="en-US" sz="1700" dirty="0"/>
+          </a:p>
+        </p:txBody>
+      </p:sp>
+      <p:sp>
+        <p:nvSpPr>
+          <p:cNvPr id="15" name="Text 13"/>
+          <p:cNvSpPr/>
+          <p:nvPr/>
+        </p:nvSpPr>
+        <p:spPr>
+          <a:xfrm>
+            <a:off x="804672" y="4937760"/>
+            <a:ext cx="4791456" cy="731520"/>
+          </a:xfrm>
+          <a:prstGeom prst="rect">
+            <a:avLst/>
+          </a:prstGeom>
+          <a:noFill/>
+          <a:ln/>
+        </p:spPr>
+        <p:txBody>
+          <a:bodyPr wrap="square" lIns="0" tIns="0" rIns="0" bIns="0" rtlCol="0" anchor="t"/>
+          <a:lstStyle/>
+          <a:p>
+            <a:pPr indent="0" marL="0">
+              <a:lnSpc>
+                <a:spcPct val="110000"/>
+              </a:lnSpc>
+              <a:buNone/>
+            </a:pPr>
+            <a:r>
+              <a:rPr lang="en-US" sz="1400" dirty="0">
+                <a:solidFill>
+                  <a:srgbClr val="9AA6B2"/>
+                </a:solidFill>
+                <a:latin typeface="Malgun Gothic" pitchFamily="34" charset="0"/>
+                <a:ea typeface="Malgun Gothic" pitchFamily="34" charset="-122"/>
+                <a:cs typeface="Malgun Gothic" pitchFamily="34" charset="-120"/>
+              </a:rPr>
+              <a:t>--pattern 0xDEADBEEF 로 커널 인자 전달 관찰</a:t>
+            </a:r>
+            <a:endParaRPr lang="en-US" sz="1400" dirty="0"/>
+          </a:p>
+        </p:txBody>
+      </p:sp>
+      <p:sp>
+        <p:nvSpPr>
+          <p:cNvPr id="16" name="Shape 14"/>
+          <p:cNvSpPr/>
+          <p:nvPr/>
+        </p:nvSpPr>
+        <p:spPr>
+          <a:xfrm>
+            <a:off x="6309360" y="3840480"/>
+            <a:ext cx="5303520" cy="1965960"/>
+          </a:xfrm>
+          <a:prstGeom prst="roundRect">
+            <a:avLst>
+              <a:gd name="adj" fmla="val 3721"/>
+            </a:avLst>
+          </a:prstGeom>
+          <a:solidFill>
+            <a:srgbClr val="1E232C"/>
+          </a:solidFill>
+          <a:ln/>
+        </p:spPr>
+      </p:sp>
+      <p:sp>
+        <p:nvSpPr>
+          <p:cNvPr id="17" name="Text 15"/>
+          <p:cNvSpPr/>
+          <p:nvPr/>
+        </p:nvSpPr>
+        <p:spPr>
+          <a:xfrm>
+            <a:off x="6565392" y="4041648"/>
+            <a:ext cx="1188720" cy="502920"/>
+          </a:xfrm>
+          <a:prstGeom prst="roundRect">
+            <a:avLst>
+              <a:gd name="adj" fmla="val 14545"/>
+            </a:avLst>
+          </a:prstGeom>
+          <a:solidFill>
+            <a:srgbClr val="E0A458"/>
+          </a:solidFill>
+          <a:ln/>
+        </p:spPr>
+        <p:txBody>
+          <a:bodyPr wrap="square" rtlCol="0" anchor="ctr"/>
+          <a:lstStyle/>
+          <a:p>
+            <a:pPr algn="ctr" indent="0" marL="0">
+              <a:buNone/>
+            </a:pPr>
+            <a:r>
+              <a:rPr lang="en-US" sz="1700" b="1" dirty="0">
+                <a:solidFill>
+                  <a:srgbClr val="13161C"/>
+                </a:solidFill>
+                <a:latin typeface="Courier New" pitchFamily="34" charset="0"/>
+                <a:ea typeface="Courier New" pitchFamily="34" charset="-122"/>
+                <a:cs typeface="Courier New" pitchFamily="34" charset="-120"/>
+              </a:rPr>
+              <a:t>Ex 4</a:t>
+            </a:r>
+            <a:endParaRPr lang="en-US" sz="1700" dirty="0"/>
+          </a:p>
+        </p:txBody>
+      </p:sp>
+      <p:sp>
+        <p:nvSpPr>
+          <p:cNvPr id="18" name="Text 16"/>
+          <p:cNvSpPr/>
+          <p:nvPr/>
+        </p:nvSpPr>
+        <p:spPr>
+          <a:xfrm>
+            <a:off x="7909560" y="4059936"/>
+            <a:ext cx="3474720" cy="822960"/>
+          </a:xfrm>
+          <a:prstGeom prst="rect">
+            <a:avLst/>
+          </a:prstGeom>
+          <a:noFill/>
+          <a:ln/>
+        </p:spPr>
+        <p:txBody>
+          <a:bodyPr wrap="square" lIns="0" tIns="0" rIns="0" bIns="0" rtlCol="0" anchor="t"/>
+          <a:lstStyle/>
+          <a:p>
+            <a:pPr indent="0" marL="0">
+              <a:buNone/>
+            </a:pPr>
+            <a:r>
+              <a:rPr lang="en-US" sz="1700" b="1" dirty="0">
                 <a:solidFill>
                   <a:srgbClr val="E8EDF2"/>
                 </a:solidFill>
@@ -3670,48 +3775,51 @@
                 <a:ea typeface="Malgun Gothic" pitchFamily="34" charset="-122"/>
                 <a:cs typeface="Malgun Gothic" pitchFamily="34" charset="-120"/>
               </a:rPr>
-              <a:t>커널에서 값을 return 하려 함 → void, 결과는 메모리로</a:t>
-            </a:r>
-            <a:endParaRPr lang="en-US" sz="1600" dirty="0"/>
-          </a:p>
-          <a:p>
-            <a:pPr marL="342900" indent="-342900">
-              <a:spcAft>
-                <a:spcPts val="1200"/>
-              </a:spcAft>
-              <a:buSzPct val="100000"/>
-              <a:buChar char="✗"/>
-            </a:pPr>
-            <a:r>
-              <a:rPr lang="en-US" sz="1600" dirty="0">
-                <a:solidFill>
-                  <a:srgbClr val="E8EDF2"/>
-                </a:solidFill>
-                <a:latin typeface="Malgun Gothic" pitchFamily="34" charset="0"/>
-                <a:ea typeface="Malgun Gothic" pitchFamily="34" charset="-122"/>
-                <a:cs typeface="Malgun Gothic" pitchFamily="34" charset="-120"/>
-              </a:rPr>
-              <a:t>경계 검사 생략 → 이웃 메모리 침범</a:t>
-            </a:r>
-            <a:endParaRPr lang="en-US" sz="1600" dirty="0"/>
-          </a:p>
-          <a:p>
-            <a:pPr marL="342900" indent="-342900">
-              <a:buSzPct val="100000"/>
-              <a:buChar char="✗"/>
-            </a:pPr>
-            <a:r>
-              <a:rPr lang="en-US" sz="1600" dirty="0">
-                <a:solidFill>
-                  <a:srgbClr val="E8EDF2"/>
-                </a:solidFill>
-                <a:latin typeface="Malgun Gothic" pitchFamily="34" charset="0"/>
-                <a:ea typeface="Malgun Gothic" pitchFamily="34" charset="-122"/>
-                <a:cs typeface="Malgun Gothic" pitchFamily="34" charset="-120"/>
-              </a:rPr>
-              <a:t>호스트 포인터를 커널에 그대로 전달 → 디바이스 포인터여야</a:t>
-            </a:r>
-            <a:endParaRPr lang="en-US" sz="1600" dirty="0"/>
+              <a:t>경계 검사를 지우면?</a:t>
+            </a:r>
+            <a:endParaRPr lang="en-US" sz="1700" dirty="0"/>
+          </a:p>
+        </p:txBody>
+      </p:sp>
+      <p:sp>
+        <p:nvSpPr>
+          <p:cNvPr id="19" name="Text 17"/>
+          <p:cNvSpPr/>
+          <p:nvPr/>
+        </p:nvSpPr>
+        <p:spPr>
+          <a:xfrm>
+            <a:off x="6565392" y="4937760"/>
+            <a:ext cx="4791456" cy="731520"/>
+          </a:xfrm>
+          <a:prstGeom prst="rect">
+            <a:avLst/>
+          </a:prstGeom>
+          <a:noFill/>
+          <a:ln/>
+        </p:spPr>
+        <p:txBody>
+          <a:bodyPr wrap="square" lIns="0" tIns="0" rIns="0" bIns="0" rtlCol="0" anchor="t"/>
+          <a:lstStyle/>
+          <a:p>
+            <a:pPr indent="0" marL="0">
+              <a:lnSpc>
+                <a:spcPct val="110000"/>
+              </a:lnSpc>
+              <a:buNone/>
+            </a:pPr>
+            <a:r>
+              <a:rPr lang="en-US" sz="1400" dirty="0">
+                <a:solidFill>
+                  <a:srgbClr val="9AA6B2"/>
+                </a:solidFill>
+                <a:latin typeface="Malgun Gothic" pitchFamily="34" charset="0"/>
+                <a:ea typeface="Malgun Gothic" pitchFamily="34" charset="-122"/>
+                <a:cs typeface="Malgun Gothic" pitchFamily="34" charset="-120"/>
+              </a:rPr>
+              <a:t>guard를 없애 illegal memory access 재현</a:t>
+            </a:r>
+            <a:endParaRPr lang="en-US" sz="1400" dirty="0"/>
           </a:p>
         </p:txBody>
       </p:sp>
@@ -3755,6 +3863,448 @@
         </p:nvSpPr>
         <p:spPr>
           <a:xfrm>
+            <a:off x="548640" y="411480"/>
+            <a:ext cx="640080" cy="640080"/>
+          </a:xfrm>
+          <a:prstGeom prst="roundRect">
+            <a:avLst>
+              <a:gd name="adj" fmla="val 12857"/>
+            </a:avLst>
+          </a:prstGeom>
+          <a:solidFill>
+            <a:srgbClr val="8CC63F"/>
+          </a:solidFill>
+          <a:ln/>
+        </p:spPr>
+        <p:txBody>
+          <a:bodyPr wrap="square" rtlCol="0" anchor="ctr"/>
+          <a:lstStyle/>
+          <a:p>
+            <a:pPr algn="ctr" indent="0" marL="0">
+              <a:buNone/>
+            </a:pPr>
+            <a:r>
+              <a:rPr lang="en-US" sz="2200" b="1" dirty="0">
+                <a:solidFill>
+                  <a:srgbClr val="13161C"/>
+                </a:solidFill>
+                <a:latin typeface="Courier New" pitchFamily="34" charset="0"/>
+                <a:ea typeface="Courier New" pitchFamily="34" charset="-122"/>
+                <a:cs typeface="Courier New" pitchFamily="34" charset="-120"/>
+              </a:rPr>
+              <a:t>11</a:t>
+            </a:r>
+            <a:endParaRPr lang="en-US" sz="2200" dirty="0"/>
+          </a:p>
+        </p:txBody>
+      </p:sp>
+      <p:sp>
+        <p:nvSpPr>
+          <p:cNvPr id="3" name="Text 1"/>
+          <p:cNvSpPr/>
+          <p:nvPr/>
+        </p:nvSpPr>
+        <p:spPr>
+          <a:xfrm>
+            <a:off x="1325880" y="384048"/>
+            <a:ext cx="10287000" cy="694944"/>
+          </a:xfrm>
+          <a:prstGeom prst="rect">
+            <a:avLst/>
+          </a:prstGeom>
+          <a:noFill/>
+          <a:ln/>
+        </p:spPr>
+        <p:txBody>
+          <a:bodyPr wrap="square" lIns="0" tIns="0" rIns="0" bIns="0" rtlCol="0" anchor="ctr"/>
+          <a:lstStyle/>
+          <a:p>
+            <a:pPr algn="l" indent="0" marL="0">
+              <a:buNone/>
+            </a:pPr>
+            <a:r>
+              <a:rPr lang="en-US" sz="3000" b="1" dirty="0">
+                <a:solidFill>
+                  <a:srgbClr val="E8EDF2"/>
+                </a:solidFill>
+                <a:latin typeface="Malgun Gothic" pitchFamily="34" charset="0"/>
+                <a:ea typeface="Malgun Gothic" pitchFamily="34" charset="-122"/>
+                <a:cs typeface="Malgun Gothic" pitchFamily="34" charset="-120"/>
+              </a:rPr>
+              <a:t>핵심 정리 &amp; 자주 하는 실수</a:t>
+            </a:r>
+            <a:endParaRPr lang="en-US" sz="3000" dirty="0"/>
+          </a:p>
+        </p:txBody>
+      </p:sp>
+      <p:sp>
+        <p:nvSpPr>
+          <p:cNvPr id="4" name="Shape 2"/>
+          <p:cNvSpPr/>
+          <p:nvPr/>
+        </p:nvSpPr>
+        <p:spPr>
+          <a:xfrm>
+            <a:off x="548640" y="1600200"/>
+            <a:ext cx="5349240" cy="4114800"/>
+          </a:xfrm>
+          <a:prstGeom prst="roundRect">
+            <a:avLst>
+              <a:gd name="adj" fmla="val 1778"/>
+            </a:avLst>
+          </a:prstGeom>
+          <a:solidFill>
+            <a:srgbClr val="1E232C"/>
+          </a:solidFill>
+          <a:ln/>
+        </p:spPr>
+      </p:sp>
+      <p:sp>
+        <p:nvSpPr>
+          <p:cNvPr id="5" name="Text 3"/>
+          <p:cNvSpPr/>
+          <p:nvPr/>
+        </p:nvSpPr>
+        <p:spPr>
+          <a:xfrm>
+            <a:off x="822960" y="1828800"/>
+            <a:ext cx="4800600" cy="457200"/>
+          </a:xfrm>
+          <a:prstGeom prst="rect">
+            <a:avLst/>
+          </a:prstGeom>
+          <a:noFill/>
+          <a:ln/>
+        </p:spPr>
+        <p:txBody>
+          <a:bodyPr wrap="square" lIns="0" tIns="0" rIns="0" bIns="0" rtlCol="0" anchor="ctr"/>
+          <a:lstStyle/>
+          <a:p>
+            <a:pPr indent="0" marL="0">
+              <a:buNone/>
+            </a:pPr>
+            <a:r>
+              <a:rPr lang="en-US" sz="2000" b="1" dirty="0">
+                <a:solidFill>
+                  <a:srgbClr val="8CC63F"/>
+                </a:solidFill>
+                <a:latin typeface="Malgun Gothic" pitchFamily="34" charset="0"/>
+                <a:ea typeface="Malgun Gothic" pitchFamily="34" charset="-122"/>
+                <a:cs typeface="Malgun Gothic" pitchFamily="34" charset="-120"/>
+              </a:rPr>
+              <a:t>기억할 것</a:t>
+            </a:r>
+            <a:endParaRPr lang="en-US" sz="2000" dirty="0"/>
+          </a:p>
+        </p:txBody>
+      </p:sp>
+      <p:sp>
+        <p:nvSpPr>
+          <p:cNvPr id="6" name="Text 4"/>
+          <p:cNvSpPr/>
+          <p:nvPr/>
+        </p:nvSpPr>
+        <p:spPr>
+          <a:xfrm>
+            <a:off x="822960" y="2423160"/>
+            <a:ext cx="4800600" cy="3108960"/>
+          </a:xfrm>
+          <a:prstGeom prst="rect">
+            <a:avLst/>
+          </a:prstGeom>
+          <a:noFill/>
+          <a:ln/>
+        </p:spPr>
+        <p:txBody>
+          <a:bodyPr wrap="square" lIns="0" tIns="0" rIns="0" bIns="0" rtlCol="0" anchor="t"/>
+          <a:lstStyle/>
+          <a:p>
+            <a:pPr marL="342900" indent="-342900">
+              <a:spcAft>
+                <a:spcPts val="1200"/>
+              </a:spcAft>
+              <a:buSzPct val="100000"/>
+              <a:buChar char="✓"/>
+            </a:pPr>
+            <a:r>
+              <a:rPr lang="en-US" sz="1600" dirty="0">
+                <a:solidFill>
+                  <a:srgbClr val="E8EDF2"/>
+                </a:solidFill>
+                <a:latin typeface="Malgun Gothic" pitchFamily="34" charset="0"/>
+                <a:ea typeface="Malgun Gothic" pitchFamily="34" charset="-122"/>
+                <a:cs typeface="Malgun Gothic" pitchFamily="34" charset="-120"/>
+              </a:rPr>
+              <a:t>커널 = __global__, 반환형 void</a:t>
+            </a:r>
+            <a:endParaRPr lang="en-US" sz="1600" dirty="0"/>
+          </a:p>
+          <a:p>
+            <a:pPr marL="342900" indent="-342900">
+              <a:spcAft>
+                <a:spcPts val="1200"/>
+              </a:spcAft>
+              <a:buSzPct val="100000"/>
+              <a:buChar char="✓"/>
+            </a:pPr>
+            <a:r>
+              <a:rPr lang="en-US" sz="1600" dirty="0">
+                <a:solidFill>
+                  <a:srgbClr val="E8EDF2"/>
+                </a:solidFill>
+                <a:latin typeface="Malgun Gothic" pitchFamily="34" charset="0"/>
+                <a:ea typeface="Malgun Gothic" pitchFamily="34" charset="-122"/>
+                <a:cs typeface="Malgun Gothic" pitchFamily="34" charset="-120"/>
+              </a:rPr>
+              <a:t>&lt;&lt;&lt;블록수, 블록당스레드수&gt;&gt;&gt;</a:t>
+            </a:r>
+            <a:endParaRPr lang="en-US" sz="1600" dirty="0"/>
+          </a:p>
+          <a:p>
+            <a:pPr marL="342900" indent="-342900">
+              <a:spcAft>
+                <a:spcPts val="1200"/>
+              </a:spcAft>
+              <a:buSzPct val="100000"/>
+              <a:buChar char="✓"/>
+            </a:pPr>
+            <a:r>
+              <a:rPr lang="en-US" sz="1600" dirty="0">
+                <a:solidFill>
+                  <a:srgbClr val="E8EDF2"/>
+                </a:solidFill>
+                <a:latin typeface="Malgun Gothic" pitchFamily="34" charset="0"/>
+                <a:ea typeface="Malgun Gothic" pitchFamily="34" charset="-122"/>
+                <a:cs typeface="Malgun Gothic" pitchFamily="34" charset="-120"/>
+              </a:rPr>
+              <a:t>blockIdx로 자기 구역 계산</a:t>
+            </a:r>
+            <a:endParaRPr lang="en-US" sz="1600" dirty="0"/>
+          </a:p>
+          <a:p>
+            <a:pPr marL="342900" indent="-342900">
+              <a:buSzPct val="100000"/>
+              <a:buChar char="✓"/>
+            </a:pPr>
+            <a:r>
+              <a:rPr lang="en-US" sz="1600" dirty="0">
+                <a:solidFill>
+                  <a:srgbClr val="E8EDF2"/>
+                </a:solidFill>
+                <a:latin typeface="Malgun Gothic" pitchFamily="34" charset="0"/>
+                <a:ea typeface="Malgun Gothic" pitchFamily="34" charset="-122"/>
+                <a:cs typeface="Malgun Gothic" pitchFamily="34" charset="-120"/>
+              </a:rPr>
+              <a:t>경계 검사(guard)는 필수</a:t>
+            </a:r>
+            <a:endParaRPr lang="en-US" sz="1600" dirty="0"/>
+          </a:p>
+        </p:txBody>
+      </p:sp>
+      <p:sp>
+        <p:nvSpPr>
+          <p:cNvPr id="7" name="Shape 5"/>
+          <p:cNvSpPr/>
+          <p:nvPr/>
+        </p:nvSpPr>
+        <p:spPr>
+          <a:xfrm>
+            <a:off x="6263640" y="1600200"/>
+            <a:ext cx="5349240" cy="4114800"/>
+          </a:xfrm>
+          <a:prstGeom prst="roundRect">
+            <a:avLst>
+              <a:gd name="adj" fmla="val 1778"/>
+            </a:avLst>
+          </a:prstGeom>
+          <a:solidFill>
+            <a:srgbClr val="1E232C"/>
+          </a:solidFill>
+          <a:ln/>
+        </p:spPr>
+      </p:sp>
+      <p:sp>
+        <p:nvSpPr>
+          <p:cNvPr id="8" name="Text 6"/>
+          <p:cNvSpPr/>
+          <p:nvPr/>
+        </p:nvSpPr>
+        <p:spPr>
+          <a:xfrm>
+            <a:off x="6537960" y="1828800"/>
+            <a:ext cx="4800600" cy="457200"/>
+          </a:xfrm>
+          <a:prstGeom prst="rect">
+            <a:avLst/>
+          </a:prstGeom>
+          <a:noFill/>
+          <a:ln/>
+        </p:spPr>
+        <p:txBody>
+          <a:bodyPr wrap="square" lIns="0" tIns="0" rIns="0" bIns="0" rtlCol="0" anchor="ctr"/>
+          <a:lstStyle/>
+          <a:p>
+            <a:pPr indent="0" marL="0">
+              <a:buNone/>
+            </a:pPr>
+            <a:r>
+              <a:rPr lang="en-US" sz="2000" b="1" dirty="0">
+                <a:solidFill>
+                  <a:srgbClr val="E0A458"/>
+                </a:solidFill>
+                <a:latin typeface="Malgun Gothic" pitchFamily="34" charset="0"/>
+                <a:ea typeface="Malgun Gothic" pitchFamily="34" charset="-122"/>
+                <a:cs typeface="Malgun Gothic" pitchFamily="34" charset="-120"/>
+              </a:rPr>
+              <a:t>입문자 함정</a:t>
+            </a:r>
+            <a:endParaRPr lang="en-US" sz="2000" dirty="0"/>
+          </a:p>
+        </p:txBody>
+      </p:sp>
+      <p:sp>
+        <p:nvSpPr>
+          <p:cNvPr id="9" name="Text 7"/>
+          <p:cNvSpPr/>
+          <p:nvPr/>
+        </p:nvSpPr>
+        <p:spPr>
+          <a:xfrm>
+            <a:off x="6537960" y="2423160"/>
+            <a:ext cx="4800600" cy="3108960"/>
+          </a:xfrm>
+          <a:prstGeom prst="rect">
+            <a:avLst/>
+          </a:prstGeom>
+          <a:noFill/>
+          <a:ln/>
+        </p:spPr>
+        <p:txBody>
+          <a:bodyPr wrap="square" lIns="0" tIns="0" rIns="0" bIns="0" rtlCol="0" anchor="t"/>
+          <a:lstStyle/>
+          <a:p>
+            <a:pPr marL="342900" indent="-342900">
+              <a:spcAft>
+                <a:spcPts val="1200"/>
+              </a:spcAft>
+              <a:buSzPct val="100000"/>
+              <a:buChar char="✗"/>
+            </a:pPr>
+            <a:r>
+              <a:rPr lang="en-US" sz="1600" dirty="0">
+                <a:solidFill>
+                  <a:srgbClr val="E8EDF2"/>
+                </a:solidFill>
+                <a:latin typeface="Malgun Gothic" pitchFamily="34" charset="0"/>
+                <a:ea typeface="Malgun Gothic" pitchFamily="34" charset="-122"/>
+                <a:cs typeface="Malgun Gothic" pitchFamily="34" charset="-120"/>
+              </a:rPr>
+              <a:t>커널을 일반 함수처럼 () 로 호출 → &lt;&lt;&lt;&gt;&gt;&gt; 필수</a:t>
+            </a:r>
+            <a:endParaRPr lang="en-US" sz="1600" dirty="0"/>
+          </a:p>
+          <a:p>
+            <a:pPr marL="342900" indent="-342900">
+              <a:spcAft>
+                <a:spcPts val="1200"/>
+              </a:spcAft>
+              <a:buSzPct val="100000"/>
+              <a:buChar char="✗"/>
+            </a:pPr>
+            <a:r>
+              <a:rPr lang="en-US" sz="1600" dirty="0">
+                <a:solidFill>
+                  <a:srgbClr val="E8EDF2"/>
+                </a:solidFill>
+                <a:latin typeface="Malgun Gothic" pitchFamily="34" charset="0"/>
+                <a:ea typeface="Malgun Gothic" pitchFamily="34" charset="-122"/>
+                <a:cs typeface="Malgun Gothic" pitchFamily="34" charset="-120"/>
+              </a:rPr>
+              <a:t>커널에서 값을 return 하려 함 → void, 결과는 메모리로</a:t>
+            </a:r>
+            <a:endParaRPr lang="en-US" sz="1600" dirty="0"/>
+          </a:p>
+          <a:p>
+            <a:pPr marL="342900" indent="-342900">
+              <a:spcAft>
+                <a:spcPts val="1200"/>
+              </a:spcAft>
+              <a:buSzPct val="100000"/>
+              <a:buChar char="✗"/>
+            </a:pPr>
+            <a:r>
+              <a:rPr lang="en-US" sz="1600" dirty="0">
+                <a:solidFill>
+                  <a:srgbClr val="E8EDF2"/>
+                </a:solidFill>
+                <a:latin typeface="Malgun Gothic" pitchFamily="34" charset="0"/>
+                <a:ea typeface="Malgun Gothic" pitchFamily="34" charset="-122"/>
+                <a:cs typeface="Malgun Gothic" pitchFamily="34" charset="-120"/>
+              </a:rPr>
+              <a:t>경계 검사 생략 → 이웃 메모리 침범</a:t>
+            </a:r>
+            <a:endParaRPr lang="en-US" sz="1600" dirty="0"/>
+          </a:p>
+          <a:p>
+            <a:pPr marL="342900" indent="-342900">
+              <a:buSzPct val="100000"/>
+              <a:buChar char="✗"/>
+            </a:pPr>
+            <a:r>
+              <a:rPr lang="en-US" sz="1600" dirty="0">
+                <a:solidFill>
+                  <a:srgbClr val="E8EDF2"/>
+                </a:solidFill>
+                <a:latin typeface="Malgun Gothic" pitchFamily="34" charset="0"/>
+                <a:ea typeface="Malgun Gothic" pitchFamily="34" charset="-122"/>
+                <a:cs typeface="Malgun Gothic" pitchFamily="34" charset="-120"/>
+              </a:rPr>
+              <a:t>호스트 포인터를 커널에 그대로 전달 → 디바이스 포인터여야</a:t>
+            </a:r>
+            <a:endParaRPr lang="en-US" sz="1600" dirty="0"/>
+          </a:p>
+        </p:txBody>
+      </p:sp>
+    </p:spTree>
+  </p:cSld>
+  <p:clrMapOvr>
+    <a:masterClrMapping/>
+  </p:clrMapOvr>
+</p:sld>
+</file>
+
+<file path=ppt/slides/slide14.xml><?xml version="1.0" encoding="utf-8"?>
+<p:sld xmlns:a="http://schemas.openxmlformats.org/drawingml/2006/main" xmlns:r="http://schemas.openxmlformats.org/officeDocument/2006/relationships" xmlns:p="http://schemas.openxmlformats.org/presentationml/2006/main">
+  <p:cSld name="Slide 14">
+    <p:bg>
+      <p:bgPr>
+        <a:solidFill>
+          <a:srgbClr val="13161C"/>
+        </a:solidFill>
+      </p:bgPr>
+    </p:bg>
+    <p:spTree>
+      <p:nvGrpSpPr>
+        <p:cNvPr id="1" name=""/>
+        <p:cNvGrpSpPr/>
+        <p:nvPr/>
+      </p:nvGrpSpPr>
+      <p:grpSpPr>
+        <a:xfrm>
+          <a:off x="0" y="0"/>
+          <a:ext cx="0" cy="0"/>
+          <a:chOff x="0" y="0"/>
+          <a:chExt cx="0" cy="0"/>
+        </a:xfrm>
+      </p:grpSpPr>
+      <p:sp>
+        <p:nvSpPr>
+          <p:cNvPr id="2" name="Text 0"/>
+          <p:cNvSpPr/>
+          <p:nvPr/>
+        </p:nvSpPr>
+        <p:spPr>
+          <a:xfrm>
             <a:off x="548640" y="1463040"/>
             <a:ext cx="9144000" cy="457200"/>
           </a:xfrm>
@@ -7526,7 +8076,7 @@
                 <a:ea typeface="Courier New" pitchFamily="34" charset="-122"/>
                 <a:cs typeface="Courier New" pitchFamily="34" charset="-120"/>
               </a:rPr>
-              <a:t>5</a:t>
+              <a:t>4</a:t>
             </a:r>
             <a:endParaRPr lang="en-US" sz="2200" dirty="0"/>
           </a:p>
@@ -7565,7 +8115,7 @@
                 <a:ea typeface="Malgun Gothic" pitchFamily="34" charset="-122"/>
                 <a:cs typeface="Malgun Gothic" pitchFamily="34" charset="-120"/>
               </a:rPr>
-              <a:t>내장 변수 · 스레드의 신분증</a:t>
+              <a:t>실행 계층 구조 · Grid → Block → Thread</a:t>
             </a:r>
             <a:endParaRPr lang="en-US" sz="3000" dirty="0"/>
           </a:p>
@@ -7579,8 +8129,8 @@
         </p:nvSpPr>
         <p:spPr>
           <a:xfrm>
-            <a:off x="548640" y="1463040"/>
-            <a:ext cx="11064240" cy="457200"/>
+            <a:off x="548640" y="1371600"/>
+            <a:ext cx="11064240" cy="411480"/>
           </a:xfrm>
           <a:prstGeom prst="rect">
             <a:avLst/>
@@ -7596,7 +8146,7 @@
               <a:buNone/>
             </a:pPr>
             <a:r>
-              <a:rPr lang="en-US" sz="1600" dirty="0">
+              <a:rPr lang="en-US" sz="1500" dirty="0">
                 <a:solidFill>
                   <a:srgbClr val="9AA6B2"/>
                 </a:solidFill>
@@ -7604,9 +8154,9 @@
                 <a:ea typeface="Malgun Gothic" pitchFamily="34" charset="-122"/>
                 <a:cs typeface="Malgun Gothic" pitchFamily="34" charset="-120"/>
               </a:rPr>
-              <a:t>커널 안에서 자동으로 주어지는 값들. 이것으로 '내가 몇 번째 스레드인지'를 계산합니다.</a:t>
-            </a:r>
-            <a:endParaRPr lang="en-US" sz="1600" dirty="0"/>
+              <a:t>커널을 실행하면 스레드가 3단 계층으로 조직됩니다. 큰 격자(그리드) 안에 블록, 블록 안에 스레드.</a:t>
+            </a:r>
+            <a:endParaRPr lang="en-US" sz="1500" dirty="0"/>
           </a:p>
         </p:txBody>
       </p:sp>
@@ -7618,18 +8168,23 @@
         </p:nvSpPr>
         <p:spPr>
           <a:xfrm>
-            <a:off x="548640" y="2103120"/>
-            <a:ext cx="11064240" cy="841248"/>
+            <a:off x="548640" y="1783080"/>
+            <a:ext cx="6492240" cy="3977640"/>
           </a:xfrm>
           <a:prstGeom prst="roundRect">
             <a:avLst>
-              <a:gd name="adj" fmla="val 7609"/>
+              <a:gd name="adj" fmla="val 1379"/>
             </a:avLst>
           </a:prstGeom>
           <a:solidFill>
             <a:srgbClr val="1E232C"/>
           </a:solidFill>
-          <a:ln/>
+          <a:ln w="19050">
+            <a:solidFill>
+              <a:srgbClr val="8CC63F"/>
+            </a:solidFill>
+            <a:prstDash val="solid"/>
+          </a:ln>
         </p:spPr>
       </p:sp>
       <p:sp>
@@ -7640,8 +8195,8 @@
         </p:nvSpPr>
         <p:spPr>
           <a:xfrm>
-            <a:off x="822960" y="2212848"/>
-            <a:ext cx="2743200" cy="621792"/>
+            <a:off x="777240" y="1892808"/>
+            <a:ext cx="6035040" cy="365760"/>
           </a:xfrm>
           <a:prstGeom prst="rect">
             <a:avLst/>
@@ -7657,91 +8212,1104 @@
               <a:buNone/>
             </a:pPr>
             <a:r>
-              <a:rPr lang="en-US" sz="2000" b="1" dirty="0">
+              <a:rPr lang="en-US" sz="1400" b="1" dirty="0">
                 <a:solidFill>
                   <a:srgbClr val="8CC63F"/>
+                </a:solidFill>
+                <a:latin typeface="Malgun Gothic" pitchFamily="34" charset="0"/>
+                <a:ea typeface="Malgun Gothic" pitchFamily="34" charset="-122"/>
+                <a:cs typeface="Malgun Gothic" pitchFamily="34" charset="-120"/>
+              </a:rPr>
+              <a:t>그리드(Grid)  ·  gridDim.x = 128</a:t>
+            </a:r>
+            <a:endParaRPr lang="en-US" sz="1400" dirty="0"/>
+          </a:p>
+        </p:txBody>
+      </p:sp>
+      <p:sp>
+        <p:nvSpPr>
+          <p:cNvPr id="7" name="Shape 5"/>
+          <p:cNvSpPr/>
+          <p:nvPr/>
+        </p:nvSpPr>
+        <p:spPr>
+          <a:xfrm>
+            <a:off x="822960" y="2377440"/>
+            <a:ext cx="1783080" cy="822960"/>
+          </a:xfrm>
+          <a:prstGeom prst="roundRect">
+            <a:avLst>
+              <a:gd name="adj" fmla="val 5556"/>
+            </a:avLst>
+          </a:prstGeom>
+          <a:solidFill>
+            <a:srgbClr val="0E1116"/>
+          </a:solidFill>
+          <a:ln w="12700">
+            <a:solidFill>
+              <a:srgbClr val="2C3440"/>
+            </a:solidFill>
+            <a:prstDash val="solid"/>
+          </a:ln>
+        </p:spPr>
+      </p:sp>
+      <p:sp>
+        <p:nvSpPr>
+          <p:cNvPr id="8" name="Text 6"/>
+          <p:cNvSpPr/>
+          <p:nvPr/>
+        </p:nvSpPr>
+        <p:spPr>
+          <a:xfrm>
+            <a:off x="822960" y="2505456"/>
+            <a:ext cx="1783080" cy="292608"/>
+          </a:xfrm>
+          <a:prstGeom prst="rect">
+            <a:avLst/>
+          </a:prstGeom>
+          <a:noFill/>
+          <a:ln/>
+        </p:spPr>
+        <p:txBody>
+          <a:bodyPr wrap="square" lIns="0" tIns="0" rIns="0" bIns="0" rtlCol="0" anchor="ctr"/>
+          <a:lstStyle/>
+          <a:p>
+            <a:pPr algn="ctr" indent="0" marL="0">
+              <a:buNone/>
+            </a:pPr>
+            <a:r>
+              <a:rPr lang="en-US" sz="1200" b="1" dirty="0">
+                <a:solidFill>
+                  <a:srgbClr val="E8EDF2"/>
+                </a:solidFill>
+                <a:latin typeface="Malgun Gothic" pitchFamily="34" charset="0"/>
+                <a:ea typeface="Malgun Gothic" pitchFamily="34" charset="-122"/>
+                <a:cs typeface="Malgun Gothic" pitchFamily="34" charset="-120"/>
+              </a:rPr>
+              <a:t>블록 0</a:t>
+            </a:r>
+            <a:endParaRPr lang="en-US" sz="1200" dirty="0"/>
+          </a:p>
+        </p:txBody>
+      </p:sp>
+      <p:sp>
+        <p:nvSpPr>
+          <p:cNvPr id="9" name="Text 7"/>
+          <p:cNvSpPr/>
+          <p:nvPr/>
+        </p:nvSpPr>
+        <p:spPr>
+          <a:xfrm>
+            <a:off x="822960" y="2798064"/>
+            <a:ext cx="1783080" cy="274320"/>
+          </a:xfrm>
+          <a:prstGeom prst="rect">
+            <a:avLst/>
+          </a:prstGeom>
+          <a:noFill/>
+          <a:ln/>
+        </p:spPr>
+        <p:txBody>
+          <a:bodyPr wrap="square" lIns="0" tIns="0" rIns="0" bIns="0" rtlCol="0" anchor="ctr"/>
+          <a:lstStyle/>
+          <a:p>
+            <a:pPr algn="ctr" indent="0" marL="0">
+              <a:buNone/>
+            </a:pPr>
+            <a:r>
+              <a:rPr lang="en-US" sz="1000" dirty="0">
+                <a:solidFill>
+                  <a:srgbClr val="9AA6B2"/>
                 </a:solidFill>
                 <a:latin typeface="Courier New" pitchFamily="34" charset="0"/>
                 <a:ea typeface="Courier New" pitchFamily="34" charset="-122"/>
                 <a:cs typeface="Courier New" pitchFamily="34" charset="-120"/>
               </a:rPr>
-              <a:t>blockIdx</a:t>
-            </a:r>
-            <a:endParaRPr lang="en-US" sz="2000" dirty="0"/>
-          </a:p>
-        </p:txBody>
-      </p:sp>
-      <p:sp>
-        <p:nvSpPr>
-          <p:cNvPr id="7" name="Text 5"/>
-          <p:cNvSpPr/>
-          <p:nvPr/>
-        </p:nvSpPr>
-        <p:spPr>
-          <a:xfrm>
-            <a:off x="3749040" y="2212848"/>
-            <a:ext cx="7589520" cy="621792"/>
-          </a:xfrm>
-          <a:prstGeom prst="rect">
-            <a:avLst/>
-          </a:prstGeom>
-          <a:noFill/>
-          <a:ln/>
-        </p:spPr>
-        <p:txBody>
-          <a:bodyPr wrap="square" lIns="0" tIns="0" rIns="0" bIns="0" rtlCol="0" anchor="ctr"/>
-          <a:lstStyle/>
-          <a:p>
-            <a:pPr indent="0" marL="0">
-              <a:buNone/>
-            </a:pPr>
-            <a:r>
-              <a:rPr lang="en-US" sz="1600" dirty="0">
-                <a:solidFill>
-                  <a:srgbClr val="E8EDF2"/>
-                </a:solidFill>
-                <a:latin typeface="Malgun Gothic" pitchFamily="34" charset="0"/>
-                <a:ea typeface="Malgun Gothic" pitchFamily="34" charset="-122"/>
-                <a:cs typeface="Malgun Gothic" pitchFamily="34" charset="-120"/>
-              </a:rPr>
-              <a:t>지금 이 블록의 번호 (그리드 안에서)</a:t>
-            </a:r>
-            <a:endParaRPr lang="en-US" sz="1600" dirty="0"/>
-          </a:p>
-        </p:txBody>
-      </p:sp>
-      <p:sp>
-        <p:nvSpPr>
-          <p:cNvPr id="8" name="Shape 6"/>
-          <p:cNvSpPr/>
-          <p:nvPr/>
-        </p:nvSpPr>
-        <p:spPr>
-          <a:xfrm>
-            <a:off x="548640" y="3072384"/>
-            <a:ext cx="11064240" cy="841248"/>
+              <a:t>blockIdx.x=0</a:t>
+            </a:r>
+            <a:endParaRPr lang="en-US" sz="1000" dirty="0"/>
+          </a:p>
+        </p:txBody>
+      </p:sp>
+      <p:sp>
+        <p:nvSpPr>
+          <p:cNvPr id="10" name="Shape 8"/>
+          <p:cNvSpPr/>
+          <p:nvPr/>
+        </p:nvSpPr>
+        <p:spPr>
+          <a:xfrm>
+            <a:off x="2862072" y="2377440"/>
+            <a:ext cx="1783080" cy="822960"/>
           </a:xfrm>
           <a:prstGeom prst="roundRect">
             <a:avLst>
-              <a:gd name="adj" fmla="val 7609"/>
+              <a:gd name="adj" fmla="val 5556"/>
+            </a:avLst>
+          </a:prstGeom>
+          <a:solidFill>
+            <a:srgbClr val="0E1116"/>
+          </a:solidFill>
+          <a:ln w="12700">
+            <a:solidFill>
+              <a:srgbClr val="2C3440"/>
+            </a:solidFill>
+            <a:prstDash val="solid"/>
+          </a:ln>
+        </p:spPr>
+      </p:sp>
+      <p:sp>
+        <p:nvSpPr>
+          <p:cNvPr id="11" name="Text 9"/>
+          <p:cNvSpPr/>
+          <p:nvPr/>
+        </p:nvSpPr>
+        <p:spPr>
+          <a:xfrm>
+            <a:off x="2862072" y="2505456"/>
+            <a:ext cx="1783080" cy="292608"/>
+          </a:xfrm>
+          <a:prstGeom prst="rect">
+            <a:avLst/>
+          </a:prstGeom>
+          <a:noFill/>
+          <a:ln/>
+        </p:spPr>
+        <p:txBody>
+          <a:bodyPr wrap="square" lIns="0" tIns="0" rIns="0" bIns="0" rtlCol="0" anchor="ctr"/>
+          <a:lstStyle/>
+          <a:p>
+            <a:pPr algn="ctr" indent="0" marL="0">
+              <a:buNone/>
+            </a:pPr>
+            <a:r>
+              <a:rPr lang="en-US" sz="1200" b="1" dirty="0">
+                <a:solidFill>
+                  <a:srgbClr val="E8EDF2"/>
+                </a:solidFill>
+                <a:latin typeface="Malgun Gothic" pitchFamily="34" charset="0"/>
+                <a:ea typeface="Malgun Gothic" pitchFamily="34" charset="-122"/>
+                <a:cs typeface="Malgun Gothic" pitchFamily="34" charset="-120"/>
+              </a:rPr>
+              <a:t>블록 1</a:t>
+            </a:r>
+            <a:endParaRPr lang="en-US" sz="1200" dirty="0"/>
+          </a:p>
+        </p:txBody>
+      </p:sp>
+      <p:sp>
+        <p:nvSpPr>
+          <p:cNvPr id="12" name="Text 10"/>
+          <p:cNvSpPr/>
+          <p:nvPr/>
+        </p:nvSpPr>
+        <p:spPr>
+          <a:xfrm>
+            <a:off x="2862072" y="2798064"/>
+            <a:ext cx="1783080" cy="274320"/>
+          </a:xfrm>
+          <a:prstGeom prst="rect">
+            <a:avLst/>
+          </a:prstGeom>
+          <a:noFill/>
+          <a:ln/>
+        </p:spPr>
+        <p:txBody>
+          <a:bodyPr wrap="square" lIns="0" tIns="0" rIns="0" bIns="0" rtlCol="0" anchor="ctr"/>
+          <a:lstStyle/>
+          <a:p>
+            <a:pPr algn="ctr" indent="0" marL="0">
+              <a:buNone/>
+            </a:pPr>
+            <a:r>
+              <a:rPr lang="en-US" sz="1000" dirty="0">
+                <a:solidFill>
+                  <a:srgbClr val="9AA6B2"/>
+                </a:solidFill>
+                <a:latin typeface="Courier New" pitchFamily="34" charset="0"/>
+                <a:ea typeface="Courier New" pitchFamily="34" charset="-122"/>
+                <a:cs typeface="Courier New" pitchFamily="34" charset="-120"/>
+              </a:rPr>
+              <a:t>blockIdx.x=1</a:t>
+            </a:r>
+            <a:endParaRPr lang="en-US" sz="1000" dirty="0"/>
+          </a:p>
+        </p:txBody>
+      </p:sp>
+      <p:sp>
+        <p:nvSpPr>
+          <p:cNvPr id="13" name="Shape 11"/>
+          <p:cNvSpPr/>
+          <p:nvPr/>
+        </p:nvSpPr>
+        <p:spPr>
+          <a:xfrm>
+            <a:off x="4901184" y="2377440"/>
+            <a:ext cx="1783080" cy="822960"/>
+          </a:xfrm>
+          <a:prstGeom prst="roundRect">
+            <a:avLst>
+              <a:gd name="adj" fmla="val 5556"/>
+            </a:avLst>
+          </a:prstGeom>
+          <a:solidFill>
+            <a:srgbClr val="0E1116"/>
+          </a:solidFill>
+          <a:ln w="25400">
+            <a:solidFill>
+              <a:srgbClr val="4FB0C6"/>
+            </a:solidFill>
+            <a:prstDash val="solid"/>
+          </a:ln>
+        </p:spPr>
+      </p:sp>
+      <p:sp>
+        <p:nvSpPr>
+          <p:cNvPr id="14" name="Text 12"/>
+          <p:cNvSpPr/>
+          <p:nvPr/>
+        </p:nvSpPr>
+        <p:spPr>
+          <a:xfrm>
+            <a:off x="4901184" y="2505456"/>
+            <a:ext cx="1783080" cy="292608"/>
+          </a:xfrm>
+          <a:prstGeom prst="rect">
+            <a:avLst/>
+          </a:prstGeom>
+          <a:noFill/>
+          <a:ln/>
+        </p:spPr>
+        <p:txBody>
+          <a:bodyPr wrap="square" lIns="0" tIns="0" rIns="0" bIns="0" rtlCol="0" anchor="ctr"/>
+          <a:lstStyle/>
+          <a:p>
+            <a:pPr algn="ctr" indent="0" marL="0">
+              <a:buNone/>
+            </a:pPr>
+            <a:r>
+              <a:rPr lang="en-US" sz="1200" b="1" dirty="0">
+                <a:solidFill>
+                  <a:srgbClr val="4FB0C6"/>
+                </a:solidFill>
+                <a:latin typeface="Malgun Gothic" pitchFamily="34" charset="0"/>
+                <a:ea typeface="Malgun Gothic" pitchFamily="34" charset="-122"/>
+                <a:cs typeface="Malgun Gothic" pitchFamily="34" charset="-120"/>
+              </a:rPr>
+              <a:t>블록 2</a:t>
+            </a:r>
+            <a:endParaRPr lang="en-US" sz="1200" dirty="0"/>
+          </a:p>
+        </p:txBody>
+      </p:sp>
+      <p:sp>
+        <p:nvSpPr>
+          <p:cNvPr id="15" name="Text 13"/>
+          <p:cNvSpPr/>
+          <p:nvPr/>
+        </p:nvSpPr>
+        <p:spPr>
+          <a:xfrm>
+            <a:off x="4901184" y="2798064"/>
+            <a:ext cx="1783080" cy="274320"/>
+          </a:xfrm>
+          <a:prstGeom prst="rect">
+            <a:avLst/>
+          </a:prstGeom>
+          <a:noFill/>
+          <a:ln/>
+        </p:spPr>
+        <p:txBody>
+          <a:bodyPr wrap="square" lIns="0" tIns="0" rIns="0" bIns="0" rtlCol="0" anchor="ctr"/>
+          <a:lstStyle/>
+          <a:p>
+            <a:pPr algn="ctr" indent="0" marL="0">
+              <a:buNone/>
+            </a:pPr>
+            <a:r>
+              <a:rPr lang="en-US" sz="1000" dirty="0">
+                <a:solidFill>
+                  <a:srgbClr val="9AA6B2"/>
+                </a:solidFill>
+                <a:latin typeface="Courier New" pitchFamily="34" charset="0"/>
+                <a:ea typeface="Courier New" pitchFamily="34" charset="-122"/>
+                <a:cs typeface="Courier New" pitchFamily="34" charset="-120"/>
+              </a:rPr>
+              <a:t>blockIdx.x=2</a:t>
+            </a:r>
+            <a:endParaRPr lang="en-US" sz="1000" dirty="0"/>
+          </a:p>
+        </p:txBody>
+      </p:sp>
+      <p:sp>
+        <p:nvSpPr>
+          <p:cNvPr id="16" name="Shape 14"/>
+          <p:cNvSpPr/>
+          <p:nvPr/>
+        </p:nvSpPr>
+        <p:spPr>
+          <a:xfrm>
+            <a:off x="822960" y="3383280"/>
+            <a:ext cx="1783080" cy="822960"/>
+          </a:xfrm>
+          <a:prstGeom prst="roundRect">
+            <a:avLst>
+              <a:gd name="adj" fmla="val 5556"/>
+            </a:avLst>
+          </a:prstGeom>
+          <a:solidFill>
+            <a:srgbClr val="0E1116"/>
+          </a:solidFill>
+          <a:ln w="12700">
+            <a:solidFill>
+              <a:srgbClr val="2C3440"/>
+            </a:solidFill>
+            <a:prstDash val="solid"/>
+          </a:ln>
+        </p:spPr>
+      </p:sp>
+      <p:sp>
+        <p:nvSpPr>
+          <p:cNvPr id="17" name="Text 15"/>
+          <p:cNvSpPr/>
+          <p:nvPr/>
+        </p:nvSpPr>
+        <p:spPr>
+          <a:xfrm>
+            <a:off x="822960" y="3511296"/>
+            <a:ext cx="1783080" cy="292608"/>
+          </a:xfrm>
+          <a:prstGeom prst="rect">
+            <a:avLst/>
+          </a:prstGeom>
+          <a:noFill/>
+          <a:ln/>
+        </p:spPr>
+        <p:txBody>
+          <a:bodyPr wrap="square" lIns="0" tIns="0" rIns="0" bIns="0" rtlCol="0" anchor="ctr"/>
+          <a:lstStyle/>
+          <a:p>
+            <a:pPr algn="ctr" indent="0" marL="0">
+              <a:buNone/>
+            </a:pPr>
+            <a:r>
+              <a:rPr lang="en-US" sz="1200" b="1" dirty="0">
+                <a:solidFill>
+                  <a:srgbClr val="E8EDF2"/>
+                </a:solidFill>
+                <a:latin typeface="Malgun Gothic" pitchFamily="34" charset="0"/>
+                <a:ea typeface="Malgun Gothic" pitchFamily="34" charset="-122"/>
+                <a:cs typeface="Malgun Gothic" pitchFamily="34" charset="-120"/>
+              </a:rPr>
+              <a:t>블록 3</a:t>
+            </a:r>
+            <a:endParaRPr lang="en-US" sz="1200" dirty="0"/>
+          </a:p>
+        </p:txBody>
+      </p:sp>
+      <p:sp>
+        <p:nvSpPr>
+          <p:cNvPr id="18" name="Text 16"/>
+          <p:cNvSpPr/>
+          <p:nvPr/>
+        </p:nvSpPr>
+        <p:spPr>
+          <a:xfrm>
+            <a:off x="822960" y="3803904"/>
+            <a:ext cx="1783080" cy="274320"/>
+          </a:xfrm>
+          <a:prstGeom prst="rect">
+            <a:avLst/>
+          </a:prstGeom>
+          <a:noFill/>
+          <a:ln/>
+        </p:spPr>
+        <p:txBody>
+          <a:bodyPr wrap="square" lIns="0" tIns="0" rIns="0" bIns="0" rtlCol="0" anchor="ctr"/>
+          <a:lstStyle/>
+          <a:p>
+            <a:pPr algn="ctr" indent="0" marL="0">
+              <a:buNone/>
+            </a:pPr>
+            <a:r>
+              <a:rPr lang="en-US" sz="1000" dirty="0">
+                <a:solidFill>
+                  <a:srgbClr val="9AA6B2"/>
+                </a:solidFill>
+                <a:latin typeface="Courier New" pitchFamily="34" charset="0"/>
+                <a:ea typeface="Courier New" pitchFamily="34" charset="-122"/>
+                <a:cs typeface="Courier New" pitchFamily="34" charset="-120"/>
+              </a:rPr>
+              <a:t>blockIdx.x=3</a:t>
+            </a:r>
+            <a:endParaRPr lang="en-US" sz="1000" dirty="0"/>
+          </a:p>
+        </p:txBody>
+      </p:sp>
+      <p:sp>
+        <p:nvSpPr>
+          <p:cNvPr id="19" name="Shape 17"/>
+          <p:cNvSpPr/>
+          <p:nvPr/>
+        </p:nvSpPr>
+        <p:spPr>
+          <a:xfrm>
+            <a:off x="2862072" y="3383280"/>
+            <a:ext cx="1783080" cy="822960"/>
+          </a:xfrm>
+          <a:prstGeom prst="roundRect">
+            <a:avLst>
+              <a:gd name="adj" fmla="val 5556"/>
+            </a:avLst>
+          </a:prstGeom>
+          <a:solidFill>
+            <a:srgbClr val="0E1116"/>
+          </a:solidFill>
+          <a:ln w="12700">
+            <a:solidFill>
+              <a:srgbClr val="2C3440"/>
+            </a:solidFill>
+            <a:prstDash val="solid"/>
+          </a:ln>
+        </p:spPr>
+      </p:sp>
+      <p:sp>
+        <p:nvSpPr>
+          <p:cNvPr id="20" name="Text 18"/>
+          <p:cNvSpPr/>
+          <p:nvPr/>
+        </p:nvSpPr>
+        <p:spPr>
+          <a:xfrm>
+            <a:off x="2862072" y="3511296"/>
+            <a:ext cx="1783080" cy="292608"/>
+          </a:xfrm>
+          <a:prstGeom prst="rect">
+            <a:avLst/>
+          </a:prstGeom>
+          <a:noFill/>
+          <a:ln/>
+        </p:spPr>
+        <p:txBody>
+          <a:bodyPr wrap="square" lIns="0" tIns="0" rIns="0" bIns="0" rtlCol="0" anchor="ctr"/>
+          <a:lstStyle/>
+          <a:p>
+            <a:pPr algn="ctr" indent="0" marL="0">
+              <a:buNone/>
+            </a:pPr>
+            <a:r>
+              <a:rPr lang="en-US" sz="1200" b="1" dirty="0">
+                <a:solidFill>
+                  <a:srgbClr val="E8EDF2"/>
+                </a:solidFill>
+                <a:latin typeface="Malgun Gothic" pitchFamily="34" charset="0"/>
+                <a:ea typeface="Malgun Gothic" pitchFamily="34" charset="-122"/>
+                <a:cs typeface="Malgun Gothic" pitchFamily="34" charset="-120"/>
+              </a:rPr>
+              <a:t>블록 4</a:t>
+            </a:r>
+            <a:endParaRPr lang="en-US" sz="1200" dirty="0"/>
+          </a:p>
+        </p:txBody>
+      </p:sp>
+      <p:sp>
+        <p:nvSpPr>
+          <p:cNvPr id="21" name="Text 19"/>
+          <p:cNvSpPr/>
+          <p:nvPr/>
+        </p:nvSpPr>
+        <p:spPr>
+          <a:xfrm>
+            <a:off x="2862072" y="3803904"/>
+            <a:ext cx="1783080" cy="274320"/>
+          </a:xfrm>
+          <a:prstGeom prst="rect">
+            <a:avLst/>
+          </a:prstGeom>
+          <a:noFill/>
+          <a:ln/>
+        </p:spPr>
+        <p:txBody>
+          <a:bodyPr wrap="square" lIns="0" tIns="0" rIns="0" bIns="0" rtlCol="0" anchor="ctr"/>
+          <a:lstStyle/>
+          <a:p>
+            <a:pPr algn="ctr" indent="0" marL="0">
+              <a:buNone/>
+            </a:pPr>
+            <a:r>
+              <a:rPr lang="en-US" sz="1000" dirty="0">
+                <a:solidFill>
+                  <a:srgbClr val="9AA6B2"/>
+                </a:solidFill>
+                <a:latin typeface="Courier New" pitchFamily="34" charset="0"/>
+                <a:ea typeface="Courier New" pitchFamily="34" charset="-122"/>
+                <a:cs typeface="Courier New" pitchFamily="34" charset="-120"/>
+              </a:rPr>
+              <a:t>blockIdx.x=4</a:t>
+            </a:r>
+            <a:endParaRPr lang="en-US" sz="1000" dirty="0"/>
+          </a:p>
+        </p:txBody>
+      </p:sp>
+      <p:sp>
+        <p:nvSpPr>
+          <p:cNvPr id="22" name="Shape 20"/>
+          <p:cNvSpPr/>
+          <p:nvPr/>
+        </p:nvSpPr>
+        <p:spPr>
+          <a:xfrm>
+            <a:off x="4901184" y="3383280"/>
+            <a:ext cx="1783080" cy="822960"/>
+          </a:xfrm>
+          <a:prstGeom prst="roundRect">
+            <a:avLst>
+              <a:gd name="adj" fmla="val 5556"/>
+            </a:avLst>
+          </a:prstGeom>
+          <a:solidFill>
+            <a:srgbClr val="0E1116"/>
+          </a:solidFill>
+          <a:ln w="12700">
+            <a:solidFill>
+              <a:srgbClr val="2C3440"/>
+            </a:solidFill>
+            <a:prstDash val="solid"/>
+          </a:ln>
+        </p:spPr>
+      </p:sp>
+      <p:sp>
+        <p:nvSpPr>
+          <p:cNvPr id="23" name="Text 21"/>
+          <p:cNvSpPr/>
+          <p:nvPr/>
+        </p:nvSpPr>
+        <p:spPr>
+          <a:xfrm>
+            <a:off x="4901184" y="3511296"/>
+            <a:ext cx="1783080" cy="292608"/>
+          </a:xfrm>
+          <a:prstGeom prst="rect">
+            <a:avLst/>
+          </a:prstGeom>
+          <a:noFill/>
+          <a:ln/>
+        </p:spPr>
+        <p:txBody>
+          <a:bodyPr wrap="square" lIns="0" tIns="0" rIns="0" bIns="0" rtlCol="0" anchor="ctr"/>
+          <a:lstStyle/>
+          <a:p>
+            <a:pPr algn="ctr" indent="0" marL="0">
+              <a:buNone/>
+            </a:pPr>
+            <a:r>
+              <a:rPr lang="en-US" sz="1200" b="1" dirty="0">
+                <a:solidFill>
+                  <a:srgbClr val="E8EDF2"/>
+                </a:solidFill>
+                <a:latin typeface="Malgun Gothic" pitchFamily="34" charset="0"/>
+                <a:ea typeface="Malgun Gothic" pitchFamily="34" charset="-122"/>
+                <a:cs typeface="Malgun Gothic" pitchFamily="34" charset="-120"/>
+              </a:rPr>
+              <a:t>블록 5</a:t>
+            </a:r>
+            <a:endParaRPr lang="en-US" sz="1200" dirty="0"/>
+          </a:p>
+        </p:txBody>
+      </p:sp>
+      <p:sp>
+        <p:nvSpPr>
+          <p:cNvPr id="24" name="Text 22"/>
+          <p:cNvSpPr/>
+          <p:nvPr/>
+        </p:nvSpPr>
+        <p:spPr>
+          <a:xfrm>
+            <a:off x="4901184" y="3803904"/>
+            <a:ext cx="1783080" cy="274320"/>
+          </a:xfrm>
+          <a:prstGeom prst="rect">
+            <a:avLst/>
+          </a:prstGeom>
+          <a:noFill/>
+          <a:ln/>
+        </p:spPr>
+        <p:txBody>
+          <a:bodyPr wrap="square" lIns="0" tIns="0" rIns="0" bIns="0" rtlCol="0" anchor="ctr"/>
+          <a:lstStyle/>
+          <a:p>
+            <a:pPr algn="ctr" indent="0" marL="0">
+              <a:buNone/>
+            </a:pPr>
+            <a:r>
+              <a:rPr lang="en-US" sz="1000" dirty="0">
+                <a:solidFill>
+                  <a:srgbClr val="9AA6B2"/>
+                </a:solidFill>
+                <a:latin typeface="Courier New" pitchFamily="34" charset="0"/>
+                <a:ea typeface="Courier New" pitchFamily="34" charset="-122"/>
+                <a:cs typeface="Courier New" pitchFamily="34" charset="-120"/>
+              </a:rPr>
+              <a:t>blockIdx.x=5</a:t>
+            </a:r>
+            <a:endParaRPr lang="en-US" sz="1000" dirty="0"/>
+          </a:p>
+        </p:txBody>
+      </p:sp>
+      <p:sp>
+        <p:nvSpPr>
+          <p:cNvPr id="25" name="Shape 23"/>
+          <p:cNvSpPr/>
+          <p:nvPr/>
+        </p:nvSpPr>
+        <p:spPr>
+          <a:xfrm>
+            <a:off x="822960" y="4389120"/>
+            <a:ext cx="1783080" cy="822960"/>
+          </a:xfrm>
+          <a:prstGeom prst="roundRect">
+            <a:avLst>
+              <a:gd name="adj" fmla="val 5556"/>
+            </a:avLst>
+          </a:prstGeom>
+          <a:solidFill>
+            <a:srgbClr val="0E1116"/>
+          </a:solidFill>
+          <a:ln w="12700">
+            <a:solidFill>
+              <a:srgbClr val="2C3440"/>
+            </a:solidFill>
+            <a:prstDash val="solid"/>
+          </a:ln>
+        </p:spPr>
+      </p:sp>
+      <p:sp>
+        <p:nvSpPr>
+          <p:cNvPr id="26" name="Text 24"/>
+          <p:cNvSpPr/>
+          <p:nvPr/>
+        </p:nvSpPr>
+        <p:spPr>
+          <a:xfrm>
+            <a:off x="822960" y="4517136"/>
+            <a:ext cx="1783080" cy="292608"/>
+          </a:xfrm>
+          <a:prstGeom prst="rect">
+            <a:avLst/>
+          </a:prstGeom>
+          <a:noFill/>
+          <a:ln/>
+        </p:spPr>
+        <p:txBody>
+          <a:bodyPr wrap="square" lIns="0" tIns="0" rIns="0" bIns="0" rtlCol="0" anchor="ctr"/>
+          <a:lstStyle/>
+          <a:p>
+            <a:pPr algn="ctr" indent="0" marL="0">
+              <a:buNone/>
+            </a:pPr>
+            <a:r>
+              <a:rPr lang="en-US" sz="1200" b="1" dirty="0">
+                <a:solidFill>
+                  <a:srgbClr val="E8EDF2"/>
+                </a:solidFill>
+                <a:latin typeface="Malgun Gothic" pitchFamily="34" charset="0"/>
+                <a:ea typeface="Malgun Gothic" pitchFamily="34" charset="-122"/>
+                <a:cs typeface="Malgun Gothic" pitchFamily="34" charset="-120"/>
+              </a:rPr>
+              <a:t>블록 6</a:t>
+            </a:r>
+            <a:endParaRPr lang="en-US" sz="1200" dirty="0"/>
+          </a:p>
+        </p:txBody>
+      </p:sp>
+      <p:sp>
+        <p:nvSpPr>
+          <p:cNvPr id="27" name="Text 25"/>
+          <p:cNvSpPr/>
+          <p:nvPr/>
+        </p:nvSpPr>
+        <p:spPr>
+          <a:xfrm>
+            <a:off x="822960" y="4809744"/>
+            <a:ext cx="1783080" cy="274320"/>
+          </a:xfrm>
+          <a:prstGeom prst="rect">
+            <a:avLst/>
+          </a:prstGeom>
+          <a:noFill/>
+          <a:ln/>
+        </p:spPr>
+        <p:txBody>
+          <a:bodyPr wrap="square" lIns="0" tIns="0" rIns="0" bIns="0" rtlCol="0" anchor="ctr"/>
+          <a:lstStyle/>
+          <a:p>
+            <a:pPr algn="ctr" indent="0" marL="0">
+              <a:buNone/>
+            </a:pPr>
+            <a:r>
+              <a:rPr lang="en-US" sz="1000" dirty="0">
+                <a:solidFill>
+                  <a:srgbClr val="9AA6B2"/>
+                </a:solidFill>
+                <a:latin typeface="Courier New" pitchFamily="34" charset="0"/>
+                <a:ea typeface="Courier New" pitchFamily="34" charset="-122"/>
+                <a:cs typeface="Courier New" pitchFamily="34" charset="-120"/>
+              </a:rPr>
+              <a:t>blockIdx.x=6</a:t>
+            </a:r>
+            <a:endParaRPr lang="en-US" sz="1000" dirty="0"/>
+          </a:p>
+        </p:txBody>
+      </p:sp>
+      <p:sp>
+        <p:nvSpPr>
+          <p:cNvPr id="28" name="Shape 26"/>
+          <p:cNvSpPr/>
+          <p:nvPr/>
+        </p:nvSpPr>
+        <p:spPr>
+          <a:xfrm>
+            <a:off x="2862072" y="4389120"/>
+            <a:ext cx="1783080" cy="822960"/>
+          </a:xfrm>
+          <a:prstGeom prst="roundRect">
+            <a:avLst>
+              <a:gd name="adj" fmla="val 5556"/>
+            </a:avLst>
+          </a:prstGeom>
+          <a:solidFill>
+            <a:srgbClr val="0E1116"/>
+          </a:solidFill>
+          <a:ln w="12700">
+            <a:solidFill>
+              <a:srgbClr val="2C3440"/>
+            </a:solidFill>
+            <a:prstDash val="solid"/>
+          </a:ln>
+        </p:spPr>
+      </p:sp>
+      <p:sp>
+        <p:nvSpPr>
+          <p:cNvPr id="29" name="Text 27"/>
+          <p:cNvSpPr/>
+          <p:nvPr/>
+        </p:nvSpPr>
+        <p:spPr>
+          <a:xfrm>
+            <a:off x="2862072" y="4517136"/>
+            <a:ext cx="1783080" cy="292608"/>
+          </a:xfrm>
+          <a:prstGeom prst="rect">
+            <a:avLst/>
+          </a:prstGeom>
+          <a:noFill/>
+          <a:ln/>
+        </p:spPr>
+        <p:txBody>
+          <a:bodyPr wrap="square" lIns="0" tIns="0" rIns="0" bIns="0" rtlCol="0" anchor="ctr"/>
+          <a:lstStyle/>
+          <a:p>
+            <a:pPr algn="ctr" indent="0" marL="0">
+              <a:buNone/>
+            </a:pPr>
+            <a:r>
+              <a:rPr lang="en-US" sz="1200" b="1" dirty="0">
+                <a:solidFill>
+                  <a:srgbClr val="E8EDF2"/>
+                </a:solidFill>
+                <a:latin typeface="Malgun Gothic" pitchFamily="34" charset="0"/>
+                <a:ea typeface="Malgun Gothic" pitchFamily="34" charset="-122"/>
+                <a:cs typeface="Malgun Gothic" pitchFamily="34" charset="-120"/>
+              </a:rPr>
+              <a:t>블록 7</a:t>
+            </a:r>
+            <a:endParaRPr lang="en-US" sz="1200" dirty="0"/>
+          </a:p>
+        </p:txBody>
+      </p:sp>
+      <p:sp>
+        <p:nvSpPr>
+          <p:cNvPr id="30" name="Text 28"/>
+          <p:cNvSpPr/>
+          <p:nvPr/>
+        </p:nvSpPr>
+        <p:spPr>
+          <a:xfrm>
+            <a:off x="2862072" y="4809744"/>
+            <a:ext cx="1783080" cy="274320"/>
+          </a:xfrm>
+          <a:prstGeom prst="rect">
+            <a:avLst/>
+          </a:prstGeom>
+          <a:noFill/>
+          <a:ln/>
+        </p:spPr>
+        <p:txBody>
+          <a:bodyPr wrap="square" lIns="0" tIns="0" rIns="0" bIns="0" rtlCol="0" anchor="ctr"/>
+          <a:lstStyle/>
+          <a:p>
+            <a:pPr algn="ctr" indent="0" marL="0">
+              <a:buNone/>
+            </a:pPr>
+            <a:r>
+              <a:rPr lang="en-US" sz="1000" dirty="0">
+                <a:solidFill>
+                  <a:srgbClr val="9AA6B2"/>
+                </a:solidFill>
+                <a:latin typeface="Courier New" pitchFamily="34" charset="0"/>
+                <a:ea typeface="Courier New" pitchFamily="34" charset="-122"/>
+                <a:cs typeface="Courier New" pitchFamily="34" charset="-120"/>
+              </a:rPr>
+              <a:t>blockIdx.x=7</a:t>
+            </a:r>
+            <a:endParaRPr lang="en-US" sz="1000" dirty="0"/>
+          </a:p>
+        </p:txBody>
+      </p:sp>
+      <p:sp>
+        <p:nvSpPr>
+          <p:cNvPr id="31" name="Shape 29"/>
+          <p:cNvSpPr/>
+          <p:nvPr/>
+        </p:nvSpPr>
+        <p:spPr>
+          <a:xfrm>
+            <a:off x="4901184" y="4389120"/>
+            <a:ext cx="1783080" cy="822960"/>
+          </a:xfrm>
+          <a:prstGeom prst="roundRect">
+            <a:avLst>
+              <a:gd name="adj" fmla="val 5556"/>
+            </a:avLst>
+          </a:prstGeom>
+          <a:solidFill>
+            <a:srgbClr val="0E1116"/>
+          </a:solidFill>
+          <a:ln w="12700">
+            <a:solidFill>
+              <a:srgbClr val="2C3440"/>
+            </a:solidFill>
+            <a:prstDash val="solid"/>
+          </a:ln>
+        </p:spPr>
+      </p:sp>
+      <p:sp>
+        <p:nvSpPr>
+          <p:cNvPr id="32" name="Text 30"/>
+          <p:cNvSpPr/>
+          <p:nvPr/>
+        </p:nvSpPr>
+        <p:spPr>
+          <a:xfrm>
+            <a:off x="4901184" y="4517136"/>
+            <a:ext cx="1783080" cy="292608"/>
+          </a:xfrm>
+          <a:prstGeom prst="rect">
+            <a:avLst/>
+          </a:prstGeom>
+          <a:noFill/>
+          <a:ln/>
+        </p:spPr>
+        <p:txBody>
+          <a:bodyPr wrap="square" lIns="0" tIns="0" rIns="0" bIns="0" rtlCol="0" anchor="ctr"/>
+          <a:lstStyle/>
+          <a:p>
+            <a:pPr algn="ctr" indent="0" marL="0">
+              <a:buNone/>
+            </a:pPr>
+            <a:r>
+              <a:rPr lang="en-US" sz="1200" b="1" dirty="0">
+                <a:solidFill>
+                  <a:srgbClr val="E8EDF2"/>
+                </a:solidFill>
+                <a:latin typeface="Malgun Gothic" pitchFamily="34" charset="0"/>
+                <a:ea typeface="Malgun Gothic" pitchFamily="34" charset="-122"/>
+                <a:cs typeface="Malgun Gothic" pitchFamily="34" charset="-120"/>
+              </a:rPr>
+              <a:t>블록 8</a:t>
+            </a:r>
+            <a:endParaRPr lang="en-US" sz="1200" dirty="0"/>
+          </a:p>
+        </p:txBody>
+      </p:sp>
+      <p:sp>
+        <p:nvSpPr>
+          <p:cNvPr id="33" name="Text 31"/>
+          <p:cNvSpPr/>
+          <p:nvPr/>
+        </p:nvSpPr>
+        <p:spPr>
+          <a:xfrm>
+            <a:off x="4901184" y="4809744"/>
+            <a:ext cx="1783080" cy="274320"/>
+          </a:xfrm>
+          <a:prstGeom prst="rect">
+            <a:avLst/>
+          </a:prstGeom>
+          <a:noFill/>
+          <a:ln/>
+        </p:spPr>
+        <p:txBody>
+          <a:bodyPr wrap="square" lIns="0" tIns="0" rIns="0" bIns="0" rtlCol="0" anchor="ctr"/>
+          <a:lstStyle/>
+          <a:p>
+            <a:pPr algn="ctr" indent="0" marL="0">
+              <a:buNone/>
+            </a:pPr>
+            <a:r>
+              <a:rPr lang="en-US" sz="1000" dirty="0">
+                <a:solidFill>
+                  <a:srgbClr val="9AA6B2"/>
+                </a:solidFill>
+                <a:latin typeface="Courier New" pitchFamily="34" charset="0"/>
+                <a:ea typeface="Courier New" pitchFamily="34" charset="-122"/>
+                <a:cs typeface="Courier New" pitchFamily="34" charset="-120"/>
+              </a:rPr>
+              <a:t>blockIdx.x=8</a:t>
+            </a:r>
+            <a:endParaRPr lang="en-US" sz="1000" dirty="0"/>
+          </a:p>
+        </p:txBody>
+      </p:sp>
+      <p:sp>
+        <p:nvSpPr>
+          <p:cNvPr id="34" name="Text 32"/>
+          <p:cNvSpPr/>
+          <p:nvPr/>
+        </p:nvSpPr>
+        <p:spPr>
+          <a:xfrm>
+            <a:off x="822960" y="5376672"/>
+            <a:ext cx="5943600" cy="274320"/>
+          </a:xfrm>
+          <a:prstGeom prst="rect">
+            <a:avLst/>
+          </a:prstGeom>
+          <a:noFill/>
+          <a:ln/>
+        </p:spPr>
+        <p:txBody>
+          <a:bodyPr wrap="square" lIns="0" tIns="0" rIns="0" bIns="0" rtlCol="0" anchor="ctr"/>
+          <a:lstStyle/>
+          <a:p>
+            <a:pPr indent="0" marL="0">
+              <a:buNone/>
+            </a:pPr>
+            <a:r>
+              <a:rPr lang="en-US" sz="1100" i="1" dirty="0">
+                <a:solidFill>
+                  <a:srgbClr val="9AA6B2"/>
+                </a:solidFill>
+                <a:latin typeface="Malgun Gothic" pitchFamily="34" charset="0"/>
+                <a:ea typeface="Malgun Gothic" pitchFamily="34" charset="-122"/>
+                <a:cs typeface="Malgun Gothic" pitchFamily="34" charset="-120"/>
+              </a:rPr>
+              <a:t>… 블록 127까지</a:t>
+            </a:r>
+            <a:endParaRPr lang="en-US" sz="1100" dirty="0"/>
+          </a:p>
+        </p:txBody>
+      </p:sp>
+      <p:sp>
+        <p:nvSpPr>
+          <p:cNvPr id="35" name="Shape 33"/>
+          <p:cNvSpPr/>
+          <p:nvPr/>
+        </p:nvSpPr>
+        <p:spPr>
+          <a:xfrm>
+            <a:off x="7059168" y="3063240"/>
+            <a:ext cx="685800" cy="0"/>
+          </a:xfrm>
+          <a:prstGeom prst="line">
+            <a:avLst/>
+          </a:prstGeom>
+          <a:noFill/>
+          <a:ln w="31750">
+            <a:solidFill>
+              <a:srgbClr val="4FB0C6"/>
+            </a:solidFill>
+            <a:prstDash val="solid"/>
+            <a:tailEnd type="triangle"/>
+          </a:ln>
+        </p:spPr>
+      </p:sp>
+      <p:sp>
+        <p:nvSpPr>
+          <p:cNvPr id="36" name="Text 34"/>
+          <p:cNvSpPr/>
+          <p:nvPr/>
+        </p:nvSpPr>
+        <p:spPr>
+          <a:xfrm>
+            <a:off x="7022592" y="2651760"/>
+            <a:ext cx="731520" cy="320040"/>
+          </a:xfrm>
+          <a:prstGeom prst="rect">
+            <a:avLst/>
+          </a:prstGeom>
+          <a:noFill/>
+          <a:ln/>
+        </p:spPr>
+        <p:txBody>
+          <a:bodyPr wrap="square" lIns="0" tIns="0" rIns="0" bIns="0" rtlCol="0" anchor="ctr"/>
+          <a:lstStyle/>
+          <a:p>
+            <a:pPr algn="ctr" indent="0" marL="0">
+              <a:buNone/>
+            </a:pPr>
+            <a:r>
+              <a:rPr lang="en-US" sz="1100" dirty="0">
+                <a:solidFill>
+                  <a:srgbClr val="4FB0C6"/>
+                </a:solidFill>
+                <a:latin typeface="Malgun Gothic" pitchFamily="34" charset="0"/>
+                <a:ea typeface="Malgun Gothic" pitchFamily="34" charset="-122"/>
+                <a:cs typeface="Malgun Gothic" pitchFamily="34" charset="-120"/>
+              </a:rPr>
+              <a:t>확대</a:t>
+            </a:r>
+            <a:endParaRPr lang="en-US" sz="1100" dirty="0"/>
+          </a:p>
+        </p:txBody>
+      </p:sp>
+      <p:sp>
+        <p:nvSpPr>
+          <p:cNvPr id="37" name="Shape 35"/>
+          <p:cNvSpPr/>
+          <p:nvPr/>
+        </p:nvSpPr>
+        <p:spPr>
+          <a:xfrm>
+            <a:off x="7818120" y="1783080"/>
+            <a:ext cx="3794760" cy="3977640"/>
+          </a:xfrm>
+          <a:prstGeom prst="roundRect">
+            <a:avLst>
+              <a:gd name="adj" fmla="val 1446"/>
             </a:avLst>
           </a:prstGeom>
           <a:solidFill>
             <a:srgbClr val="1E232C"/>
           </a:solidFill>
-          <a:ln/>
-        </p:spPr>
-      </p:sp>
-      <p:sp>
-        <p:nvSpPr>
-          <p:cNvPr id="9" name="Text 7"/>
-          <p:cNvSpPr/>
-          <p:nvPr/>
-        </p:nvSpPr>
-        <p:spPr>
-          <a:xfrm>
-            <a:off x="822960" y="3182112"/>
-            <a:ext cx="2743200" cy="621792"/>
+          <a:ln w="19050">
+            <a:solidFill>
+              <a:srgbClr val="4FB0C6"/>
+            </a:solidFill>
+            <a:prstDash val="solid"/>
+          </a:ln>
+        </p:spPr>
+      </p:sp>
+      <p:sp>
+        <p:nvSpPr>
+          <p:cNvPr id="38" name="Text 36"/>
+          <p:cNvSpPr/>
+          <p:nvPr/>
+        </p:nvSpPr>
+        <p:spPr>
+          <a:xfrm>
+            <a:off x="8046720" y="1892808"/>
+            <a:ext cx="3337560" cy="365760"/>
           </a:xfrm>
           <a:prstGeom prst="rect">
             <a:avLst/>
@@ -7757,91 +9325,162 @@
               <a:buNone/>
             </a:pPr>
             <a:r>
-              <a:rPr lang="en-US" sz="2000" b="1" dirty="0">
+              <a:rPr lang="en-US" sz="1400" b="1" dirty="0">
                 <a:solidFill>
                   <a:srgbClr val="4FB0C6"/>
+                </a:solidFill>
+                <a:latin typeface="Malgun Gothic" pitchFamily="34" charset="0"/>
+                <a:ea typeface="Malgun Gothic" pitchFamily="34" charset="-122"/>
+                <a:cs typeface="Malgun Gothic" pitchFamily="34" charset="-120"/>
+              </a:rPr>
+              <a:t>블록(Block)  ·  blockIdx.x</a:t>
+            </a:r>
+            <a:endParaRPr lang="en-US" sz="1400" dirty="0"/>
+          </a:p>
+        </p:txBody>
+      </p:sp>
+      <p:sp>
+        <p:nvSpPr>
+          <p:cNvPr id="39" name="Text 37"/>
+          <p:cNvSpPr/>
+          <p:nvPr/>
+        </p:nvSpPr>
+        <p:spPr>
+          <a:xfrm>
+            <a:off x="8046720" y="2331720"/>
+            <a:ext cx="3337560" cy="320040"/>
+          </a:xfrm>
+          <a:prstGeom prst="rect">
+            <a:avLst/>
+          </a:prstGeom>
+          <a:noFill/>
+          <a:ln/>
+        </p:spPr>
+        <p:txBody>
+          <a:bodyPr wrap="square" lIns="0" tIns="0" rIns="0" bIns="0" rtlCol="0" anchor="ctr"/>
+          <a:lstStyle/>
+          <a:p>
+            <a:pPr indent="0" marL="0">
+              <a:buNone/>
+            </a:pPr>
+            <a:r>
+              <a:rPr lang="en-US" sz="1200" dirty="0">
+                <a:solidFill>
+                  <a:srgbClr val="9AA6B2"/>
+                </a:solidFill>
+                <a:latin typeface="Malgun Gothic" pitchFamily="34" charset="0"/>
+                <a:ea typeface="Malgun Gothic" pitchFamily="34" charset="-122"/>
+                <a:cs typeface="Malgun Gothic" pitchFamily="34" charset="-120"/>
+              </a:rPr>
+              <a:t>스레드(Thread) · threadIdx.x</a:t>
+            </a:r>
+            <a:endParaRPr lang="en-US" sz="1200" dirty="0"/>
+          </a:p>
+        </p:txBody>
+      </p:sp>
+      <p:sp>
+        <p:nvSpPr>
+          <p:cNvPr id="40" name="Shape 38"/>
+          <p:cNvSpPr/>
+          <p:nvPr/>
+        </p:nvSpPr>
+        <p:spPr>
+          <a:xfrm>
+            <a:off x="8092440" y="2788920"/>
+            <a:ext cx="658368" cy="658368"/>
+          </a:xfrm>
+          <a:prstGeom prst="roundRect">
+            <a:avLst>
+              <a:gd name="adj" fmla="val 5556"/>
+            </a:avLst>
+          </a:prstGeom>
+          <a:solidFill>
+            <a:srgbClr val="0E1116"/>
+          </a:solidFill>
+          <a:ln w="12700">
+            <a:solidFill>
+              <a:srgbClr val="2C3440"/>
+            </a:solidFill>
+            <a:prstDash val="solid"/>
+          </a:ln>
+        </p:spPr>
+      </p:sp>
+      <p:sp>
+        <p:nvSpPr>
+          <p:cNvPr id="41" name="Text 39"/>
+          <p:cNvSpPr/>
+          <p:nvPr/>
+        </p:nvSpPr>
+        <p:spPr>
+          <a:xfrm>
+            <a:off x="8092440" y="2788920"/>
+            <a:ext cx="658368" cy="658368"/>
+          </a:xfrm>
+          <a:prstGeom prst="rect">
+            <a:avLst/>
+          </a:prstGeom>
+          <a:noFill/>
+          <a:ln/>
+        </p:spPr>
+        <p:txBody>
+          <a:bodyPr wrap="square" lIns="0" tIns="0" rIns="0" bIns="0" rtlCol="0" anchor="ctr"/>
+          <a:lstStyle/>
+          <a:p>
+            <a:pPr algn="ctr" indent="0" marL="0">
+              <a:buNone/>
+            </a:pPr>
+            <a:r>
+              <a:rPr lang="en-US" sz="1300" b="1" dirty="0">
+                <a:solidFill>
+                  <a:srgbClr val="E8EDF2"/>
                 </a:solidFill>
                 <a:latin typeface="Courier New" pitchFamily="34" charset="0"/>
                 <a:ea typeface="Courier New" pitchFamily="34" charset="-122"/>
                 <a:cs typeface="Courier New" pitchFamily="34" charset="-120"/>
               </a:rPr>
-              <a:t>threadIdx</a:t>
-            </a:r>
-            <a:endParaRPr lang="en-US" sz="2000" dirty="0"/>
-          </a:p>
-        </p:txBody>
-      </p:sp>
-      <p:sp>
-        <p:nvSpPr>
-          <p:cNvPr id="10" name="Text 8"/>
-          <p:cNvSpPr/>
-          <p:nvPr/>
-        </p:nvSpPr>
-        <p:spPr>
-          <a:xfrm>
-            <a:off x="3749040" y="3182112"/>
-            <a:ext cx="7589520" cy="621792"/>
-          </a:xfrm>
-          <a:prstGeom prst="rect">
-            <a:avLst/>
-          </a:prstGeom>
-          <a:noFill/>
-          <a:ln/>
-        </p:spPr>
-        <p:txBody>
-          <a:bodyPr wrap="square" lIns="0" tIns="0" rIns="0" bIns="0" rtlCol="0" anchor="ctr"/>
-          <a:lstStyle/>
-          <a:p>
-            <a:pPr indent="0" marL="0">
-              <a:buNone/>
-            </a:pPr>
-            <a:r>
-              <a:rPr lang="en-US" sz="1600" dirty="0">
-                <a:solidFill>
-                  <a:srgbClr val="E8EDF2"/>
-                </a:solidFill>
-                <a:latin typeface="Malgun Gothic" pitchFamily="34" charset="0"/>
-                <a:ea typeface="Malgun Gothic" pitchFamily="34" charset="-122"/>
-                <a:cs typeface="Malgun Gothic" pitchFamily="34" charset="-120"/>
-              </a:rPr>
-              <a:t>지금 이 스레드의 번호 (블록 안에서)</a:t>
-            </a:r>
-            <a:endParaRPr lang="en-US" sz="1600" dirty="0"/>
-          </a:p>
-        </p:txBody>
-      </p:sp>
-      <p:sp>
-        <p:nvSpPr>
-          <p:cNvPr id="11" name="Shape 9"/>
-          <p:cNvSpPr/>
-          <p:nvPr/>
-        </p:nvSpPr>
-        <p:spPr>
-          <a:xfrm>
-            <a:off x="548640" y="4041648"/>
-            <a:ext cx="11064240" cy="841248"/>
+              <a:t>T0</a:t>
+            </a:r>
+            <a:endParaRPr lang="en-US" sz="1300" dirty="0"/>
+          </a:p>
+        </p:txBody>
+      </p:sp>
+      <p:sp>
+        <p:nvSpPr>
+          <p:cNvPr id="42" name="Shape 40"/>
+          <p:cNvSpPr/>
+          <p:nvPr/>
+        </p:nvSpPr>
+        <p:spPr>
+          <a:xfrm>
+            <a:off x="8915400" y="2788920"/>
+            <a:ext cx="658368" cy="658368"/>
           </a:xfrm>
           <a:prstGeom prst="roundRect">
             <a:avLst>
-              <a:gd name="adj" fmla="val 7609"/>
+              <a:gd name="adj" fmla="val 5556"/>
             </a:avLst>
           </a:prstGeom>
           <a:solidFill>
-            <a:srgbClr val="1E232C"/>
+            <a:srgbClr val="0E1116"/>
           </a:solidFill>
-          <a:ln/>
-        </p:spPr>
-      </p:sp>
-      <p:sp>
-        <p:nvSpPr>
-          <p:cNvPr id="12" name="Text 10"/>
-          <p:cNvSpPr/>
-          <p:nvPr/>
-        </p:nvSpPr>
-        <p:spPr>
-          <a:xfrm>
-            <a:off x="822960" y="4151376"/>
-            <a:ext cx="2743200" cy="621792"/>
+          <a:ln w="12700">
+            <a:solidFill>
+              <a:srgbClr val="2C3440"/>
+            </a:solidFill>
+            <a:prstDash val="solid"/>
+          </a:ln>
+        </p:spPr>
+      </p:sp>
+      <p:sp>
+        <p:nvSpPr>
+          <p:cNvPr id="43" name="Text 41"/>
+          <p:cNvSpPr/>
+          <p:nvPr/>
+        </p:nvSpPr>
+        <p:spPr>
+          <a:xfrm>
+            <a:off x="8915400" y="2788920"/>
+            <a:ext cx="658368" cy="658368"/>
           </a:xfrm>
           <a:prstGeom prst="rect">
             <a:avLst/>
@@ -7853,95 +9492,61 @@
           <a:bodyPr wrap="square" lIns="0" tIns="0" rIns="0" bIns="0" rtlCol="0" anchor="ctr"/>
           <a:lstStyle/>
           <a:p>
-            <a:pPr indent="0" marL="0">
-              <a:buNone/>
-            </a:pPr>
-            <a:r>
-              <a:rPr lang="en-US" sz="2000" b="1" dirty="0">
-                <a:solidFill>
-                  <a:srgbClr val="4FB0C6"/>
+            <a:pPr algn="ctr" indent="0" marL="0">
+              <a:buNone/>
+            </a:pPr>
+            <a:r>
+              <a:rPr lang="en-US" sz="1300" b="1" dirty="0">
+                <a:solidFill>
+                  <a:srgbClr val="E8EDF2"/>
                 </a:solidFill>
                 <a:latin typeface="Courier New" pitchFamily="34" charset="0"/>
                 <a:ea typeface="Courier New" pitchFamily="34" charset="-122"/>
                 <a:cs typeface="Courier New" pitchFamily="34" charset="-120"/>
               </a:rPr>
-              <a:t>blockDim</a:t>
-            </a:r>
-            <a:endParaRPr lang="en-US" sz="2000" dirty="0"/>
-          </a:p>
-        </p:txBody>
-      </p:sp>
-      <p:sp>
-        <p:nvSpPr>
-          <p:cNvPr id="13" name="Text 11"/>
-          <p:cNvSpPr/>
-          <p:nvPr/>
-        </p:nvSpPr>
-        <p:spPr>
-          <a:xfrm>
-            <a:off x="3749040" y="4151376"/>
-            <a:ext cx="7589520" cy="621792"/>
-          </a:xfrm>
-          <a:prstGeom prst="rect">
-            <a:avLst/>
-          </a:prstGeom>
-          <a:noFill/>
-          <a:ln/>
-        </p:spPr>
-        <p:txBody>
-          <a:bodyPr wrap="square" lIns="0" tIns="0" rIns="0" bIns="0" rtlCol="0" anchor="ctr"/>
-          <a:lstStyle/>
-          <a:p>
-            <a:pPr indent="0" marL="0">
-              <a:buNone/>
-            </a:pPr>
-            <a:r>
-              <a:rPr lang="en-US" sz="1600" dirty="0">
-                <a:solidFill>
-                  <a:srgbClr val="E8EDF2"/>
-                </a:solidFill>
-                <a:latin typeface="Malgun Gothic" pitchFamily="34" charset="0"/>
-                <a:ea typeface="Malgun Gothic" pitchFamily="34" charset="-122"/>
-                <a:cs typeface="Malgun Gothic" pitchFamily="34" charset="-120"/>
-              </a:rPr>
-              <a:t>블록당 스레드 수 (블록 크기)</a:t>
-            </a:r>
-            <a:endParaRPr lang="en-US" sz="1600" dirty="0"/>
-          </a:p>
-        </p:txBody>
-      </p:sp>
-      <p:sp>
-        <p:nvSpPr>
-          <p:cNvPr id="14" name="Shape 12"/>
-          <p:cNvSpPr/>
-          <p:nvPr/>
-        </p:nvSpPr>
-        <p:spPr>
-          <a:xfrm>
-            <a:off x="548640" y="5010912"/>
-            <a:ext cx="11064240" cy="841248"/>
+              <a:t>T1</a:t>
+            </a:r>
+            <a:endParaRPr lang="en-US" sz="1300" dirty="0"/>
+          </a:p>
+        </p:txBody>
+      </p:sp>
+      <p:sp>
+        <p:nvSpPr>
+          <p:cNvPr id="44" name="Shape 42"/>
+          <p:cNvSpPr/>
+          <p:nvPr/>
+        </p:nvSpPr>
+        <p:spPr>
+          <a:xfrm>
+            <a:off x="9738360" y="2788920"/>
+            <a:ext cx="658368" cy="658368"/>
           </a:xfrm>
           <a:prstGeom prst="roundRect">
             <a:avLst>
-              <a:gd name="adj" fmla="val 7609"/>
+              <a:gd name="adj" fmla="val 5556"/>
             </a:avLst>
           </a:prstGeom>
           <a:solidFill>
-            <a:srgbClr val="1E232C"/>
+            <a:srgbClr val="0E1116"/>
           </a:solidFill>
-          <a:ln/>
-        </p:spPr>
-      </p:sp>
-      <p:sp>
-        <p:nvSpPr>
-          <p:cNvPr id="15" name="Text 13"/>
-          <p:cNvSpPr/>
-          <p:nvPr/>
-        </p:nvSpPr>
-        <p:spPr>
-          <a:xfrm>
-            <a:off x="822960" y="5120640"/>
-            <a:ext cx="2743200" cy="621792"/>
+          <a:ln w="12700">
+            <a:solidFill>
+              <a:srgbClr val="2C3440"/>
+            </a:solidFill>
+            <a:prstDash val="solid"/>
+          </a:ln>
+        </p:spPr>
+      </p:sp>
+      <p:sp>
+        <p:nvSpPr>
+          <p:cNvPr id="45" name="Text 43"/>
+          <p:cNvSpPr/>
+          <p:nvPr/>
+        </p:nvSpPr>
+        <p:spPr>
+          <a:xfrm>
+            <a:off x="9738360" y="2788920"/>
+            <a:ext cx="658368" cy="658368"/>
           </a:xfrm>
           <a:prstGeom prst="rect">
             <a:avLst/>
@@ -7953,34 +9558,61 @@
           <a:bodyPr wrap="square" lIns="0" tIns="0" rIns="0" bIns="0" rtlCol="0" anchor="ctr"/>
           <a:lstStyle/>
           <a:p>
-            <a:pPr indent="0" marL="0">
-              <a:buNone/>
-            </a:pPr>
-            <a:r>
-              <a:rPr lang="en-US" sz="2000" b="1" dirty="0">
-                <a:solidFill>
-                  <a:srgbClr val="8CC63F"/>
+            <a:pPr algn="ctr" indent="0" marL="0">
+              <a:buNone/>
+            </a:pPr>
+            <a:r>
+              <a:rPr lang="en-US" sz="1300" b="1" dirty="0">
+                <a:solidFill>
+                  <a:srgbClr val="E8EDF2"/>
                 </a:solidFill>
                 <a:latin typeface="Courier New" pitchFamily="34" charset="0"/>
                 <a:ea typeface="Courier New" pitchFamily="34" charset="-122"/>
                 <a:cs typeface="Courier New" pitchFamily="34" charset="-120"/>
               </a:rPr>
-              <a:t>gridDim</a:t>
-            </a:r>
-            <a:endParaRPr lang="en-US" sz="2000" dirty="0"/>
-          </a:p>
-        </p:txBody>
-      </p:sp>
-      <p:sp>
-        <p:nvSpPr>
-          <p:cNvPr id="16" name="Text 14"/>
-          <p:cNvSpPr/>
-          <p:nvPr/>
-        </p:nvSpPr>
-        <p:spPr>
-          <a:xfrm>
-            <a:off x="3749040" y="5120640"/>
-            <a:ext cx="7589520" cy="621792"/>
+              <a:t>T2</a:t>
+            </a:r>
+            <a:endParaRPr lang="en-US" sz="1300" dirty="0"/>
+          </a:p>
+        </p:txBody>
+      </p:sp>
+      <p:sp>
+        <p:nvSpPr>
+          <p:cNvPr id="46" name="Shape 44"/>
+          <p:cNvSpPr/>
+          <p:nvPr/>
+        </p:nvSpPr>
+        <p:spPr>
+          <a:xfrm>
+            <a:off x="10561320" y="2788920"/>
+            <a:ext cx="658368" cy="658368"/>
+          </a:xfrm>
+          <a:prstGeom prst="roundRect">
+            <a:avLst>
+              <a:gd name="adj" fmla="val 5556"/>
+            </a:avLst>
+          </a:prstGeom>
+          <a:solidFill>
+            <a:srgbClr val="0E1116"/>
+          </a:solidFill>
+          <a:ln w="12700">
+            <a:solidFill>
+              <a:srgbClr val="2C3440"/>
+            </a:solidFill>
+            <a:prstDash val="solid"/>
+          </a:ln>
+        </p:spPr>
+      </p:sp>
+      <p:sp>
+        <p:nvSpPr>
+          <p:cNvPr id="47" name="Text 45"/>
+          <p:cNvSpPr/>
+          <p:nvPr/>
+        </p:nvSpPr>
+        <p:spPr>
+          <a:xfrm>
+            <a:off x="10561320" y="2788920"/>
+            <a:ext cx="658368" cy="658368"/>
           </a:xfrm>
           <a:prstGeom prst="rect">
             <a:avLst/>
@@ -7992,11 +9624,398 @@
           <a:bodyPr wrap="square" lIns="0" tIns="0" rIns="0" bIns="0" rtlCol="0" anchor="ctr"/>
           <a:lstStyle/>
           <a:p>
+            <a:pPr algn="ctr" indent="0" marL="0">
+              <a:buNone/>
+            </a:pPr>
+            <a:r>
+              <a:rPr lang="en-US" sz="1300" b="1" dirty="0">
+                <a:solidFill>
+                  <a:srgbClr val="E8EDF2"/>
+                </a:solidFill>
+                <a:latin typeface="Courier New" pitchFamily="34" charset="0"/>
+                <a:ea typeface="Courier New" pitchFamily="34" charset="-122"/>
+                <a:cs typeface="Courier New" pitchFamily="34" charset="-120"/>
+              </a:rPr>
+              <a:t>T3</a:t>
+            </a:r>
+            <a:endParaRPr lang="en-US" sz="1300" dirty="0"/>
+          </a:p>
+        </p:txBody>
+      </p:sp>
+      <p:sp>
+        <p:nvSpPr>
+          <p:cNvPr id="48" name="Shape 46"/>
+          <p:cNvSpPr/>
+          <p:nvPr/>
+        </p:nvSpPr>
+        <p:spPr>
+          <a:xfrm>
+            <a:off x="8092440" y="3675888"/>
+            <a:ext cx="658368" cy="658368"/>
+          </a:xfrm>
+          <a:prstGeom prst="roundRect">
+            <a:avLst>
+              <a:gd name="adj" fmla="val 5556"/>
+            </a:avLst>
+          </a:prstGeom>
+          <a:solidFill>
+            <a:srgbClr val="0E1116"/>
+          </a:solidFill>
+          <a:ln w="12700">
+            <a:solidFill>
+              <a:srgbClr val="2C3440"/>
+            </a:solidFill>
+            <a:prstDash val="solid"/>
+          </a:ln>
+        </p:spPr>
+      </p:sp>
+      <p:sp>
+        <p:nvSpPr>
+          <p:cNvPr id="49" name="Text 47"/>
+          <p:cNvSpPr/>
+          <p:nvPr/>
+        </p:nvSpPr>
+        <p:spPr>
+          <a:xfrm>
+            <a:off x="8092440" y="3675888"/>
+            <a:ext cx="658368" cy="658368"/>
+          </a:xfrm>
+          <a:prstGeom prst="rect">
+            <a:avLst/>
+          </a:prstGeom>
+          <a:noFill/>
+          <a:ln/>
+        </p:spPr>
+        <p:txBody>
+          <a:bodyPr wrap="square" lIns="0" tIns="0" rIns="0" bIns="0" rtlCol="0" anchor="ctr"/>
+          <a:lstStyle/>
+          <a:p>
+            <a:pPr algn="ctr" indent="0" marL="0">
+              <a:buNone/>
+            </a:pPr>
+            <a:r>
+              <a:rPr lang="en-US" sz="1300" b="1" dirty="0">
+                <a:solidFill>
+                  <a:srgbClr val="E8EDF2"/>
+                </a:solidFill>
+                <a:latin typeface="Courier New" pitchFamily="34" charset="0"/>
+                <a:ea typeface="Courier New" pitchFamily="34" charset="-122"/>
+                <a:cs typeface="Courier New" pitchFamily="34" charset="-120"/>
+              </a:rPr>
+              <a:t>T4</a:t>
+            </a:r>
+            <a:endParaRPr lang="en-US" sz="1300" dirty="0"/>
+          </a:p>
+        </p:txBody>
+      </p:sp>
+      <p:sp>
+        <p:nvSpPr>
+          <p:cNvPr id="50" name="Shape 48"/>
+          <p:cNvSpPr/>
+          <p:nvPr/>
+        </p:nvSpPr>
+        <p:spPr>
+          <a:xfrm>
+            <a:off x="8915400" y="3675888"/>
+            <a:ext cx="658368" cy="658368"/>
+          </a:xfrm>
+          <a:prstGeom prst="roundRect">
+            <a:avLst>
+              <a:gd name="adj" fmla="val 5556"/>
+            </a:avLst>
+          </a:prstGeom>
+          <a:solidFill>
+            <a:srgbClr val="0E1116"/>
+          </a:solidFill>
+          <a:ln w="12700">
+            <a:solidFill>
+              <a:srgbClr val="2C3440"/>
+            </a:solidFill>
+            <a:prstDash val="solid"/>
+          </a:ln>
+        </p:spPr>
+      </p:sp>
+      <p:sp>
+        <p:nvSpPr>
+          <p:cNvPr id="51" name="Text 49"/>
+          <p:cNvSpPr/>
+          <p:nvPr/>
+        </p:nvSpPr>
+        <p:spPr>
+          <a:xfrm>
+            <a:off x="8915400" y="3675888"/>
+            <a:ext cx="658368" cy="658368"/>
+          </a:xfrm>
+          <a:prstGeom prst="rect">
+            <a:avLst/>
+          </a:prstGeom>
+          <a:noFill/>
+          <a:ln/>
+        </p:spPr>
+        <p:txBody>
+          <a:bodyPr wrap="square" lIns="0" tIns="0" rIns="0" bIns="0" rtlCol="0" anchor="ctr"/>
+          <a:lstStyle/>
+          <a:p>
+            <a:pPr algn="ctr" indent="0" marL="0">
+              <a:buNone/>
+            </a:pPr>
+            <a:r>
+              <a:rPr lang="en-US" sz="1300" b="1" dirty="0">
+                <a:solidFill>
+                  <a:srgbClr val="E8EDF2"/>
+                </a:solidFill>
+                <a:latin typeface="Courier New" pitchFamily="34" charset="0"/>
+                <a:ea typeface="Courier New" pitchFamily="34" charset="-122"/>
+                <a:cs typeface="Courier New" pitchFamily="34" charset="-120"/>
+              </a:rPr>
+              <a:t>T5</a:t>
+            </a:r>
+            <a:endParaRPr lang="en-US" sz="1300" dirty="0"/>
+          </a:p>
+        </p:txBody>
+      </p:sp>
+      <p:sp>
+        <p:nvSpPr>
+          <p:cNvPr id="52" name="Shape 50"/>
+          <p:cNvSpPr/>
+          <p:nvPr/>
+        </p:nvSpPr>
+        <p:spPr>
+          <a:xfrm>
+            <a:off x="9738360" y="3675888"/>
+            <a:ext cx="658368" cy="658368"/>
+          </a:xfrm>
+          <a:prstGeom prst="roundRect">
+            <a:avLst>
+              <a:gd name="adj" fmla="val 5556"/>
+            </a:avLst>
+          </a:prstGeom>
+          <a:solidFill>
+            <a:srgbClr val="0E1116"/>
+          </a:solidFill>
+          <a:ln w="12700">
+            <a:solidFill>
+              <a:srgbClr val="2C3440"/>
+            </a:solidFill>
+            <a:prstDash val="solid"/>
+          </a:ln>
+        </p:spPr>
+      </p:sp>
+      <p:sp>
+        <p:nvSpPr>
+          <p:cNvPr id="53" name="Text 51"/>
+          <p:cNvSpPr/>
+          <p:nvPr/>
+        </p:nvSpPr>
+        <p:spPr>
+          <a:xfrm>
+            <a:off x="9738360" y="3675888"/>
+            <a:ext cx="658368" cy="658368"/>
+          </a:xfrm>
+          <a:prstGeom prst="rect">
+            <a:avLst/>
+          </a:prstGeom>
+          <a:noFill/>
+          <a:ln/>
+        </p:spPr>
+        <p:txBody>
+          <a:bodyPr wrap="square" lIns="0" tIns="0" rIns="0" bIns="0" rtlCol="0" anchor="ctr"/>
+          <a:lstStyle/>
+          <a:p>
+            <a:pPr algn="ctr" indent="0" marL="0">
+              <a:buNone/>
+            </a:pPr>
+            <a:r>
+              <a:rPr lang="en-US" sz="1300" b="1" dirty="0">
+                <a:solidFill>
+                  <a:srgbClr val="E8EDF2"/>
+                </a:solidFill>
+                <a:latin typeface="Courier New" pitchFamily="34" charset="0"/>
+                <a:ea typeface="Courier New" pitchFamily="34" charset="-122"/>
+                <a:cs typeface="Courier New" pitchFamily="34" charset="-120"/>
+              </a:rPr>
+              <a:t>T6</a:t>
+            </a:r>
+            <a:endParaRPr lang="en-US" sz="1300" dirty="0"/>
+          </a:p>
+        </p:txBody>
+      </p:sp>
+      <p:sp>
+        <p:nvSpPr>
+          <p:cNvPr id="54" name="Shape 52"/>
+          <p:cNvSpPr/>
+          <p:nvPr/>
+        </p:nvSpPr>
+        <p:spPr>
+          <a:xfrm>
+            <a:off x="10561320" y="3675888"/>
+            <a:ext cx="658368" cy="658368"/>
+          </a:xfrm>
+          <a:prstGeom prst="roundRect">
+            <a:avLst>
+              <a:gd name="adj" fmla="val 5556"/>
+            </a:avLst>
+          </a:prstGeom>
+          <a:solidFill>
+            <a:srgbClr val="0E1116"/>
+          </a:solidFill>
+          <a:ln w="12700">
+            <a:solidFill>
+              <a:srgbClr val="2C3440"/>
+            </a:solidFill>
+            <a:prstDash val="solid"/>
+          </a:ln>
+        </p:spPr>
+      </p:sp>
+      <p:sp>
+        <p:nvSpPr>
+          <p:cNvPr id="55" name="Text 53"/>
+          <p:cNvSpPr/>
+          <p:nvPr/>
+        </p:nvSpPr>
+        <p:spPr>
+          <a:xfrm>
+            <a:off x="10561320" y="3675888"/>
+            <a:ext cx="658368" cy="658368"/>
+          </a:xfrm>
+          <a:prstGeom prst="rect">
+            <a:avLst/>
+          </a:prstGeom>
+          <a:noFill/>
+          <a:ln/>
+        </p:spPr>
+        <p:txBody>
+          <a:bodyPr wrap="square" lIns="0" tIns="0" rIns="0" bIns="0" rtlCol="0" anchor="ctr"/>
+          <a:lstStyle/>
+          <a:p>
+            <a:pPr algn="ctr" indent="0" marL="0">
+              <a:buNone/>
+            </a:pPr>
+            <a:r>
+              <a:rPr lang="en-US" sz="1300" b="1" dirty="0">
+                <a:solidFill>
+                  <a:srgbClr val="E8EDF2"/>
+                </a:solidFill>
+                <a:latin typeface="Courier New" pitchFamily="34" charset="0"/>
+                <a:ea typeface="Courier New" pitchFamily="34" charset="-122"/>
+                <a:cs typeface="Courier New" pitchFamily="34" charset="-120"/>
+              </a:rPr>
+              <a:t>T7</a:t>
+            </a:r>
+            <a:endParaRPr lang="en-US" sz="1300" dirty="0"/>
+          </a:p>
+        </p:txBody>
+      </p:sp>
+      <p:sp>
+        <p:nvSpPr>
+          <p:cNvPr id="56" name="Text 54"/>
+          <p:cNvSpPr/>
+          <p:nvPr/>
+        </p:nvSpPr>
+        <p:spPr>
+          <a:xfrm>
+            <a:off x="8092440" y="4517136"/>
+            <a:ext cx="3246120" cy="274320"/>
+          </a:xfrm>
+          <a:prstGeom prst="rect">
+            <a:avLst/>
+          </a:prstGeom>
+          <a:noFill/>
+          <a:ln/>
+        </p:spPr>
+        <p:txBody>
+          <a:bodyPr wrap="square" lIns="0" tIns="0" rIns="0" bIns="0" rtlCol="0" anchor="ctr"/>
+          <a:lstStyle/>
+          <a:p>
             <a:pPr indent="0" marL="0">
               <a:buNone/>
             </a:pPr>
             <a:r>
-              <a:rPr lang="en-US" sz="1600" dirty="0">
+              <a:rPr lang="en-US" sz="1050" i="1" dirty="0">
+                <a:solidFill>
+                  <a:srgbClr val="9AA6B2"/>
+                </a:solidFill>
+                <a:latin typeface="Malgun Gothic" pitchFamily="34" charset="0"/>
+                <a:ea typeface="Malgun Gothic" pitchFamily="34" charset="-122"/>
+                <a:cs typeface="Malgun Gothic" pitchFamily="34" charset="-120"/>
+              </a:rPr>
+              <a:t>… threadIdx.x = 0 ~ (blockDim.x − 1)</a:t>
+            </a:r>
+            <a:endParaRPr lang="en-US" sz="1050" dirty="0"/>
+          </a:p>
+        </p:txBody>
+      </p:sp>
+      <p:sp>
+        <p:nvSpPr>
+          <p:cNvPr id="57" name="Shape 55"/>
+          <p:cNvSpPr/>
+          <p:nvPr/>
+        </p:nvSpPr>
+        <p:spPr>
+          <a:xfrm>
+            <a:off x="7818120" y="4846320"/>
+            <a:ext cx="3794760" cy="822960"/>
+          </a:xfrm>
+          <a:prstGeom prst="roundRect">
+            <a:avLst>
+              <a:gd name="adj" fmla="val 5556"/>
+            </a:avLst>
+          </a:prstGeom>
+          <a:solidFill>
+            <a:srgbClr val="1A2418"/>
+          </a:solidFill>
+          <a:ln/>
+        </p:spPr>
+      </p:sp>
+      <p:sp>
+        <p:nvSpPr>
+          <p:cNvPr id="58" name="Text 56"/>
+          <p:cNvSpPr/>
+          <p:nvPr/>
+        </p:nvSpPr>
+        <p:spPr>
+          <a:xfrm>
+            <a:off x="8001000" y="4919472"/>
+            <a:ext cx="3429000" cy="731520"/>
+          </a:xfrm>
+          <a:prstGeom prst="rect">
+            <a:avLst/>
+          </a:prstGeom>
+          <a:noFill/>
+          <a:ln/>
+        </p:spPr>
+        <p:txBody>
+          <a:bodyPr wrap="square" lIns="0" tIns="0" rIns="0" bIns="0" rtlCol="0" anchor="t"/>
+          <a:lstStyle/>
+          <a:p>
+            <a:pPr indent="0" marL="0">
+              <a:lnSpc>
+                <a:spcPct val="102000"/>
+              </a:lnSpc>
+              <a:buNone/>
+            </a:pPr>
+            <a:r>
+              <a:rPr lang="en-US" sz="1100" b="1" dirty="0">
+                <a:solidFill>
+                  <a:srgbClr val="E0A458"/>
+                </a:solidFill>
+                <a:latin typeface="Malgun Gothic" pitchFamily="34" charset="0"/>
+                <a:ea typeface="Malgun Gothic" pitchFamily="34" charset="-122"/>
+                <a:cs typeface="Malgun Gothic" pitchFamily="34" charset="-120"/>
+              </a:rPr>
+              <a:t>이 저장소:</a:t>
+            </a:r>
+            <a:endParaRPr lang="en-US" sz="1100" dirty="0"/>
+          </a:p>
+          <a:p>
+            <a:pPr indent="0" marL="0">
+              <a:lnSpc>
+                <a:spcPct val="102000"/>
+              </a:lnSpc>
+              <a:buNone/>
+            </a:pPr>
+            <a:r>
+              <a:rPr lang="en-US" sz="1100" dirty="0">
                 <a:solidFill>
                   <a:srgbClr val="E8EDF2"/>
                 </a:solidFill>
@@ -8004,48 +10023,29 @@
                 <a:ea typeface="Malgun Gothic" pitchFamily="34" charset="-122"/>
                 <a:cs typeface="Malgun Gothic" pitchFamily="34" charset="-120"/>
               </a:rPr>
-              <a:t>그리드의 블록 수 (그리드 크기)</a:t>
-            </a:r>
-            <a:endParaRPr lang="en-US" sz="1600" dirty="0"/>
-          </a:p>
-        </p:txBody>
-      </p:sp>
-      <p:sp>
-        <p:nvSpPr>
-          <p:cNvPr id="17" name="Text 15"/>
-          <p:cNvSpPr/>
-          <p:nvPr/>
-        </p:nvSpPr>
-        <p:spPr>
-          <a:xfrm>
-            <a:off x="548640" y="6172200"/>
-            <a:ext cx="11064240" cy="365760"/>
-          </a:xfrm>
-          <a:prstGeom prst="rect">
-            <a:avLst/>
-          </a:prstGeom>
-          <a:noFill/>
-          <a:ln/>
-        </p:spPr>
-        <p:txBody>
-          <a:bodyPr wrap="square" lIns="0" tIns="0" rIns="0" bIns="0" rtlCol="0" anchor="ctr"/>
-          <a:lstStyle/>
+              <a:t>Test 0~9 → 블록당 스레드 1개</a:t>
+            </a:r>
+            <a:endParaRPr lang="en-US" sz="1100" dirty="0"/>
+          </a:p>
           <a:p>
             <a:pPr indent="0" marL="0">
-              <a:buNone/>
-            </a:pPr>
-            <a:r>
-              <a:rPr lang="en-US" sz="1300" i="1" dirty="0">
-                <a:solidFill>
-                  <a:srgbClr val="9AA6B2"/>
-                </a:solidFill>
-                <a:latin typeface="Malgun Gothic" pitchFamily="34" charset="0"/>
-                <a:ea typeface="Malgun Gothic" pitchFamily="34" charset="-122"/>
-                <a:cs typeface="Malgun Gothic" pitchFamily="34" charset="-120"/>
-              </a:rPr>
-              <a:t>이 저장소는 .x 만 씁니다 (1차원). 실전에선 .x/.y/.z 로 2·3차원도 가능합니다.</a:t>
-            </a:r>
-            <a:endParaRPr lang="en-US" sz="1300" dirty="0"/>
+              <a:lnSpc>
+                <a:spcPct val="102000"/>
+              </a:lnSpc>
+              <a:buNone/>
+            </a:pPr>
+            <a:r>
+              <a:rPr lang="en-US" sz="1100" dirty="0">
+                <a:solidFill>
+                  <a:srgbClr val="E8EDF2"/>
+                </a:solidFill>
+                <a:latin typeface="Malgun Gothic" pitchFamily="34" charset="0"/>
+                <a:ea typeface="Malgun Gothic" pitchFamily="34" charset="-122"/>
+                <a:cs typeface="Malgun Gothic" pitchFamily="34" charset="-120"/>
+              </a:rPr>
+              <a:t>Test 10 → 블록당 64개</a:t>
+            </a:r>
+            <a:endParaRPr lang="en-US" sz="1100" dirty="0"/>
           </a:p>
         </p:txBody>
       </p:sp>
@@ -8118,7 +10118,7 @@
                 <a:ea typeface="Courier New" pitchFamily="34" charset="-122"/>
                 <a:cs typeface="Courier New" pitchFamily="34" charset="-120"/>
               </a:rPr>
-              <a:t>6</a:t>
+              <a:t>5</a:t>
             </a:r>
             <a:endParaRPr lang="en-US" sz="2200" dirty="0"/>
           </a:p>
@@ -8157,7 +10157,7 @@
                 <a:ea typeface="Malgun Gothic" pitchFamily="34" charset="-122"/>
                 <a:cs typeface="Malgun Gothic" pitchFamily="34" charset="-120"/>
               </a:rPr>
-              <a:t>이 저장소의 관례 · 블록 1개 = 1 MB</a:t>
+              <a:t>내장 변수 · 스레드의 신분증</a:t>
             </a:r>
             <a:endParaRPr lang="en-US" sz="3000" dirty="0"/>
           </a:p>
@@ -8165,164 +10165,414 @@
       </p:sp>
       <p:sp>
         <p:nvSpPr>
-          <p:cNvPr id="4" name="Shape 2"/>
-          <p:cNvSpPr/>
-          <p:nvPr/>
-        </p:nvSpPr>
-        <p:spPr>
-          <a:xfrm>
-            <a:off x="548640" y="1554480"/>
-            <a:ext cx="11064240" cy="1234440"/>
+          <p:cNvPr id="4" name="Text 2"/>
+          <p:cNvSpPr/>
+          <p:nvPr/>
+        </p:nvSpPr>
+        <p:spPr>
+          <a:xfrm>
+            <a:off x="548640" y="1463040"/>
+            <a:ext cx="11064240" cy="457200"/>
+          </a:xfrm>
+          <a:prstGeom prst="rect">
+            <a:avLst/>
+          </a:prstGeom>
+          <a:noFill/>
+          <a:ln/>
+        </p:spPr>
+        <p:txBody>
+          <a:bodyPr wrap="square" lIns="0" tIns="0" rIns="0" bIns="0" rtlCol="0" anchor="ctr"/>
+          <a:lstStyle/>
+          <a:p>
+            <a:pPr indent="0" marL="0">
+              <a:buNone/>
+            </a:pPr>
+            <a:r>
+              <a:rPr lang="en-US" sz="1600" dirty="0">
+                <a:solidFill>
+                  <a:srgbClr val="9AA6B2"/>
+                </a:solidFill>
+                <a:latin typeface="Malgun Gothic" pitchFamily="34" charset="0"/>
+                <a:ea typeface="Malgun Gothic" pitchFamily="34" charset="-122"/>
+                <a:cs typeface="Malgun Gothic" pitchFamily="34" charset="-120"/>
+              </a:rPr>
+              <a:t>커널 안에서 자동으로 주어지는 값들. 이것으로 '내가 몇 번째 스레드인지'를 계산합니다.</a:t>
+            </a:r>
+            <a:endParaRPr lang="en-US" sz="1600" dirty="0"/>
+          </a:p>
+        </p:txBody>
+      </p:sp>
+      <p:sp>
+        <p:nvSpPr>
+          <p:cNvPr id="5" name="Shape 3"/>
+          <p:cNvSpPr/>
+          <p:nvPr/>
+        </p:nvSpPr>
+        <p:spPr>
+          <a:xfrm>
+            <a:off x="548640" y="2103120"/>
+            <a:ext cx="11064240" cy="841248"/>
           </a:xfrm>
           <a:prstGeom prst="roundRect">
             <a:avLst>
-              <a:gd name="adj" fmla="val 4444"/>
+              <a:gd name="adj" fmla="val 7609"/>
             </a:avLst>
           </a:prstGeom>
           <a:solidFill>
-            <a:srgbClr val="0E1116"/>
+            <a:srgbClr val="1E232C"/>
           </a:solidFill>
-          <a:ln w="12700">
-            <a:solidFill>
-              <a:srgbClr val="2C3440"/>
-            </a:solidFill>
-            <a:prstDash val="solid"/>
-          </a:ln>
-        </p:spPr>
-      </p:sp>
-      <p:sp>
-        <p:nvSpPr>
-          <p:cNvPr id="5" name="Text 3"/>
-          <p:cNvSpPr/>
-          <p:nvPr/>
-        </p:nvSpPr>
-        <p:spPr>
-          <a:xfrm>
-            <a:off x="749808" y="1700784"/>
-            <a:ext cx="10661904" cy="941832"/>
-          </a:xfrm>
-          <a:prstGeom prst="rect">
-            <a:avLst/>
-          </a:prstGeom>
-          <a:noFill/>
-          <a:ln/>
-        </p:spPr>
-        <p:txBody>
-          <a:bodyPr wrap="square" lIns="0" tIns="0" rIns="0" bIns="0" rtlCol="0" anchor="t"/>
-          <a:lstStyle/>
-          <a:p>
-            <a:pPr algn="l" indent="0" marL="0">
-              <a:lnSpc>
-                <a:spcPct val="108000"/>
-              </a:lnSpc>
-              <a:buNone/>
-            </a:pPr>
-            <a:r>
-              <a:rPr lang="en-US" sz="1400" dirty="0">
-                <a:solidFill>
-                  <a:srgbClr val="9AA6B2"/>
+          <a:ln/>
+        </p:spPr>
+      </p:sp>
+      <p:sp>
+        <p:nvSpPr>
+          <p:cNvPr id="6" name="Text 4"/>
+          <p:cNvSpPr/>
+          <p:nvPr/>
+        </p:nvSpPr>
+        <p:spPr>
+          <a:xfrm>
+            <a:off x="822960" y="2212848"/>
+            <a:ext cx="2743200" cy="621792"/>
+          </a:xfrm>
+          <a:prstGeom prst="rect">
+            <a:avLst/>
+          </a:prstGeom>
+          <a:noFill/>
+          <a:ln/>
+        </p:spPr>
+        <p:txBody>
+          <a:bodyPr wrap="square" lIns="0" tIns="0" rIns="0" bIns="0" rtlCol="0" anchor="ctr"/>
+          <a:lstStyle/>
+          <a:p>
+            <a:pPr indent="0" marL="0">
+              <a:buNone/>
+            </a:pPr>
+            <a:r>
+              <a:rPr lang="en-US" sz="2000" b="1" dirty="0">
+                <a:solidFill>
+                  <a:srgbClr val="8CC63F"/>
                 </a:solidFill>
                 <a:latin typeface="Courier New" pitchFamily="34" charset="0"/>
                 <a:ea typeface="Courier New" pitchFamily="34" charset="-122"/>
                 <a:cs typeface="Courier New" pitchFamily="34" charset="-120"/>
               </a:rPr>
-              <a:t>#define BLOCKSIZE ((unsigned long)(1024*1024))   // = 1 MB</a:t>
-            </a:r>
-            <a:endParaRPr lang="en-US" sz="1400" dirty="0"/>
-          </a:p>
-          <a:p>
-            <a:pPr algn="l" indent="0" marL="0">
-              <a:lnSpc>
-                <a:spcPct val="108000"/>
-              </a:lnSpc>
-              <a:buNone/>
-            </a:pPr>
-            <a:r>
-              <a:rPr lang="en-US" sz="1400" dirty="0">
+              <a:t>blockIdx</a:t>
+            </a:r>
+            <a:endParaRPr lang="en-US" sz="2000" dirty="0"/>
+          </a:p>
+        </p:txBody>
+      </p:sp>
+      <p:sp>
+        <p:nvSpPr>
+          <p:cNvPr id="7" name="Text 5"/>
+          <p:cNvSpPr/>
+          <p:nvPr/>
+        </p:nvSpPr>
+        <p:spPr>
+          <a:xfrm>
+            <a:off x="3749040" y="2212848"/>
+            <a:ext cx="7589520" cy="621792"/>
+          </a:xfrm>
+          <a:prstGeom prst="rect">
+            <a:avLst/>
+          </a:prstGeom>
+          <a:noFill/>
+          <a:ln/>
+        </p:spPr>
+        <p:txBody>
+          <a:bodyPr wrap="square" lIns="0" tIns="0" rIns="0" bIns="0" rtlCol="0" anchor="ctr"/>
+          <a:lstStyle/>
+          <a:p>
+            <a:pPr indent="0" marL="0">
+              <a:buNone/>
+            </a:pPr>
+            <a:r>
+              <a:rPr lang="en-US" sz="1600" dirty="0">
                 <a:solidFill>
                   <a:srgbClr val="E8EDF2"/>
+                </a:solidFill>
+                <a:latin typeface="Malgun Gothic" pitchFamily="34" charset="0"/>
+                <a:ea typeface="Malgun Gothic" pitchFamily="34" charset="-122"/>
+                <a:cs typeface="Malgun Gothic" pitchFamily="34" charset="-120"/>
+              </a:rPr>
+              <a:t>지금 이 블록의 번호 (그리드 안에서)</a:t>
+            </a:r>
+            <a:endParaRPr lang="en-US" sz="1600" dirty="0"/>
+          </a:p>
+        </p:txBody>
+      </p:sp>
+      <p:sp>
+        <p:nvSpPr>
+          <p:cNvPr id="8" name="Shape 6"/>
+          <p:cNvSpPr/>
+          <p:nvPr/>
+        </p:nvSpPr>
+        <p:spPr>
+          <a:xfrm>
+            <a:off x="548640" y="3072384"/>
+            <a:ext cx="11064240" cy="841248"/>
+          </a:xfrm>
+          <a:prstGeom prst="roundRect">
+            <a:avLst>
+              <a:gd name="adj" fmla="val 7609"/>
+            </a:avLst>
+          </a:prstGeom>
+          <a:solidFill>
+            <a:srgbClr val="1E232C"/>
+          </a:solidFill>
+          <a:ln/>
+        </p:spPr>
+      </p:sp>
+      <p:sp>
+        <p:nvSpPr>
+          <p:cNvPr id="9" name="Text 7"/>
+          <p:cNvSpPr/>
+          <p:nvPr/>
+        </p:nvSpPr>
+        <p:spPr>
+          <a:xfrm>
+            <a:off x="822960" y="3182112"/>
+            <a:ext cx="2743200" cy="621792"/>
+          </a:xfrm>
+          <a:prstGeom prst="rect">
+            <a:avLst/>
+          </a:prstGeom>
+          <a:noFill/>
+          <a:ln/>
+        </p:spPr>
+        <p:txBody>
+          <a:bodyPr wrap="square" lIns="0" tIns="0" rIns="0" bIns="0" rtlCol="0" anchor="ctr"/>
+          <a:lstStyle/>
+          <a:p>
+            <a:pPr indent="0" marL="0">
+              <a:buNone/>
+            </a:pPr>
+            <a:r>
+              <a:rPr lang="en-US" sz="2000" b="1" dirty="0">
+                <a:solidFill>
+                  <a:srgbClr val="4FB0C6"/>
                 </a:solidFill>
                 <a:latin typeface="Courier New" pitchFamily="34" charset="0"/>
                 <a:ea typeface="Courier New" pitchFamily="34" charset="-122"/>
                 <a:cs typeface="Courier New" pitchFamily="34" charset="-120"/>
               </a:rPr>
-              <a:t>unsigned int* ptr = (unsigned int*)(_ptr + </a:t>
-            </a:r>
-            <a:pPr algn="l" indent="0" marL="0">
-              <a:lnSpc>
-                <a:spcPct val="108000"/>
-              </a:lnSpc>
-              <a:buNone/>
-            </a:pPr>
-            <a:r>
-              <a:rPr lang="en-US" sz="1400" b="1" dirty="0">
-                <a:solidFill>
-                  <a:srgbClr val="8CC63F"/>
+              <a:t>threadIdx</a:t>
+            </a:r>
+            <a:endParaRPr lang="en-US" sz="2000" dirty="0"/>
+          </a:p>
+        </p:txBody>
+      </p:sp>
+      <p:sp>
+        <p:nvSpPr>
+          <p:cNvPr id="10" name="Text 8"/>
+          <p:cNvSpPr/>
+          <p:nvPr/>
+        </p:nvSpPr>
+        <p:spPr>
+          <a:xfrm>
+            <a:off x="3749040" y="3182112"/>
+            <a:ext cx="7589520" cy="621792"/>
+          </a:xfrm>
+          <a:prstGeom prst="rect">
+            <a:avLst/>
+          </a:prstGeom>
+          <a:noFill/>
+          <a:ln/>
+        </p:spPr>
+        <p:txBody>
+          <a:bodyPr wrap="square" lIns="0" tIns="0" rIns="0" bIns="0" rtlCol="0" anchor="ctr"/>
+          <a:lstStyle/>
+          <a:p>
+            <a:pPr indent="0" marL="0">
+              <a:buNone/>
+            </a:pPr>
+            <a:r>
+              <a:rPr lang="en-US" sz="1600" dirty="0">
+                <a:solidFill>
+                  <a:srgbClr val="E8EDF2"/>
+                </a:solidFill>
+                <a:latin typeface="Malgun Gothic" pitchFamily="34" charset="0"/>
+                <a:ea typeface="Malgun Gothic" pitchFamily="34" charset="-122"/>
+                <a:cs typeface="Malgun Gothic" pitchFamily="34" charset="-120"/>
+              </a:rPr>
+              <a:t>지금 이 스레드의 번호 (블록 안에서)</a:t>
+            </a:r>
+            <a:endParaRPr lang="en-US" sz="1600" dirty="0"/>
+          </a:p>
+        </p:txBody>
+      </p:sp>
+      <p:sp>
+        <p:nvSpPr>
+          <p:cNvPr id="11" name="Shape 9"/>
+          <p:cNvSpPr/>
+          <p:nvPr/>
+        </p:nvSpPr>
+        <p:spPr>
+          <a:xfrm>
+            <a:off x="548640" y="4041648"/>
+            <a:ext cx="11064240" cy="841248"/>
+          </a:xfrm>
+          <a:prstGeom prst="roundRect">
+            <a:avLst>
+              <a:gd name="adj" fmla="val 7609"/>
+            </a:avLst>
+          </a:prstGeom>
+          <a:solidFill>
+            <a:srgbClr val="1E232C"/>
+          </a:solidFill>
+          <a:ln/>
+        </p:spPr>
+      </p:sp>
+      <p:sp>
+        <p:nvSpPr>
+          <p:cNvPr id="12" name="Text 10"/>
+          <p:cNvSpPr/>
+          <p:nvPr/>
+        </p:nvSpPr>
+        <p:spPr>
+          <a:xfrm>
+            <a:off x="822960" y="4151376"/>
+            <a:ext cx="2743200" cy="621792"/>
+          </a:xfrm>
+          <a:prstGeom prst="rect">
+            <a:avLst/>
+          </a:prstGeom>
+          <a:noFill/>
+          <a:ln/>
+        </p:spPr>
+        <p:txBody>
+          <a:bodyPr wrap="square" lIns="0" tIns="0" rIns="0" bIns="0" rtlCol="0" anchor="ctr"/>
+          <a:lstStyle/>
+          <a:p>
+            <a:pPr indent="0" marL="0">
+              <a:buNone/>
+            </a:pPr>
+            <a:r>
+              <a:rPr lang="en-US" sz="2000" b="1" dirty="0">
+                <a:solidFill>
+                  <a:srgbClr val="4FB0C6"/>
                 </a:solidFill>
                 <a:latin typeface="Courier New" pitchFamily="34" charset="0"/>
                 <a:ea typeface="Courier New" pitchFamily="34" charset="-122"/>
                 <a:cs typeface="Courier New" pitchFamily="34" charset="-120"/>
               </a:rPr>
-              <a:t>blockIdx.x * BLOCKSIZE</a:t>
-            </a:r>
-            <a:pPr algn="l" indent="0" marL="0">
-              <a:lnSpc>
-                <a:spcPct val="108000"/>
-              </a:lnSpc>
-              <a:buNone/>
-            </a:pPr>
-            <a:r>
-              <a:rPr lang="en-US" sz="1400" dirty="0">
+              <a:t>blockDim</a:t>
+            </a:r>
+            <a:endParaRPr lang="en-US" sz="2000" dirty="0"/>
+          </a:p>
+        </p:txBody>
+      </p:sp>
+      <p:sp>
+        <p:nvSpPr>
+          <p:cNvPr id="13" name="Text 11"/>
+          <p:cNvSpPr/>
+          <p:nvPr/>
+        </p:nvSpPr>
+        <p:spPr>
+          <a:xfrm>
+            <a:off x="3749040" y="4151376"/>
+            <a:ext cx="7589520" cy="621792"/>
+          </a:xfrm>
+          <a:prstGeom prst="rect">
+            <a:avLst/>
+          </a:prstGeom>
+          <a:noFill/>
+          <a:ln/>
+        </p:spPr>
+        <p:txBody>
+          <a:bodyPr wrap="square" lIns="0" tIns="0" rIns="0" bIns="0" rtlCol="0" anchor="ctr"/>
+          <a:lstStyle/>
+          <a:p>
+            <a:pPr indent="0" marL="0">
+              <a:buNone/>
+            </a:pPr>
+            <a:r>
+              <a:rPr lang="en-US" sz="1600" dirty="0">
                 <a:solidFill>
                   <a:srgbClr val="E8EDF2"/>
+                </a:solidFill>
+                <a:latin typeface="Malgun Gothic" pitchFamily="34" charset="0"/>
+                <a:ea typeface="Malgun Gothic" pitchFamily="34" charset="-122"/>
+                <a:cs typeface="Malgun Gothic" pitchFamily="34" charset="-120"/>
+              </a:rPr>
+              <a:t>블록당 스레드 수 (블록 크기)</a:t>
+            </a:r>
+            <a:endParaRPr lang="en-US" sz="1600" dirty="0"/>
+          </a:p>
+        </p:txBody>
+      </p:sp>
+      <p:sp>
+        <p:nvSpPr>
+          <p:cNvPr id="14" name="Shape 12"/>
+          <p:cNvSpPr/>
+          <p:nvPr/>
+        </p:nvSpPr>
+        <p:spPr>
+          <a:xfrm>
+            <a:off x="548640" y="5010912"/>
+            <a:ext cx="11064240" cy="841248"/>
+          </a:xfrm>
+          <a:prstGeom prst="roundRect">
+            <a:avLst>
+              <a:gd name="adj" fmla="val 7609"/>
+            </a:avLst>
+          </a:prstGeom>
+          <a:solidFill>
+            <a:srgbClr val="1E232C"/>
+          </a:solidFill>
+          <a:ln/>
+        </p:spPr>
+      </p:sp>
+      <p:sp>
+        <p:nvSpPr>
+          <p:cNvPr id="15" name="Text 13"/>
+          <p:cNvSpPr/>
+          <p:nvPr/>
+        </p:nvSpPr>
+        <p:spPr>
+          <a:xfrm>
+            <a:off x="822960" y="5120640"/>
+            <a:ext cx="2743200" cy="621792"/>
+          </a:xfrm>
+          <a:prstGeom prst="rect">
+            <a:avLst/>
+          </a:prstGeom>
+          <a:noFill/>
+          <a:ln/>
+        </p:spPr>
+        <p:txBody>
+          <a:bodyPr wrap="square" lIns="0" tIns="0" rIns="0" bIns="0" rtlCol="0" anchor="ctr"/>
+          <a:lstStyle/>
+          <a:p>
+            <a:pPr indent="0" marL="0">
+              <a:buNone/>
+            </a:pPr>
+            <a:r>
+              <a:rPr lang="en-US" sz="2000" b="1" dirty="0">
+                <a:solidFill>
+                  <a:srgbClr val="8CC63F"/>
                 </a:solidFill>
                 <a:latin typeface="Courier New" pitchFamily="34" charset="0"/>
                 <a:ea typeface="Courier New" pitchFamily="34" charset="-122"/>
                 <a:cs typeface="Courier New" pitchFamily="34" charset="-120"/>
               </a:rPr>
-              <a:t>);</a:t>
-            </a:r>
-            <a:endParaRPr lang="en-US" sz="1400" dirty="0"/>
-          </a:p>
-        </p:txBody>
-      </p:sp>
-      <p:sp>
-        <p:nvSpPr>
-          <p:cNvPr id="6" name="Shape 4"/>
-          <p:cNvSpPr/>
-          <p:nvPr/>
-        </p:nvSpPr>
-        <p:spPr>
-          <a:xfrm>
-            <a:off x="576072" y="3108960"/>
-            <a:ext cx="1789176" cy="914400"/>
-          </a:xfrm>
-          <a:prstGeom prst="roundRect">
-            <a:avLst>
-              <a:gd name="adj" fmla="val 4000"/>
-            </a:avLst>
-          </a:prstGeom>
-          <a:solidFill>
-            <a:srgbClr val="0E1116"/>
-          </a:solidFill>
-          <a:ln w="12700">
-            <a:solidFill>
-              <a:srgbClr val="8CC63F"/>
-            </a:solidFill>
-            <a:prstDash val="solid"/>
-          </a:ln>
-        </p:spPr>
-      </p:sp>
-      <p:sp>
-        <p:nvSpPr>
-          <p:cNvPr id="7" name="Text 5"/>
-          <p:cNvSpPr/>
-          <p:nvPr/>
-        </p:nvSpPr>
-        <p:spPr>
-          <a:xfrm>
-            <a:off x="548640" y="3218688"/>
-            <a:ext cx="1844040" cy="310896"/>
+              <a:t>gridDim</a:t>
+            </a:r>
+            <a:endParaRPr lang="en-US" sz="2000" dirty="0"/>
+          </a:p>
+        </p:txBody>
+      </p:sp>
+      <p:sp>
+        <p:nvSpPr>
+          <p:cNvPr id="16" name="Text 14"/>
+          <p:cNvSpPr/>
+          <p:nvPr/>
+        </p:nvSpPr>
+        <p:spPr>
+          <a:xfrm>
+            <a:off x="3749040" y="5120640"/>
+            <a:ext cx="7589520" cy="621792"/>
           </a:xfrm>
           <a:prstGeom prst="rect">
             <a:avLst/>
@@ -8334,11 +10584,11 @@
           <a:bodyPr wrap="square" lIns="0" tIns="0" rIns="0" bIns="0" rtlCol="0" anchor="ctr"/>
           <a:lstStyle/>
           <a:p>
-            <a:pPr algn="ctr" indent="0" marL="0">
-              <a:buNone/>
-            </a:pPr>
-            <a:r>
-              <a:rPr lang="en-US" sz="1200" b="1" dirty="0">
+            <a:pPr indent="0" marL="0">
+              <a:buNone/>
+            </a:pPr>
+            <a:r>
+              <a:rPr lang="en-US" sz="1600" dirty="0">
                 <a:solidFill>
                   <a:srgbClr val="E8EDF2"/>
                 </a:solidFill>
@@ -8346,22 +10596,22 @@
                 <a:ea typeface="Malgun Gothic" pitchFamily="34" charset="-122"/>
                 <a:cs typeface="Malgun Gothic" pitchFamily="34" charset="-120"/>
               </a:rPr>
-              <a:t>블록 0</a:t>
-            </a:r>
-            <a:endParaRPr lang="en-US" sz="1200" dirty="0"/>
-          </a:p>
-        </p:txBody>
-      </p:sp>
-      <p:sp>
-        <p:nvSpPr>
-          <p:cNvPr id="8" name="Text 6"/>
-          <p:cNvSpPr/>
-          <p:nvPr/>
-        </p:nvSpPr>
-        <p:spPr>
-          <a:xfrm>
-            <a:off x="548640" y="3566160"/>
-            <a:ext cx="1844040" cy="310896"/>
+              <a:t>그리드의 블록 수 (그리드 크기)</a:t>
+            </a:r>
+            <a:endParaRPr lang="en-US" sz="1600" dirty="0"/>
+          </a:p>
+        </p:txBody>
+      </p:sp>
+      <p:sp>
+        <p:nvSpPr>
+          <p:cNvPr id="17" name="Text 15"/>
+          <p:cNvSpPr/>
+          <p:nvPr/>
+        </p:nvSpPr>
+        <p:spPr>
+          <a:xfrm>
+            <a:off x="548640" y="6172200"/>
+            <a:ext cx="11064240" cy="365760"/>
           </a:xfrm>
           <a:prstGeom prst="rect">
             <a:avLst/>
@@ -8373,627 +10623,21 @@
           <a:bodyPr wrap="square" lIns="0" tIns="0" rIns="0" bIns="0" rtlCol="0" anchor="ctr"/>
           <a:lstStyle/>
           <a:p>
-            <a:pPr algn="ctr" indent="0" marL="0">
-              <a:buNone/>
-            </a:pPr>
-            <a:r>
-              <a:rPr lang="en-US" sz="1100" dirty="0">
+            <a:pPr indent="0" marL="0">
+              <a:buNone/>
+            </a:pPr>
+            <a:r>
+              <a:rPr lang="en-US" sz="1300" i="1" dirty="0">
                 <a:solidFill>
                   <a:srgbClr val="9AA6B2"/>
                 </a:solidFill>
-                <a:latin typeface="Courier New" pitchFamily="34" charset="0"/>
-                <a:ea typeface="Courier New" pitchFamily="34" charset="-122"/>
-                <a:cs typeface="Courier New" pitchFamily="34" charset="-120"/>
-              </a:rPr>
-              <a:t>0 MB~</a:t>
-            </a:r>
-            <a:endParaRPr lang="en-US" sz="1100" dirty="0"/>
-          </a:p>
-        </p:txBody>
-      </p:sp>
-      <p:sp>
-        <p:nvSpPr>
-          <p:cNvPr id="9" name="Shape 7"/>
-          <p:cNvSpPr/>
-          <p:nvPr/>
-        </p:nvSpPr>
-        <p:spPr>
-          <a:xfrm>
-            <a:off x="2420112" y="3108960"/>
-            <a:ext cx="1789176" cy="914400"/>
-          </a:xfrm>
-          <a:prstGeom prst="roundRect">
-            <a:avLst>
-              <a:gd name="adj" fmla="val 4000"/>
-            </a:avLst>
-          </a:prstGeom>
-          <a:solidFill>
-            <a:srgbClr val="0E1116"/>
-          </a:solidFill>
-          <a:ln w="12700">
-            <a:solidFill>
-              <a:srgbClr val="4FB0C6"/>
-            </a:solidFill>
-            <a:prstDash val="solid"/>
-          </a:ln>
-        </p:spPr>
-      </p:sp>
-      <p:sp>
-        <p:nvSpPr>
-          <p:cNvPr id="10" name="Text 8"/>
-          <p:cNvSpPr/>
-          <p:nvPr/>
-        </p:nvSpPr>
-        <p:spPr>
-          <a:xfrm>
-            <a:off x="2392680" y="3218688"/>
-            <a:ext cx="1844040" cy="310896"/>
-          </a:xfrm>
-          <a:prstGeom prst="rect">
-            <a:avLst/>
-          </a:prstGeom>
-          <a:noFill/>
-          <a:ln/>
-        </p:spPr>
-        <p:txBody>
-          <a:bodyPr wrap="square" lIns="0" tIns="0" rIns="0" bIns="0" rtlCol="0" anchor="ctr"/>
-          <a:lstStyle/>
-          <a:p>
-            <a:pPr algn="ctr" indent="0" marL="0">
-              <a:buNone/>
-            </a:pPr>
-            <a:r>
-              <a:rPr lang="en-US" sz="1200" b="1" dirty="0">
-                <a:solidFill>
-                  <a:srgbClr val="E8EDF2"/>
-                </a:solidFill>
-                <a:latin typeface="Malgun Gothic" pitchFamily="34" charset="0"/>
-                <a:ea typeface="Malgun Gothic" pitchFamily="34" charset="-122"/>
-                <a:cs typeface="Malgun Gothic" pitchFamily="34" charset="-120"/>
-              </a:rPr>
-              <a:t>블록 1</a:t>
-            </a:r>
-            <a:endParaRPr lang="en-US" sz="1200" dirty="0"/>
-          </a:p>
-        </p:txBody>
-      </p:sp>
-      <p:sp>
-        <p:nvSpPr>
-          <p:cNvPr id="11" name="Text 9"/>
-          <p:cNvSpPr/>
-          <p:nvPr/>
-        </p:nvSpPr>
-        <p:spPr>
-          <a:xfrm>
-            <a:off x="2392680" y="3566160"/>
-            <a:ext cx="1844040" cy="310896"/>
-          </a:xfrm>
-          <a:prstGeom prst="rect">
-            <a:avLst/>
-          </a:prstGeom>
-          <a:noFill/>
-          <a:ln/>
-        </p:spPr>
-        <p:txBody>
-          <a:bodyPr wrap="square" lIns="0" tIns="0" rIns="0" bIns="0" rtlCol="0" anchor="ctr"/>
-          <a:lstStyle/>
-          <a:p>
-            <a:pPr algn="ctr" indent="0" marL="0">
-              <a:buNone/>
-            </a:pPr>
-            <a:r>
-              <a:rPr lang="en-US" sz="1100" dirty="0">
-                <a:solidFill>
-                  <a:srgbClr val="9AA6B2"/>
-                </a:solidFill>
-                <a:latin typeface="Courier New" pitchFamily="34" charset="0"/>
-                <a:ea typeface="Courier New" pitchFamily="34" charset="-122"/>
-                <a:cs typeface="Courier New" pitchFamily="34" charset="-120"/>
-              </a:rPr>
-              <a:t>1 MB~</a:t>
-            </a:r>
-            <a:endParaRPr lang="en-US" sz="1100" dirty="0"/>
-          </a:p>
-        </p:txBody>
-      </p:sp>
-      <p:sp>
-        <p:nvSpPr>
-          <p:cNvPr id="12" name="Shape 10"/>
-          <p:cNvSpPr/>
-          <p:nvPr/>
-        </p:nvSpPr>
-        <p:spPr>
-          <a:xfrm>
-            <a:off x="4264152" y="3108960"/>
-            <a:ext cx="1789176" cy="914400"/>
-          </a:xfrm>
-          <a:prstGeom prst="roundRect">
-            <a:avLst>
-              <a:gd name="adj" fmla="val 4000"/>
-            </a:avLst>
-          </a:prstGeom>
-          <a:solidFill>
-            <a:srgbClr val="0E1116"/>
-          </a:solidFill>
-          <a:ln w="12700">
-            <a:solidFill>
-              <a:srgbClr val="8CC63F"/>
-            </a:solidFill>
-            <a:prstDash val="solid"/>
-          </a:ln>
-        </p:spPr>
-      </p:sp>
-      <p:sp>
-        <p:nvSpPr>
-          <p:cNvPr id="13" name="Text 11"/>
-          <p:cNvSpPr/>
-          <p:nvPr/>
-        </p:nvSpPr>
-        <p:spPr>
-          <a:xfrm>
-            <a:off x="4236720" y="3218688"/>
-            <a:ext cx="1844040" cy="310896"/>
-          </a:xfrm>
-          <a:prstGeom prst="rect">
-            <a:avLst/>
-          </a:prstGeom>
-          <a:noFill/>
-          <a:ln/>
-        </p:spPr>
-        <p:txBody>
-          <a:bodyPr wrap="square" lIns="0" tIns="0" rIns="0" bIns="0" rtlCol="0" anchor="ctr"/>
-          <a:lstStyle/>
-          <a:p>
-            <a:pPr algn="ctr" indent="0" marL="0">
-              <a:buNone/>
-            </a:pPr>
-            <a:r>
-              <a:rPr lang="en-US" sz="1200" b="1" dirty="0">
-                <a:solidFill>
-                  <a:srgbClr val="E8EDF2"/>
-                </a:solidFill>
-                <a:latin typeface="Malgun Gothic" pitchFamily="34" charset="0"/>
-                <a:ea typeface="Malgun Gothic" pitchFamily="34" charset="-122"/>
-                <a:cs typeface="Malgun Gothic" pitchFamily="34" charset="-120"/>
-              </a:rPr>
-              <a:t>블록 2</a:t>
-            </a:r>
-            <a:endParaRPr lang="en-US" sz="1200" dirty="0"/>
-          </a:p>
-        </p:txBody>
-      </p:sp>
-      <p:sp>
-        <p:nvSpPr>
-          <p:cNvPr id="14" name="Text 12"/>
-          <p:cNvSpPr/>
-          <p:nvPr/>
-        </p:nvSpPr>
-        <p:spPr>
-          <a:xfrm>
-            <a:off x="4236720" y="3566160"/>
-            <a:ext cx="1844040" cy="310896"/>
-          </a:xfrm>
-          <a:prstGeom prst="rect">
-            <a:avLst/>
-          </a:prstGeom>
-          <a:noFill/>
-          <a:ln/>
-        </p:spPr>
-        <p:txBody>
-          <a:bodyPr wrap="square" lIns="0" tIns="0" rIns="0" bIns="0" rtlCol="0" anchor="ctr"/>
-          <a:lstStyle/>
-          <a:p>
-            <a:pPr algn="ctr" indent="0" marL="0">
-              <a:buNone/>
-            </a:pPr>
-            <a:r>
-              <a:rPr lang="en-US" sz="1100" dirty="0">
-                <a:solidFill>
-                  <a:srgbClr val="9AA6B2"/>
-                </a:solidFill>
-                <a:latin typeface="Courier New" pitchFamily="34" charset="0"/>
-                <a:ea typeface="Courier New" pitchFamily="34" charset="-122"/>
-                <a:cs typeface="Courier New" pitchFamily="34" charset="-120"/>
-              </a:rPr>
-              <a:t>2 MB~</a:t>
-            </a:r>
-            <a:endParaRPr lang="en-US" sz="1100" dirty="0"/>
-          </a:p>
-        </p:txBody>
-      </p:sp>
-      <p:sp>
-        <p:nvSpPr>
-          <p:cNvPr id="15" name="Shape 13"/>
-          <p:cNvSpPr/>
-          <p:nvPr/>
-        </p:nvSpPr>
-        <p:spPr>
-          <a:xfrm>
-            <a:off x="6108192" y="3108960"/>
-            <a:ext cx="1789176" cy="914400"/>
-          </a:xfrm>
-          <a:prstGeom prst="roundRect">
-            <a:avLst>
-              <a:gd name="adj" fmla="val 4000"/>
-            </a:avLst>
-          </a:prstGeom>
-          <a:solidFill>
-            <a:srgbClr val="0E1116"/>
-          </a:solidFill>
-          <a:ln w="12700">
-            <a:solidFill>
-              <a:srgbClr val="4FB0C6"/>
-            </a:solidFill>
-            <a:prstDash val="solid"/>
-          </a:ln>
-        </p:spPr>
-      </p:sp>
-      <p:sp>
-        <p:nvSpPr>
-          <p:cNvPr id="16" name="Text 14"/>
-          <p:cNvSpPr/>
-          <p:nvPr/>
-        </p:nvSpPr>
-        <p:spPr>
-          <a:xfrm>
-            <a:off x="6080760" y="3218688"/>
-            <a:ext cx="1844040" cy="310896"/>
-          </a:xfrm>
-          <a:prstGeom prst="rect">
-            <a:avLst/>
-          </a:prstGeom>
-          <a:noFill/>
-          <a:ln/>
-        </p:spPr>
-        <p:txBody>
-          <a:bodyPr wrap="square" lIns="0" tIns="0" rIns="0" bIns="0" rtlCol="0" anchor="ctr"/>
-          <a:lstStyle/>
-          <a:p>
-            <a:pPr algn="ctr" indent="0" marL="0">
-              <a:buNone/>
-            </a:pPr>
-            <a:r>
-              <a:rPr lang="en-US" sz="1200" b="1" dirty="0">
-                <a:solidFill>
-                  <a:srgbClr val="E8EDF2"/>
-                </a:solidFill>
-                <a:latin typeface="Malgun Gothic" pitchFamily="34" charset="0"/>
-                <a:ea typeface="Malgun Gothic" pitchFamily="34" charset="-122"/>
-                <a:cs typeface="Malgun Gothic" pitchFamily="34" charset="-120"/>
-              </a:rPr>
-              <a:t>블록 3</a:t>
-            </a:r>
-            <a:endParaRPr lang="en-US" sz="1200" dirty="0"/>
-          </a:p>
-        </p:txBody>
-      </p:sp>
-      <p:sp>
-        <p:nvSpPr>
-          <p:cNvPr id="17" name="Text 15"/>
-          <p:cNvSpPr/>
-          <p:nvPr/>
-        </p:nvSpPr>
-        <p:spPr>
-          <a:xfrm>
-            <a:off x="6080760" y="3566160"/>
-            <a:ext cx="1844040" cy="310896"/>
-          </a:xfrm>
-          <a:prstGeom prst="rect">
-            <a:avLst/>
-          </a:prstGeom>
-          <a:noFill/>
-          <a:ln/>
-        </p:spPr>
-        <p:txBody>
-          <a:bodyPr wrap="square" lIns="0" tIns="0" rIns="0" bIns="0" rtlCol="0" anchor="ctr"/>
-          <a:lstStyle/>
-          <a:p>
-            <a:pPr algn="ctr" indent="0" marL="0">
-              <a:buNone/>
-            </a:pPr>
-            <a:r>
-              <a:rPr lang="en-US" sz="1100" dirty="0">
-                <a:solidFill>
-                  <a:srgbClr val="9AA6B2"/>
-                </a:solidFill>
-                <a:latin typeface="Courier New" pitchFamily="34" charset="0"/>
-                <a:ea typeface="Courier New" pitchFamily="34" charset="-122"/>
-                <a:cs typeface="Courier New" pitchFamily="34" charset="-120"/>
-              </a:rPr>
-              <a:t>3 MB~</a:t>
-            </a:r>
-            <a:endParaRPr lang="en-US" sz="1100" dirty="0"/>
-          </a:p>
-        </p:txBody>
-      </p:sp>
-      <p:sp>
-        <p:nvSpPr>
-          <p:cNvPr id="18" name="Shape 16"/>
-          <p:cNvSpPr/>
-          <p:nvPr/>
-        </p:nvSpPr>
-        <p:spPr>
-          <a:xfrm>
-            <a:off x="7952232" y="3108960"/>
-            <a:ext cx="1789176" cy="914400"/>
-          </a:xfrm>
-          <a:prstGeom prst="roundRect">
-            <a:avLst>
-              <a:gd name="adj" fmla="val 4000"/>
-            </a:avLst>
-          </a:prstGeom>
-          <a:solidFill>
-            <a:srgbClr val="0E1116"/>
-          </a:solidFill>
-          <a:ln w="12700">
-            <a:solidFill>
-              <a:srgbClr val="8CC63F"/>
-            </a:solidFill>
-            <a:prstDash val="solid"/>
-          </a:ln>
-        </p:spPr>
-      </p:sp>
-      <p:sp>
-        <p:nvSpPr>
-          <p:cNvPr id="19" name="Text 17"/>
-          <p:cNvSpPr/>
-          <p:nvPr/>
-        </p:nvSpPr>
-        <p:spPr>
-          <a:xfrm>
-            <a:off x="7924800" y="3218688"/>
-            <a:ext cx="1844040" cy="310896"/>
-          </a:xfrm>
-          <a:prstGeom prst="rect">
-            <a:avLst/>
-          </a:prstGeom>
-          <a:noFill/>
-          <a:ln/>
-        </p:spPr>
-        <p:txBody>
-          <a:bodyPr wrap="square" lIns="0" tIns="0" rIns="0" bIns="0" rtlCol="0" anchor="ctr"/>
-          <a:lstStyle/>
-          <a:p>
-            <a:pPr algn="ctr" indent="0" marL="0">
-              <a:buNone/>
-            </a:pPr>
-            <a:r>
-              <a:rPr lang="en-US" sz="1200" b="1" dirty="0">
-                <a:solidFill>
-                  <a:srgbClr val="E8EDF2"/>
-                </a:solidFill>
-                <a:latin typeface="Malgun Gothic" pitchFamily="34" charset="0"/>
-                <a:ea typeface="Malgun Gothic" pitchFamily="34" charset="-122"/>
-                <a:cs typeface="Malgun Gothic" pitchFamily="34" charset="-120"/>
-              </a:rPr>
-              <a:t>블록 4</a:t>
-            </a:r>
-            <a:endParaRPr lang="en-US" sz="1200" dirty="0"/>
-          </a:p>
-        </p:txBody>
-      </p:sp>
-      <p:sp>
-        <p:nvSpPr>
-          <p:cNvPr id="20" name="Text 18"/>
-          <p:cNvSpPr/>
-          <p:nvPr/>
-        </p:nvSpPr>
-        <p:spPr>
-          <a:xfrm>
-            <a:off x="7924800" y="3566160"/>
-            <a:ext cx="1844040" cy="310896"/>
-          </a:xfrm>
-          <a:prstGeom prst="rect">
-            <a:avLst/>
-          </a:prstGeom>
-          <a:noFill/>
-          <a:ln/>
-        </p:spPr>
-        <p:txBody>
-          <a:bodyPr wrap="square" lIns="0" tIns="0" rIns="0" bIns="0" rtlCol="0" anchor="ctr"/>
-          <a:lstStyle/>
-          <a:p>
-            <a:pPr algn="ctr" indent="0" marL="0">
-              <a:buNone/>
-            </a:pPr>
-            <a:r>
-              <a:rPr lang="en-US" sz="1100" dirty="0">
-                <a:solidFill>
-                  <a:srgbClr val="9AA6B2"/>
-                </a:solidFill>
-                <a:latin typeface="Courier New" pitchFamily="34" charset="0"/>
-                <a:ea typeface="Courier New" pitchFamily="34" charset="-122"/>
-                <a:cs typeface="Courier New" pitchFamily="34" charset="-120"/>
-              </a:rPr>
-              <a:t>4 MB~</a:t>
-            </a:r>
-            <a:endParaRPr lang="en-US" sz="1100" dirty="0"/>
-          </a:p>
-        </p:txBody>
-      </p:sp>
-      <p:sp>
-        <p:nvSpPr>
-          <p:cNvPr id="21" name="Shape 19"/>
-          <p:cNvSpPr/>
-          <p:nvPr/>
-        </p:nvSpPr>
-        <p:spPr>
-          <a:xfrm>
-            <a:off x="9796272" y="3108960"/>
-            <a:ext cx="1789176" cy="914400"/>
-          </a:xfrm>
-          <a:prstGeom prst="roundRect">
-            <a:avLst>
-              <a:gd name="adj" fmla="val 4000"/>
-            </a:avLst>
-          </a:prstGeom>
-          <a:solidFill>
-            <a:srgbClr val="1A1414"/>
-          </a:solidFill>
-          <a:ln w="12700">
-            <a:solidFill>
-              <a:srgbClr val="4FB0C6"/>
-            </a:solidFill>
-            <a:prstDash val="solid"/>
-          </a:ln>
-        </p:spPr>
-      </p:sp>
-      <p:sp>
-        <p:nvSpPr>
-          <p:cNvPr id="22" name="Text 20"/>
-          <p:cNvSpPr/>
-          <p:nvPr/>
-        </p:nvSpPr>
-        <p:spPr>
-          <a:xfrm>
-            <a:off x="9768840" y="3218688"/>
-            <a:ext cx="1844040" cy="310896"/>
-          </a:xfrm>
-          <a:prstGeom prst="rect">
-            <a:avLst/>
-          </a:prstGeom>
-          <a:noFill/>
-          <a:ln/>
-        </p:spPr>
-        <p:txBody>
-          <a:bodyPr wrap="square" lIns="0" tIns="0" rIns="0" bIns="0" rtlCol="0" anchor="ctr"/>
-          <a:lstStyle/>
-          <a:p>
-            <a:pPr algn="ctr" indent="0" marL="0">
-              <a:buNone/>
-            </a:pPr>
-            <a:r>
-              <a:rPr lang="en-US" sz="1200" b="1" dirty="0">
-                <a:solidFill>
-                  <a:srgbClr val="E8EDF2"/>
-                </a:solidFill>
-                <a:latin typeface="Malgun Gothic" pitchFamily="34" charset="0"/>
-                <a:ea typeface="Malgun Gothic" pitchFamily="34" charset="-122"/>
-                <a:cs typeface="Malgun Gothic" pitchFamily="34" charset="-120"/>
-              </a:rPr>
-              <a:t>· · ·</a:t>
-            </a:r>
-            <a:endParaRPr lang="en-US" sz="1200" dirty="0"/>
-          </a:p>
-        </p:txBody>
-      </p:sp>
-      <p:sp>
-        <p:nvSpPr>
-          <p:cNvPr id="23" name="Text 21"/>
-          <p:cNvSpPr/>
-          <p:nvPr/>
-        </p:nvSpPr>
-        <p:spPr>
-          <a:xfrm>
-            <a:off x="9768840" y="3566160"/>
-            <a:ext cx="1844040" cy="310896"/>
-          </a:xfrm>
-          <a:prstGeom prst="rect">
-            <a:avLst/>
-          </a:prstGeom>
-          <a:noFill/>
-          <a:ln/>
-        </p:spPr>
-        <p:txBody>
-          <a:bodyPr wrap="square" lIns="0" tIns="0" rIns="0" bIns="0" rtlCol="0" anchor="ctr"/>
-          <a:lstStyle/>
-          <a:p>
-            <a:pPr algn="ctr" indent="0" marL="0">
-              <a:buNone/>
-            </a:pPr>
-            <a:endParaRPr lang="en-US" sz="1100" dirty="0"/>
-          </a:p>
-        </p:txBody>
-      </p:sp>
-      <p:sp>
-        <p:nvSpPr>
-          <p:cNvPr id="24" name="Text 22"/>
-          <p:cNvSpPr/>
-          <p:nvPr/>
-        </p:nvSpPr>
-        <p:spPr>
-          <a:xfrm>
-            <a:off x="548640" y="4133088"/>
-            <a:ext cx="11064240" cy="320040"/>
-          </a:xfrm>
-          <a:prstGeom prst="rect">
-            <a:avLst/>
-          </a:prstGeom>
-          <a:noFill/>
-          <a:ln/>
-        </p:spPr>
-        <p:txBody>
-          <a:bodyPr wrap="square" lIns="0" tIns="0" rIns="0" bIns="0" rtlCol="0" anchor="ctr"/>
-          <a:lstStyle/>
-          <a:p>
-            <a:pPr algn="ctr" indent="0" marL="0">
-              <a:buNone/>
-            </a:pPr>
-            <a:r>
-              <a:rPr lang="en-US" sz="1200" i="1" dirty="0">
-                <a:solidFill>
-                  <a:srgbClr val="9AA6B2"/>
-                </a:solidFill>
-                <a:latin typeface="Malgun Gothic" pitchFamily="34" charset="0"/>
-                <a:ea typeface="Malgun Gothic" pitchFamily="34" charset="-122"/>
-                <a:cs typeface="Malgun Gothic" pitchFamily="34" charset="-120"/>
-              </a:rPr>
-              <a:t>전체 GPU 메모리</a:t>
-            </a:r>
-            <a:endParaRPr lang="en-US" sz="1200" dirty="0"/>
-          </a:p>
-        </p:txBody>
-      </p:sp>
-      <p:sp>
-        <p:nvSpPr>
-          <p:cNvPr id="25" name="Text 23"/>
-          <p:cNvSpPr/>
-          <p:nvPr/>
-        </p:nvSpPr>
-        <p:spPr>
-          <a:xfrm>
-            <a:off x="548640" y="5029200"/>
-            <a:ext cx="11064240" cy="914400"/>
-          </a:xfrm>
-          <a:prstGeom prst="rect">
-            <a:avLst/>
-          </a:prstGeom>
-          <a:noFill/>
-          <a:ln/>
-        </p:spPr>
-        <p:txBody>
-          <a:bodyPr wrap="square" lIns="0" tIns="0" rIns="0" bIns="0" rtlCol="0" anchor="t"/>
-          <a:lstStyle/>
-          <a:p>
-            <a:pPr indent="0" marL="0">
-              <a:buNone/>
-            </a:pPr>
-            <a:r>
-              <a:rPr lang="en-US" sz="1700" dirty="0">
-                <a:solidFill>
-                  <a:srgbClr val="E8EDF2"/>
-                </a:solidFill>
-                <a:latin typeface="Malgun Gothic" pitchFamily="34" charset="0"/>
-                <a:ea typeface="Malgun Gothic" pitchFamily="34" charset="-122"/>
-                <a:cs typeface="Malgun Gothic" pitchFamily="34" charset="-120"/>
-              </a:rPr>
-              <a:t>블록 번호(blockIdx.x)에 1 MB를 곱해 자기 구역을 정합니다. </a:t>
-            </a:r>
-            <a:pPr indent="0" marL="0">
-              <a:buNone/>
-            </a:pPr>
-            <a:r>
-              <a:rPr lang="en-US" sz="1700" dirty="0">
-                <a:solidFill>
-                  <a:srgbClr val="E8EDF2"/>
-                </a:solidFill>
-                <a:latin typeface="Malgun Gothic" pitchFamily="34" charset="0"/>
-                <a:ea typeface="Malgun Gothic" pitchFamily="34" charset="-122"/>
-                <a:cs typeface="Malgun Gothic" pitchFamily="34" charset="-120"/>
-              </a:rPr>
-              <a:t>블록 0은 0~1 MB, 블록 1은 1~2 MB … 서로 겹치지 않습니다.</a:t>
-            </a:r>
-            <a:endParaRPr lang="en-US" sz="1700" dirty="0"/>
+                <a:latin typeface="Malgun Gothic" pitchFamily="34" charset="0"/>
+                <a:ea typeface="Malgun Gothic" pitchFamily="34" charset="-122"/>
+                <a:cs typeface="Malgun Gothic" pitchFamily="34" charset="-120"/>
+              </a:rPr>
+              <a:t>이 저장소는 .x 만 씁니다 (1차원). 실전에선 .x/.y/.z 로 2·3차원도 가능합니다.</a:t>
+            </a:r>
+            <a:endParaRPr lang="en-US" sz="1300" dirty="0"/>
           </a:p>
         </p:txBody>
       </p:sp>
@@ -9066,7 +10710,7 @@
                 <a:ea typeface="Courier New" pitchFamily="34" charset="-122"/>
                 <a:cs typeface="Courier New" pitchFamily="34" charset="-120"/>
               </a:rPr>
-              <a:t>7</a:t>
+              <a:t>6</a:t>
             </a:r>
             <a:endParaRPr lang="en-US" sz="2200" dirty="0"/>
           </a:p>
@@ -9105,7 +10749,7 @@
                 <a:ea typeface="Malgun Gothic" pitchFamily="34" charset="-122"/>
                 <a:cs typeface="Malgun Gothic" pitchFamily="34" charset="-120"/>
               </a:rPr>
-              <a:t>첫 커널 완독 · kernel_move_inv_write</a:t>
+              <a:t>이 저장소의 관례 · 블록 1개 = 1 MB</a:t>
             </a:r>
             <a:endParaRPr lang="en-US" sz="3000" dirty="0"/>
           </a:p>
@@ -9120,11 +10764,11 @@
         <p:spPr>
           <a:xfrm>
             <a:off x="548640" y="1554480"/>
-            <a:ext cx="11064240" cy="3794760"/>
+            <a:ext cx="11064240" cy="1234440"/>
           </a:xfrm>
           <a:prstGeom prst="roundRect">
             <a:avLst>
-              <a:gd name="adj" fmla="val 1446"/>
+              <a:gd name="adj" fmla="val 4444"/>
             </a:avLst>
           </a:prstGeom>
           <a:solidFill>
@@ -9147,7 +10791,7 @@
         <p:spPr>
           <a:xfrm>
             <a:off x="749808" y="1700784"/>
-            <a:ext cx="10661904" cy="3502152"/>
+            <a:ext cx="10661904" cy="941832"/>
           </a:xfrm>
           <a:prstGeom prst="rect">
             <a:avLst/>
@@ -9166,17 +10810,17 @@
               <a:buNone/>
             </a:pPr>
             <a:r>
-              <a:rPr lang="en-US" sz="1350" dirty="0">
-                <a:solidFill>
-                  <a:srgbClr val="8CC63F"/>
+              <a:rPr lang="en-US" sz="1400" dirty="0">
+                <a:solidFill>
+                  <a:srgbClr val="9AA6B2"/>
                 </a:solidFill>
                 <a:latin typeface="Courier New" pitchFamily="34" charset="0"/>
                 <a:ea typeface="Courier New" pitchFamily="34" charset="-122"/>
                 <a:cs typeface="Courier New" pitchFamily="34" charset="-120"/>
               </a:rPr>
-              <a:t>__global__ void</a:t>
-            </a:r>
-            <a:endParaRPr lang="en-US" sz="1350" dirty="0"/>
+              <a:t>#define BLOCKSIZE ((unsigned long)(1024*1024))   // = 1 MB</a:t>
+            </a:r>
+            <a:endParaRPr lang="en-US" sz="1400" dirty="0"/>
           </a:p>
           <a:p>
             <a:pPr algn="l" indent="0" marL="0">
@@ -9186,7 +10830,7 @@
               <a:buNone/>
             </a:pPr>
             <a:r>
-              <a:rPr lang="en-US" sz="1350" dirty="0">
+              <a:rPr lang="en-US" sz="1400" dirty="0">
                 <a:solidFill>
                   <a:srgbClr val="E8EDF2"/>
                 </a:solidFill>
@@ -9194,11 +10838,8 @@
                 <a:ea typeface="Courier New" pitchFamily="34" charset="-122"/>
                 <a:cs typeface="Courier New" pitchFamily="34" charset="-120"/>
               </a:rPr>
-              <a:t>kernel_move_inv_write(char* _ptr, char* end_ptr, unsigned int pattern) {</a:t>
-            </a:r>
-            <a:endParaRPr lang="en-US" sz="1350" dirty="0"/>
-          </a:p>
-          <a:p>
+              <a:t>unsigned int* ptr = (unsigned int*)(_ptr + </a:t>
+            </a:r>
             <a:pPr algn="l" indent="0" marL="0">
               <a:lnSpc>
                 <a:spcPct val="108000"/>
@@ -9206,19 +10847,16 @@
               <a:buNone/>
             </a:pPr>
             <a:r>
-              <a:rPr lang="en-US" sz="1350" dirty="0">
-                <a:solidFill>
-                  <a:srgbClr val="E8EDF2"/>
+              <a:rPr lang="en-US" sz="1400" b="1" dirty="0">
+                <a:solidFill>
+                  <a:srgbClr val="8CC63F"/>
                 </a:solidFill>
                 <a:latin typeface="Courier New" pitchFamily="34" charset="0"/>
                 <a:ea typeface="Courier New" pitchFamily="34" charset="-122"/>
                 <a:cs typeface="Courier New" pitchFamily="34" charset="-120"/>
               </a:rPr>
-              <a:t>    unsigned int i;</a:t>
-            </a:r>
-            <a:endParaRPr lang="en-US" sz="1350" dirty="0"/>
-          </a:p>
-          <a:p>
+              <a:t>blockIdx.x * BLOCKSIZE</a:t>
+            </a:r>
             <a:pPr algn="l" indent="0" marL="0">
               <a:lnSpc>
                 <a:spcPct val="108000"/>
@@ -9226,7 +10864,7 @@
               <a:buNone/>
             </a:pPr>
             <a:r>
-              <a:rPr lang="en-US" sz="1350" dirty="0">
+              <a:rPr lang="en-US" sz="1400" dirty="0">
                 <a:solidFill>
                   <a:srgbClr val="E8EDF2"/>
                 </a:solidFill>
@@ -9234,208 +10872,720 @@
                 <a:ea typeface="Courier New" pitchFamily="34" charset="-122"/>
                 <a:cs typeface="Courier New" pitchFamily="34" charset="-120"/>
               </a:rPr>
-              <a:t>    unsigned int* ptr = (unsigned int*)(_ptr + blockIdx.x*BLOCKSIZE);</a:t>
-            </a:r>
-            <a:endParaRPr lang="en-US" sz="1350" dirty="0"/>
-          </a:p>
-          <a:p>
-            <a:pPr algn="l" indent="0" marL="0">
-              <a:lnSpc>
-                <a:spcPct val="108000"/>
-              </a:lnSpc>
-              <a:buNone/>
-            </a:pPr>
-            <a:r>
-              <a:rPr lang="en-US" sz="1350" dirty="0">
+              <a:t>);</a:t>
+            </a:r>
+            <a:endParaRPr lang="en-US" sz="1400" dirty="0"/>
+          </a:p>
+        </p:txBody>
+      </p:sp>
+      <p:sp>
+        <p:nvSpPr>
+          <p:cNvPr id="6" name="Shape 4"/>
+          <p:cNvSpPr/>
+          <p:nvPr/>
+        </p:nvSpPr>
+        <p:spPr>
+          <a:xfrm>
+            <a:off x="576072" y="3108960"/>
+            <a:ext cx="1789176" cy="914400"/>
+          </a:xfrm>
+          <a:prstGeom prst="roundRect">
+            <a:avLst>
+              <a:gd name="adj" fmla="val 4000"/>
+            </a:avLst>
+          </a:prstGeom>
+          <a:solidFill>
+            <a:srgbClr val="0E1116"/>
+          </a:solidFill>
+          <a:ln w="12700">
+            <a:solidFill>
+              <a:srgbClr val="8CC63F"/>
+            </a:solidFill>
+            <a:prstDash val="solid"/>
+          </a:ln>
+        </p:spPr>
+      </p:sp>
+      <p:sp>
+        <p:nvSpPr>
+          <p:cNvPr id="7" name="Text 5"/>
+          <p:cNvSpPr/>
+          <p:nvPr/>
+        </p:nvSpPr>
+        <p:spPr>
+          <a:xfrm>
+            <a:off x="548640" y="3218688"/>
+            <a:ext cx="1844040" cy="310896"/>
+          </a:xfrm>
+          <a:prstGeom prst="rect">
+            <a:avLst/>
+          </a:prstGeom>
+          <a:noFill/>
+          <a:ln/>
+        </p:spPr>
+        <p:txBody>
+          <a:bodyPr wrap="square" lIns="0" tIns="0" rIns="0" bIns="0" rtlCol="0" anchor="ctr"/>
+          <a:lstStyle/>
+          <a:p>
+            <a:pPr algn="ctr" indent="0" marL="0">
+              <a:buNone/>
+            </a:pPr>
+            <a:r>
+              <a:rPr lang="en-US" sz="1200" b="1" dirty="0">
                 <a:solidFill>
                   <a:srgbClr val="E8EDF2"/>
+                </a:solidFill>
+                <a:latin typeface="Malgun Gothic" pitchFamily="34" charset="0"/>
+                <a:ea typeface="Malgun Gothic" pitchFamily="34" charset="-122"/>
+                <a:cs typeface="Malgun Gothic" pitchFamily="34" charset="-120"/>
+              </a:rPr>
+              <a:t>블록 0</a:t>
+            </a:r>
+            <a:endParaRPr lang="en-US" sz="1200" dirty="0"/>
+          </a:p>
+        </p:txBody>
+      </p:sp>
+      <p:sp>
+        <p:nvSpPr>
+          <p:cNvPr id="8" name="Text 6"/>
+          <p:cNvSpPr/>
+          <p:nvPr/>
+        </p:nvSpPr>
+        <p:spPr>
+          <a:xfrm>
+            <a:off x="548640" y="3566160"/>
+            <a:ext cx="1844040" cy="310896"/>
+          </a:xfrm>
+          <a:prstGeom prst="rect">
+            <a:avLst/>
+          </a:prstGeom>
+          <a:noFill/>
+          <a:ln/>
+        </p:spPr>
+        <p:txBody>
+          <a:bodyPr wrap="square" lIns="0" tIns="0" rIns="0" bIns="0" rtlCol="0" anchor="ctr"/>
+          <a:lstStyle/>
+          <a:p>
+            <a:pPr algn="ctr" indent="0" marL="0">
+              <a:buNone/>
+            </a:pPr>
+            <a:r>
+              <a:rPr lang="en-US" sz="1100" dirty="0">
+                <a:solidFill>
+                  <a:srgbClr val="9AA6B2"/>
                 </a:solidFill>
                 <a:latin typeface="Courier New" pitchFamily="34" charset="0"/>
                 <a:ea typeface="Courier New" pitchFamily="34" charset="-122"/>
                 <a:cs typeface="Courier New" pitchFamily="34" charset="-120"/>
               </a:rPr>
-              <a:t>    if (ptr &gt;= (unsigned int*) end_ptr) {</a:t>
-            </a:r>
-            <a:endParaRPr lang="en-US" sz="1350" dirty="0"/>
-          </a:p>
-          <a:p>
-            <a:pPr algn="l" indent="0" marL="0">
-              <a:lnSpc>
-                <a:spcPct val="108000"/>
-              </a:lnSpc>
-              <a:buNone/>
-            </a:pPr>
-            <a:r>
-              <a:rPr lang="en-US" sz="1350" dirty="0">
-                <a:solidFill>
-                  <a:srgbClr val="E0A458"/>
+              <a:t>0 MB~</a:t>
+            </a:r>
+            <a:endParaRPr lang="en-US" sz="1100" dirty="0"/>
+          </a:p>
+        </p:txBody>
+      </p:sp>
+      <p:sp>
+        <p:nvSpPr>
+          <p:cNvPr id="9" name="Shape 7"/>
+          <p:cNvSpPr/>
+          <p:nvPr/>
+        </p:nvSpPr>
+        <p:spPr>
+          <a:xfrm>
+            <a:off x="2420112" y="3108960"/>
+            <a:ext cx="1789176" cy="914400"/>
+          </a:xfrm>
+          <a:prstGeom prst="roundRect">
+            <a:avLst>
+              <a:gd name="adj" fmla="val 4000"/>
+            </a:avLst>
+          </a:prstGeom>
+          <a:solidFill>
+            <a:srgbClr val="0E1116"/>
+          </a:solidFill>
+          <a:ln w="12700">
+            <a:solidFill>
+              <a:srgbClr val="4FB0C6"/>
+            </a:solidFill>
+            <a:prstDash val="solid"/>
+          </a:ln>
+        </p:spPr>
+      </p:sp>
+      <p:sp>
+        <p:nvSpPr>
+          <p:cNvPr id="10" name="Text 8"/>
+          <p:cNvSpPr/>
+          <p:nvPr/>
+        </p:nvSpPr>
+        <p:spPr>
+          <a:xfrm>
+            <a:off x="2392680" y="3218688"/>
+            <a:ext cx="1844040" cy="310896"/>
+          </a:xfrm>
+          <a:prstGeom prst="rect">
+            <a:avLst/>
+          </a:prstGeom>
+          <a:noFill/>
+          <a:ln/>
+        </p:spPr>
+        <p:txBody>
+          <a:bodyPr wrap="square" lIns="0" tIns="0" rIns="0" bIns="0" rtlCol="0" anchor="ctr"/>
+          <a:lstStyle/>
+          <a:p>
+            <a:pPr algn="ctr" indent="0" marL="0">
+              <a:buNone/>
+            </a:pPr>
+            <a:r>
+              <a:rPr lang="en-US" sz="1200" b="1" dirty="0">
+                <a:solidFill>
+                  <a:srgbClr val="E8EDF2"/>
+                </a:solidFill>
+                <a:latin typeface="Malgun Gothic" pitchFamily="34" charset="0"/>
+                <a:ea typeface="Malgun Gothic" pitchFamily="34" charset="-122"/>
+                <a:cs typeface="Malgun Gothic" pitchFamily="34" charset="-120"/>
+              </a:rPr>
+              <a:t>블록 1</a:t>
+            </a:r>
+            <a:endParaRPr lang="en-US" sz="1200" dirty="0"/>
+          </a:p>
+        </p:txBody>
+      </p:sp>
+      <p:sp>
+        <p:nvSpPr>
+          <p:cNvPr id="11" name="Text 9"/>
+          <p:cNvSpPr/>
+          <p:nvPr/>
+        </p:nvSpPr>
+        <p:spPr>
+          <a:xfrm>
+            <a:off x="2392680" y="3566160"/>
+            <a:ext cx="1844040" cy="310896"/>
+          </a:xfrm>
+          <a:prstGeom prst="rect">
+            <a:avLst/>
+          </a:prstGeom>
+          <a:noFill/>
+          <a:ln/>
+        </p:spPr>
+        <p:txBody>
+          <a:bodyPr wrap="square" lIns="0" tIns="0" rIns="0" bIns="0" rtlCol="0" anchor="ctr"/>
+          <a:lstStyle/>
+          <a:p>
+            <a:pPr algn="ctr" indent="0" marL="0">
+              <a:buNone/>
+            </a:pPr>
+            <a:r>
+              <a:rPr lang="en-US" sz="1100" dirty="0">
+                <a:solidFill>
+                  <a:srgbClr val="9AA6B2"/>
                 </a:solidFill>
                 <a:latin typeface="Courier New" pitchFamily="34" charset="0"/>
                 <a:ea typeface="Courier New" pitchFamily="34" charset="-122"/>
                 <a:cs typeface="Courier New" pitchFamily="34" charset="-120"/>
               </a:rPr>
-              <a:t>        return;                       // 범위 밖이면 아무 것도 안 함(guard)</a:t>
-            </a:r>
-            <a:endParaRPr lang="en-US" sz="1350" dirty="0"/>
-          </a:p>
-          <a:p>
-            <a:pPr algn="l" indent="0" marL="0">
-              <a:lnSpc>
-                <a:spcPct val="108000"/>
-              </a:lnSpc>
-              <a:buNone/>
-            </a:pPr>
-            <a:r>
-              <a:rPr lang="en-US" sz="1350" dirty="0">
+              <a:t>1 MB~</a:t>
+            </a:r>
+            <a:endParaRPr lang="en-US" sz="1100" dirty="0"/>
+          </a:p>
+        </p:txBody>
+      </p:sp>
+      <p:sp>
+        <p:nvSpPr>
+          <p:cNvPr id="12" name="Shape 10"/>
+          <p:cNvSpPr/>
+          <p:nvPr/>
+        </p:nvSpPr>
+        <p:spPr>
+          <a:xfrm>
+            <a:off x="4264152" y="3108960"/>
+            <a:ext cx="1789176" cy="914400"/>
+          </a:xfrm>
+          <a:prstGeom prst="roundRect">
+            <a:avLst>
+              <a:gd name="adj" fmla="val 4000"/>
+            </a:avLst>
+          </a:prstGeom>
+          <a:solidFill>
+            <a:srgbClr val="0E1116"/>
+          </a:solidFill>
+          <a:ln w="12700">
+            <a:solidFill>
+              <a:srgbClr val="8CC63F"/>
+            </a:solidFill>
+            <a:prstDash val="solid"/>
+          </a:ln>
+        </p:spPr>
+      </p:sp>
+      <p:sp>
+        <p:nvSpPr>
+          <p:cNvPr id="13" name="Text 11"/>
+          <p:cNvSpPr/>
+          <p:nvPr/>
+        </p:nvSpPr>
+        <p:spPr>
+          <a:xfrm>
+            <a:off x="4236720" y="3218688"/>
+            <a:ext cx="1844040" cy="310896"/>
+          </a:xfrm>
+          <a:prstGeom prst="rect">
+            <a:avLst/>
+          </a:prstGeom>
+          <a:noFill/>
+          <a:ln/>
+        </p:spPr>
+        <p:txBody>
+          <a:bodyPr wrap="square" lIns="0" tIns="0" rIns="0" bIns="0" rtlCol="0" anchor="ctr"/>
+          <a:lstStyle/>
+          <a:p>
+            <a:pPr algn="ctr" indent="0" marL="0">
+              <a:buNone/>
+            </a:pPr>
+            <a:r>
+              <a:rPr lang="en-US" sz="1200" b="1" dirty="0">
                 <a:solidFill>
                   <a:srgbClr val="E8EDF2"/>
+                </a:solidFill>
+                <a:latin typeface="Malgun Gothic" pitchFamily="34" charset="0"/>
+                <a:ea typeface="Malgun Gothic" pitchFamily="34" charset="-122"/>
+                <a:cs typeface="Malgun Gothic" pitchFamily="34" charset="-120"/>
+              </a:rPr>
+              <a:t>블록 2</a:t>
+            </a:r>
+            <a:endParaRPr lang="en-US" sz="1200" dirty="0"/>
+          </a:p>
+        </p:txBody>
+      </p:sp>
+      <p:sp>
+        <p:nvSpPr>
+          <p:cNvPr id="14" name="Text 12"/>
+          <p:cNvSpPr/>
+          <p:nvPr/>
+        </p:nvSpPr>
+        <p:spPr>
+          <a:xfrm>
+            <a:off x="4236720" y="3566160"/>
+            <a:ext cx="1844040" cy="310896"/>
+          </a:xfrm>
+          <a:prstGeom prst="rect">
+            <a:avLst/>
+          </a:prstGeom>
+          <a:noFill/>
+          <a:ln/>
+        </p:spPr>
+        <p:txBody>
+          <a:bodyPr wrap="square" lIns="0" tIns="0" rIns="0" bIns="0" rtlCol="0" anchor="ctr"/>
+          <a:lstStyle/>
+          <a:p>
+            <a:pPr algn="ctr" indent="0" marL="0">
+              <a:buNone/>
+            </a:pPr>
+            <a:r>
+              <a:rPr lang="en-US" sz="1100" dirty="0">
+                <a:solidFill>
+                  <a:srgbClr val="9AA6B2"/>
                 </a:solidFill>
                 <a:latin typeface="Courier New" pitchFamily="34" charset="0"/>
                 <a:ea typeface="Courier New" pitchFamily="34" charset="-122"/>
                 <a:cs typeface="Courier New" pitchFamily="34" charset="-120"/>
               </a:rPr>
-              <a:t>    }</a:t>
-            </a:r>
-            <a:endParaRPr lang="en-US" sz="1350" dirty="0"/>
-          </a:p>
-          <a:p>
-            <a:pPr algn="l" indent="0" marL="0">
-              <a:lnSpc>
-                <a:spcPct val="108000"/>
-              </a:lnSpc>
-              <a:buNone/>
-            </a:pPr>
-            <a:r>
-              <a:rPr lang="en-US" sz="1350" dirty="0">
+              <a:t>2 MB~</a:t>
+            </a:r>
+            <a:endParaRPr lang="en-US" sz="1100" dirty="0"/>
+          </a:p>
+        </p:txBody>
+      </p:sp>
+      <p:sp>
+        <p:nvSpPr>
+          <p:cNvPr id="15" name="Shape 13"/>
+          <p:cNvSpPr/>
+          <p:nvPr/>
+        </p:nvSpPr>
+        <p:spPr>
+          <a:xfrm>
+            <a:off x="6108192" y="3108960"/>
+            <a:ext cx="1789176" cy="914400"/>
+          </a:xfrm>
+          <a:prstGeom prst="roundRect">
+            <a:avLst>
+              <a:gd name="adj" fmla="val 4000"/>
+            </a:avLst>
+          </a:prstGeom>
+          <a:solidFill>
+            <a:srgbClr val="0E1116"/>
+          </a:solidFill>
+          <a:ln w="12700">
+            <a:solidFill>
+              <a:srgbClr val="4FB0C6"/>
+            </a:solidFill>
+            <a:prstDash val="solid"/>
+          </a:ln>
+        </p:spPr>
+      </p:sp>
+      <p:sp>
+        <p:nvSpPr>
+          <p:cNvPr id="16" name="Text 14"/>
+          <p:cNvSpPr/>
+          <p:nvPr/>
+        </p:nvSpPr>
+        <p:spPr>
+          <a:xfrm>
+            <a:off x="6080760" y="3218688"/>
+            <a:ext cx="1844040" cy="310896"/>
+          </a:xfrm>
+          <a:prstGeom prst="rect">
+            <a:avLst/>
+          </a:prstGeom>
+          <a:noFill/>
+          <a:ln/>
+        </p:spPr>
+        <p:txBody>
+          <a:bodyPr wrap="square" lIns="0" tIns="0" rIns="0" bIns="0" rtlCol="0" anchor="ctr"/>
+          <a:lstStyle/>
+          <a:p>
+            <a:pPr algn="ctr" indent="0" marL="0">
+              <a:buNone/>
+            </a:pPr>
+            <a:r>
+              <a:rPr lang="en-US" sz="1200" b="1" dirty="0">
                 <a:solidFill>
                   <a:srgbClr val="E8EDF2"/>
+                </a:solidFill>
+                <a:latin typeface="Malgun Gothic" pitchFamily="34" charset="0"/>
+                <a:ea typeface="Malgun Gothic" pitchFamily="34" charset="-122"/>
+                <a:cs typeface="Malgun Gothic" pitchFamily="34" charset="-120"/>
+              </a:rPr>
+              <a:t>블록 3</a:t>
+            </a:r>
+            <a:endParaRPr lang="en-US" sz="1200" dirty="0"/>
+          </a:p>
+        </p:txBody>
+      </p:sp>
+      <p:sp>
+        <p:nvSpPr>
+          <p:cNvPr id="17" name="Text 15"/>
+          <p:cNvSpPr/>
+          <p:nvPr/>
+        </p:nvSpPr>
+        <p:spPr>
+          <a:xfrm>
+            <a:off x="6080760" y="3566160"/>
+            <a:ext cx="1844040" cy="310896"/>
+          </a:xfrm>
+          <a:prstGeom prst="rect">
+            <a:avLst/>
+          </a:prstGeom>
+          <a:noFill/>
+          <a:ln/>
+        </p:spPr>
+        <p:txBody>
+          <a:bodyPr wrap="square" lIns="0" tIns="0" rIns="0" bIns="0" rtlCol="0" anchor="ctr"/>
+          <a:lstStyle/>
+          <a:p>
+            <a:pPr algn="ctr" indent="0" marL="0">
+              <a:buNone/>
+            </a:pPr>
+            <a:r>
+              <a:rPr lang="en-US" sz="1100" dirty="0">
+                <a:solidFill>
+                  <a:srgbClr val="9AA6B2"/>
                 </a:solidFill>
                 <a:latin typeface="Courier New" pitchFamily="34" charset="0"/>
                 <a:ea typeface="Courier New" pitchFamily="34" charset="-122"/>
                 <a:cs typeface="Courier New" pitchFamily="34" charset="-120"/>
               </a:rPr>
-              <a:t>    for (i = 0; i &lt; BLOCKSIZE/sizeof(unsigned int); i++) {</a:t>
-            </a:r>
-            <a:endParaRPr lang="en-US" sz="1350" dirty="0"/>
-          </a:p>
-          <a:p>
-            <a:pPr algn="l" indent="0" marL="0">
-              <a:lnSpc>
-                <a:spcPct val="108000"/>
-              </a:lnSpc>
-              <a:buNone/>
-            </a:pPr>
-            <a:r>
-              <a:rPr lang="en-US" sz="1350" dirty="0">
-                <a:solidFill>
-                  <a:srgbClr val="8CC63F"/>
+              <a:t>3 MB~</a:t>
+            </a:r>
+            <a:endParaRPr lang="en-US" sz="1100" dirty="0"/>
+          </a:p>
+        </p:txBody>
+      </p:sp>
+      <p:sp>
+        <p:nvSpPr>
+          <p:cNvPr id="18" name="Shape 16"/>
+          <p:cNvSpPr/>
+          <p:nvPr/>
+        </p:nvSpPr>
+        <p:spPr>
+          <a:xfrm>
+            <a:off x="7952232" y="3108960"/>
+            <a:ext cx="1789176" cy="914400"/>
+          </a:xfrm>
+          <a:prstGeom prst="roundRect">
+            <a:avLst>
+              <a:gd name="adj" fmla="val 4000"/>
+            </a:avLst>
+          </a:prstGeom>
+          <a:solidFill>
+            <a:srgbClr val="0E1116"/>
+          </a:solidFill>
+          <a:ln w="12700">
+            <a:solidFill>
+              <a:srgbClr val="8CC63F"/>
+            </a:solidFill>
+            <a:prstDash val="solid"/>
+          </a:ln>
+        </p:spPr>
+      </p:sp>
+      <p:sp>
+        <p:nvSpPr>
+          <p:cNvPr id="19" name="Text 17"/>
+          <p:cNvSpPr/>
+          <p:nvPr/>
+        </p:nvSpPr>
+        <p:spPr>
+          <a:xfrm>
+            <a:off x="7924800" y="3218688"/>
+            <a:ext cx="1844040" cy="310896"/>
+          </a:xfrm>
+          <a:prstGeom prst="rect">
+            <a:avLst/>
+          </a:prstGeom>
+          <a:noFill/>
+          <a:ln/>
+        </p:spPr>
+        <p:txBody>
+          <a:bodyPr wrap="square" lIns="0" tIns="0" rIns="0" bIns="0" rtlCol="0" anchor="ctr"/>
+          <a:lstStyle/>
+          <a:p>
+            <a:pPr algn="ctr" indent="0" marL="0">
+              <a:buNone/>
+            </a:pPr>
+            <a:r>
+              <a:rPr lang="en-US" sz="1200" b="1" dirty="0">
+                <a:solidFill>
+                  <a:srgbClr val="E8EDF2"/>
+                </a:solidFill>
+                <a:latin typeface="Malgun Gothic" pitchFamily="34" charset="0"/>
+                <a:ea typeface="Malgun Gothic" pitchFamily="34" charset="-122"/>
+                <a:cs typeface="Malgun Gothic" pitchFamily="34" charset="-120"/>
+              </a:rPr>
+              <a:t>블록 4</a:t>
+            </a:r>
+            <a:endParaRPr lang="en-US" sz="1200" dirty="0"/>
+          </a:p>
+        </p:txBody>
+      </p:sp>
+      <p:sp>
+        <p:nvSpPr>
+          <p:cNvPr id="20" name="Text 18"/>
+          <p:cNvSpPr/>
+          <p:nvPr/>
+        </p:nvSpPr>
+        <p:spPr>
+          <a:xfrm>
+            <a:off x="7924800" y="3566160"/>
+            <a:ext cx="1844040" cy="310896"/>
+          </a:xfrm>
+          <a:prstGeom prst="rect">
+            <a:avLst/>
+          </a:prstGeom>
+          <a:noFill/>
+          <a:ln/>
+        </p:spPr>
+        <p:txBody>
+          <a:bodyPr wrap="square" lIns="0" tIns="0" rIns="0" bIns="0" rtlCol="0" anchor="ctr"/>
+          <a:lstStyle/>
+          <a:p>
+            <a:pPr algn="ctr" indent="0" marL="0">
+              <a:buNone/>
+            </a:pPr>
+            <a:r>
+              <a:rPr lang="en-US" sz="1100" dirty="0">
+                <a:solidFill>
+                  <a:srgbClr val="9AA6B2"/>
                 </a:solidFill>
                 <a:latin typeface="Courier New" pitchFamily="34" charset="0"/>
                 <a:ea typeface="Courier New" pitchFamily="34" charset="-122"/>
                 <a:cs typeface="Courier New" pitchFamily="34" charset="-120"/>
               </a:rPr>
-              <a:t>        ptr[i] = pattern;             // 1 MB를 4바이트씩 pattern으로 채움</a:t>
-            </a:r>
-            <a:endParaRPr lang="en-US" sz="1350" dirty="0"/>
-          </a:p>
-          <a:p>
-            <a:pPr algn="l" indent="0" marL="0">
-              <a:lnSpc>
-                <a:spcPct val="108000"/>
-              </a:lnSpc>
-              <a:buNone/>
-            </a:pPr>
-            <a:r>
-              <a:rPr lang="en-US" sz="1350" dirty="0">
+              <a:t>4 MB~</a:t>
+            </a:r>
+            <a:endParaRPr lang="en-US" sz="1100" dirty="0"/>
+          </a:p>
+        </p:txBody>
+      </p:sp>
+      <p:sp>
+        <p:nvSpPr>
+          <p:cNvPr id="21" name="Shape 19"/>
+          <p:cNvSpPr/>
+          <p:nvPr/>
+        </p:nvSpPr>
+        <p:spPr>
+          <a:xfrm>
+            <a:off x="9796272" y="3108960"/>
+            <a:ext cx="1789176" cy="914400"/>
+          </a:xfrm>
+          <a:prstGeom prst="roundRect">
+            <a:avLst>
+              <a:gd name="adj" fmla="val 4000"/>
+            </a:avLst>
+          </a:prstGeom>
+          <a:solidFill>
+            <a:srgbClr val="1A1414"/>
+          </a:solidFill>
+          <a:ln w="12700">
+            <a:solidFill>
+              <a:srgbClr val="4FB0C6"/>
+            </a:solidFill>
+            <a:prstDash val="solid"/>
+          </a:ln>
+        </p:spPr>
+      </p:sp>
+      <p:sp>
+        <p:nvSpPr>
+          <p:cNvPr id="22" name="Text 20"/>
+          <p:cNvSpPr/>
+          <p:nvPr/>
+        </p:nvSpPr>
+        <p:spPr>
+          <a:xfrm>
+            <a:off x="9768840" y="3218688"/>
+            <a:ext cx="1844040" cy="310896"/>
+          </a:xfrm>
+          <a:prstGeom prst="rect">
+            <a:avLst/>
+          </a:prstGeom>
+          <a:noFill/>
+          <a:ln/>
+        </p:spPr>
+        <p:txBody>
+          <a:bodyPr wrap="square" lIns="0" tIns="0" rIns="0" bIns="0" rtlCol="0" anchor="ctr"/>
+          <a:lstStyle/>
+          <a:p>
+            <a:pPr algn="ctr" indent="0" marL="0">
+              <a:buNone/>
+            </a:pPr>
+            <a:r>
+              <a:rPr lang="en-US" sz="1200" b="1" dirty="0">
                 <a:solidFill>
                   <a:srgbClr val="E8EDF2"/>
                 </a:solidFill>
-                <a:latin typeface="Courier New" pitchFamily="34" charset="0"/>
-                <a:ea typeface="Courier New" pitchFamily="34" charset="-122"/>
-                <a:cs typeface="Courier New" pitchFamily="34" charset="-120"/>
-              </a:rPr>
-              <a:t>    }</a:t>
-            </a:r>
-            <a:endParaRPr lang="en-US" sz="1350" dirty="0"/>
-          </a:p>
-          <a:p>
-            <a:pPr algn="l" indent="0" marL="0">
-              <a:lnSpc>
-                <a:spcPct val="108000"/>
-              </a:lnSpc>
-              <a:buNone/>
-            </a:pPr>
-            <a:r>
-              <a:rPr lang="en-US" sz="1350" dirty="0">
+                <a:latin typeface="Malgun Gothic" pitchFamily="34" charset="0"/>
+                <a:ea typeface="Malgun Gothic" pitchFamily="34" charset="-122"/>
+                <a:cs typeface="Malgun Gothic" pitchFamily="34" charset="-120"/>
+              </a:rPr>
+              <a:t>· · ·</a:t>
+            </a:r>
+            <a:endParaRPr lang="en-US" sz="1200" dirty="0"/>
+          </a:p>
+        </p:txBody>
+      </p:sp>
+      <p:sp>
+        <p:nvSpPr>
+          <p:cNvPr id="23" name="Text 21"/>
+          <p:cNvSpPr/>
+          <p:nvPr/>
+        </p:nvSpPr>
+        <p:spPr>
+          <a:xfrm>
+            <a:off x="9768840" y="3566160"/>
+            <a:ext cx="1844040" cy="310896"/>
+          </a:xfrm>
+          <a:prstGeom prst="rect">
+            <a:avLst/>
+          </a:prstGeom>
+          <a:noFill/>
+          <a:ln/>
+        </p:spPr>
+        <p:txBody>
+          <a:bodyPr wrap="square" lIns="0" tIns="0" rIns="0" bIns="0" rtlCol="0" anchor="ctr"/>
+          <a:lstStyle/>
+          <a:p>
+            <a:pPr algn="ctr" indent="0" marL="0">
+              <a:buNone/>
+            </a:pPr>
+            <a:endParaRPr lang="en-US" sz="1100" dirty="0"/>
+          </a:p>
+        </p:txBody>
+      </p:sp>
+      <p:sp>
+        <p:nvSpPr>
+          <p:cNvPr id="24" name="Text 22"/>
+          <p:cNvSpPr/>
+          <p:nvPr/>
+        </p:nvSpPr>
+        <p:spPr>
+          <a:xfrm>
+            <a:off x="548640" y="4133088"/>
+            <a:ext cx="11064240" cy="320040"/>
+          </a:xfrm>
+          <a:prstGeom prst="rect">
+            <a:avLst/>
+          </a:prstGeom>
+          <a:noFill/>
+          <a:ln/>
+        </p:spPr>
+        <p:txBody>
+          <a:bodyPr wrap="square" lIns="0" tIns="0" rIns="0" bIns="0" rtlCol="0" anchor="ctr"/>
+          <a:lstStyle/>
+          <a:p>
+            <a:pPr algn="ctr" indent="0" marL="0">
+              <a:buNone/>
+            </a:pPr>
+            <a:r>
+              <a:rPr lang="en-US" sz="1200" i="1" dirty="0">
+                <a:solidFill>
+                  <a:srgbClr val="9AA6B2"/>
+                </a:solidFill>
+                <a:latin typeface="Malgun Gothic" pitchFamily="34" charset="0"/>
+                <a:ea typeface="Malgun Gothic" pitchFamily="34" charset="-122"/>
+                <a:cs typeface="Malgun Gothic" pitchFamily="34" charset="-120"/>
+              </a:rPr>
+              <a:t>전체 GPU 메모리</a:t>
+            </a:r>
+            <a:endParaRPr lang="en-US" sz="1200" dirty="0"/>
+          </a:p>
+        </p:txBody>
+      </p:sp>
+      <p:sp>
+        <p:nvSpPr>
+          <p:cNvPr id="25" name="Text 23"/>
+          <p:cNvSpPr/>
+          <p:nvPr/>
+        </p:nvSpPr>
+        <p:spPr>
+          <a:xfrm>
+            <a:off x="548640" y="5029200"/>
+            <a:ext cx="11064240" cy="914400"/>
+          </a:xfrm>
+          <a:prstGeom prst="rect">
+            <a:avLst/>
+          </a:prstGeom>
+          <a:noFill/>
+          <a:ln/>
+        </p:spPr>
+        <p:txBody>
+          <a:bodyPr wrap="square" lIns="0" tIns="0" rIns="0" bIns="0" rtlCol="0" anchor="t"/>
+          <a:lstStyle/>
+          <a:p>
+            <a:pPr indent="0" marL="0">
+              <a:buNone/>
+            </a:pPr>
+            <a:r>
+              <a:rPr lang="en-US" sz="1700" dirty="0">
                 <a:solidFill>
                   <a:srgbClr val="E8EDF2"/>
                 </a:solidFill>
-                <a:latin typeface="Courier New" pitchFamily="34" charset="0"/>
-                <a:ea typeface="Courier New" pitchFamily="34" charset="-122"/>
-                <a:cs typeface="Courier New" pitchFamily="34" charset="-120"/>
-              </a:rPr>
-              <a:t>    return;</a:t>
-            </a:r>
-            <a:endParaRPr lang="en-US" sz="1350" dirty="0"/>
-          </a:p>
-          <a:p>
-            <a:pPr algn="l" indent="0" marL="0">
-              <a:lnSpc>
-                <a:spcPct val="108000"/>
-              </a:lnSpc>
-              <a:buNone/>
-            </a:pPr>
-            <a:r>
-              <a:rPr lang="en-US" sz="1350" dirty="0">
+                <a:latin typeface="Malgun Gothic" pitchFamily="34" charset="0"/>
+                <a:ea typeface="Malgun Gothic" pitchFamily="34" charset="-122"/>
+                <a:cs typeface="Malgun Gothic" pitchFamily="34" charset="-120"/>
+              </a:rPr>
+              <a:t>블록 번호(blockIdx.x)에 1 MB를 곱해 자기 구역을 정합니다. </a:t>
+            </a:r>
+            <a:pPr indent="0" marL="0">
+              <a:buNone/>
+            </a:pPr>
+            <a:r>
+              <a:rPr lang="en-US" sz="1700" dirty="0">
                 <a:solidFill>
                   <a:srgbClr val="E8EDF2"/>
                 </a:solidFill>
-                <a:latin typeface="Courier New" pitchFamily="34" charset="0"/>
-                <a:ea typeface="Courier New" pitchFamily="34" charset="-122"/>
-                <a:cs typeface="Courier New" pitchFamily="34" charset="-120"/>
-              </a:rPr>
-              <a:t>}</a:t>
-            </a:r>
-            <a:endParaRPr lang="en-US" sz="1350" dirty="0"/>
-          </a:p>
-        </p:txBody>
-      </p:sp>
-      <p:sp>
-        <p:nvSpPr>
-          <p:cNvPr id="6" name="Text 4"/>
-          <p:cNvSpPr/>
-          <p:nvPr/>
-        </p:nvSpPr>
-        <p:spPr>
-          <a:xfrm>
-            <a:off x="548640" y="5532120"/>
-            <a:ext cx="11064240" cy="640080"/>
-          </a:xfrm>
-          <a:prstGeom prst="rect">
-            <a:avLst/>
-          </a:prstGeom>
-          <a:noFill/>
-          <a:ln/>
-        </p:spPr>
-        <p:txBody>
-          <a:bodyPr wrap="square" lIns="0" tIns="0" rIns="0" bIns="0" rtlCol="0" anchor="t"/>
-          <a:lstStyle/>
-          <a:p>
-            <a:pPr indent="0" marL="0">
-              <a:buNone/>
-            </a:pPr>
-            <a:r>
-              <a:rPr lang="en-US" sz="1500" dirty="0">
-                <a:solidFill>
-                  <a:srgbClr val="9AA6B2"/>
-                </a:solidFill>
-                <a:latin typeface="Malgun Gothic" pitchFamily="34" charset="0"/>
-                <a:ea typeface="Malgun Gothic" pitchFamily="34" charset="-122"/>
-                <a:cs typeface="Malgun Gothic" pitchFamily="34" charset="-120"/>
-              </a:rPr>
-              <a:t>tests.cpp:245  —  블록당 스레드 1개라 threadIdx가 등장하지 않습니다. 스레드 하나가 1 MB 전체를 순회합니다.</a:t>
-            </a:r>
-            <a:endParaRPr lang="en-US" sz="1500" dirty="0"/>
+                <a:latin typeface="Malgun Gothic" pitchFamily="34" charset="0"/>
+                <a:ea typeface="Malgun Gothic" pitchFamily="34" charset="-122"/>
+                <a:cs typeface="Malgun Gothic" pitchFamily="34" charset="-120"/>
+              </a:rPr>
+              <a:t>블록 0은 0~1 MB, 블록 1은 1~2 MB … 서로 겹치지 않습니다.</a:t>
+            </a:r>
+            <a:endParaRPr lang="en-US" sz="1700" dirty="0"/>
           </a:p>
         </p:txBody>
       </p:sp>
@@ -9508,7 +11658,7 @@
                 <a:ea typeface="Courier New" pitchFamily="34" charset="-122"/>
                 <a:cs typeface="Courier New" pitchFamily="34" charset="-120"/>
               </a:rPr>
-              <a:t>8</a:t>
+              <a:t>7</a:t>
             </a:r>
             <a:endParaRPr lang="en-US" sz="2200" dirty="0"/>
           </a:p>
@@ -9547,7 +11697,7 @@
                 <a:ea typeface="Malgun Gothic" pitchFamily="34" charset="-122"/>
                 <a:cs typeface="Malgun Gothic" pitchFamily="34" charset="-120"/>
               </a:rPr>
-              <a:t>왜 블록당 스레드 1개일까?</a:t>
+              <a:t>첫 커널 완독 · kernel_move_inv_write</a:t>
             </a:r>
             <a:endParaRPr lang="en-US" sz="3000" dirty="0"/>
           </a:p>
@@ -9561,18 +11711,23 @@
         </p:nvSpPr>
         <p:spPr>
           <a:xfrm>
-            <a:off x="548640" y="1600200"/>
-            <a:ext cx="5349240" cy="4114800"/>
+            <a:off x="548640" y="1554480"/>
+            <a:ext cx="11064240" cy="3794760"/>
           </a:xfrm>
           <a:prstGeom prst="roundRect">
             <a:avLst>
-              <a:gd name="adj" fmla="val 1778"/>
+              <a:gd name="adj" fmla="val 1446"/>
             </a:avLst>
           </a:prstGeom>
           <a:solidFill>
-            <a:srgbClr val="1E232C"/>
+            <a:srgbClr val="0E1116"/>
           </a:solidFill>
-          <a:ln/>
+          <a:ln w="12700">
+            <a:solidFill>
+              <a:srgbClr val="2C3440"/>
+            </a:solidFill>
+            <a:prstDash val="solid"/>
+          </a:ln>
         </p:spPr>
       </p:sp>
       <p:sp>
@@ -9583,320 +11738,296 @@
         </p:nvSpPr>
         <p:spPr>
           <a:xfrm>
-            <a:off x="822960" y="1828800"/>
-            <a:ext cx="4800600" cy="457200"/>
-          </a:xfrm>
-          <a:prstGeom prst="rect">
-            <a:avLst/>
-          </a:prstGeom>
-          <a:noFill/>
-          <a:ln/>
-        </p:spPr>
-        <p:txBody>
-          <a:bodyPr wrap="square" lIns="0" tIns="0" rIns="0" bIns="0" rtlCol="0" anchor="ctr"/>
+            <a:off x="749808" y="1700784"/>
+            <a:ext cx="10661904" cy="3502152"/>
+          </a:xfrm>
+          <a:prstGeom prst="rect">
+            <a:avLst/>
+          </a:prstGeom>
+          <a:noFill/>
+          <a:ln/>
+        </p:spPr>
+        <p:txBody>
+          <a:bodyPr wrap="square" lIns="0" tIns="0" rIns="0" bIns="0" rtlCol="0" anchor="t"/>
+          <a:lstStyle/>
+          <a:p>
+            <a:pPr algn="l" indent="0" marL="0">
+              <a:lnSpc>
+                <a:spcPct val="108000"/>
+              </a:lnSpc>
+              <a:buNone/>
+            </a:pPr>
+            <a:r>
+              <a:rPr lang="en-US" sz="1350" dirty="0">
+                <a:solidFill>
+                  <a:srgbClr val="8CC63F"/>
+                </a:solidFill>
+                <a:latin typeface="Courier New" pitchFamily="34" charset="0"/>
+                <a:ea typeface="Courier New" pitchFamily="34" charset="-122"/>
+                <a:cs typeface="Courier New" pitchFamily="34" charset="-120"/>
+              </a:rPr>
+              <a:t>__global__ void</a:t>
+            </a:r>
+            <a:endParaRPr lang="en-US" sz="1350" dirty="0"/>
+          </a:p>
+          <a:p>
+            <a:pPr algn="l" indent="0" marL="0">
+              <a:lnSpc>
+                <a:spcPct val="108000"/>
+              </a:lnSpc>
+              <a:buNone/>
+            </a:pPr>
+            <a:r>
+              <a:rPr lang="en-US" sz="1350" dirty="0">
+                <a:solidFill>
+                  <a:srgbClr val="E8EDF2"/>
+                </a:solidFill>
+                <a:latin typeface="Courier New" pitchFamily="34" charset="0"/>
+                <a:ea typeface="Courier New" pitchFamily="34" charset="-122"/>
+                <a:cs typeface="Courier New" pitchFamily="34" charset="-120"/>
+              </a:rPr>
+              <a:t>kernel_move_inv_write(char* _ptr, char* end_ptr, unsigned int pattern) {</a:t>
+            </a:r>
+            <a:endParaRPr lang="en-US" sz="1350" dirty="0"/>
+          </a:p>
+          <a:p>
+            <a:pPr algn="l" indent="0" marL="0">
+              <a:lnSpc>
+                <a:spcPct val="108000"/>
+              </a:lnSpc>
+              <a:buNone/>
+            </a:pPr>
+            <a:r>
+              <a:rPr lang="en-US" sz="1350" dirty="0">
+                <a:solidFill>
+                  <a:srgbClr val="E8EDF2"/>
+                </a:solidFill>
+                <a:latin typeface="Courier New" pitchFamily="34" charset="0"/>
+                <a:ea typeface="Courier New" pitchFamily="34" charset="-122"/>
+                <a:cs typeface="Courier New" pitchFamily="34" charset="-120"/>
+              </a:rPr>
+              <a:t>    unsigned int i;</a:t>
+            </a:r>
+            <a:endParaRPr lang="en-US" sz="1350" dirty="0"/>
+          </a:p>
+          <a:p>
+            <a:pPr algn="l" indent="0" marL="0">
+              <a:lnSpc>
+                <a:spcPct val="108000"/>
+              </a:lnSpc>
+              <a:buNone/>
+            </a:pPr>
+            <a:r>
+              <a:rPr lang="en-US" sz="1350" dirty="0">
+                <a:solidFill>
+                  <a:srgbClr val="E8EDF2"/>
+                </a:solidFill>
+                <a:latin typeface="Courier New" pitchFamily="34" charset="0"/>
+                <a:ea typeface="Courier New" pitchFamily="34" charset="-122"/>
+                <a:cs typeface="Courier New" pitchFamily="34" charset="-120"/>
+              </a:rPr>
+              <a:t>    unsigned int* ptr = (unsigned int*)(_ptr + blockIdx.x*BLOCKSIZE);</a:t>
+            </a:r>
+            <a:endParaRPr lang="en-US" sz="1350" dirty="0"/>
+          </a:p>
+          <a:p>
+            <a:pPr algn="l" indent="0" marL="0">
+              <a:lnSpc>
+                <a:spcPct val="108000"/>
+              </a:lnSpc>
+              <a:buNone/>
+            </a:pPr>
+            <a:r>
+              <a:rPr lang="en-US" sz="1350" dirty="0">
+                <a:solidFill>
+                  <a:srgbClr val="E8EDF2"/>
+                </a:solidFill>
+                <a:latin typeface="Courier New" pitchFamily="34" charset="0"/>
+                <a:ea typeface="Courier New" pitchFamily="34" charset="-122"/>
+                <a:cs typeface="Courier New" pitchFamily="34" charset="-120"/>
+              </a:rPr>
+              <a:t>    if (ptr &gt;= (unsigned int*) end_ptr) {</a:t>
+            </a:r>
+            <a:endParaRPr lang="en-US" sz="1350" dirty="0"/>
+          </a:p>
+          <a:p>
+            <a:pPr algn="l" indent="0" marL="0">
+              <a:lnSpc>
+                <a:spcPct val="108000"/>
+              </a:lnSpc>
+              <a:buNone/>
+            </a:pPr>
+            <a:r>
+              <a:rPr lang="en-US" sz="1350" dirty="0">
+                <a:solidFill>
+                  <a:srgbClr val="E0A458"/>
+                </a:solidFill>
+                <a:latin typeface="Courier New" pitchFamily="34" charset="0"/>
+                <a:ea typeface="Courier New" pitchFamily="34" charset="-122"/>
+                <a:cs typeface="Courier New" pitchFamily="34" charset="-120"/>
+              </a:rPr>
+              <a:t>        return;                       // 범위 밖이면 아무 것도 안 함(guard)</a:t>
+            </a:r>
+            <a:endParaRPr lang="en-US" sz="1350" dirty="0"/>
+          </a:p>
+          <a:p>
+            <a:pPr algn="l" indent="0" marL="0">
+              <a:lnSpc>
+                <a:spcPct val="108000"/>
+              </a:lnSpc>
+              <a:buNone/>
+            </a:pPr>
+            <a:r>
+              <a:rPr lang="en-US" sz="1350" dirty="0">
+                <a:solidFill>
+                  <a:srgbClr val="E8EDF2"/>
+                </a:solidFill>
+                <a:latin typeface="Courier New" pitchFamily="34" charset="0"/>
+                <a:ea typeface="Courier New" pitchFamily="34" charset="-122"/>
+                <a:cs typeface="Courier New" pitchFamily="34" charset="-120"/>
+              </a:rPr>
+              <a:t>    }</a:t>
+            </a:r>
+            <a:endParaRPr lang="en-US" sz="1350" dirty="0"/>
+          </a:p>
+          <a:p>
+            <a:pPr algn="l" indent="0" marL="0">
+              <a:lnSpc>
+                <a:spcPct val="108000"/>
+              </a:lnSpc>
+              <a:buNone/>
+            </a:pPr>
+            <a:r>
+              <a:rPr lang="en-US" sz="1350" dirty="0">
+                <a:solidFill>
+                  <a:srgbClr val="E8EDF2"/>
+                </a:solidFill>
+                <a:latin typeface="Courier New" pitchFamily="34" charset="0"/>
+                <a:ea typeface="Courier New" pitchFamily="34" charset="-122"/>
+                <a:cs typeface="Courier New" pitchFamily="34" charset="-120"/>
+              </a:rPr>
+              <a:t>    for (i = 0; i &lt; BLOCKSIZE/sizeof(unsigned int); i++) {</a:t>
+            </a:r>
+            <a:endParaRPr lang="en-US" sz="1350" dirty="0"/>
+          </a:p>
+          <a:p>
+            <a:pPr algn="l" indent="0" marL="0">
+              <a:lnSpc>
+                <a:spcPct val="108000"/>
+              </a:lnSpc>
+              <a:buNone/>
+            </a:pPr>
+            <a:r>
+              <a:rPr lang="en-US" sz="1350" dirty="0">
+                <a:solidFill>
+                  <a:srgbClr val="8CC63F"/>
+                </a:solidFill>
+                <a:latin typeface="Courier New" pitchFamily="34" charset="0"/>
+                <a:ea typeface="Courier New" pitchFamily="34" charset="-122"/>
+                <a:cs typeface="Courier New" pitchFamily="34" charset="-120"/>
+              </a:rPr>
+              <a:t>        ptr[i] = pattern;             // 1 MB를 4바이트씩 pattern으로 채움</a:t>
+            </a:r>
+            <a:endParaRPr lang="en-US" sz="1350" dirty="0"/>
+          </a:p>
+          <a:p>
+            <a:pPr algn="l" indent="0" marL="0">
+              <a:lnSpc>
+                <a:spcPct val="108000"/>
+              </a:lnSpc>
+              <a:buNone/>
+            </a:pPr>
+            <a:r>
+              <a:rPr lang="en-US" sz="1350" dirty="0">
+                <a:solidFill>
+                  <a:srgbClr val="E8EDF2"/>
+                </a:solidFill>
+                <a:latin typeface="Courier New" pitchFamily="34" charset="0"/>
+                <a:ea typeface="Courier New" pitchFamily="34" charset="-122"/>
+                <a:cs typeface="Courier New" pitchFamily="34" charset="-120"/>
+              </a:rPr>
+              <a:t>    }</a:t>
+            </a:r>
+            <a:endParaRPr lang="en-US" sz="1350" dirty="0"/>
+          </a:p>
+          <a:p>
+            <a:pPr algn="l" indent="0" marL="0">
+              <a:lnSpc>
+                <a:spcPct val="108000"/>
+              </a:lnSpc>
+              <a:buNone/>
+            </a:pPr>
+            <a:r>
+              <a:rPr lang="en-US" sz="1350" dirty="0">
+                <a:solidFill>
+                  <a:srgbClr val="E8EDF2"/>
+                </a:solidFill>
+                <a:latin typeface="Courier New" pitchFamily="34" charset="0"/>
+                <a:ea typeface="Courier New" pitchFamily="34" charset="-122"/>
+                <a:cs typeface="Courier New" pitchFamily="34" charset="-120"/>
+              </a:rPr>
+              <a:t>    return;</a:t>
+            </a:r>
+            <a:endParaRPr lang="en-US" sz="1350" dirty="0"/>
+          </a:p>
+          <a:p>
+            <a:pPr algn="l" indent="0" marL="0">
+              <a:lnSpc>
+                <a:spcPct val="108000"/>
+              </a:lnSpc>
+              <a:buNone/>
+            </a:pPr>
+            <a:r>
+              <a:rPr lang="en-US" sz="1350" dirty="0">
+                <a:solidFill>
+                  <a:srgbClr val="E8EDF2"/>
+                </a:solidFill>
+                <a:latin typeface="Courier New" pitchFamily="34" charset="0"/>
+                <a:ea typeface="Courier New" pitchFamily="34" charset="-122"/>
+                <a:cs typeface="Courier New" pitchFamily="34" charset="-120"/>
+              </a:rPr>
+              <a:t>}</a:t>
+            </a:r>
+            <a:endParaRPr lang="en-US" sz="1350" dirty="0"/>
+          </a:p>
+        </p:txBody>
+      </p:sp>
+      <p:sp>
+        <p:nvSpPr>
+          <p:cNvPr id="6" name="Text 4"/>
+          <p:cNvSpPr/>
+          <p:nvPr/>
+        </p:nvSpPr>
+        <p:spPr>
+          <a:xfrm>
+            <a:off x="548640" y="5532120"/>
+            <a:ext cx="11064240" cy="640080"/>
+          </a:xfrm>
+          <a:prstGeom prst="rect">
+            <a:avLst/>
+          </a:prstGeom>
+          <a:noFill/>
+          <a:ln/>
+        </p:spPr>
+        <p:txBody>
+          <a:bodyPr wrap="square" lIns="0" tIns="0" rIns="0" bIns="0" rtlCol="0" anchor="t"/>
           <a:lstStyle/>
           <a:p>
             <a:pPr indent="0" marL="0">
               <a:buNone/>
             </a:pPr>
             <a:r>
-              <a:rPr lang="en-US" sz="2000" b="1" dirty="0">
-                <a:solidFill>
-                  <a:srgbClr val="8CC63F"/>
-                </a:solidFill>
-                <a:latin typeface="Malgun Gothic" pitchFamily="34" charset="0"/>
-                <a:ea typeface="Malgun Gothic" pitchFamily="34" charset="-122"/>
-                <a:cs typeface="Malgun Gothic" pitchFamily="34" charset="-120"/>
-              </a:rPr>
-              <a:t>의도된 단순함</a:t>
-            </a:r>
-            <a:endParaRPr lang="en-US" sz="2000" dirty="0"/>
-          </a:p>
-        </p:txBody>
-      </p:sp>
-      <p:sp>
-        <p:nvSpPr>
-          <p:cNvPr id="6" name="Text 4"/>
-          <p:cNvSpPr/>
-          <p:nvPr/>
-        </p:nvSpPr>
-        <p:spPr>
-          <a:xfrm>
-            <a:off x="822960" y="2377440"/>
-            <a:ext cx="4800600" cy="3108960"/>
-          </a:xfrm>
-          <a:prstGeom prst="rect">
-            <a:avLst/>
-          </a:prstGeom>
-          <a:noFill/>
-          <a:ln/>
-        </p:spPr>
-        <p:txBody>
-          <a:bodyPr wrap="square" lIns="0" tIns="0" rIns="0" bIns="0" rtlCol="0" anchor="t"/>
-          <a:lstStyle/>
-          <a:p>
-            <a:pPr marL="342900" indent="-342900">
-              <a:spcAft>
-                <a:spcPts val="1000"/>
-              </a:spcAft>
-              <a:buSzPct val="100000"/>
-              <a:buChar char="•"/>
-            </a:pPr>
-            <a:r>
-              <a:rPr lang="en-US" sz="1550" dirty="0">
-                <a:solidFill>
-                  <a:srgbClr val="E8EDF2"/>
-                </a:solidFill>
-                <a:latin typeface="Malgun Gothic" pitchFamily="34" charset="0"/>
-                <a:ea typeface="Malgun Gothic" pitchFamily="34" charset="-122"/>
-                <a:cs typeface="Malgun Gothic" pitchFamily="34" charset="-120"/>
-              </a:rPr>
-              <a:t>Test 0~9의 목적은 속도가 아니라 정확한 진단</a:t>
-            </a:r>
-            <a:endParaRPr lang="en-US" sz="1550" dirty="0"/>
-          </a:p>
-          <a:p>
-            <a:pPr marL="342900" indent="-342900">
-              <a:spcAft>
-                <a:spcPts val="1000"/>
-              </a:spcAft>
-              <a:buSzPct val="100000"/>
-              <a:buChar char="•"/>
-            </a:pPr>
-            <a:r>
-              <a:rPr lang="en-US" sz="1550" dirty="0">
-                <a:solidFill>
-                  <a:srgbClr val="E8EDF2"/>
-                </a:solidFill>
-                <a:latin typeface="Malgun Gothic" pitchFamily="34" charset="0"/>
-                <a:ea typeface="Malgun Gothic" pitchFamily="34" charset="-122"/>
-                <a:cs typeface="Malgun Gothic" pitchFamily="34" charset="-120"/>
-              </a:rPr>
-              <a:t>주소 배선(address wire) 오류를 찾으려면 예측 가능한 접근 패턴이 유리</a:t>
-            </a:r>
-            <a:endParaRPr lang="en-US" sz="1550" dirty="0"/>
-          </a:p>
-          <a:p>
-            <a:pPr marL="342900" indent="-342900">
-              <a:spcAft>
-                <a:spcPts val="1000"/>
-              </a:spcAft>
-              <a:buSzPct val="100000"/>
-              <a:buChar char="•"/>
-            </a:pPr>
-            <a:r>
-              <a:rPr lang="en-US" sz="1550" dirty="0">
-                <a:solidFill>
-                  <a:srgbClr val="E8EDF2"/>
-                </a:solidFill>
-                <a:latin typeface="Malgun Gothic" pitchFamily="34" charset="0"/>
-                <a:ea typeface="Malgun Gothic" pitchFamily="34" charset="-122"/>
-                <a:cs typeface="Malgun Gothic" pitchFamily="34" charset="-120"/>
-              </a:rPr>
-              <a:t>코드가 단순 = 버그가 적고 신뢰 가능</a:t>
-            </a:r>
-            <a:endParaRPr lang="en-US" sz="1550" dirty="0"/>
-          </a:p>
-          <a:p>
-            <a:pPr marL="342900" indent="-342900">
-              <a:buSzPct val="100000"/>
-              <a:buChar char="•"/>
-            </a:pPr>
-            <a:r>
-              <a:rPr lang="en-US" sz="1550" dirty="0">
-                <a:solidFill>
-                  <a:srgbClr val="8CC63F"/>
-                </a:solidFill>
-                <a:latin typeface="Malgun Gothic" pitchFamily="34" charset="0"/>
-                <a:ea typeface="Malgun Gothic" pitchFamily="34" charset="-122"/>
-                <a:cs typeface="Malgun Gothic" pitchFamily="34" charset="-120"/>
-              </a:rPr>
-              <a:t>입문자가 읽기에 완벽</a:t>
-            </a:r>
-            <a:endParaRPr lang="en-US" sz="1550" dirty="0"/>
-          </a:p>
-        </p:txBody>
-      </p:sp>
-      <p:sp>
-        <p:nvSpPr>
-          <p:cNvPr id="7" name="Shape 5"/>
-          <p:cNvSpPr/>
-          <p:nvPr/>
-        </p:nvSpPr>
-        <p:spPr>
-          <a:xfrm>
-            <a:off x="6263640" y="1600200"/>
-            <a:ext cx="5349240" cy="4114800"/>
-          </a:xfrm>
-          <a:prstGeom prst="roundRect">
-            <a:avLst>
-              <a:gd name="adj" fmla="val 1778"/>
-            </a:avLst>
-          </a:prstGeom>
-          <a:solidFill>
-            <a:srgbClr val="1E232C"/>
-          </a:solidFill>
-          <a:ln/>
-        </p:spPr>
-      </p:sp>
-      <p:sp>
-        <p:nvSpPr>
-          <p:cNvPr id="8" name="Text 6"/>
-          <p:cNvSpPr/>
-          <p:nvPr/>
-        </p:nvSpPr>
-        <p:spPr>
-          <a:xfrm>
-            <a:off x="6537960" y="1828800"/>
-            <a:ext cx="4800600" cy="457200"/>
-          </a:xfrm>
-          <a:prstGeom prst="rect">
-            <a:avLst/>
-          </a:prstGeom>
-          <a:noFill/>
-          <a:ln/>
-        </p:spPr>
-        <p:txBody>
-          <a:bodyPr wrap="square" lIns="0" tIns="0" rIns="0" bIns="0" rtlCol="0" anchor="ctr"/>
-          <a:lstStyle/>
-          <a:p>
-            <a:pPr indent="0" marL="0">
-              <a:buNone/>
-            </a:pPr>
-            <a:r>
-              <a:rPr lang="en-US" sz="2000" b="1" dirty="0">
-                <a:solidFill>
-                  <a:srgbClr val="E0A458"/>
-                </a:solidFill>
-                <a:latin typeface="Malgun Gothic" pitchFamily="34" charset="0"/>
-                <a:ea typeface="Malgun Gothic" pitchFamily="34" charset="-122"/>
-                <a:cs typeface="Malgun Gothic" pitchFamily="34" charset="-120"/>
-              </a:rPr>
-              <a:t>하지만 느리다</a:t>
-            </a:r>
-            <a:endParaRPr lang="en-US" sz="2000" dirty="0"/>
-          </a:p>
-        </p:txBody>
-      </p:sp>
-      <p:sp>
-        <p:nvSpPr>
-          <p:cNvPr id="9" name="Text 7"/>
-          <p:cNvSpPr/>
-          <p:nvPr/>
-        </p:nvSpPr>
-        <p:spPr>
-          <a:xfrm>
-            <a:off x="6537960" y="2377440"/>
-            <a:ext cx="4800600" cy="3108960"/>
-          </a:xfrm>
-          <a:prstGeom prst="rect">
-            <a:avLst/>
-          </a:prstGeom>
-          <a:noFill/>
-          <a:ln/>
-        </p:spPr>
-        <p:txBody>
-          <a:bodyPr wrap="square" lIns="0" tIns="0" rIns="0" bIns="0" rtlCol="0" anchor="t"/>
-          <a:lstStyle/>
-          <a:p>
-            <a:pPr marL="342900" indent="-342900">
-              <a:spcAft>
-                <a:spcPts val="1000"/>
-              </a:spcAft>
-              <a:buSzPct val="100000"/>
-              <a:buChar char="•"/>
-            </a:pPr>
-            <a:r>
-              <a:rPr lang="en-US" sz="1550" dirty="0">
-                <a:solidFill>
-                  <a:srgbClr val="E8EDF2"/>
-                </a:solidFill>
-                <a:latin typeface="Malgun Gothic" pitchFamily="34" charset="0"/>
-                <a:ea typeface="Malgun Gothic" pitchFamily="34" charset="-122"/>
-                <a:cs typeface="Malgun Gothic" pitchFamily="34" charset="-120"/>
-              </a:rPr>
-              <a:t>GPU의 수천 코어를 거의 놀림</a:t>
-            </a:r>
-            <a:endParaRPr lang="en-US" sz="1550" dirty="0"/>
-          </a:p>
-          <a:p>
-            <a:pPr marL="342900" indent="-342900">
-              <a:spcAft>
-                <a:spcPts val="1000"/>
-              </a:spcAft>
-              <a:buSzPct val="100000"/>
-              <a:buChar char="•"/>
-            </a:pPr>
-            <a:r>
-              <a:rPr lang="en-US" sz="1550" dirty="0">
-                <a:solidFill>
-                  <a:srgbClr val="E8EDF2"/>
-                </a:solidFill>
-                <a:latin typeface="Malgun Gothic" pitchFamily="34" charset="0"/>
-                <a:ea typeface="Malgun Gothic" pitchFamily="34" charset="-122"/>
-                <a:cs typeface="Malgun Gothic" pitchFamily="34" charset="-120"/>
-              </a:rPr>
-              <a:t>블록당 스레드 1개 → 병렬성 최소</a:t>
-            </a:r>
-            <a:endParaRPr lang="en-US" sz="1550" dirty="0"/>
-          </a:p>
-          <a:p>
-            <a:pPr marL="342900" indent="-342900">
-              <a:spcAft>
-                <a:spcPts val="600"/>
-              </a:spcAft>
-              <a:buSzPct val="100000"/>
-              <a:buChar char="•"/>
-            </a:pPr>
-            <a:r>
-              <a:rPr lang="en-US" sz="1550" dirty="0">
-                <a:solidFill>
-                  <a:srgbClr val="E8EDF2"/>
-                </a:solidFill>
-                <a:latin typeface="Malgun Gothic" pitchFamily="34" charset="0"/>
-                <a:ea typeface="Malgun Gothic" pitchFamily="34" charset="-122"/>
-                <a:cs typeface="Malgun Gothic" pitchFamily="34" charset="-120"/>
-              </a:rPr>
-              <a:t>Test 10은 정반대로 설계됨:</a:t>
-            </a:r>
-            <a:endParaRPr lang="en-US" sz="1550" dirty="0"/>
-          </a:p>
-          <a:p>
-            <a:pPr indent="0" marL="0">
-              <a:spcAft>
-                <a:spcPts val="1000"/>
-              </a:spcAft>
-              <a:buNone/>
-            </a:pPr>
-            <a:r>
-              <a:rPr lang="en-US" sz="1550" dirty="0">
-                <a:solidFill>
-                  <a:srgbClr val="4FB0C6"/>
-                </a:solidFill>
-                <a:latin typeface="Malgun Gothic" pitchFamily="34" charset="0"/>
-                <a:ea typeface="Malgun Gothic" pitchFamily="34" charset="-122"/>
-                <a:cs typeface="Malgun Gothic" pitchFamily="34" charset="-120"/>
-              </a:rPr>
-              <a:t>&lt;&lt;&lt;32768, 64&gt;&gt;&gt;  — 대역폭 최적화</a:t>
-            </a:r>
-            <a:endParaRPr lang="en-US" sz="1550" dirty="0"/>
-          </a:p>
-          <a:p>
-            <a:pPr indent="0" marL="0">
-              <a:buNone/>
-            </a:pPr>
-            <a:r>
-              <a:rPr lang="en-US" sz="1550" i="1" dirty="0">
-                <a:solidFill>
-                  <a:srgbClr val="8CC63F"/>
-                </a:solidFill>
-                <a:latin typeface="Malgun Gothic" pitchFamily="34" charset="0"/>
-                <a:ea typeface="Malgun Gothic" pitchFamily="34" charset="-122"/>
-                <a:cs typeface="Malgun Gothic" pitchFamily="34" charset="-120"/>
-              </a:rPr>
-              <a:t>→ 세션 3에서 두 방식을 직접 비교합니다</a:t>
-            </a:r>
-            <a:endParaRPr lang="en-US" sz="1550" dirty="0"/>
+              <a:rPr lang="en-US" sz="1500" dirty="0">
+                <a:solidFill>
+                  <a:srgbClr val="9AA6B2"/>
+                </a:solidFill>
+                <a:latin typeface="Malgun Gothic" pitchFamily="34" charset="0"/>
+                <a:ea typeface="Malgun Gothic" pitchFamily="34" charset="-122"/>
+                <a:cs typeface="Malgun Gothic" pitchFamily="34" charset="-120"/>
+              </a:rPr>
+              <a:t>tests.cpp:245  —  블록당 스레드 1개라 threadIdx가 등장하지 않습니다. 스레드 하나가 1 MB 전체를 순회합니다.</a:t>
+            </a:r>
+            <a:endParaRPr lang="en-US" sz="1500" dirty="0"/>
           </a:p>
         </p:txBody>
       </p:sp>

--- a/seminar/slides/세션1_CUDA_스레드모델과_첫커널.pptx
+++ b/seminar/slides/세션1_CUDA_스레드모델과_첫커널.pptx
@@ -19,9 +19,10 @@
     <p:sldId id="267" r:id="rId13"/>
     <p:sldId id="268" r:id="rId14"/>
     <p:sldId id="269" r:id="rId15"/>
+    <p:sldId id="270" r:id="rId16"/>
   </p:sldIdLst>
   <p:notesMasterIdLst>
-    <p:notesMasterId r:id="rId16"/>
+    <p:notesMasterId r:id="rId17"/>
   </p:notesMasterIdLst>
   <p:sldSz cx="12192000" cy="6858000"/>
   <p:notesSz cx="6858000" cy="12192000"/>
@@ -779,7 +780,7 @@
           <a:p>
             <a:r>
               <a:rPr lang="en-US" dirty="0"/>
-              <a:t>실습 랩 문서(세션1_실습랩.md)를 나눠주고 진행합니다. Ex 4는 반드시 원복하도록 강조하세요.</a:t>
+              <a:t>launch = CPU 한 줄 → GPU가 블록을 SM에 분배 → 워프 실행 → 완료. 호스트는 비동기로 리턴한다는 점이 다음 세션들의 복선.</a:t>
             </a:r>
             <a:endParaRPr lang="en-US" dirty="0"/>
           </a:p>
@@ -867,7 +868,7 @@
           <a:p>
             <a:r>
               <a:rPr lang="en-US" dirty="0"/>
-              <a:t>네 가지 목표(슬라이드 2)로 돌아가 자가 점검을 유도하세요.</a:t>
+              <a:t>실습 랩 문서(세션1_실습랩.md)를 나눠주고 진행합니다. Ex 4는 반드시 원복하도록 강조하세요.</a:t>
             </a:r>
             <a:endParaRPr lang="en-US" dirty="0"/>
           </a:p>
@@ -955,7 +956,7 @@
           <a:p>
             <a:r>
               <a:rPr lang="en-US" dirty="0"/>
-              <a:t>오늘의 write 커널이 다음 세션 read 커널로 이어진다는 연속성을 강조하며 마무리하세요.</a:t>
+              <a:t>네 가지 목표(슬라이드 2)로 돌아가 자가 점검을 유도하세요.</a:t>
             </a:r>
             <a:endParaRPr lang="en-US" dirty="0"/>
           </a:p>
@@ -979,6 +980,94 @@
             <a:fld id="{F7021451-1387-4CA6-816F-3879F97B5CBC}" type="slidenum">
               <a:rPr lang="en-US"/>
               <a:t>14</a:t>
+            </a:fld>
+            <a:endParaRPr lang="en-US"/>
+          </a:p>
+        </p:txBody>
+      </p:sp>
+    </p:spTree>
+    <p:extLst>
+      <p:ext uri="{BB962C8B-B14F-4D97-AF65-F5344CB8AC3E}">
+        <p14:creationId xmlns:p14="http://schemas.microsoft.com/office/powerpoint/2010/main" val="1024086991"/>
+      </p:ext>
+    </p:extLst>
+  </p:cSld>
+  <p:clrMapOvr>
+    <a:masterClrMapping/>
+  </p:clrMapOvr>
+</p:notes>
+</file>
+
+<file path=ppt/notesSlides/notesSlide15.xml><?xml version="1.0" encoding="utf-8"?>
+<p:notes xmlns:a="http://schemas.openxmlformats.org/drawingml/2006/main" xmlns:r="http://schemas.openxmlformats.org/officeDocument/2006/relationships" xmlns:p="http://schemas.openxmlformats.org/presentationml/2006/main">
+  <p:cSld>
+    <p:spTree>
+      <p:nvGrpSpPr>
+        <p:cNvPr id="1" name=""/>
+        <p:cNvGrpSpPr/>
+        <p:nvPr/>
+      </p:nvGrpSpPr>
+      <p:grpSpPr>
+        <a:xfrm>
+          <a:off x="0" y="0"/>
+          <a:ext cx="0" cy="0"/>
+          <a:chOff x="0" y="0"/>
+          <a:chExt cx="0" cy="0"/>
+        </a:xfrm>
+      </p:grpSpPr>
+      <p:sp>
+        <p:nvSpPr>
+          <p:cNvPr id="2" name="Slide Image Placeholder 1"/>
+          <p:cNvSpPr>
+            <a:spLocks noGrp="1" noRot="1" noChangeAspect="1"/>
+          </p:cNvSpPr>
+          <p:nvPr>
+            <p:ph type="sldImg"/>
+          </p:nvPr>
+        </p:nvSpPr>
+        <p:spPr/>
+      </p:sp>
+      <p:sp>
+        <p:nvSpPr>
+          <p:cNvPr id="3" name="Notes Placeholder 2"/>
+          <p:cNvSpPr>
+            <a:spLocks noGrp="1"/>
+          </p:cNvSpPr>
+          <p:nvPr>
+            <p:ph type="body" idx="1"/>
+          </p:nvPr>
+        </p:nvSpPr>
+        <p:spPr/>
+        <p:txBody>
+          <a:bodyPr/>
+          <a:lstStyle/>
+          <a:p>
+            <a:r>
+              <a:rPr lang="en-US" dirty="0"/>
+              <a:t>오늘의 write 커널이 다음 세션 read 커널로 이어진다는 연속성을 강조하며 마무리하세요.</a:t>
+            </a:r>
+            <a:endParaRPr lang="en-US" dirty="0"/>
+          </a:p>
+        </p:txBody>
+      </p:sp>
+      <p:sp>
+        <p:nvSpPr>
+          <p:cNvPr id="4" name="Slide Number Placeholder 3"/>
+          <p:cNvSpPr>
+            <a:spLocks noGrp="1"/>
+          </p:cNvSpPr>
+          <p:nvPr>
+            <p:ph type="sldNum" sz="quarter" idx="10"/>
+          </p:nvPr>
+        </p:nvSpPr>
+        <p:spPr/>
+        <p:txBody>
+          <a:bodyPr/>
+          <a:lstStyle/>
+          <a:p>
+            <a:fld id="{F7021451-1387-4CA6-816F-3879F97B5CBC}" type="slidenum">
+              <a:rPr lang="en-US"/>
+              <a:t>15</a:t>
             </a:fld>
             <a:endParaRPr lang="en-US"/>
           </a:p>
@@ -3194,7 +3283,7 @@
                 <a:ea typeface="Courier New" pitchFamily="34" charset="-122"/>
                 <a:cs typeface="Courier New" pitchFamily="34" charset="-120"/>
               </a:rPr>
-              <a:t>10</a:t>
+              <a:t>9</a:t>
             </a:r>
             <a:endParaRPr lang="en-US" sz="2200" dirty="0"/>
           </a:p>
@@ -3233,7 +3322,7 @@
                 <a:ea typeface="Malgun Gothic" pitchFamily="34" charset="-122"/>
                 <a:cs typeface="Malgun Gothic" pitchFamily="34" charset="-120"/>
               </a:rPr>
-              <a:t>실습 미리보기 · Lab 1</a:t>
+              <a:t>커널 launch 흐름 · 호출에서 완료까지</a:t>
             </a:r>
             <a:endParaRPr lang="en-US" sz="3000" dirty="0"/>
           </a:p>
@@ -3241,64 +3330,713 @@
       </p:sp>
       <p:sp>
         <p:nvSpPr>
-          <p:cNvPr id="4" name="Shape 2"/>
-          <p:cNvSpPr/>
-          <p:nvPr/>
-        </p:nvSpPr>
-        <p:spPr>
-          <a:xfrm>
-            <a:off x="548640" y="1554480"/>
-            <a:ext cx="5303520" cy="1965960"/>
+          <p:cNvPr id="4" name="Text 2"/>
+          <p:cNvSpPr/>
+          <p:nvPr/>
+        </p:nvSpPr>
+        <p:spPr>
+          <a:xfrm>
+            <a:off x="548640" y="1371600"/>
+            <a:ext cx="11064240" cy="411480"/>
+          </a:xfrm>
+          <a:prstGeom prst="rect">
+            <a:avLst/>
+          </a:prstGeom>
+          <a:noFill/>
+          <a:ln/>
+        </p:spPr>
+        <p:txBody>
+          <a:bodyPr wrap="square" lIns="0" tIns="0" rIns="0" bIns="0" rtlCol="0" anchor="ctr"/>
+          <a:lstStyle/>
+          <a:p>
+            <a:pPr indent="0" marL="0">
+              <a:buNone/>
+            </a:pPr>
+            <a:r>
+              <a:rPr lang="en-US" sz="1500" dirty="0">
+                <a:solidFill>
+                  <a:srgbClr val="9AA6B2"/>
+                </a:solidFill>
+                <a:latin typeface="Malgun Gothic" pitchFamily="34" charset="0"/>
+                <a:ea typeface="Malgun Gothic" pitchFamily="34" charset="-122"/>
+                <a:cs typeface="Malgun Gothic" pitchFamily="34" charset="-120"/>
+              </a:rPr>
+              <a:t>&lt;&lt;&lt;&gt;&gt;&gt; 한 줄을 실행하면, 요청이 GPU로 넘어가 블록이 SM에 분배되고 워프 단위로 실행됩니다.</a:t>
+            </a:r>
+            <a:endParaRPr lang="en-US" sz="1500" dirty="0"/>
+          </a:p>
+        </p:txBody>
+      </p:sp>
+      <p:sp>
+        <p:nvSpPr>
+          <p:cNvPr id="5" name="Shape 3"/>
+          <p:cNvSpPr/>
+          <p:nvPr/>
+        </p:nvSpPr>
+        <p:spPr>
+          <a:xfrm>
+            <a:off x="548640" y="1920240"/>
+            <a:ext cx="6949440" cy="822960"/>
           </a:xfrm>
           <a:prstGeom prst="roundRect">
             <a:avLst>
-              <a:gd name="adj" fmla="val 3721"/>
+              <a:gd name="adj" fmla="val 6667"/>
+            </a:avLst>
+          </a:prstGeom>
+          <a:solidFill>
+            <a:srgbClr val="16242C"/>
+          </a:solidFill>
+          <a:ln w="19050">
+            <a:solidFill>
+              <a:srgbClr val="4FB0C6"/>
+            </a:solidFill>
+            <a:prstDash val="solid"/>
+          </a:ln>
+        </p:spPr>
+      </p:sp>
+      <p:sp>
+        <p:nvSpPr>
+          <p:cNvPr id="6" name="Text 4"/>
+          <p:cNvSpPr/>
+          <p:nvPr/>
+        </p:nvSpPr>
+        <p:spPr>
+          <a:xfrm>
+            <a:off x="804672" y="2029968"/>
+            <a:ext cx="6492240" cy="365760"/>
+          </a:xfrm>
+          <a:prstGeom prst="rect">
+            <a:avLst/>
+          </a:prstGeom>
+          <a:noFill/>
+          <a:ln/>
+        </p:spPr>
+        <p:txBody>
+          <a:bodyPr wrap="square" lIns="0" tIns="0" rIns="0" bIns="0" rtlCol="0" anchor="ctr"/>
+          <a:lstStyle/>
+          <a:p>
+            <a:pPr indent="0" marL="0">
+              <a:buNone/>
+            </a:pPr>
+            <a:r>
+              <a:rPr lang="en-US" sz="1500" b="1" dirty="0">
+                <a:solidFill>
+                  <a:srgbClr val="4FB0C6"/>
+                </a:solidFill>
+                <a:latin typeface="Malgun Gothic" pitchFamily="34" charset="0"/>
+                <a:ea typeface="Malgun Gothic" pitchFamily="34" charset="-122"/>
+                <a:cs typeface="Malgun Gothic" pitchFamily="34" charset="-120"/>
+              </a:rPr>
+              <a:t>① 호스트(CPU) — 커널 실행 요청</a:t>
+            </a:r>
+            <a:endParaRPr lang="en-US" sz="1500" dirty="0"/>
+          </a:p>
+        </p:txBody>
+      </p:sp>
+      <p:sp>
+        <p:nvSpPr>
+          <p:cNvPr id="7" name="Text 5"/>
+          <p:cNvSpPr/>
+          <p:nvPr/>
+        </p:nvSpPr>
+        <p:spPr>
+          <a:xfrm>
+            <a:off x="804672" y="2377440"/>
+            <a:ext cx="6492240" cy="292608"/>
+          </a:xfrm>
+          <a:prstGeom prst="rect">
+            <a:avLst/>
+          </a:prstGeom>
+          <a:noFill/>
+          <a:ln/>
+        </p:spPr>
+        <p:txBody>
+          <a:bodyPr wrap="square" lIns="0" tIns="0" rIns="0" bIns="0" rtlCol="0" anchor="ctr"/>
+          <a:lstStyle/>
+          <a:p>
+            <a:pPr indent="0" marL="0">
+              <a:buNone/>
+            </a:pPr>
+            <a:r>
+              <a:rPr lang="en-US" sz="1150" dirty="0">
+                <a:solidFill>
+                  <a:srgbClr val="9AA6B2"/>
+                </a:solidFill>
+                <a:latin typeface="Courier New" pitchFamily="34" charset="0"/>
+                <a:ea typeface="Courier New" pitchFamily="34" charset="-122"/>
+                <a:cs typeface="Courier New" pitchFamily="34" charset="-120"/>
+              </a:rPr>
+              <a:t>kernel_move_inv_write&lt;&lt;&lt;128, 1&gt;&gt;&gt;(...)</a:t>
+            </a:r>
+            <a:endParaRPr lang="en-US" sz="1150" dirty="0"/>
+          </a:p>
+        </p:txBody>
+      </p:sp>
+      <p:sp>
+        <p:nvSpPr>
+          <p:cNvPr id="8" name="Shape 6"/>
+          <p:cNvSpPr/>
+          <p:nvPr/>
+        </p:nvSpPr>
+        <p:spPr>
+          <a:xfrm>
+            <a:off x="4023360" y="2761488"/>
+            <a:ext cx="0" cy="173736"/>
+          </a:xfrm>
+          <a:prstGeom prst="line">
+            <a:avLst/>
+          </a:prstGeom>
+          <a:noFill/>
+          <a:ln w="25400">
+            <a:solidFill>
+              <a:srgbClr val="9AA6B2"/>
+            </a:solidFill>
+            <a:prstDash val="solid"/>
+            <a:tailEnd type="triangle"/>
+          </a:ln>
+        </p:spPr>
+      </p:sp>
+      <p:sp>
+        <p:nvSpPr>
+          <p:cNvPr id="9" name="Shape 7"/>
+          <p:cNvSpPr/>
+          <p:nvPr/>
+        </p:nvSpPr>
+        <p:spPr>
+          <a:xfrm>
+            <a:off x="548640" y="2953512"/>
+            <a:ext cx="6949440" cy="822960"/>
+          </a:xfrm>
+          <a:prstGeom prst="roundRect">
+            <a:avLst>
+              <a:gd name="adj" fmla="val 6667"/>
+            </a:avLst>
+          </a:prstGeom>
+          <a:solidFill>
+            <a:srgbClr val="16241A"/>
+          </a:solidFill>
+          <a:ln w="19050">
+            <a:solidFill>
+              <a:srgbClr val="8CC63F"/>
+            </a:solidFill>
+            <a:prstDash val="solid"/>
+          </a:ln>
+        </p:spPr>
+      </p:sp>
+      <p:sp>
+        <p:nvSpPr>
+          <p:cNvPr id="10" name="Text 8"/>
+          <p:cNvSpPr/>
+          <p:nvPr/>
+        </p:nvSpPr>
+        <p:spPr>
+          <a:xfrm>
+            <a:off x="804672" y="3063240"/>
+            <a:ext cx="6492240" cy="365760"/>
+          </a:xfrm>
+          <a:prstGeom prst="rect">
+            <a:avLst/>
+          </a:prstGeom>
+          <a:noFill/>
+          <a:ln/>
+        </p:spPr>
+        <p:txBody>
+          <a:bodyPr wrap="square" lIns="0" tIns="0" rIns="0" bIns="0" rtlCol="0" anchor="ctr"/>
+          <a:lstStyle/>
+          <a:p>
+            <a:pPr indent="0" marL="0">
+              <a:buNone/>
+            </a:pPr>
+            <a:r>
+              <a:rPr lang="en-US" sz="1500" b="1" dirty="0">
+                <a:solidFill>
+                  <a:srgbClr val="8CC63F"/>
+                </a:solidFill>
+                <a:latin typeface="Malgun Gothic" pitchFamily="34" charset="0"/>
+                <a:ea typeface="Malgun Gothic" pitchFamily="34" charset="-122"/>
+                <a:cs typeface="Malgun Gothic" pitchFamily="34" charset="-120"/>
+              </a:rPr>
+              <a:t>② GPU 스케줄러 — 블록을 SM에 분배</a:t>
+            </a:r>
+            <a:endParaRPr lang="en-US" sz="1500" dirty="0"/>
+          </a:p>
+        </p:txBody>
+      </p:sp>
+      <p:sp>
+        <p:nvSpPr>
+          <p:cNvPr id="11" name="Text 9"/>
+          <p:cNvSpPr/>
+          <p:nvPr/>
+        </p:nvSpPr>
+        <p:spPr>
+          <a:xfrm>
+            <a:off x="804672" y="3410712"/>
+            <a:ext cx="6492240" cy="292608"/>
+          </a:xfrm>
+          <a:prstGeom prst="rect">
+            <a:avLst/>
+          </a:prstGeom>
+          <a:noFill/>
+          <a:ln/>
+        </p:spPr>
+        <p:txBody>
+          <a:bodyPr wrap="square" lIns="0" tIns="0" rIns="0" bIns="0" rtlCol="0" anchor="ctr"/>
+          <a:lstStyle/>
+          <a:p>
+            <a:pPr indent="0" marL="0">
+              <a:buNone/>
+            </a:pPr>
+            <a:r>
+              <a:rPr lang="en-US" sz="1150" dirty="0">
+                <a:solidFill>
+                  <a:srgbClr val="9AA6B2"/>
+                </a:solidFill>
+                <a:latin typeface="Courier New" pitchFamily="34" charset="0"/>
+                <a:ea typeface="Courier New" pitchFamily="34" charset="-122"/>
+                <a:cs typeface="Courier New" pitchFamily="34" charset="-120"/>
+              </a:rPr>
+              <a:t>128개 블록 → 여러 SM에 나눠 배정</a:t>
+            </a:r>
+            <a:endParaRPr lang="en-US" sz="1150" dirty="0"/>
+          </a:p>
+        </p:txBody>
+      </p:sp>
+      <p:sp>
+        <p:nvSpPr>
+          <p:cNvPr id="12" name="Shape 10"/>
+          <p:cNvSpPr/>
+          <p:nvPr/>
+        </p:nvSpPr>
+        <p:spPr>
+          <a:xfrm>
+            <a:off x="4023360" y="3794760"/>
+            <a:ext cx="0" cy="173736"/>
+          </a:xfrm>
+          <a:prstGeom prst="line">
+            <a:avLst/>
+          </a:prstGeom>
+          <a:noFill/>
+          <a:ln w="25400">
+            <a:solidFill>
+              <a:srgbClr val="9AA6B2"/>
+            </a:solidFill>
+            <a:prstDash val="solid"/>
+            <a:tailEnd type="triangle"/>
+          </a:ln>
+        </p:spPr>
+      </p:sp>
+      <p:sp>
+        <p:nvSpPr>
+          <p:cNvPr id="13" name="Shape 11"/>
+          <p:cNvSpPr/>
+          <p:nvPr/>
+        </p:nvSpPr>
+        <p:spPr>
+          <a:xfrm>
+            <a:off x="548640" y="3986784"/>
+            <a:ext cx="6949440" cy="822960"/>
+          </a:xfrm>
+          <a:prstGeom prst="roundRect">
+            <a:avLst>
+              <a:gd name="adj" fmla="val 6667"/>
+            </a:avLst>
+          </a:prstGeom>
+          <a:solidFill>
+            <a:srgbClr val="16241A"/>
+          </a:solidFill>
+          <a:ln w="19050">
+            <a:solidFill>
+              <a:srgbClr val="8CC63F"/>
+            </a:solidFill>
+            <a:prstDash val="solid"/>
+          </a:ln>
+        </p:spPr>
+      </p:sp>
+      <p:sp>
+        <p:nvSpPr>
+          <p:cNvPr id="14" name="Text 12"/>
+          <p:cNvSpPr/>
+          <p:nvPr/>
+        </p:nvSpPr>
+        <p:spPr>
+          <a:xfrm>
+            <a:off x="804672" y="4096512"/>
+            <a:ext cx="6492240" cy="365760"/>
+          </a:xfrm>
+          <a:prstGeom prst="rect">
+            <a:avLst/>
+          </a:prstGeom>
+          <a:noFill/>
+          <a:ln/>
+        </p:spPr>
+        <p:txBody>
+          <a:bodyPr wrap="square" lIns="0" tIns="0" rIns="0" bIns="0" rtlCol="0" anchor="ctr"/>
+          <a:lstStyle/>
+          <a:p>
+            <a:pPr indent="0" marL="0">
+              <a:buNone/>
+            </a:pPr>
+            <a:r>
+              <a:rPr lang="en-US" sz="1500" b="1" dirty="0">
+                <a:solidFill>
+                  <a:srgbClr val="8CC63F"/>
+                </a:solidFill>
+                <a:latin typeface="Malgun Gothic" pitchFamily="34" charset="0"/>
+                <a:ea typeface="Malgun Gothic" pitchFamily="34" charset="-122"/>
+                <a:cs typeface="Malgun Gothic" pitchFamily="34" charset="-120"/>
+              </a:rPr>
+              <a:t>③ 각 SM — 워프(32 스레드) 단위로 실행</a:t>
+            </a:r>
+            <a:endParaRPr lang="en-US" sz="1500" dirty="0"/>
+          </a:p>
+        </p:txBody>
+      </p:sp>
+      <p:sp>
+        <p:nvSpPr>
+          <p:cNvPr id="15" name="Text 13"/>
+          <p:cNvSpPr/>
+          <p:nvPr/>
+        </p:nvSpPr>
+        <p:spPr>
+          <a:xfrm>
+            <a:off x="804672" y="4443984"/>
+            <a:ext cx="6492240" cy="292608"/>
+          </a:xfrm>
+          <a:prstGeom prst="rect">
+            <a:avLst/>
+          </a:prstGeom>
+          <a:noFill/>
+          <a:ln/>
+        </p:spPr>
+        <p:txBody>
+          <a:bodyPr wrap="square" lIns="0" tIns="0" rIns="0" bIns="0" rtlCol="0" anchor="ctr"/>
+          <a:lstStyle/>
+          <a:p>
+            <a:pPr indent="0" marL="0">
+              <a:buNone/>
+            </a:pPr>
+            <a:r>
+              <a:rPr lang="en-US" sz="1150" dirty="0">
+                <a:solidFill>
+                  <a:srgbClr val="9AA6B2"/>
+                </a:solidFill>
+                <a:latin typeface="Courier New" pitchFamily="34" charset="0"/>
+                <a:ea typeface="Courier New" pitchFamily="34" charset="-122"/>
+                <a:cs typeface="Courier New" pitchFamily="34" charset="-120"/>
+              </a:rPr>
+              <a:t>블록 안 스레드들이 실제 연산 수행</a:t>
+            </a:r>
+            <a:endParaRPr lang="en-US" sz="1150" dirty="0"/>
+          </a:p>
+        </p:txBody>
+      </p:sp>
+      <p:sp>
+        <p:nvSpPr>
+          <p:cNvPr id="16" name="Shape 14"/>
+          <p:cNvSpPr/>
+          <p:nvPr/>
+        </p:nvSpPr>
+        <p:spPr>
+          <a:xfrm>
+            <a:off x="4023360" y="4828032"/>
+            <a:ext cx="0" cy="173736"/>
+          </a:xfrm>
+          <a:prstGeom prst="line">
+            <a:avLst/>
+          </a:prstGeom>
+          <a:noFill/>
+          <a:ln w="25400">
+            <a:solidFill>
+              <a:srgbClr val="9AA6B2"/>
+            </a:solidFill>
+            <a:prstDash val="solid"/>
+            <a:tailEnd type="triangle"/>
+          </a:ln>
+        </p:spPr>
+      </p:sp>
+      <p:sp>
+        <p:nvSpPr>
+          <p:cNvPr id="17" name="Shape 15"/>
+          <p:cNvSpPr/>
+          <p:nvPr/>
+        </p:nvSpPr>
+        <p:spPr>
+          <a:xfrm>
+            <a:off x="548640" y="5020056"/>
+            <a:ext cx="6949440" cy="822960"/>
+          </a:xfrm>
+          <a:prstGeom prst="roundRect">
+            <a:avLst>
+              <a:gd name="adj" fmla="val 6667"/>
+            </a:avLst>
+          </a:prstGeom>
+          <a:solidFill>
+            <a:srgbClr val="16241A"/>
+          </a:solidFill>
+          <a:ln w="19050">
+            <a:solidFill>
+              <a:srgbClr val="8CC63F"/>
+            </a:solidFill>
+            <a:prstDash val="solid"/>
+          </a:ln>
+        </p:spPr>
+      </p:sp>
+      <p:sp>
+        <p:nvSpPr>
+          <p:cNvPr id="18" name="Text 16"/>
+          <p:cNvSpPr/>
+          <p:nvPr/>
+        </p:nvSpPr>
+        <p:spPr>
+          <a:xfrm>
+            <a:off x="804672" y="5129784"/>
+            <a:ext cx="6492240" cy="365760"/>
+          </a:xfrm>
+          <a:prstGeom prst="rect">
+            <a:avLst/>
+          </a:prstGeom>
+          <a:noFill/>
+          <a:ln/>
+        </p:spPr>
+        <p:txBody>
+          <a:bodyPr wrap="square" lIns="0" tIns="0" rIns="0" bIns="0" rtlCol="0" anchor="ctr"/>
+          <a:lstStyle/>
+          <a:p>
+            <a:pPr indent="0" marL="0">
+              <a:buNone/>
+            </a:pPr>
+            <a:r>
+              <a:rPr lang="en-US" sz="1500" b="1" dirty="0">
+                <a:solidFill>
+                  <a:srgbClr val="8CC63F"/>
+                </a:solidFill>
+                <a:latin typeface="Malgun Gothic" pitchFamily="34" charset="0"/>
+                <a:ea typeface="Malgun Gothic" pitchFamily="34" charset="-122"/>
+                <a:cs typeface="Malgun Gothic" pitchFamily="34" charset="-120"/>
+              </a:rPr>
+              <a:t>④ 커널 완료 — 결과는 전역 메모리에</a:t>
+            </a:r>
+            <a:endParaRPr lang="en-US" sz="1500" dirty="0"/>
+          </a:p>
+        </p:txBody>
+      </p:sp>
+      <p:sp>
+        <p:nvSpPr>
+          <p:cNvPr id="19" name="Text 17"/>
+          <p:cNvSpPr/>
+          <p:nvPr/>
+        </p:nvSpPr>
+        <p:spPr>
+          <a:xfrm>
+            <a:off x="804672" y="5477256"/>
+            <a:ext cx="6492240" cy="292608"/>
+          </a:xfrm>
+          <a:prstGeom prst="rect">
+            <a:avLst/>
+          </a:prstGeom>
+          <a:noFill/>
+          <a:ln/>
+        </p:spPr>
+        <p:txBody>
+          <a:bodyPr wrap="square" lIns="0" tIns="0" rIns="0" bIns="0" rtlCol="0" anchor="ctr"/>
+          <a:lstStyle/>
+          <a:p>
+            <a:pPr indent="0" marL="0">
+              <a:buNone/>
+            </a:pPr>
+            <a:r>
+              <a:rPr lang="en-US" sz="1150" dirty="0">
+                <a:solidFill>
+                  <a:srgbClr val="9AA6B2"/>
+                </a:solidFill>
+                <a:latin typeface="Courier New" pitchFamily="34" charset="0"/>
+                <a:ea typeface="Courier New" pitchFamily="34" charset="-122"/>
+                <a:cs typeface="Courier New" pitchFamily="34" charset="-120"/>
+              </a:rPr>
+              <a:t>호스트는 동기화 후 결과를 사용</a:t>
+            </a:r>
+            <a:endParaRPr lang="en-US" sz="1150" dirty="0"/>
+          </a:p>
+        </p:txBody>
+      </p:sp>
+      <p:sp>
+        <p:nvSpPr>
+          <p:cNvPr id="20" name="Text 18"/>
+          <p:cNvSpPr/>
+          <p:nvPr/>
+        </p:nvSpPr>
+        <p:spPr>
+          <a:xfrm>
+            <a:off x="4160520" y="2743200"/>
+            <a:ext cx="2743200" cy="274320"/>
+          </a:xfrm>
+          <a:prstGeom prst="rect">
+            <a:avLst/>
+          </a:prstGeom>
+          <a:noFill/>
+          <a:ln/>
+        </p:spPr>
+        <p:txBody>
+          <a:bodyPr wrap="square" lIns="0" tIns="0" rIns="0" bIns="0" rtlCol="0" anchor="ctr"/>
+          <a:lstStyle/>
+          <a:p>
+            <a:pPr indent="0" marL="0">
+              <a:buNone/>
+            </a:pPr>
+            <a:r>
+              <a:rPr lang="en-US" sz="1100" i="1" dirty="0">
+                <a:solidFill>
+                  <a:srgbClr val="9AA6B2"/>
+                </a:solidFill>
+                <a:latin typeface="Malgun Gothic" pitchFamily="34" charset="0"/>
+                <a:ea typeface="Malgun Gothic" pitchFamily="34" charset="-122"/>
+                <a:cs typeface="Malgun Gothic" pitchFamily="34" charset="-120"/>
+              </a:rPr>
+              <a:t>실행 구성 + 인자 전달</a:t>
+            </a:r>
+            <a:endParaRPr lang="en-US" sz="1100" dirty="0"/>
+          </a:p>
+        </p:txBody>
+      </p:sp>
+      <p:sp>
+        <p:nvSpPr>
+          <p:cNvPr id="21" name="Text 19"/>
+          <p:cNvSpPr/>
+          <p:nvPr/>
+        </p:nvSpPr>
+        <p:spPr>
+          <a:xfrm>
+            <a:off x="7635240" y="2103120"/>
+            <a:ext cx="822960" cy="365760"/>
+          </a:xfrm>
+          <a:prstGeom prst="rect">
+            <a:avLst/>
+          </a:prstGeom>
+          <a:noFill/>
+          <a:ln/>
+        </p:spPr>
+        <p:txBody>
+          <a:bodyPr wrap="square" lIns="0" tIns="0" rIns="0" bIns="0" rtlCol="0" anchor="ctr"/>
+          <a:lstStyle/>
+          <a:p>
+            <a:pPr indent="0" marL="0">
+              <a:buNone/>
+            </a:pPr>
+            <a:r>
+              <a:rPr lang="en-US" sz="1200" b="1" dirty="0">
+                <a:solidFill>
+                  <a:srgbClr val="4FB0C6"/>
+                </a:solidFill>
+                <a:latin typeface="Malgun Gothic" pitchFamily="34" charset="0"/>
+                <a:ea typeface="Malgun Gothic" pitchFamily="34" charset="-122"/>
+                <a:cs typeface="Malgun Gothic" pitchFamily="34" charset="-120"/>
+              </a:rPr>
+              <a:t>호스트</a:t>
+            </a:r>
+            <a:endParaRPr lang="en-US" sz="1200" dirty="0"/>
+          </a:p>
+        </p:txBody>
+      </p:sp>
+      <p:sp>
+        <p:nvSpPr>
+          <p:cNvPr id="22" name="Text 20"/>
+          <p:cNvSpPr/>
+          <p:nvPr/>
+        </p:nvSpPr>
+        <p:spPr>
+          <a:xfrm>
+            <a:off x="7635240" y="3200400"/>
+            <a:ext cx="1554480" cy="365760"/>
+          </a:xfrm>
+          <a:prstGeom prst="rect">
+            <a:avLst/>
+          </a:prstGeom>
+          <a:noFill/>
+          <a:ln/>
+        </p:spPr>
+        <p:txBody>
+          <a:bodyPr wrap="square" lIns="0" tIns="0" rIns="0" bIns="0" rtlCol="0" anchor="ctr"/>
+          <a:lstStyle/>
+          <a:p>
+            <a:pPr indent="0" marL="0">
+              <a:buNone/>
+            </a:pPr>
+            <a:r>
+              <a:rPr lang="en-US" sz="1200" b="1" dirty="0">
+                <a:solidFill>
+                  <a:srgbClr val="8CC63F"/>
+                </a:solidFill>
+                <a:latin typeface="Malgun Gothic" pitchFamily="34" charset="0"/>
+                <a:ea typeface="Malgun Gothic" pitchFamily="34" charset="-122"/>
+                <a:cs typeface="Malgun Gothic" pitchFamily="34" charset="-120"/>
+              </a:rPr>
+              <a:t>디바이스(GPU)</a:t>
+            </a:r>
+            <a:endParaRPr lang="en-US" sz="1200" dirty="0"/>
+          </a:p>
+        </p:txBody>
+      </p:sp>
+      <p:sp>
+        <p:nvSpPr>
+          <p:cNvPr id="23" name="Shape 21"/>
+          <p:cNvSpPr/>
+          <p:nvPr/>
+        </p:nvSpPr>
+        <p:spPr>
+          <a:xfrm>
+            <a:off x="9646920" y="1920240"/>
+            <a:ext cx="1965960" cy="3977640"/>
+          </a:xfrm>
+          <a:prstGeom prst="roundRect">
+            <a:avLst>
+              <a:gd name="adj" fmla="val 3256"/>
             </a:avLst>
           </a:prstGeom>
           <a:solidFill>
             <a:srgbClr val="1E232C"/>
           </a:solidFill>
-          <a:ln/>
-        </p:spPr>
-      </p:sp>
-      <p:sp>
-        <p:nvSpPr>
-          <p:cNvPr id="5" name="Text 3"/>
-          <p:cNvSpPr/>
-          <p:nvPr/>
-        </p:nvSpPr>
-        <p:spPr>
-          <a:xfrm>
-            <a:off x="804672" y="1755648"/>
-            <a:ext cx="1188720" cy="502920"/>
-          </a:xfrm>
-          <a:prstGeom prst="roundRect">
-            <a:avLst>
-              <a:gd name="adj" fmla="val 14545"/>
-            </a:avLst>
-          </a:prstGeom>
-          <a:solidFill>
-            <a:srgbClr val="8CC63F"/>
-          </a:solidFill>
-          <a:ln/>
-        </p:spPr>
-        <p:txBody>
-          <a:bodyPr wrap="square" rtlCol="0" anchor="ctr"/>
-          <a:lstStyle/>
-          <a:p>
-            <a:pPr algn="ctr" indent="0" marL="0">
+          <a:ln w="19050">
+            <a:solidFill>
+              <a:srgbClr val="E0A458"/>
+            </a:solidFill>
+            <a:prstDash val="solid"/>
+          </a:ln>
+        </p:spPr>
+      </p:sp>
+      <p:sp>
+        <p:nvSpPr>
+          <p:cNvPr id="24" name="Text 22"/>
+          <p:cNvSpPr/>
+          <p:nvPr/>
+        </p:nvSpPr>
+        <p:spPr>
+          <a:xfrm>
+            <a:off x="9875520" y="2103120"/>
+            <a:ext cx="1508760" cy="411480"/>
+          </a:xfrm>
+          <a:prstGeom prst="rect">
+            <a:avLst/>
+          </a:prstGeom>
+          <a:noFill/>
+          <a:ln/>
+        </p:spPr>
+        <p:txBody>
+          <a:bodyPr wrap="square" lIns="0" tIns="0" rIns="0" bIns="0" rtlCol="0" anchor="ctr"/>
+          <a:lstStyle/>
+          <a:p>
+            <a:pPr indent="0" marL="0">
               <a:buNone/>
             </a:pPr>
             <a:r>
               <a:rPr lang="en-US" sz="1700" b="1" dirty="0">
                 <a:solidFill>
-                  <a:srgbClr val="13161C"/>
-                </a:solidFill>
-                <a:latin typeface="Courier New" pitchFamily="34" charset="0"/>
-                <a:ea typeface="Courier New" pitchFamily="34" charset="-122"/>
-                <a:cs typeface="Courier New" pitchFamily="34" charset="-120"/>
-              </a:rPr>
-              <a:t>Ex 1</a:t>
+                  <a:srgbClr val="E0A458"/>
+                </a:solidFill>
+                <a:latin typeface="Malgun Gothic" pitchFamily="34" charset="0"/>
+                <a:ea typeface="Malgun Gothic" pitchFamily="34" charset="-122"/>
+                <a:cs typeface="Malgun Gothic" pitchFamily="34" charset="-120"/>
+              </a:rPr>
+              <a:t>비동기(async)</a:t>
             </a:r>
             <a:endParaRPr lang="en-US" sz="1700" dirty="0"/>
           </a:p>
@@ -3306,53 +4044,14 @@
       </p:sp>
       <p:sp>
         <p:nvSpPr>
-          <p:cNvPr id="6" name="Text 4"/>
-          <p:cNvSpPr/>
-          <p:nvPr/>
-        </p:nvSpPr>
-        <p:spPr>
-          <a:xfrm>
-            <a:off x="2148840" y="1773936"/>
-            <a:ext cx="3474720" cy="822960"/>
-          </a:xfrm>
-          <a:prstGeom prst="rect">
-            <a:avLst/>
-          </a:prstGeom>
-          <a:noFill/>
-          <a:ln/>
-        </p:spPr>
-        <p:txBody>
-          <a:bodyPr wrap="square" lIns="0" tIns="0" rIns="0" bIns="0" rtlCol="0" anchor="t"/>
-          <a:lstStyle/>
-          <a:p>
-            <a:pPr indent="0" marL="0">
-              <a:buNone/>
-            </a:pPr>
-            <a:r>
-              <a:rPr lang="en-US" sz="1700" b="1" dirty="0">
-                <a:solidFill>
-                  <a:srgbClr val="E8EDF2"/>
-                </a:solidFill>
-                <a:latin typeface="Malgun Gothic" pitchFamily="34" charset="0"/>
-                <a:ea typeface="Malgun Gothic" pitchFamily="34" charset="-122"/>
-                <a:cs typeface="Malgun Gothic" pitchFamily="34" charset="-120"/>
-              </a:rPr>
-              <a:t>스레드는 자기가 누구인지 안다</a:t>
-            </a:r>
-            <a:endParaRPr lang="en-US" sz="1700" dirty="0"/>
-          </a:p>
-        </p:txBody>
-      </p:sp>
-      <p:sp>
-        <p:nvSpPr>
-          <p:cNvPr id="7" name="Text 5"/>
-          <p:cNvSpPr/>
-          <p:nvPr/>
-        </p:nvSpPr>
-        <p:spPr>
-          <a:xfrm>
-            <a:off x="804672" y="2651760"/>
-            <a:ext cx="4791456" cy="731520"/>
+          <p:cNvPr id="25" name="Text 23"/>
+          <p:cNvSpPr/>
+          <p:nvPr/>
+        </p:nvSpPr>
+        <p:spPr>
+          <a:xfrm>
+            <a:off x="9875520" y="2651760"/>
+            <a:ext cx="1508760" cy="3063240"/>
           </a:xfrm>
           <a:prstGeom prst="rect">
             <a:avLst/>
@@ -3366,304 +4065,58 @@
           <a:p>
             <a:pPr indent="0" marL="0">
               <a:lnSpc>
-                <a:spcPct val="110000"/>
+                <a:spcPct val="115000"/>
               </a:lnSpc>
+              <a:spcAft>
+                <a:spcPts val="1000"/>
+              </a:spcAft>
               <a:buNone/>
             </a:pPr>
             <a:r>
               <a:rPr lang="en-US" sz="1400" dirty="0">
                 <a:solidFill>
-                  <a:srgbClr val="9AA6B2"/>
-                </a:solidFill>
-                <a:latin typeface="Malgun Gothic" pitchFamily="34" charset="0"/>
-                <a:ea typeface="Malgun Gothic" pitchFamily="34" charset="-122"/>
-                <a:cs typeface="Malgun Gothic" pitchFamily="34" charset="-120"/>
-              </a:rPr>
-              <a:t>커널 안에서 blockIdx.x를 printf로 출력해 확인</a:t>
+                  <a:srgbClr val="E8EDF2"/>
+                </a:solidFill>
+                <a:latin typeface="Malgun Gothic" pitchFamily="34" charset="0"/>
+                <a:ea typeface="Malgun Gothic" pitchFamily="34" charset="-122"/>
+                <a:cs typeface="Malgun Gothic" pitchFamily="34" charset="-120"/>
+              </a:rPr>
+              <a:t>호스트는 ① 요청 후 곧바로 다음 코드로 갑니다.</a:t>
             </a:r>
             <a:endParaRPr lang="en-US" sz="1400" dirty="0"/>
           </a:p>
-        </p:txBody>
-      </p:sp>
-      <p:sp>
-        <p:nvSpPr>
-          <p:cNvPr id="8" name="Shape 6"/>
-          <p:cNvSpPr/>
-          <p:nvPr/>
-        </p:nvSpPr>
-        <p:spPr>
-          <a:xfrm>
-            <a:off x="6309360" y="1554480"/>
-            <a:ext cx="5303520" cy="1965960"/>
-          </a:xfrm>
-          <a:prstGeom prst="roundRect">
-            <a:avLst>
-              <a:gd name="adj" fmla="val 3721"/>
-            </a:avLst>
-          </a:prstGeom>
-          <a:solidFill>
-            <a:srgbClr val="1E232C"/>
-          </a:solidFill>
-          <a:ln/>
-        </p:spPr>
-      </p:sp>
-      <p:sp>
-        <p:nvSpPr>
-          <p:cNvPr id="9" name="Text 7"/>
-          <p:cNvSpPr/>
-          <p:nvPr/>
-        </p:nvSpPr>
-        <p:spPr>
-          <a:xfrm>
-            <a:off x="6565392" y="1755648"/>
-            <a:ext cx="1188720" cy="502920"/>
-          </a:xfrm>
-          <a:prstGeom prst="roundRect">
-            <a:avLst>
-              <a:gd name="adj" fmla="val 14545"/>
-            </a:avLst>
-          </a:prstGeom>
-          <a:solidFill>
-            <a:srgbClr val="4FB0C6"/>
-          </a:solidFill>
-          <a:ln/>
-        </p:spPr>
-        <p:txBody>
-          <a:bodyPr wrap="square" rtlCol="0" anchor="ctr"/>
-          <a:lstStyle/>
-          <a:p>
-            <a:pPr algn="ctr" indent="0" marL="0">
-              <a:buNone/>
-            </a:pPr>
-            <a:r>
-              <a:rPr lang="en-US" sz="1700" b="1" dirty="0">
-                <a:solidFill>
-                  <a:srgbClr val="13161C"/>
-                </a:solidFill>
-                <a:latin typeface="Courier New" pitchFamily="34" charset="0"/>
-                <a:ea typeface="Courier New" pitchFamily="34" charset="-122"/>
-                <a:cs typeface="Courier New" pitchFamily="34" charset="-120"/>
-              </a:rPr>
-              <a:t>Ex 2</a:t>
-            </a:r>
-            <a:endParaRPr lang="en-US" sz="1700" dirty="0"/>
-          </a:p>
-        </p:txBody>
-      </p:sp>
-      <p:sp>
-        <p:nvSpPr>
-          <p:cNvPr id="10" name="Text 8"/>
-          <p:cNvSpPr/>
-          <p:nvPr/>
-        </p:nvSpPr>
-        <p:spPr>
-          <a:xfrm>
-            <a:off x="7909560" y="1773936"/>
-            <a:ext cx="3474720" cy="822960"/>
-          </a:xfrm>
-          <a:prstGeom prst="rect">
-            <a:avLst/>
-          </a:prstGeom>
-          <a:noFill/>
-          <a:ln/>
-        </p:spPr>
-        <p:txBody>
-          <a:bodyPr wrap="square" lIns="0" tIns="0" rIns="0" bIns="0" rtlCol="0" anchor="t"/>
-          <a:lstStyle/>
-          <a:p>
-            <a:pPr indent="0" marL="0">
-              <a:buNone/>
-            </a:pPr>
-            <a:r>
-              <a:rPr lang="en-US" sz="1700" b="1" dirty="0">
-                <a:solidFill>
-                  <a:srgbClr val="E8EDF2"/>
-                </a:solidFill>
-                <a:latin typeface="Malgun Gothic" pitchFamily="34" charset="0"/>
-                <a:ea typeface="Malgun Gothic" pitchFamily="34" charset="-122"/>
-                <a:cs typeface="Malgun Gothic" pitchFamily="34" charset="-120"/>
-              </a:rPr>
-              <a:t>그리드 크기를 바꿔보기</a:t>
-            </a:r>
-            <a:endParaRPr lang="en-US" sz="1700" dirty="0"/>
-          </a:p>
-        </p:txBody>
-      </p:sp>
-      <p:sp>
-        <p:nvSpPr>
-          <p:cNvPr id="11" name="Text 9"/>
-          <p:cNvSpPr/>
-          <p:nvPr/>
-        </p:nvSpPr>
-        <p:spPr>
-          <a:xfrm>
-            <a:off x="6565392" y="2651760"/>
-            <a:ext cx="4791456" cy="731520"/>
-          </a:xfrm>
-          <a:prstGeom prst="rect">
-            <a:avLst/>
-          </a:prstGeom>
-          <a:noFill/>
-          <a:ln/>
-        </p:spPr>
-        <p:txBody>
-          <a:bodyPr wrap="square" lIns="0" tIns="0" rIns="0" bIns="0" rtlCol="0" anchor="t"/>
-          <a:lstStyle/>
           <a:p>
             <a:pPr indent="0" marL="0">
               <a:lnSpc>
-                <a:spcPct val="110000"/>
+                <a:spcPct val="115000"/>
               </a:lnSpc>
+              <a:spcAft>
+                <a:spcPts val="1000"/>
+              </a:spcAft>
               <a:buNone/>
             </a:pPr>
             <a:r>
               <a:rPr lang="en-US" sz="1400" dirty="0">
                 <a:solidFill>
-                  <a:srgbClr val="9AA6B2"/>
-                </a:solidFill>
-                <a:latin typeface="Malgun Gothic" pitchFamily="34" charset="0"/>
-                <a:ea typeface="Malgun Gothic" pitchFamily="34" charset="-122"/>
-                <a:cs typeface="Malgun Gothic" pitchFamily="34" charset="-120"/>
-              </a:rPr>
-              <a:t>GRIDSIZE를 32/128/512로 바꿔 실행 시간 측정</a:t>
+                  <a:srgbClr val="E8EDF2"/>
+                </a:solidFill>
+                <a:latin typeface="Malgun Gothic" pitchFamily="34" charset="0"/>
+                <a:ea typeface="Malgun Gothic" pitchFamily="34" charset="-122"/>
+                <a:cs typeface="Malgun Gothic" pitchFamily="34" charset="-120"/>
+              </a:rPr>
+              <a:t>결과가 필요하면 cudaDeviceSynchronize로 GPU 완료를 기다립니다.</a:t>
             </a:r>
             <a:endParaRPr lang="en-US" sz="1400" dirty="0"/>
           </a:p>
-        </p:txBody>
-      </p:sp>
-      <p:sp>
-        <p:nvSpPr>
-          <p:cNvPr id="12" name="Shape 10"/>
-          <p:cNvSpPr/>
-          <p:nvPr/>
-        </p:nvSpPr>
-        <p:spPr>
-          <a:xfrm>
-            <a:off x="548640" y="3840480"/>
-            <a:ext cx="5303520" cy="1965960"/>
-          </a:xfrm>
-          <a:prstGeom prst="roundRect">
-            <a:avLst>
-              <a:gd name="adj" fmla="val 3721"/>
-            </a:avLst>
-          </a:prstGeom>
-          <a:solidFill>
-            <a:srgbClr val="1E232C"/>
-          </a:solidFill>
-          <a:ln/>
-        </p:spPr>
-      </p:sp>
-      <p:sp>
-        <p:nvSpPr>
-          <p:cNvPr id="13" name="Text 11"/>
-          <p:cNvSpPr/>
-          <p:nvPr/>
-        </p:nvSpPr>
-        <p:spPr>
-          <a:xfrm>
-            <a:off x="804672" y="4041648"/>
-            <a:ext cx="1188720" cy="502920"/>
-          </a:xfrm>
-          <a:prstGeom prst="roundRect">
-            <a:avLst>
-              <a:gd name="adj" fmla="val 14545"/>
-            </a:avLst>
-          </a:prstGeom>
-          <a:solidFill>
-            <a:srgbClr val="8CC63F"/>
-          </a:solidFill>
-          <a:ln/>
-        </p:spPr>
-        <p:txBody>
-          <a:bodyPr wrap="square" rtlCol="0" anchor="ctr"/>
-          <a:lstStyle/>
-          <a:p>
-            <a:pPr algn="ctr" indent="0" marL="0">
-              <a:buNone/>
-            </a:pPr>
-            <a:r>
-              <a:rPr lang="en-US" sz="1700" b="1" dirty="0">
-                <a:solidFill>
-                  <a:srgbClr val="13161C"/>
-                </a:solidFill>
-                <a:latin typeface="Courier New" pitchFamily="34" charset="0"/>
-                <a:ea typeface="Courier New" pitchFamily="34" charset="-122"/>
-                <a:cs typeface="Courier New" pitchFamily="34" charset="-120"/>
-              </a:rPr>
-              <a:t>Ex 3</a:t>
-            </a:r>
-            <a:endParaRPr lang="en-US" sz="1700" dirty="0"/>
-          </a:p>
-        </p:txBody>
-      </p:sp>
-      <p:sp>
-        <p:nvSpPr>
-          <p:cNvPr id="14" name="Text 12"/>
-          <p:cNvSpPr/>
-          <p:nvPr/>
-        </p:nvSpPr>
-        <p:spPr>
-          <a:xfrm>
-            <a:off x="2148840" y="4059936"/>
-            <a:ext cx="3474720" cy="822960"/>
-          </a:xfrm>
-          <a:prstGeom prst="rect">
-            <a:avLst/>
-          </a:prstGeom>
-          <a:noFill/>
-          <a:ln/>
-        </p:spPr>
-        <p:txBody>
-          <a:bodyPr wrap="square" lIns="0" tIns="0" rIns="0" bIns="0" rtlCol="0" anchor="t"/>
-          <a:lstStyle/>
-          <a:p>
-            <a:pPr indent="0" marL="0">
-              <a:buNone/>
-            </a:pPr>
-            <a:r>
-              <a:rPr lang="en-US" sz="1700" b="1" dirty="0">
-                <a:solidFill>
-                  <a:srgbClr val="E8EDF2"/>
-                </a:solidFill>
-                <a:latin typeface="Malgun Gothic" pitchFamily="34" charset="0"/>
-                <a:ea typeface="Malgun Gothic" pitchFamily="34" charset="-122"/>
-                <a:cs typeface="Malgun Gothic" pitchFamily="34" charset="-120"/>
-              </a:rPr>
-              <a:t>패턴을 내 마음대로</a:t>
-            </a:r>
-            <a:endParaRPr lang="en-US" sz="1700" dirty="0"/>
-          </a:p>
-        </p:txBody>
-      </p:sp>
-      <p:sp>
-        <p:nvSpPr>
-          <p:cNvPr id="15" name="Text 13"/>
-          <p:cNvSpPr/>
-          <p:nvPr/>
-        </p:nvSpPr>
-        <p:spPr>
-          <a:xfrm>
-            <a:off x="804672" y="4937760"/>
-            <a:ext cx="4791456" cy="731520"/>
-          </a:xfrm>
-          <a:prstGeom prst="rect">
-            <a:avLst/>
-          </a:prstGeom>
-          <a:noFill/>
-          <a:ln/>
-        </p:spPr>
-        <p:txBody>
-          <a:bodyPr wrap="square" lIns="0" tIns="0" rIns="0" bIns="0" rtlCol="0" anchor="t"/>
-          <a:lstStyle/>
           <a:p>
             <a:pPr indent="0" marL="0">
               <a:lnSpc>
-                <a:spcPct val="110000"/>
+                <a:spcPct val="115000"/>
               </a:lnSpc>
               <a:buNone/>
             </a:pPr>
             <a:r>
-              <a:rPr lang="en-US" sz="1400" dirty="0">
+              <a:rPr lang="en-US" sz="1400" i="1" dirty="0">
                 <a:solidFill>
                   <a:srgbClr val="9AA6B2"/>
                 </a:solidFill>
@@ -3671,7 +4124,7 @@
                 <a:ea typeface="Malgun Gothic" pitchFamily="34" charset="-122"/>
                 <a:cs typeface="Malgun Gothic" pitchFamily="34" charset="-120"/>
               </a:rPr>
-              <a:t>--pattern 0xDEADBEEF 로 커널 인자 전달 관찰</a:t>
+              <a:t>→ 이 비동기 특성은 세션 3(타이밍)·세션 4(오류)에서 자세히.</a:t>
             </a:r>
             <a:endParaRPr lang="en-US" sz="1400" dirty="0"/>
           </a:p>
@@ -3679,137 +4132,30 @@
       </p:sp>
       <p:sp>
         <p:nvSpPr>
-          <p:cNvPr id="16" name="Shape 14"/>
-          <p:cNvSpPr/>
-          <p:nvPr/>
-        </p:nvSpPr>
-        <p:spPr>
-          <a:xfrm>
-            <a:off x="6309360" y="3840480"/>
-            <a:ext cx="5303520" cy="1965960"/>
-          </a:xfrm>
-          <a:prstGeom prst="roundRect">
-            <a:avLst>
-              <a:gd name="adj" fmla="val 3721"/>
-            </a:avLst>
-          </a:prstGeom>
-          <a:solidFill>
-            <a:srgbClr val="1E232C"/>
-          </a:solidFill>
-          <a:ln/>
-        </p:spPr>
-      </p:sp>
-      <p:sp>
-        <p:nvSpPr>
-          <p:cNvPr id="17" name="Text 15"/>
-          <p:cNvSpPr/>
-          <p:nvPr/>
-        </p:nvSpPr>
-        <p:spPr>
-          <a:xfrm>
-            <a:off x="6565392" y="4041648"/>
-            <a:ext cx="1188720" cy="502920"/>
-          </a:xfrm>
-          <a:prstGeom prst="roundRect">
-            <a:avLst>
-              <a:gd name="adj" fmla="val 14545"/>
-            </a:avLst>
-          </a:prstGeom>
-          <a:solidFill>
-            <a:srgbClr val="E0A458"/>
-          </a:solidFill>
-          <a:ln/>
-        </p:spPr>
-        <p:txBody>
-          <a:bodyPr wrap="square" rtlCol="0" anchor="ctr"/>
+          <p:cNvPr id="26" name="Text 24"/>
+          <p:cNvSpPr/>
+          <p:nvPr/>
+        </p:nvSpPr>
+        <p:spPr>
+          <a:xfrm>
+            <a:off x="548640" y="6035040"/>
+            <a:ext cx="11064240" cy="365760"/>
+          </a:xfrm>
+          <a:prstGeom prst="rect">
+            <a:avLst/>
+          </a:prstGeom>
+          <a:noFill/>
+          <a:ln/>
+        </p:spPr>
+        <p:txBody>
+          <a:bodyPr wrap="square" lIns="0" tIns="0" rIns="0" bIns="0" rtlCol="0" anchor="ctr"/>
           <a:lstStyle/>
           <a:p>
             <a:pPr algn="ctr" indent="0" marL="0">
               <a:buNone/>
             </a:pPr>
             <a:r>
-              <a:rPr lang="en-US" sz="1700" b="1" dirty="0">
-                <a:solidFill>
-                  <a:srgbClr val="13161C"/>
-                </a:solidFill>
-                <a:latin typeface="Courier New" pitchFamily="34" charset="0"/>
-                <a:ea typeface="Courier New" pitchFamily="34" charset="-122"/>
-                <a:cs typeface="Courier New" pitchFamily="34" charset="-120"/>
-              </a:rPr>
-              <a:t>Ex 4</a:t>
-            </a:r>
-            <a:endParaRPr lang="en-US" sz="1700" dirty="0"/>
-          </a:p>
-        </p:txBody>
-      </p:sp>
-      <p:sp>
-        <p:nvSpPr>
-          <p:cNvPr id="18" name="Text 16"/>
-          <p:cNvSpPr/>
-          <p:nvPr/>
-        </p:nvSpPr>
-        <p:spPr>
-          <a:xfrm>
-            <a:off x="7909560" y="4059936"/>
-            <a:ext cx="3474720" cy="822960"/>
-          </a:xfrm>
-          <a:prstGeom prst="rect">
-            <a:avLst/>
-          </a:prstGeom>
-          <a:noFill/>
-          <a:ln/>
-        </p:spPr>
-        <p:txBody>
-          <a:bodyPr wrap="square" lIns="0" tIns="0" rIns="0" bIns="0" rtlCol="0" anchor="t"/>
-          <a:lstStyle/>
-          <a:p>
-            <a:pPr indent="0" marL="0">
-              <a:buNone/>
-            </a:pPr>
-            <a:r>
-              <a:rPr lang="en-US" sz="1700" b="1" dirty="0">
-                <a:solidFill>
-                  <a:srgbClr val="E8EDF2"/>
-                </a:solidFill>
-                <a:latin typeface="Malgun Gothic" pitchFamily="34" charset="0"/>
-                <a:ea typeface="Malgun Gothic" pitchFamily="34" charset="-122"/>
-                <a:cs typeface="Malgun Gothic" pitchFamily="34" charset="-120"/>
-              </a:rPr>
-              <a:t>경계 검사를 지우면?</a:t>
-            </a:r>
-            <a:endParaRPr lang="en-US" sz="1700" dirty="0"/>
-          </a:p>
-        </p:txBody>
-      </p:sp>
-      <p:sp>
-        <p:nvSpPr>
-          <p:cNvPr id="19" name="Text 17"/>
-          <p:cNvSpPr/>
-          <p:nvPr/>
-        </p:nvSpPr>
-        <p:spPr>
-          <a:xfrm>
-            <a:off x="6565392" y="4937760"/>
-            <a:ext cx="4791456" cy="731520"/>
-          </a:xfrm>
-          <a:prstGeom prst="rect">
-            <a:avLst/>
-          </a:prstGeom>
-          <a:noFill/>
-          <a:ln/>
-        </p:spPr>
-        <p:txBody>
-          <a:bodyPr wrap="square" lIns="0" tIns="0" rIns="0" bIns="0" rtlCol="0" anchor="t"/>
-          <a:lstStyle/>
-          <a:p>
-            <a:pPr indent="0" marL="0">
-              <a:lnSpc>
-                <a:spcPct val="110000"/>
-              </a:lnSpc>
-              <a:buNone/>
-            </a:pPr>
-            <a:r>
-              <a:rPr lang="en-US" sz="1400" dirty="0">
+              <a:rPr lang="en-US" sz="1300" i="1" dirty="0">
                 <a:solidFill>
                   <a:srgbClr val="9AA6B2"/>
                 </a:solidFill>
@@ -3817,9 +4163,9 @@
                 <a:ea typeface="Malgun Gothic" pitchFamily="34" charset="-122"/>
                 <a:cs typeface="Malgun Gothic" pitchFamily="34" charset="-120"/>
               </a:rPr>
-              <a:t>guard를 없애 illegal memory access 재현</a:t>
-            </a:r>
-            <a:endParaRPr lang="en-US" sz="1400" dirty="0"/>
+              <a:t>이 저장소: 스레드가 blockIdx로 자기 1 MB를 맡아 순회 (세션 1의 첫 커널이 바로 이 흐름으로 실행됩니다).</a:t>
+            </a:r>
+            <a:endParaRPr lang="en-US" sz="1300" dirty="0"/>
           </a:p>
         </p:txBody>
       </p:sp>
@@ -3892,7 +4238,7 @@
                 <a:ea typeface="Courier New" pitchFamily="34" charset="-122"/>
                 <a:cs typeface="Courier New" pitchFamily="34" charset="-120"/>
               </a:rPr>
-              <a:t>11</a:t>
+              <a:t>10</a:t>
             </a:r>
             <a:endParaRPr lang="en-US" sz="2200" dirty="0"/>
           </a:p>
@@ -3931,7 +4277,7 @@
                 <a:ea typeface="Malgun Gothic" pitchFamily="34" charset="-122"/>
                 <a:cs typeface="Malgun Gothic" pitchFamily="34" charset="-120"/>
               </a:rPr>
-              <a:t>핵심 정리 &amp; 자주 하는 실수</a:t>
+              <a:t>실습 미리보기 · Lab 1</a:t>
             </a:r>
             <a:endParaRPr lang="en-US" sz="3000" dirty="0"/>
           </a:p>
@@ -3945,12 +4291,12 @@
         </p:nvSpPr>
         <p:spPr>
           <a:xfrm>
-            <a:off x="548640" y="1600200"/>
-            <a:ext cx="5349240" cy="4114800"/>
+            <a:off x="548640" y="1554480"/>
+            <a:ext cx="5303520" cy="1965960"/>
           </a:xfrm>
           <a:prstGeom prst="roundRect">
             <a:avLst>
-              <a:gd name="adj" fmla="val 1778"/>
+              <a:gd name="adj" fmla="val 3721"/>
             </a:avLst>
           </a:prstGeom>
           <a:solidFill>
@@ -3967,154 +4313,136 @@
         </p:nvSpPr>
         <p:spPr>
           <a:xfrm>
-            <a:off x="822960" y="1828800"/>
-            <a:ext cx="4800600" cy="457200"/>
-          </a:xfrm>
-          <a:prstGeom prst="rect">
-            <a:avLst/>
-          </a:prstGeom>
-          <a:noFill/>
-          <a:ln/>
-        </p:spPr>
-        <p:txBody>
-          <a:bodyPr wrap="square" lIns="0" tIns="0" rIns="0" bIns="0" rtlCol="0" anchor="ctr"/>
-          <a:lstStyle/>
-          <a:p>
-            <a:pPr indent="0" marL="0">
-              <a:buNone/>
-            </a:pPr>
-            <a:r>
-              <a:rPr lang="en-US" sz="2000" b="1" dirty="0">
-                <a:solidFill>
-                  <a:srgbClr val="8CC63F"/>
-                </a:solidFill>
-                <a:latin typeface="Malgun Gothic" pitchFamily="34" charset="0"/>
-                <a:ea typeface="Malgun Gothic" pitchFamily="34" charset="-122"/>
-                <a:cs typeface="Malgun Gothic" pitchFamily="34" charset="-120"/>
-              </a:rPr>
-              <a:t>기억할 것</a:t>
-            </a:r>
-            <a:endParaRPr lang="en-US" sz="2000" dirty="0"/>
-          </a:p>
-        </p:txBody>
-      </p:sp>
-      <p:sp>
-        <p:nvSpPr>
-          <p:cNvPr id="6" name="Text 4"/>
-          <p:cNvSpPr/>
-          <p:nvPr/>
-        </p:nvSpPr>
-        <p:spPr>
-          <a:xfrm>
-            <a:off x="822960" y="2423160"/>
-            <a:ext cx="4800600" cy="3108960"/>
-          </a:xfrm>
-          <a:prstGeom prst="rect">
-            <a:avLst/>
-          </a:prstGeom>
-          <a:noFill/>
-          <a:ln/>
-        </p:spPr>
-        <p:txBody>
-          <a:bodyPr wrap="square" lIns="0" tIns="0" rIns="0" bIns="0" rtlCol="0" anchor="t"/>
-          <a:lstStyle/>
-          <a:p>
-            <a:pPr marL="342900" indent="-342900">
-              <a:spcAft>
-                <a:spcPts val="1200"/>
-              </a:spcAft>
-              <a:buSzPct val="100000"/>
-              <a:buChar char="✓"/>
-            </a:pPr>
-            <a:r>
-              <a:rPr lang="en-US" sz="1600" dirty="0">
-                <a:solidFill>
-                  <a:srgbClr val="E8EDF2"/>
-                </a:solidFill>
-                <a:latin typeface="Malgun Gothic" pitchFamily="34" charset="0"/>
-                <a:ea typeface="Malgun Gothic" pitchFamily="34" charset="-122"/>
-                <a:cs typeface="Malgun Gothic" pitchFamily="34" charset="-120"/>
-              </a:rPr>
-              <a:t>커널 = __global__, 반환형 void</a:t>
-            </a:r>
-            <a:endParaRPr lang="en-US" sz="1600" dirty="0"/>
-          </a:p>
-          <a:p>
-            <a:pPr marL="342900" indent="-342900">
-              <a:spcAft>
-                <a:spcPts val="1200"/>
-              </a:spcAft>
-              <a:buSzPct val="100000"/>
-              <a:buChar char="✓"/>
-            </a:pPr>
-            <a:r>
-              <a:rPr lang="en-US" sz="1600" dirty="0">
-                <a:solidFill>
-                  <a:srgbClr val="E8EDF2"/>
-                </a:solidFill>
-                <a:latin typeface="Malgun Gothic" pitchFamily="34" charset="0"/>
-                <a:ea typeface="Malgun Gothic" pitchFamily="34" charset="-122"/>
-                <a:cs typeface="Malgun Gothic" pitchFamily="34" charset="-120"/>
-              </a:rPr>
-              <a:t>&lt;&lt;&lt;블록수, 블록당스레드수&gt;&gt;&gt;</a:t>
-            </a:r>
-            <a:endParaRPr lang="en-US" sz="1600" dirty="0"/>
-          </a:p>
-          <a:p>
-            <a:pPr marL="342900" indent="-342900">
-              <a:spcAft>
-                <a:spcPts val="1200"/>
-              </a:spcAft>
-              <a:buSzPct val="100000"/>
-              <a:buChar char="✓"/>
-            </a:pPr>
-            <a:r>
-              <a:rPr lang="en-US" sz="1600" dirty="0">
-                <a:solidFill>
-                  <a:srgbClr val="E8EDF2"/>
-                </a:solidFill>
-                <a:latin typeface="Malgun Gothic" pitchFamily="34" charset="0"/>
-                <a:ea typeface="Malgun Gothic" pitchFamily="34" charset="-122"/>
-                <a:cs typeface="Malgun Gothic" pitchFamily="34" charset="-120"/>
-              </a:rPr>
-              <a:t>blockIdx로 자기 구역 계산</a:t>
-            </a:r>
-            <a:endParaRPr lang="en-US" sz="1600" dirty="0"/>
-          </a:p>
-          <a:p>
-            <a:pPr marL="342900" indent="-342900">
-              <a:buSzPct val="100000"/>
-              <a:buChar char="✓"/>
-            </a:pPr>
-            <a:r>
-              <a:rPr lang="en-US" sz="1600" dirty="0">
-                <a:solidFill>
-                  <a:srgbClr val="E8EDF2"/>
-                </a:solidFill>
-                <a:latin typeface="Malgun Gothic" pitchFamily="34" charset="0"/>
-                <a:ea typeface="Malgun Gothic" pitchFamily="34" charset="-122"/>
-                <a:cs typeface="Malgun Gothic" pitchFamily="34" charset="-120"/>
-              </a:rPr>
-              <a:t>경계 검사(guard)는 필수</a:t>
-            </a:r>
-            <a:endParaRPr lang="en-US" sz="1600" dirty="0"/>
-          </a:p>
-        </p:txBody>
-      </p:sp>
-      <p:sp>
-        <p:nvSpPr>
-          <p:cNvPr id="7" name="Shape 5"/>
-          <p:cNvSpPr/>
-          <p:nvPr/>
-        </p:nvSpPr>
-        <p:spPr>
-          <a:xfrm>
-            <a:off x="6263640" y="1600200"/>
-            <a:ext cx="5349240" cy="4114800"/>
+            <a:off x="804672" y="1755648"/>
+            <a:ext cx="1188720" cy="502920"/>
           </a:xfrm>
           <a:prstGeom prst="roundRect">
             <a:avLst>
-              <a:gd name="adj" fmla="val 1778"/>
+              <a:gd name="adj" fmla="val 14545"/>
+            </a:avLst>
+          </a:prstGeom>
+          <a:solidFill>
+            <a:srgbClr val="8CC63F"/>
+          </a:solidFill>
+          <a:ln/>
+        </p:spPr>
+        <p:txBody>
+          <a:bodyPr wrap="square" rtlCol="0" anchor="ctr"/>
+          <a:lstStyle/>
+          <a:p>
+            <a:pPr algn="ctr" indent="0" marL="0">
+              <a:buNone/>
+            </a:pPr>
+            <a:r>
+              <a:rPr lang="en-US" sz="1700" b="1" dirty="0">
+                <a:solidFill>
+                  <a:srgbClr val="13161C"/>
+                </a:solidFill>
+                <a:latin typeface="Courier New" pitchFamily="34" charset="0"/>
+                <a:ea typeface="Courier New" pitchFamily="34" charset="-122"/>
+                <a:cs typeface="Courier New" pitchFamily="34" charset="-120"/>
+              </a:rPr>
+              <a:t>Ex 1</a:t>
+            </a:r>
+            <a:endParaRPr lang="en-US" sz="1700" dirty="0"/>
+          </a:p>
+        </p:txBody>
+      </p:sp>
+      <p:sp>
+        <p:nvSpPr>
+          <p:cNvPr id="6" name="Text 4"/>
+          <p:cNvSpPr/>
+          <p:nvPr/>
+        </p:nvSpPr>
+        <p:spPr>
+          <a:xfrm>
+            <a:off x="2148840" y="1773936"/>
+            <a:ext cx="3474720" cy="822960"/>
+          </a:xfrm>
+          <a:prstGeom prst="rect">
+            <a:avLst/>
+          </a:prstGeom>
+          <a:noFill/>
+          <a:ln/>
+        </p:spPr>
+        <p:txBody>
+          <a:bodyPr wrap="square" lIns="0" tIns="0" rIns="0" bIns="0" rtlCol="0" anchor="t"/>
+          <a:lstStyle/>
+          <a:p>
+            <a:pPr indent="0" marL="0">
+              <a:buNone/>
+            </a:pPr>
+            <a:r>
+              <a:rPr lang="en-US" sz="1700" b="1" dirty="0">
+                <a:solidFill>
+                  <a:srgbClr val="E8EDF2"/>
+                </a:solidFill>
+                <a:latin typeface="Malgun Gothic" pitchFamily="34" charset="0"/>
+                <a:ea typeface="Malgun Gothic" pitchFamily="34" charset="-122"/>
+                <a:cs typeface="Malgun Gothic" pitchFamily="34" charset="-120"/>
+              </a:rPr>
+              <a:t>스레드는 자기가 누구인지 안다</a:t>
+            </a:r>
+            <a:endParaRPr lang="en-US" sz="1700" dirty="0"/>
+          </a:p>
+        </p:txBody>
+      </p:sp>
+      <p:sp>
+        <p:nvSpPr>
+          <p:cNvPr id="7" name="Text 5"/>
+          <p:cNvSpPr/>
+          <p:nvPr/>
+        </p:nvSpPr>
+        <p:spPr>
+          <a:xfrm>
+            <a:off x="804672" y="2651760"/>
+            <a:ext cx="4791456" cy="731520"/>
+          </a:xfrm>
+          <a:prstGeom prst="rect">
+            <a:avLst/>
+          </a:prstGeom>
+          <a:noFill/>
+          <a:ln/>
+        </p:spPr>
+        <p:txBody>
+          <a:bodyPr wrap="square" lIns="0" tIns="0" rIns="0" bIns="0" rtlCol="0" anchor="t"/>
+          <a:lstStyle/>
+          <a:p>
+            <a:pPr indent="0" marL="0">
+              <a:lnSpc>
+                <a:spcPct val="110000"/>
+              </a:lnSpc>
+              <a:buNone/>
+            </a:pPr>
+            <a:r>
+              <a:rPr lang="en-US" sz="1400" dirty="0">
+                <a:solidFill>
+                  <a:srgbClr val="9AA6B2"/>
+                </a:solidFill>
+                <a:latin typeface="Malgun Gothic" pitchFamily="34" charset="0"/>
+                <a:ea typeface="Malgun Gothic" pitchFamily="34" charset="-122"/>
+                <a:cs typeface="Malgun Gothic" pitchFamily="34" charset="-120"/>
+              </a:rPr>
+              <a:t>커널 안에서 blockIdx.x를 printf로 출력해 확인</a:t>
+            </a:r>
+            <a:endParaRPr lang="en-US" sz="1400" dirty="0"/>
+          </a:p>
+        </p:txBody>
+      </p:sp>
+      <p:sp>
+        <p:nvSpPr>
+          <p:cNvPr id="8" name="Shape 6"/>
+          <p:cNvSpPr/>
+          <p:nvPr/>
+        </p:nvSpPr>
+        <p:spPr>
+          <a:xfrm>
+            <a:off x="6309360" y="1554480"/>
+            <a:ext cx="5303520" cy="1965960"/>
+          </a:xfrm>
+          <a:prstGeom prst="roundRect">
+            <a:avLst>
+              <a:gd name="adj" fmla="val 3721"/>
             </a:avLst>
           </a:prstGeom>
           <a:solidFill>
@@ -4125,53 +4453,96 @@
       </p:sp>
       <p:sp>
         <p:nvSpPr>
-          <p:cNvPr id="8" name="Text 6"/>
-          <p:cNvSpPr/>
-          <p:nvPr/>
-        </p:nvSpPr>
-        <p:spPr>
-          <a:xfrm>
-            <a:off x="6537960" y="1828800"/>
-            <a:ext cx="4800600" cy="457200"/>
-          </a:xfrm>
-          <a:prstGeom prst="rect">
-            <a:avLst/>
-          </a:prstGeom>
-          <a:noFill/>
-          <a:ln/>
-        </p:spPr>
-        <p:txBody>
-          <a:bodyPr wrap="square" lIns="0" tIns="0" rIns="0" bIns="0" rtlCol="0" anchor="ctr"/>
+          <p:cNvPr id="9" name="Text 7"/>
+          <p:cNvSpPr/>
+          <p:nvPr/>
+        </p:nvSpPr>
+        <p:spPr>
+          <a:xfrm>
+            <a:off x="6565392" y="1755648"/>
+            <a:ext cx="1188720" cy="502920"/>
+          </a:xfrm>
+          <a:prstGeom prst="roundRect">
+            <a:avLst>
+              <a:gd name="adj" fmla="val 14545"/>
+            </a:avLst>
+          </a:prstGeom>
+          <a:solidFill>
+            <a:srgbClr val="4FB0C6"/>
+          </a:solidFill>
+          <a:ln/>
+        </p:spPr>
+        <p:txBody>
+          <a:bodyPr wrap="square" rtlCol="0" anchor="ctr"/>
+          <a:lstStyle/>
+          <a:p>
+            <a:pPr algn="ctr" indent="0" marL="0">
+              <a:buNone/>
+            </a:pPr>
+            <a:r>
+              <a:rPr lang="en-US" sz="1700" b="1" dirty="0">
+                <a:solidFill>
+                  <a:srgbClr val="13161C"/>
+                </a:solidFill>
+                <a:latin typeface="Courier New" pitchFamily="34" charset="0"/>
+                <a:ea typeface="Courier New" pitchFamily="34" charset="-122"/>
+                <a:cs typeface="Courier New" pitchFamily="34" charset="-120"/>
+              </a:rPr>
+              <a:t>Ex 2</a:t>
+            </a:r>
+            <a:endParaRPr lang="en-US" sz="1700" dirty="0"/>
+          </a:p>
+        </p:txBody>
+      </p:sp>
+      <p:sp>
+        <p:nvSpPr>
+          <p:cNvPr id="10" name="Text 8"/>
+          <p:cNvSpPr/>
+          <p:nvPr/>
+        </p:nvSpPr>
+        <p:spPr>
+          <a:xfrm>
+            <a:off x="7909560" y="1773936"/>
+            <a:ext cx="3474720" cy="822960"/>
+          </a:xfrm>
+          <a:prstGeom prst="rect">
+            <a:avLst/>
+          </a:prstGeom>
+          <a:noFill/>
+          <a:ln/>
+        </p:spPr>
+        <p:txBody>
+          <a:bodyPr wrap="square" lIns="0" tIns="0" rIns="0" bIns="0" rtlCol="0" anchor="t"/>
           <a:lstStyle/>
           <a:p>
             <a:pPr indent="0" marL="0">
               <a:buNone/>
             </a:pPr>
             <a:r>
-              <a:rPr lang="en-US" sz="2000" b="1" dirty="0">
-                <a:solidFill>
-                  <a:srgbClr val="E0A458"/>
-                </a:solidFill>
-                <a:latin typeface="Malgun Gothic" pitchFamily="34" charset="0"/>
-                <a:ea typeface="Malgun Gothic" pitchFamily="34" charset="-122"/>
-                <a:cs typeface="Malgun Gothic" pitchFamily="34" charset="-120"/>
-              </a:rPr>
-              <a:t>입문자 함정</a:t>
-            </a:r>
-            <a:endParaRPr lang="en-US" sz="2000" dirty="0"/>
-          </a:p>
-        </p:txBody>
-      </p:sp>
-      <p:sp>
-        <p:nvSpPr>
-          <p:cNvPr id="9" name="Text 7"/>
-          <p:cNvSpPr/>
-          <p:nvPr/>
-        </p:nvSpPr>
-        <p:spPr>
-          <a:xfrm>
-            <a:off x="6537960" y="2423160"/>
-            <a:ext cx="4800600" cy="3108960"/>
+              <a:rPr lang="en-US" sz="1700" b="1" dirty="0">
+                <a:solidFill>
+                  <a:srgbClr val="E8EDF2"/>
+                </a:solidFill>
+                <a:latin typeface="Malgun Gothic" pitchFamily="34" charset="0"/>
+                <a:ea typeface="Malgun Gothic" pitchFamily="34" charset="-122"/>
+                <a:cs typeface="Malgun Gothic" pitchFamily="34" charset="-120"/>
+              </a:rPr>
+              <a:t>그리드 크기를 바꿔보기</a:t>
+            </a:r>
+            <a:endParaRPr lang="en-US" sz="1700" dirty="0"/>
+          </a:p>
+        </p:txBody>
+      </p:sp>
+      <p:sp>
+        <p:nvSpPr>
+          <p:cNvPr id="11" name="Text 9"/>
+          <p:cNvSpPr/>
+          <p:nvPr/>
+        </p:nvSpPr>
+        <p:spPr>
+          <a:xfrm>
+            <a:off x="6565392" y="2651760"/>
+            <a:ext cx="4791456" cy="731520"/>
           </a:xfrm>
           <a:prstGeom prst="rect">
             <a:avLst/>
@@ -4183,15 +4554,118 @@
           <a:bodyPr wrap="square" lIns="0" tIns="0" rIns="0" bIns="0" rtlCol="0" anchor="t"/>
           <a:lstStyle/>
           <a:p>
-            <a:pPr marL="342900" indent="-342900">
-              <a:spcAft>
-                <a:spcPts val="1200"/>
-              </a:spcAft>
-              <a:buSzPct val="100000"/>
-              <a:buChar char="✗"/>
-            </a:pPr>
-            <a:r>
-              <a:rPr lang="en-US" sz="1600" dirty="0">
+            <a:pPr indent="0" marL="0">
+              <a:lnSpc>
+                <a:spcPct val="110000"/>
+              </a:lnSpc>
+              <a:buNone/>
+            </a:pPr>
+            <a:r>
+              <a:rPr lang="en-US" sz="1400" dirty="0">
+                <a:solidFill>
+                  <a:srgbClr val="9AA6B2"/>
+                </a:solidFill>
+                <a:latin typeface="Malgun Gothic" pitchFamily="34" charset="0"/>
+                <a:ea typeface="Malgun Gothic" pitchFamily="34" charset="-122"/>
+                <a:cs typeface="Malgun Gothic" pitchFamily="34" charset="-120"/>
+              </a:rPr>
+              <a:t>GRIDSIZE를 32/128/512로 바꿔 실행 시간 측정</a:t>
+            </a:r>
+            <a:endParaRPr lang="en-US" sz="1400" dirty="0"/>
+          </a:p>
+        </p:txBody>
+      </p:sp>
+      <p:sp>
+        <p:nvSpPr>
+          <p:cNvPr id="12" name="Shape 10"/>
+          <p:cNvSpPr/>
+          <p:nvPr/>
+        </p:nvSpPr>
+        <p:spPr>
+          <a:xfrm>
+            <a:off x="548640" y="3840480"/>
+            <a:ext cx="5303520" cy="1965960"/>
+          </a:xfrm>
+          <a:prstGeom prst="roundRect">
+            <a:avLst>
+              <a:gd name="adj" fmla="val 3721"/>
+            </a:avLst>
+          </a:prstGeom>
+          <a:solidFill>
+            <a:srgbClr val="1E232C"/>
+          </a:solidFill>
+          <a:ln/>
+        </p:spPr>
+      </p:sp>
+      <p:sp>
+        <p:nvSpPr>
+          <p:cNvPr id="13" name="Text 11"/>
+          <p:cNvSpPr/>
+          <p:nvPr/>
+        </p:nvSpPr>
+        <p:spPr>
+          <a:xfrm>
+            <a:off x="804672" y="4041648"/>
+            <a:ext cx="1188720" cy="502920"/>
+          </a:xfrm>
+          <a:prstGeom prst="roundRect">
+            <a:avLst>
+              <a:gd name="adj" fmla="val 14545"/>
+            </a:avLst>
+          </a:prstGeom>
+          <a:solidFill>
+            <a:srgbClr val="8CC63F"/>
+          </a:solidFill>
+          <a:ln/>
+        </p:spPr>
+        <p:txBody>
+          <a:bodyPr wrap="square" rtlCol="0" anchor="ctr"/>
+          <a:lstStyle/>
+          <a:p>
+            <a:pPr algn="ctr" indent="0" marL="0">
+              <a:buNone/>
+            </a:pPr>
+            <a:r>
+              <a:rPr lang="en-US" sz="1700" b="1" dirty="0">
+                <a:solidFill>
+                  <a:srgbClr val="13161C"/>
+                </a:solidFill>
+                <a:latin typeface="Courier New" pitchFamily="34" charset="0"/>
+                <a:ea typeface="Courier New" pitchFamily="34" charset="-122"/>
+                <a:cs typeface="Courier New" pitchFamily="34" charset="-120"/>
+              </a:rPr>
+              <a:t>Ex 3</a:t>
+            </a:r>
+            <a:endParaRPr lang="en-US" sz="1700" dirty="0"/>
+          </a:p>
+        </p:txBody>
+      </p:sp>
+      <p:sp>
+        <p:nvSpPr>
+          <p:cNvPr id="14" name="Text 12"/>
+          <p:cNvSpPr/>
+          <p:nvPr/>
+        </p:nvSpPr>
+        <p:spPr>
+          <a:xfrm>
+            <a:off x="2148840" y="4059936"/>
+            <a:ext cx="3474720" cy="822960"/>
+          </a:xfrm>
+          <a:prstGeom prst="rect">
+            <a:avLst/>
+          </a:prstGeom>
+          <a:noFill/>
+          <a:ln/>
+        </p:spPr>
+        <p:txBody>
+          <a:bodyPr wrap="square" lIns="0" tIns="0" rIns="0" bIns="0" rtlCol="0" anchor="t"/>
+          <a:lstStyle/>
+          <a:p>
+            <a:pPr indent="0" marL="0">
+              <a:buNone/>
+            </a:pPr>
+            <a:r>
+              <a:rPr lang="en-US" sz="1700" b="1" dirty="0">
                 <a:solidFill>
                   <a:srgbClr val="E8EDF2"/>
                 </a:solidFill>
@@ -4199,20 +4673,145 @@
                 <a:ea typeface="Malgun Gothic" pitchFamily="34" charset="-122"/>
                 <a:cs typeface="Malgun Gothic" pitchFamily="34" charset="-120"/>
               </a:rPr>
-              <a:t>커널을 일반 함수처럼 () 로 호출 → &lt;&lt;&lt;&gt;&gt;&gt; 필수</a:t>
-            </a:r>
-            <a:endParaRPr lang="en-US" sz="1600" dirty="0"/>
-          </a:p>
-          <a:p>
-            <a:pPr marL="342900" indent="-342900">
-              <a:spcAft>
-                <a:spcPts val="1200"/>
-              </a:spcAft>
-              <a:buSzPct val="100000"/>
-              <a:buChar char="✗"/>
-            </a:pPr>
-            <a:r>
-              <a:rPr lang="en-US" sz="1600" dirty="0">
+              <a:t>패턴을 내 마음대로</a:t>
+            </a:r>
+            <a:endParaRPr lang="en-US" sz="1700" dirty="0"/>
+          </a:p>
+        </p:txBody>
+      </p:sp>
+      <p:sp>
+        <p:nvSpPr>
+          <p:cNvPr id="15" name="Text 13"/>
+          <p:cNvSpPr/>
+          <p:nvPr/>
+        </p:nvSpPr>
+        <p:spPr>
+          <a:xfrm>
+            <a:off x="804672" y="4937760"/>
+            <a:ext cx="4791456" cy="731520"/>
+          </a:xfrm>
+          <a:prstGeom prst="rect">
+            <a:avLst/>
+          </a:prstGeom>
+          <a:noFill/>
+          <a:ln/>
+        </p:spPr>
+        <p:txBody>
+          <a:bodyPr wrap="square" lIns="0" tIns="0" rIns="0" bIns="0" rtlCol="0" anchor="t"/>
+          <a:lstStyle/>
+          <a:p>
+            <a:pPr indent="0" marL="0">
+              <a:lnSpc>
+                <a:spcPct val="110000"/>
+              </a:lnSpc>
+              <a:buNone/>
+            </a:pPr>
+            <a:r>
+              <a:rPr lang="en-US" sz="1400" dirty="0">
+                <a:solidFill>
+                  <a:srgbClr val="9AA6B2"/>
+                </a:solidFill>
+                <a:latin typeface="Malgun Gothic" pitchFamily="34" charset="0"/>
+                <a:ea typeface="Malgun Gothic" pitchFamily="34" charset="-122"/>
+                <a:cs typeface="Malgun Gothic" pitchFamily="34" charset="-120"/>
+              </a:rPr>
+              <a:t>--pattern 0xDEADBEEF 로 커널 인자 전달 관찰</a:t>
+            </a:r>
+            <a:endParaRPr lang="en-US" sz="1400" dirty="0"/>
+          </a:p>
+        </p:txBody>
+      </p:sp>
+      <p:sp>
+        <p:nvSpPr>
+          <p:cNvPr id="16" name="Shape 14"/>
+          <p:cNvSpPr/>
+          <p:nvPr/>
+        </p:nvSpPr>
+        <p:spPr>
+          <a:xfrm>
+            <a:off x="6309360" y="3840480"/>
+            <a:ext cx="5303520" cy="1965960"/>
+          </a:xfrm>
+          <a:prstGeom prst="roundRect">
+            <a:avLst>
+              <a:gd name="adj" fmla="val 3721"/>
+            </a:avLst>
+          </a:prstGeom>
+          <a:solidFill>
+            <a:srgbClr val="1E232C"/>
+          </a:solidFill>
+          <a:ln/>
+        </p:spPr>
+      </p:sp>
+      <p:sp>
+        <p:nvSpPr>
+          <p:cNvPr id="17" name="Text 15"/>
+          <p:cNvSpPr/>
+          <p:nvPr/>
+        </p:nvSpPr>
+        <p:spPr>
+          <a:xfrm>
+            <a:off x="6565392" y="4041648"/>
+            <a:ext cx="1188720" cy="502920"/>
+          </a:xfrm>
+          <a:prstGeom prst="roundRect">
+            <a:avLst>
+              <a:gd name="adj" fmla="val 14545"/>
+            </a:avLst>
+          </a:prstGeom>
+          <a:solidFill>
+            <a:srgbClr val="E0A458"/>
+          </a:solidFill>
+          <a:ln/>
+        </p:spPr>
+        <p:txBody>
+          <a:bodyPr wrap="square" rtlCol="0" anchor="ctr"/>
+          <a:lstStyle/>
+          <a:p>
+            <a:pPr algn="ctr" indent="0" marL="0">
+              <a:buNone/>
+            </a:pPr>
+            <a:r>
+              <a:rPr lang="en-US" sz="1700" b="1" dirty="0">
+                <a:solidFill>
+                  <a:srgbClr val="13161C"/>
+                </a:solidFill>
+                <a:latin typeface="Courier New" pitchFamily="34" charset="0"/>
+                <a:ea typeface="Courier New" pitchFamily="34" charset="-122"/>
+                <a:cs typeface="Courier New" pitchFamily="34" charset="-120"/>
+              </a:rPr>
+              <a:t>Ex 4</a:t>
+            </a:r>
+            <a:endParaRPr lang="en-US" sz="1700" dirty="0"/>
+          </a:p>
+        </p:txBody>
+      </p:sp>
+      <p:sp>
+        <p:nvSpPr>
+          <p:cNvPr id="18" name="Text 16"/>
+          <p:cNvSpPr/>
+          <p:nvPr/>
+        </p:nvSpPr>
+        <p:spPr>
+          <a:xfrm>
+            <a:off x="7909560" y="4059936"/>
+            <a:ext cx="3474720" cy="822960"/>
+          </a:xfrm>
+          <a:prstGeom prst="rect">
+            <a:avLst/>
+          </a:prstGeom>
+          <a:noFill/>
+          <a:ln/>
+        </p:spPr>
+        <p:txBody>
+          <a:bodyPr wrap="square" lIns="0" tIns="0" rIns="0" bIns="0" rtlCol="0" anchor="t"/>
+          <a:lstStyle/>
+          <a:p>
+            <a:pPr indent="0" marL="0">
+              <a:buNone/>
+            </a:pPr>
+            <a:r>
+              <a:rPr lang="en-US" sz="1700" b="1" dirty="0">
                 <a:solidFill>
                   <a:srgbClr val="E8EDF2"/>
                 </a:solidFill>
@@ -4220,48 +4819,51 @@
                 <a:ea typeface="Malgun Gothic" pitchFamily="34" charset="-122"/>
                 <a:cs typeface="Malgun Gothic" pitchFamily="34" charset="-120"/>
               </a:rPr>
-              <a:t>커널에서 값을 return 하려 함 → void, 결과는 메모리로</a:t>
-            </a:r>
-            <a:endParaRPr lang="en-US" sz="1600" dirty="0"/>
-          </a:p>
-          <a:p>
-            <a:pPr marL="342900" indent="-342900">
-              <a:spcAft>
-                <a:spcPts val="1200"/>
-              </a:spcAft>
-              <a:buSzPct val="100000"/>
-              <a:buChar char="✗"/>
-            </a:pPr>
-            <a:r>
-              <a:rPr lang="en-US" sz="1600" dirty="0">
-                <a:solidFill>
-                  <a:srgbClr val="E8EDF2"/>
-                </a:solidFill>
-                <a:latin typeface="Malgun Gothic" pitchFamily="34" charset="0"/>
-                <a:ea typeface="Malgun Gothic" pitchFamily="34" charset="-122"/>
-                <a:cs typeface="Malgun Gothic" pitchFamily="34" charset="-120"/>
-              </a:rPr>
-              <a:t>경계 검사 생략 → 이웃 메모리 침범</a:t>
-            </a:r>
-            <a:endParaRPr lang="en-US" sz="1600" dirty="0"/>
-          </a:p>
-          <a:p>
-            <a:pPr marL="342900" indent="-342900">
-              <a:buSzPct val="100000"/>
-              <a:buChar char="✗"/>
-            </a:pPr>
-            <a:r>
-              <a:rPr lang="en-US" sz="1600" dirty="0">
-                <a:solidFill>
-                  <a:srgbClr val="E8EDF2"/>
-                </a:solidFill>
-                <a:latin typeface="Malgun Gothic" pitchFamily="34" charset="0"/>
-                <a:ea typeface="Malgun Gothic" pitchFamily="34" charset="-122"/>
-                <a:cs typeface="Malgun Gothic" pitchFamily="34" charset="-120"/>
-              </a:rPr>
-              <a:t>호스트 포인터를 커널에 그대로 전달 → 디바이스 포인터여야</a:t>
-            </a:r>
-            <a:endParaRPr lang="en-US" sz="1600" dirty="0"/>
+              <a:t>경계 검사를 지우면?</a:t>
+            </a:r>
+            <a:endParaRPr lang="en-US" sz="1700" dirty="0"/>
+          </a:p>
+        </p:txBody>
+      </p:sp>
+      <p:sp>
+        <p:nvSpPr>
+          <p:cNvPr id="19" name="Text 17"/>
+          <p:cNvSpPr/>
+          <p:nvPr/>
+        </p:nvSpPr>
+        <p:spPr>
+          <a:xfrm>
+            <a:off x="6565392" y="4937760"/>
+            <a:ext cx="4791456" cy="731520"/>
+          </a:xfrm>
+          <a:prstGeom prst="rect">
+            <a:avLst/>
+          </a:prstGeom>
+          <a:noFill/>
+          <a:ln/>
+        </p:spPr>
+        <p:txBody>
+          <a:bodyPr wrap="square" lIns="0" tIns="0" rIns="0" bIns="0" rtlCol="0" anchor="t"/>
+          <a:lstStyle/>
+          <a:p>
+            <a:pPr indent="0" marL="0">
+              <a:lnSpc>
+                <a:spcPct val="110000"/>
+              </a:lnSpc>
+              <a:buNone/>
+            </a:pPr>
+            <a:r>
+              <a:rPr lang="en-US" sz="1400" dirty="0">
+                <a:solidFill>
+                  <a:srgbClr val="9AA6B2"/>
+                </a:solidFill>
+                <a:latin typeface="Malgun Gothic" pitchFamily="34" charset="0"/>
+                <a:ea typeface="Malgun Gothic" pitchFamily="34" charset="-122"/>
+                <a:cs typeface="Malgun Gothic" pitchFamily="34" charset="-120"/>
+              </a:rPr>
+              <a:t>guard를 없애 illegal memory access 재현</a:t>
+            </a:r>
+            <a:endParaRPr lang="en-US" sz="1400" dirty="0"/>
           </a:p>
         </p:txBody>
       </p:sp>
@@ -4276,6 +4878,448 @@
 <file path=ppt/slides/slide14.xml><?xml version="1.0" encoding="utf-8"?>
 <p:sld xmlns:a="http://schemas.openxmlformats.org/drawingml/2006/main" xmlns:r="http://schemas.openxmlformats.org/officeDocument/2006/relationships" xmlns:p="http://schemas.openxmlformats.org/presentationml/2006/main">
   <p:cSld name="Slide 14">
+    <p:bg>
+      <p:bgPr>
+        <a:solidFill>
+          <a:srgbClr val="13161C"/>
+        </a:solidFill>
+      </p:bgPr>
+    </p:bg>
+    <p:spTree>
+      <p:nvGrpSpPr>
+        <p:cNvPr id="1" name=""/>
+        <p:cNvGrpSpPr/>
+        <p:nvPr/>
+      </p:nvGrpSpPr>
+      <p:grpSpPr>
+        <a:xfrm>
+          <a:off x="0" y="0"/>
+          <a:ext cx="0" cy="0"/>
+          <a:chOff x="0" y="0"/>
+          <a:chExt cx="0" cy="0"/>
+        </a:xfrm>
+      </p:grpSpPr>
+      <p:sp>
+        <p:nvSpPr>
+          <p:cNvPr id="2" name="Text 0"/>
+          <p:cNvSpPr/>
+          <p:nvPr/>
+        </p:nvSpPr>
+        <p:spPr>
+          <a:xfrm>
+            <a:off x="548640" y="411480"/>
+            <a:ext cx="640080" cy="640080"/>
+          </a:xfrm>
+          <a:prstGeom prst="roundRect">
+            <a:avLst>
+              <a:gd name="adj" fmla="val 12857"/>
+            </a:avLst>
+          </a:prstGeom>
+          <a:solidFill>
+            <a:srgbClr val="8CC63F"/>
+          </a:solidFill>
+          <a:ln/>
+        </p:spPr>
+        <p:txBody>
+          <a:bodyPr wrap="square" rtlCol="0" anchor="ctr"/>
+          <a:lstStyle/>
+          <a:p>
+            <a:pPr algn="ctr" indent="0" marL="0">
+              <a:buNone/>
+            </a:pPr>
+            <a:r>
+              <a:rPr lang="en-US" sz="2200" b="1" dirty="0">
+                <a:solidFill>
+                  <a:srgbClr val="13161C"/>
+                </a:solidFill>
+                <a:latin typeface="Courier New" pitchFamily="34" charset="0"/>
+                <a:ea typeface="Courier New" pitchFamily="34" charset="-122"/>
+                <a:cs typeface="Courier New" pitchFamily="34" charset="-120"/>
+              </a:rPr>
+              <a:t>11</a:t>
+            </a:r>
+            <a:endParaRPr lang="en-US" sz="2200" dirty="0"/>
+          </a:p>
+        </p:txBody>
+      </p:sp>
+      <p:sp>
+        <p:nvSpPr>
+          <p:cNvPr id="3" name="Text 1"/>
+          <p:cNvSpPr/>
+          <p:nvPr/>
+        </p:nvSpPr>
+        <p:spPr>
+          <a:xfrm>
+            <a:off x="1325880" y="384048"/>
+            <a:ext cx="10287000" cy="694944"/>
+          </a:xfrm>
+          <a:prstGeom prst="rect">
+            <a:avLst/>
+          </a:prstGeom>
+          <a:noFill/>
+          <a:ln/>
+        </p:spPr>
+        <p:txBody>
+          <a:bodyPr wrap="square" lIns="0" tIns="0" rIns="0" bIns="0" rtlCol="0" anchor="ctr"/>
+          <a:lstStyle/>
+          <a:p>
+            <a:pPr algn="l" indent="0" marL="0">
+              <a:buNone/>
+            </a:pPr>
+            <a:r>
+              <a:rPr lang="en-US" sz="3000" b="1" dirty="0">
+                <a:solidFill>
+                  <a:srgbClr val="E8EDF2"/>
+                </a:solidFill>
+                <a:latin typeface="Malgun Gothic" pitchFamily="34" charset="0"/>
+                <a:ea typeface="Malgun Gothic" pitchFamily="34" charset="-122"/>
+                <a:cs typeface="Malgun Gothic" pitchFamily="34" charset="-120"/>
+              </a:rPr>
+              <a:t>핵심 정리 &amp; 자주 하는 실수</a:t>
+            </a:r>
+            <a:endParaRPr lang="en-US" sz="3000" dirty="0"/>
+          </a:p>
+        </p:txBody>
+      </p:sp>
+      <p:sp>
+        <p:nvSpPr>
+          <p:cNvPr id="4" name="Shape 2"/>
+          <p:cNvSpPr/>
+          <p:nvPr/>
+        </p:nvSpPr>
+        <p:spPr>
+          <a:xfrm>
+            <a:off x="548640" y="1600200"/>
+            <a:ext cx="5349240" cy="4114800"/>
+          </a:xfrm>
+          <a:prstGeom prst="roundRect">
+            <a:avLst>
+              <a:gd name="adj" fmla="val 1778"/>
+            </a:avLst>
+          </a:prstGeom>
+          <a:solidFill>
+            <a:srgbClr val="1E232C"/>
+          </a:solidFill>
+          <a:ln/>
+        </p:spPr>
+      </p:sp>
+      <p:sp>
+        <p:nvSpPr>
+          <p:cNvPr id="5" name="Text 3"/>
+          <p:cNvSpPr/>
+          <p:nvPr/>
+        </p:nvSpPr>
+        <p:spPr>
+          <a:xfrm>
+            <a:off x="822960" y="1828800"/>
+            <a:ext cx="4800600" cy="457200"/>
+          </a:xfrm>
+          <a:prstGeom prst="rect">
+            <a:avLst/>
+          </a:prstGeom>
+          <a:noFill/>
+          <a:ln/>
+        </p:spPr>
+        <p:txBody>
+          <a:bodyPr wrap="square" lIns="0" tIns="0" rIns="0" bIns="0" rtlCol="0" anchor="ctr"/>
+          <a:lstStyle/>
+          <a:p>
+            <a:pPr indent="0" marL="0">
+              <a:buNone/>
+            </a:pPr>
+            <a:r>
+              <a:rPr lang="en-US" sz="2000" b="1" dirty="0">
+                <a:solidFill>
+                  <a:srgbClr val="8CC63F"/>
+                </a:solidFill>
+                <a:latin typeface="Malgun Gothic" pitchFamily="34" charset="0"/>
+                <a:ea typeface="Malgun Gothic" pitchFamily="34" charset="-122"/>
+                <a:cs typeface="Malgun Gothic" pitchFamily="34" charset="-120"/>
+              </a:rPr>
+              <a:t>기억할 것</a:t>
+            </a:r>
+            <a:endParaRPr lang="en-US" sz="2000" dirty="0"/>
+          </a:p>
+        </p:txBody>
+      </p:sp>
+      <p:sp>
+        <p:nvSpPr>
+          <p:cNvPr id="6" name="Text 4"/>
+          <p:cNvSpPr/>
+          <p:nvPr/>
+        </p:nvSpPr>
+        <p:spPr>
+          <a:xfrm>
+            <a:off x="822960" y="2423160"/>
+            <a:ext cx="4800600" cy="3108960"/>
+          </a:xfrm>
+          <a:prstGeom prst="rect">
+            <a:avLst/>
+          </a:prstGeom>
+          <a:noFill/>
+          <a:ln/>
+        </p:spPr>
+        <p:txBody>
+          <a:bodyPr wrap="square" lIns="0" tIns="0" rIns="0" bIns="0" rtlCol="0" anchor="t"/>
+          <a:lstStyle/>
+          <a:p>
+            <a:pPr marL="342900" indent="-342900">
+              <a:spcAft>
+                <a:spcPts val="1200"/>
+              </a:spcAft>
+              <a:buSzPct val="100000"/>
+              <a:buChar char="✓"/>
+            </a:pPr>
+            <a:r>
+              <a:rPr lang="en-US" sz="1600" dirty="0">
+                <a:solidFill>
+                  <a:srgbClr val="E8EDF2"/>
+                </a:solidFill>
+                <a:latin typeface="Malgun Gothic" pitchFamily="34" charset="0"/>
+                <a:ea typeface="Malgun Gothic" pitchFamily="34" charset="-122"/>
+                <a:cs typeface="Malgun Gothic" pitchFamily="34" charset="-120"/>
+              </a:rPr>
+              <a:t>커널 = __global__, 반환형 void</a:t>
+            </a:r>
+            <a:endParaRPr lang="en-US" sz="1600" dirty="0"/>
+          </a:p>
+          <a:p>
+            <a:pPr marL="342900" indent="-342900">
+              <a:spcAft>
+                <a:spcPts val="1200"/>
+              </a:spcAft>
+              <a:buSzPct val="100000"/>
+              <a:buChar char="✓"/>
+            </a:pPr>
+            <a:r>
+              <a:rPr lang="en-US" sz="1600" dirty="0">
+                <a:solidFill>
+                  <a:srgbClr val="E8EDF2"/>
+                </a:solidFill>
+                <a:latin typeface="Malgun Gothic" pitchFamily="34" charset="0"/>
+                <a:ea typeface="Malgun Gothic" pitchFamily="34" charset="-122"/>
+                <a:cs typeface="Malgun Gothic" pitchFamily="34" charset="-120"/>
+              </a:rPr>
+              <a:t>&lt;&lt;&lt;블록수, 블록당스레드수&gt;&gt;&gt;</a:t>
+            </a:r>
+            <a:endParaRPr lang="en-US" sz="1600" dirty="0"/>
+          </a:p>
+          <a:p>
+            <a:pPr marL="342900" indent="-342900">
+              <a:spcAft>
+                <a:spcPts val="1200"/>
+              </a:spcAft>
+              <a:buSzPct val="100000"/>
+              <a:buChar char="✓"/>
+            </a:pPr>
+            <a:r>
+              <a:rPr lang="en-US" sz="1600" dirty="0">
+                <a:solidFill>
+                  <a:srgbClr val="E8EDF2"/>
+                </a:solidFill>
+                <a:latin typeface="Malgun Gothic" pitchFamily="34" charset="0"/>
+                <a:ea typeface="Malgun Gothic" pitchFamily="34" charset="-122"/>
+                <a:cs typeface="Malgun Gothic" pitchFamily="34" charset="-120"/>
+              </a:rPr>
+              <a:t>blockIdx로 자기 구역 계산</a:t>
+            </a:r>
+            <a:endParaRPr lang="en-US" sz="1600" dirty="0"/>
+          </a:p>
+          <a:p>
+            <a:pPr marL="342900" indent="-342900">
+              <a:buSzPct val="100000"/>
+              <a:buChar char="✓"/>
+            </a:pPr>
+            <a:r>
+              <a:rPr lang="en-US" sz="1600" dirty="0">
+                <a:solidFill>
+                  <a:srgbClr val="E8EDF2"/>
+                </a:solidFill>
+                <a:latin typeface="Malgun Gothic" pitchFamily="34" charset="0"/>
+                <a:ea typeface="Malgun Gothic" pitchFamily="34" charset="-122"/>
+                <a:cs typeface="Malgun Gothic" pitchFamily="34" charset="-120"/>
+              </a:rPr>
+              <a:t>경계 검사(guard)는 필수</a:t>
+            </a:r>
+            <a:endParaRPr lang="en-US" sz="1600" dirty="0"/>
+          </a:p>
+        </p:txBody>
+      </p:sp>
+      <p:sp>
+        <p:nvSpPr>
+          <p:cNvPr id="7" name="Shape 5"/>
+          <p:cNvSpPr/>
+          <p:nvPr/>
+        </p:nvSpPr>
+        <p:spPr>
+          <a:xfrm>
+            <a:off x="6263640" y="1600200"/>
+            <a:ext cx="5349240" cy="4114800"/>
+          </a:xfrm>
+          <a:prstGeom prst="roundRect">
+            <a:avLst>
+              <a:gd name="adj" fmla="val 1778"/>
+            </a:avLst>
+          </a:prstGeom>
+          <a:solidFill>
+            <a:srgbClr val="1E232C"/>
+          </a:solidFill>
+          <a:ln/>
+        </p:spPr>
+      </p:sp>
+      <p:sp>
+        <p:nvSpPr>
+          <p:cNvPr id="8" name="Text 6"/>
+          <p:cNvSpPr/>
+          <p:nvPr/>
+        </p:nvSpPr>
+        <p:spPr>
+          <a:xfrm>
+            <a:off x="6537960" y="1828800"/>
+            <a:ext cx="4800600" cy="457200"/>
+          </a:xfrm>
+          <a:prstGeom prst="rect">
+            <a:avLst/>
+          </a:prstGeom>
+          <a:noFill/>
+          <a:ln/>
+        </p:spPr>
+        <p:txBody>
+          <a:bodyPr wrap="square" lIns="0" tIns="0" rIns="0" bIns="0" rtlCol="0" anchor="ctr"/>
+          <a:lstStyle/>
+          <a:p>
+            <a:pPr indent="0" marL="0">
+              <a:buNone/>
+            </a:pPr>
+            <a:r>
+              <a:rPr lang="en-US" sz="2000" b="1" dirty="0">
+                <a:solidFill>
+                  <a:srgbClr val="E0A458"/>
+                </a:solidFill>
+                <a:latin typeface="Malgun Gothic" pitchFamily="34" charset="0"/>
+                <a:ea typeface="Malgun Gothic" pitchFamily="34" charset="-122"/>
+                <a:cs typeface="Malgun Gothic" pitchFamily="34" charset="-120"/>
+              </a:rPr>
+              <a:t>입문자 함정</a:t>
+            </a:r>
+            <a:endParaRPr lang="en-US" sz="2000" dirty="0"/>
+          </a:p>
+        </p:txBody>
+      </p:sp>
+      <p:sp>
+        <p:nvSpPr>
+          <p:cNvPr id="9" name="Text 7"/>
+          <p:cNvSpPr/>
+          <p:nvPr/>
+        </p:nvSpPr>
+        <p:spPr>
+          <a:xfrm>
+            <a:off x="6537960" y="2423160"/>
+            <a:ext cx="4800600" cy="3108960"/>
+          </a:xfrm>
+          <a:prstGeom prst="rect">
+            <a:avLst/>
+          </a:prstGeom>
+          <a:noFill/>
+          <a:ln/>
+        </p:spPr>
+        <p:txBody>
+          <a:bodyPr wrap="square" lIns="0" tIns="0" rIns="0" bIns="0" rtlCol="0" anchor="t"/>
+          <a:lstStyle/>
+          <a:p>
+            <a:pPr marL="342900" indent="-342900">
+              <a:spcAft>
+                <a:spcPts val="1200"/>
+              </a:spcAft>
+              <a:buSzPct val="100000"/>
+              <a:buChar char="✗"/>
+            </a:pPr>
+            <a:r>
+              <a:rPr lang="en-US" sz="1600" dirty="0">
+                <a:solidFill>
+                  <a:srgbClr val="E8EDF2"/>
+                </a:solidFill>
+                <a:latin typeface="Malgun Gothic" pitchFamily="34" charset="0"/>
+                <a:ea typeface="Malgun Gothic" pitchFamily="34" charset="-122"/>
+                <a:cs typeface="Malgun Gothic" pitchFamily="34" charset="-120"/>
+              </a:rPr>
+              <a:t>커널을 일반 함수처럼 () 로 호출 → &lt;&lt;&lt;&gt;&gt;&gt; 필수</a:t>
+            </a:r>
+            <a:endParaRPr lang="en-US" sz="1600" dirty="0"/>
+          </a:p>
+          <a:p>
+            <a:pPr marL="342900" indent="-342900">
+              <a:spcAft>
+                <a:spcPts val="1200"/>
+              </a:spcAft>
+              <a:buSzPct val="100000"/>
+              <a:buChar char="✗"/>
+            </a:pPr>
+            <a:r>
+              <a:rPr lang="en-US" sz="1600" dirty="0">
+                <a:solidFill>
+                  <a:srgbClr val="E8EDF2"/>
+                </a:solidFill>
+                <a:latin typeface="Malgun Gothic" pitchFamily="34" charset="0"/>
+                <a:ea typeface="Malgun Gothic" pitchFamily="34" charset="-122"/>
+                <a:cs typeface="Malgun Gothic" pitchFamily="34" charset="-120"/>
+              </a:rPr>
+              <a:t>커널에서 값을 return 하려 함 → void, 결과는 메모리로</a:t>
+            </a:r>
+            <a:endParaRPr lang="en-US" sz="1600" dirty="0"/>
+          </a:p>
+          <a:p>
+            <a:pPr marL="342900" indent="-342900">
+              <a:spcAft>
+                <a:spcPts val="1200"/>
+              </a:spcAft>
+              <a:buSzPct val="100000"/>
+              <a:buChar char="✗"/>
+            </a:pPr>
+            <a:r>
+              <a:rPr lang="en-US" sz="1600" dirty="0">
+                <a:solidFill>
+                  <a:srgbClr val="E8EDF2"/>
+                </a:solidFill>
+                <a:latin typeface="Malgun Gothic" pitchFamily="34" charset="0"/>
+                <a:ea typeface="Malgun Gothic" pitchFamily="34" charset="-122"/>
+                <a:cs typeface="Malgun Gothic" pitchFamily="34" charset="-120"/>
+              </a:rPr>
+              <a:t>경계 검사 생략 → 이웃 메모리 침범</a:t>
+            </a:r>
+            <a:endParaRPr lang="en-US" sz="1600" dirty="0"/>
+          </a:p>
+          <a:p>
+            <a:pPr marL="342900" indent="-342900">
+              <a:buSzPct val="100000"/>
+              <a:buChar char="✗"/>
+            </a:pPr>
+            <a:r>
+              <a:rPr lang="en-US" sz="1600" dirty="0">
+                <a:solidFill>
+                  <a:srgbClr val="E8EDF2"/>
+                </a:solidFill>
+                <a:latin typeface="Malgun Gothic" pitchFamily="34" charset="0"/>
+                <a:ea typeface="Malgun Gothic" pitchFamily="34" charset="-122"/>
+                <a:cs typeface="Malgun Gothic" pitchFamily="34" charset="-120"/>
+              </a:rPr>
+              <a:t>호스트 포인터를 커널에 그대로 전달 → 디바이스 포인터여야</a:t>
+            </a:r>
+            <a:endParaRPr lang="en-US" sz="1600" dirty="0"/>
+          </a:p>
+        </p:txBody>
+      </p:sp>
+    </p:spTree>
+  </p:cSld>
+  <p:clrMapOvr>
+    <a:masterClrMapping/>
+  </p:clrMapOvr>
+</p:sld>
+</file>
+
+<file path=ppt/slides/slide15.xml><?xml version="1.0" encoding="utf-8"?>
+<p:sld xmlns:a="http://schemas.openxmlformats.org/drawingml/2006/main" xmlns:r="http://schemas.openxmlformats.org/officeDocument/2006/relationships" xmlns:p="http://schemas.openxmlformats.org/presentationml/2006/main">
+  <p:cSld name="Slide 15">
     <p:bg>
       <p:bgPr>
         <a:solidFill>
